--- a/docs/test/stress/e2e-outputs/operating_case16_icheon_logistics_basic.pptx
+++ b/docs/test/stress/e2e-outputs/operating_case16_icheon_logistics_basic.pptx
@@ -3949,7 +3949,7 @@
                 <a:ea typeface="Pretendard" pitchFamily="34" charset="-122"/>
                 <a:cs typeface="Pretendard" pitchFamily="34" charset="-120"/>
               </a:rPr>
-              <a:t>소재지</a:t>
+              <a:t>{"ok"</a:t>
             </a:r>
             <a:endParaRPr lang="en-US" sz="950" dirty="0"/>
           </a:p>
@@ -3986,11 +3986,11 @@
                 <a:solidFill>
                   <a:srgbClr val="0F172A"/>
                 </a:solidFill>
-                <a:latin typeface="Pretendard" pitchFamily="34" charset="0"/>
-                <a:ea typeface="Pretendard" pitchFamily="34" charset="-122"/>
-                <a:cs typeface="Pretendard" pitchFamily="34" charset="-120"/>
-              </a:rPr>
-              <a:t>이천권역</a:t>
+                <a:latin typeface="Arial" pitchFamily="34" charset="0"/>
+                <a:ea typeface="Arial" pitchFamily="34" charset="-122"/>
+                <a:cs typeface="Arial" pitchFamily="34" charset="-120"/>
+              </a:rPr>
+              <a:t>true,"mocked"</a:t>
             </a:r>
             <a:endParaRPr lang="en-US" sz="2000" dirty="0"/>
           </a:p>
@@ -3998,547 +3998,7 @@
       </p:sp>
       <p:sp>
         <p:nvSpPr>
-          <p:cNvPr id="19" name="Shape 17"/>
-          <p:cNvSpPr/>
-          <p:nvPr/>
-        </p:nvSpPr>
-        <p:spPr>
-          <a:xfrm>
-            <a:off x="566928" y="3429000"/>
-            <a:ext cx="2627300" cy="1280160"/>
-          </a:xfrm>
-          <a:prstGeom prst="roundRect">
-            <a:avLst>
-              <a:gd name="adj" fmla="val 4286"/>
-            </a:avLst>
-          </a:prstGeom>
-          <a:solidFill>
-            <a:srgbClr val="F8FAFC"/>
-          </a:solidFill>
-          <a:ln w="6350">
-            <a:solidFill>
-              <a:srgbClr val="CBD5E1"/>
-            </a:solidFill>
-            <a:prstDash val="solid"/>
-          </a:ln>
-        </p:spPr>
-      </p:sp>
-      <p:sp>
-        <p:nvSpPr>
-          <p:cNvPr id="20" name="Text 18"/>
-          <p:cNvSpPr/>
-          <p:nvPr/>
-        </p:nvSpPr>
-        <p:spPr>
-          <a:xfrm>
-            <a:off x="731520" y="3557016"/>
-            <a:ext cx="2298116" cy="201168"/>
-          </a:xfrm>
-          <a:prstGeom prst="rect">
-            <a:avLst/>
-          </a:prstGeom>
-          <a:noFill/>
-          <a:ln/>
-        </p:spPr>
-        <p:txBody>
-          <a:bodyPr wrap="square" lIns="0" tIns="0" rIns="0" bIns="0" rtlCol="0" anchor="ctr"/>
-          <a:lstStyle/>
-          <a:p>
-            <a:pPr indent="0" marL="0">
-              <a:buNone/>
-            </a:pPr>
-            <a:r>
-              <a:rPr lang="en-US" sz="950" dirty="0">
-                <a:solidFill>
-                  <a:srgbClr val="64748B"/>
-                </a:solidFill>
-                <a:latin typeface="Pretendard" pitchFamily="34" charset="0"/>
-                <a:ea typeface="Pretendard" pitchFamily="34" charset="-122"/>
-                <a:cs typeface="Pretendard" pitchFamily="34" charset="-120"/>
-              </a:rPr>
-              <a:t>주요 용도</a:t>
-            </a:r>
-            <a:endParaRPr lang="en-US" sz="950" dirty="0"/>
-          </a:p>
-        </p:txBody>
-      </p:sp>
-      <p:sp>
-        <p:nvSpPr>
-          <p:cNvPr id="21" name="Text 19"/>
-          <p:cNvSpPr/>
-          <p:nvPr/>
-        </p:nvSpPr>
-        <p:spPr>
-          <a:xfrm>
-            <a:off x="731520" y="3739896"/>
-            <a:ext cx="2298116" cy="402336"/>
-          </a:xfrm>
-          <a:prstGeom prst="rect">
-            <a:avLst/>
-          </a:prstGeom>
-          <a:noFill/>
-          <a:ln/>
-        </p:spPr>
-        <p:txBody>
-          <a:bodyPr wrap="square" lIns="0" tIns="0" rIns="0" bIns="0" rtlCol="0" anchor="ctr">
-            <a:normAutofit/>
-          </a:bodyPr>
-          <a:lstStyle/>
-          <a:p>
-            <a:pPr indent="0" marL="0">
-              <a:buNone/>
-            </a:pPr>
-            <a:r>
-              <a:rPr lang="en-US" sz="2000" b="1" dirty="0">
-                <a:solidFill>
-                  <a:srgbClr val="0F172A"/>
-                </a:solidFill>
-                <a:latin typeface="Pretendard" pitchFamily="34" charset="0"/>
-                <a:ea typeface="Pretendard" pitchFamily="34" charset="-122"/>
-                <a:cs typeface="Pretendard" pitchFamily="34" charset="-120"/>
-              </a:rPr>
-              <a:t>근린생활시설 / 메디컬</a:t>
-            </a:r>
-            <a:endParaRPr lang="en-US" sz="2000" dirty="0"/>
-          </a:p>
-        </p:txBody>
-      </p:sp>
-      <p:sp>
-        <p:nvSpPr>
-          <p:cNvPr id="22" name="Shape 20"/>
-          <p:cNvSpPr/>
-          <p:nvPr/>
-        </p:nvSpPr>
-        <p:spPr>
-          <a:xfrm>
-            <a:off x="3377108" y="3429000"/>
-            <a:ext cx="2627300" cy="1280160"/>
-          </a:xfrm>
-          <a:prstGeom prst="roundRect">
-            <a:avLst>
-              <a:gd name="adj" fmla="val 4286"/>
-            </a:avLst>
-          </a:prstGeom>
-          <a:solidFill>
-            <a:srgbClr val="F8FAFC"/>
-          </a:solidFill>
-          <a:ln w="6350">
-            <a:solidFill>
-              <a:srgbClr val="CBD5E1"/>
-            </a:solidFill>
-            <a:prstDash val="solid"/>
-          </a:ln>
-        </p:spPr>
-      </p:sp>
-      <p:sp>
-        <p:nvSpPr>
-          <p:cNvPr id="23" name="Text 21"/>
-          <p:cNvSpPr/>
-          <p:nvPr/>
-        </p:nvSpPr>
-        <p:spPr>
-          <a:xfrm>
-            <a:off x="3541700" y="3557016"/>
-            <a:ext cx="2298116" cy="201168"/>
-          </a:xfrm>
-          <a:prstGeom prst="rect">
-            <a:avLst/>
-          </a:prstGeom>
-          <a:noFill/>
-          <a:ln/>
-        </p:spPr>
-        <p:txBody>
-          <a:bodyPr wrap="square" lIns="0" tIns="0" rIns="0" bIns="0" rtlCol="0" anchor="ctr"/>
-          <a:lstStyle/>
-          <a:p>
-            <a:pPr indent="0" marL="0">
-              <a:buNone/>
-            </a:pPr>
-            <a:r>
-              <a:rPr lang="en-US" sz="950" dirty="0">
-                <a:solidFill>
-                  <a:srgbClr val="64748B"/>
-                </a:solidFill>
-                <a:latin typeface="Pretendard" pitchFamily="34" charset="0"/>
-                <a:ea typeface="Pretendard" pitchFamily="34" charset="-122"/>
-                <a:cs typeface="Pretendard" pitchFamily="34" charset="-120"/>
-              </a:rPr>
-              <a:t>연면적</a:t>
-            </a:r>
-            <a:endParaRPr lang="en-US" sz="950" dirty="0"/>
-          </a:p>
-        </p:txBody>
-      </p:sp>
-      <p:sp>
-        <p:nvSpPr>
-          <p:cNvPr id="24" name="Text 22"/>
-          <p:cNvSpPr/>
-          <p:nvPr/>
-        </p:nvSpPr>
-        <p:spPr>
-          <a:xfrm>
-            <a:off x="3541700" y="3739896"/>
-            <a:ext cx="2298116" cy="402336"/>
-          </a:xfrm>
-          <a:prstGeom prst="rect">
-            <a:avLst/>
-          </a:prstGeom>
-          <a:noFill/>
-          <a:ln/>
-        </p:spPr>
-        <p:txBody>
-          <a:bodyPr wrap="square" lIns="0" tIns="0" rIns="0" bIns="0" rtlCol="0" anchor="ctr">
-            <a:normAutofit/>
-          </a:bodyPr>
-          <a:lstStyle/>
-          <a:p>
-            <a:pPr indent="0" marL="0">
-              <a:buNone/>
-            </a:pPr>
-            <a:r>
-              <a:rPr lang="en-US" sz="2000" b="1" dirty="0">
-                <a:solidFill>
-                  <a:srgbClr val="0F172A"/>
-                </a:solidFill>
-                <a:latin typeface="Pretendard" pitchFamily="34" charset="0"/>
-                <a:ea typeface="Pretendard" pitchFamily="34" charset="-122"/>
-                <a:cs typeface="Pretendard" pitchFamily="34" charset="-120"/>
-              </a:rPr>
-              <a:t>5,000㎡ (약 1513평(약 5001.7㎡))</a:t>
-            </a:r>
-            <a:endParaRPr lang="en-US" sz="2000" dirty="0"/>
-          </a:p>
-        </p:txBody>
-      </p:sp>
-      <p:sp>
-        <p:nvSpPr>
-          <p:cNvPr id="25" name="Shape 23"/>
-          <p:cNvSpPr/>
-          <p:nvPr/>
-        </p:nvSpPr>
-        <p:spPr>
-          <a:xfrm>
-            <a:off x="6187288" y="3429000"/>
-            <a:ext cx="2627300" cy="1280160"/>
-          </a:xfrm>
-          <a:prstGeom prst="roundRect">
-            <a:avLst>
-              <a:gd name="adj" fmla="val 4286"/>
-            </a:avLst>
-          </a:prstGeom>
-          <a:solidFill>
-            <a:srgbClr val="F8FAFC"/>
-          </a:solidFill>
-          <a:ln w="6350">
-            <a:solidFill>
-              <a:srgbClr val="CBD5E1"/>
-            </a:solidFill>
-            <a:prstDash val="solid"/>
-          </a:ln>
-        </p:spPr>
-      </p:sp>
-      <p:sp>
-        <p:nvSpPr>
-          <p:cNvPr id="26" name="Text 24"/>
-          <p:cNvSpPr/>
-          <p:nvPr/>
-        </p:nvSpPr>
-        <p:spPr>
-          <a:xfrm>
-            <a:off x="6351880" y="3557016"/>
-            <a:ext cx="2298116" cy="201168"/>
-          </a:xfrm>
-          <a:prstGeom prst="rect">
-            <a:avLst/>
-          </a:prstGeom>
-          <a:noFill/>
-          <a:ln/>
-        </p:spPr>
-        <p:txBody>
-          <a:bodyPr wrap="square" lIns="0" tIns="0" rIns="0" bIns="0" rtlCol="0" anchor="ctr"/>
-          <a:lstStyle/>
-          <a:p>
-            <a:pPr indent="0" marL="0">
-              <a:buNone/>
-            </a:pPr>
-            <a:r>
-              <a:rPr lang="en-US" sz="950" dirty="0">
-                <a:solidFill>
-                  <a:srgbClr val="64748B"/>
-                </a:solidFill>
-                <a:latin typeface="Pretendard" pitchFamily="34" charset="0"/>
-                <a:ea typeface="Pretendard" pitchFamily="34" charset="-122"/>
-                <a:cs typeface="Pretendard" pitchFamily="34" charset="-120"/>
-              </a:rPr>
-              <a:t>대지면적</a:t>
-            </a:r>
-            <a:endParaRPr lang="en-US" sz="950" dirty="0"/>
-          </a:p>
-        </p:txBody>
-      </p:sp>
-      <p:sp>
-        <p:nvSpPr>
-          <p:cNvPr id="27" name="Text 25"/>
-          <p:cNvSpPr/>
-          <p:nvPr/>
-        </p:nvSpPr>
-        <p:spPr>
-          <a:xfrm>
-            <a:off x="6351880" y="3739896"/>
-            <a:ext cx="2298116" cy="402336"/>
-          </a:xfrm>
-          <a:prstGeom prst="rect">
-            <a:avLst/>
-          </a:prstGeom>
-          <a:noFill/>
-          <a:ln/>
-        </p:spPr>
-        <p:txBody>
-          <a:bodyPr wrap="square" lIns="0" tIns="0" rIns="0" bIns="0" rtlCol="0" anchor="ctr">
-            <a:normAutofit/>
-          </a:bodyPr>
-          <a:lstStyle/>
-          <a:p>
-            <a:pPr indent="0" marL="0">
-              <a:buNone/>
-            </a:pPr>
-            <a:r>
-              <a:rPr lang="en-US" sz="2000" b="1" dirty="0">
-                <a:solidFill>
-                  <a:srgbClr val="0F172A"/>
-                </a:solidFill>
-                <a:latin typeface="Pretendard" pitchFamily="34" charset="0"/>
-                <a:ea typeface="Pretendard" pitchFamily="34" charset="-122"/>
-                <a:cs typeface="Pretendard" pitchFamily="34" charset="-120"/>
-              </a:rPr>
-              <a:t>1,000㎡ (약 303평(약 1001.7㎡))</a:t>
-            </a:r>
-            <a:endParaRPr lang="en-US" sz="2000" dirty="0"/>
-          </a:p>
-        </p:txBody>
-      </p:sp>
-      <p:sp>
-        <p:nvSpPr>
-          <p:cNvPr id="28" name="Shape 26"/>
-          <p:cNvSpPr/>
-          <p:nvPr/>
-        </p:nvSpPr>
-        <p:spPr>
-          <a:xfrm>
-            <a:off x="8997467" y="3429000"/>
-            <a:ext cx="2627300" cy="1280160"/>
-          </a:xfrm>
-          <a:prstGeom prst="roundRect">
-            <a:avLst>
-              <a:gd name="adj" fmla="val 4286"/>
-            </a:avLst>
-          </a:prstGeom>
-          <a:solidFill>
-            <a:srgbClr val="F8FAFC"/>
-          </a:solidFill>
-          <a:ln w="6350">
-            <a:solidFill>
-              <a:srgbClr val="CBD5E1"/>
-            </a:solidFill>
-            <a:prstDash val="solid"/>
-          </a:ln>
-        </p:spPr>
-      </p:sp>
-      <p:sp>
-        <p:nvSpPr>
-          <p:cNvPr id="29" name="Text 27"/>
-          <p:cNvSpPr/>
-          <p:nvPr/>
-        </p:nvSpPr>
-        <p:spPr>
-          <a:xfrm>
-            <a:off x="9162059" y="3557016"/>
-            <a:ext cx="2298116" cy="201168"/>
-          </a:xfrm>
-          <a:prstGeom prst="rect">
-            <a:avLst/>
-          </a:prstGeom>
-          <a:noFill/>
-          <a:ln/>
-        </p:spPr>
-        <p:txBody>
-          <a:bodyPr wrap="square" lIns="0" tIns="0" rIns="0" bIns="0" rtlCol="0" anchor="ctr"/>
-          <a:lstStyle/>
-          <a:p>
-            <a:pPr indent="0" marL="0">
-              <a:buNone/>
-            </a:pPr>
-            <a:r>
-              <a:rPr lang="en-US" sz="950" dirty="0">
-                <a:solidFill>
-                  <a:srgbClr val="64748B"/>
-                </a:solidFill>
-                <a:latin typeface="Pretendard" pitchFamily="34" charset="0"/>
-                <a:ea typeface="Pretendard" pitchFamily="34" charset="-122"/>
-                <a:cs typeface="Pretendard" pitchFamily="34" charset="-120"/>
-              </a:rPr>
-              <a:t>용도지역</a:t>
-            </a:r>
-            <a:endParaRPr lang="en-US" sz="950" dirty="0"/>
-          </a:p>
-        </p:txBody>
-      </p:sp>
-      <p:sp>
-        <p:nvSpPr>
-          <p:cNvPr id="30" name="Text 28"/>
-          <p:cNvSpPr/>
-          <p:nvPr/>
-        </p:nvSpPr>
-        <p:spPr>
-          <a:xfrm>
-            <a:off x="9162059" y="3739896"/>
-            <a:ext cx="2298116" cy="402336"/>
-          </a:xfrm>
-          <a:prstGeom prst="rect">
-            <a:avLst/>
-          </a:prstGeom>
-          <a:noFill/>
-          <a:ln/>
-        </p:spPr>
-        <p:txBody>
-          <a:bodyPr wrap="square" lIns="0" tIns="0" rIns="0" bIns="0" rtlCol="0" anchor="ctr">
-            <a:normAutofit/>
-          </a:bodyPr>
-          <a:lstStyle/>
-          <a:p>
-            <a:pPr indent="0" marL="0">
-              <a:buNone/>
-            </a:pPr>
-            <a:r>
-              <a:rPr lang="en-US" sz="2000" b="1" dirty="0">
-                <a:solidFill>
-                  <a:srgbClr val="0F172A"/>
-                </a:solidFill>
-                <a:latin typeface="Pretendard" pitchFamily="34" charset="0"/>
-                <a:ea typeface="Pretendard" pitchFamily="34" charset="-122"/>
-                <a:cs typeface="Pretendard" pitchFamily="34" charset="-120"/>
-              </a:rPr>
-              <a:t>일반상업지역</a:t>
-            </a:r>
-            <a:endParaRPr lang="en-US" sz="2000" dirty="0"/>
-          </a:p>
-        </p:txBody>
-      </p:sp>
-      <p:sp>
-        <p:nvSpPr>
-          <p:cNvPr id="31" name="Shape 29"/>
-          <p:cNvSpPr/>
-          <p:nvPr/>
-        </p:nvSpPr>
-        <p:spPr>
-          <a:xfrm>
-            <a:off x="566928" y="4937760"/>
-            <a:ext cx="5437480" cy="1097280"/>
-          </a:xfrm>
-          <a:prstGeom prst="roundRect">
-            <a:avLst>
-              <a:gd name="adj" fmla="val 5000"/>
-            </a:avLst>
-          </a:prstGeom>
-          <a:solidFill>
-            <a:srgbClr val="DBEAFE"/>
-          </a:solidFill>
-          <a:ln/>
-        </p:spPr>
-      </p:sp>
-      <p:sp>
-        <p:nvSpPr>
-          <p:cNvPr id="32" name="Shape 30"/>
-          <p:cNvSpPr/>
-          <p:nvPr/>
-        </p:nvSpPr>
-        <p:spPr>
-          <a:xfrm>
-            <a:off x="566928" y="4992624"/>
-            <a:ext cx="36576" cy="987552"/>
-          </a:xfrm>
-          <a:prstGeom prst="rect">
-            <a:avLst/>
-          </a:prstGeom>
-          <a:solidFill>
-            <a:srgbClr val="1D4ED8"/>
-          </a:solidFill>
-          <a:ln/>
-        </p:spPr>
-      </p:sp>
-      <p:sp>
-        <p:nvSpPr>
-          <p:cNvPr id="33" name="Text 31"/>
-          <p:cNvSpPr/>
-          <p:nvPr/>
-        </p:nvSpPr>
-        <p:spPr>
-          <a:xfrm>
-            <a:off x="749808" y="5047488"/>
-            <a:ext cx="5108296" cy="201168"/>
-          </a:xfrm>
-          <a:prstGeom prst="rect">
-            <a:avLst/>
-          </a:prstGeom>
-          <a:noFill/>
-          <a:ln/>
-        </p:spPr>
-        <p:txBody>
-          <a:bodyPr wrap="square" lIns="0" tIns="0" rIns="0" bIns="0" rtlCol="0" anchor="ctr"/>
-          <a:lstStyle/>
-          <a:p>
-            <a:pPr indent="0" marL="0">
-              <a:buNone/>
-            </a:pPr>
-            <a:endParaRPr lang="en-US" sz="1050" dirty="0"/>
-          </a:p>
-        </p:txBody>
-      </p:sp>
-      <p:sp>
-        <p:nvSpPr>
-          <p:cNvPr id="34" name="Text 32"/>
-          <p:cNvSpPr/>
-          <p:nvPr/>
-        </p:nvSpPr>
-        <p:spPr>
-          <a:xfrm>
-            <a:off x="749808" y="5266944"/>
-            <a:ext cx="5108296" cy="694944"/>
-          </a:xfrm>
-          <a:prstGeom prst="rect">
-            <a:avLst/>
-          </a:prstGeom>
-          <a:noFill/>
-          <a:ln/>
-        </p:spPr>
-        <p:txBody>
-          <a:bodyPr wrap="square" lIns="0" tIns="0" rIns="0" bIns="0" rtlCol="0" anchor="t"/>
-          <a:lstStyle/>
-          <a:p>
-            <a:pPr indent="0" marL="0">
-              <a:lnSpc>
-                <a:spcPct val="120000"/>
-              </a:lnSpc>
-              <a:buNone/>
-            </a:pPr>
-            <a:r>
-              <a:rPr lang="en-US" sz="930" dirty="0">
-                <a:solidFill>
-                  <a:srgbClr val="0F172A"/>
-                </a:solidFill>
-                <a:latin typeface="Pretendard" pitchFamily="34" charset="0"/>
-                <a:ea typeface="Pretendard" pitchFamily="34" charset="-122"/>
-                <a:cs typeface="Pretendard" pitchFamily="34" charset="-120"/>
-              </a:rPr>
-              <a:t>본 매물은 이천권역 대로변 입지의 우량 메디컬 테넌트 만실 운영 자산입니다.</a:t>
-            </a:r>
-            <a:endParaRPr lang="en-US" sz="930" dirty="0"/>
-          </a:p>
-        </p:txBody>
-      </p:sp>
-      <p:sp>
-        <p:nvSpPr>
-          <p:cNvPr id="35" name="Text 33"/>
+          <p:cNvPr id="19" name="Text 17"/>
           <p:cNvSpPr/>
           <p:nvPr/>
         </p:nvSpPr>
@@ -4577,7 +4037,7 @@
       </p:sp>
       <p:sp>
         <p:nvSpPr>
-          <p:cNvPr id="36" name="Shape 34"/>
+          <p:cNvPr id="20" name="Shape 18"/>
           <p:cNvSpPr/>
           <p:nvPr/>
         </p:nvSpPr>
@@ -4761,6 +4221,45 @@
         <p:spPr>
           <a:xfrm>
             <a:off x="6053328" y="1481328"/>
+            <a:ext cx="5571439" cy="237744"/>
+          </a:xfrm>
+          <a:prstGeom prst="rect">
+            <a:avLst/>
+          </a:prstGeom>
+          <a:noFill/>
+          <a:ln/>
+        </p:spPr>
+        <p:txBody>
+          <a:bodyPr wrap="square" lIns="0" tIns="0" rIns="0" bIns="0" rtlCol="0" anchor="ctr"/>
+          <a:lstStyle/>
+          <a:p>
+            <a:pPr indent="0" marL="0">
+              <a:buNone/>
+            </a:pPr>
+            <a:r>
+              <a:rPr lang="en-US" sz="1100" b="1" dirty="0">
+                <a:solidFill>
+                  <a:srgbClr val="0F172A"/>
+                </a:solidFill>
+                <a:latin typeface="Pretendard" pitchFamily="34" charset="0"/>
+                <a:ea typeface="Pretendard" pitchFamily="34" charset="-122"/>
+                <a:cs typeface="Pretendard" pitchFamily="34" charset="-120"/>
+              </a:rPr>
+              <a:t>교통 및 도로 접근성</a:t>
+            </a:r>
+            <a:endParaRPr lang="en-US" sz="1100" dirty="0"/>
+          </a:p>
+        </p:txBody>
+      </p:sp>
+      <p:sp>
+        <p:nvSpPr>
+          <p:cNvPr id="7" name="Text 4"/>
+          <p:cNvSpPr/>
+          <p:nvPr/>
+        </p:nvSpPr>
+        <p:spPr>
+          <a:xfrm>
+            <a:off x="6053328" y="1801368"/>
             <a:ext cx="2117147" cy="438912"/>
           </a:xfrm>
           <a:prstGeom prst="rect">
@@ -4788,7 +4287,7 @@
                 <a:ea typeface="Pretendard" pitchFamily="34" charset="-122"/>
                 <a:cs typeface="Pretendard" pitchFamily="34" charset="-120"/>
               </a:rPr>
-              <a:t>교통 접근성</a:t>
+              <a:t>지하철 접근성</a:t>
             </a:r>
             <a:endParaRPr lang="en-US" sz="1400" dirty="0"/>
           </a:p>
@@ -4796,13 +4295,13 @@
       </p:sp>
       <p:sp>
         <p:nvSpPr>
-          <p:cNvPr id="7" name="Text 4"/>
-          <p:cNvSpPr/>
-          <p:nvPr/>
-        </p:nvSpPr>
-        <p:spPr>
-          <a:xfrm>
-            <a:off x="8170475" y="1481328"/>
+          <p:cNvPr id="8" name="Text 5"/>
+          <p:cNvSpPr/>
+          <p:nvPr/>
+        </p:nvSpPr>
+        <p:spPr>
+          <a:xfrm>
+            <a:off x="8170475" y="1801368"/>
             <a:ext cx="3454292" cy="438912"/>
           </a:xfrm>
           <a:prstGeom prst="rect">
@@ -4830,7 +4329,7 @@
                 <a:ea typeface="Pretendard" pitchFamily="34" charset="-122"/>
                 <a:cs typeface="Pretendard" pitchFamily="34" charset="-120"/>
               </a:rPr>
-              <a:t>{"ok":true,"mocked":true,"extractedFields":{"area_signal":"역…</a:t>
+              <a:t>강남역(2호선·신분당선) 및 양재역(3호선) 더블역세권 도보 4분</a:t>
             </a:r>
             <a:endParaRPr lang="en-US" sz="1400" dirty="0"/>
           </a:p>
@@ -4838,7 +4337,542 @@
       </p:sp>
       <p:sp>
         <p:nvSpPr>
-          <p:cNvPr id="8" name="Text 5"/>
+          <p:cNvPr id="9" name="Shape 6"/>
+          <p:cNvSpPr/>
+          <p:nvPr/>
+        </p:nvSpPr>
+        <p:spPr>
+          <a:xfrm>
+            <a:off x="6053328" y="2240280"/>
+            <a:ext cx="5571439" cy="0"/>
+          </a:xfrm>
+          <a:prstGeom prst="line">
+            <a:avLst/>
+          </a:prstGeom>
+          <a:noFill/>
+          <a:ln w="3810">
+            <a:solidFill>
+              <a:srgbClr val="CBD5E1"/>
+            </a:solidFill>
+            <a:prstDash val="solid"/>
+          </a:ln>
+        </p:spPr>
+      </p:sp>
+      <p:sp>
+        <p:nvSpPr>
+          <p:cNvPr id="10" name="Text 7"/>
+          <p:cNvSpPr/>
+          <p:nvPr/>
+        </p:nvSpPr>
+        <p:spPr>
+          <a:xfrm>
+            <a:off x="6053328" y="2240280"/>
+            <a:ext cx="2117147" cy="438912"/>
+          </a:xfrm>
+          <a:prstGeom prst="rect">
+            <a:avLst/>
+          </a:prstGeom>
+          <a:noFill/>
+          <a:ln/>
+        </p:spPr>
+        <p:txBody>
+          <a:bodyPr wrap="square" lIns="0" tIns="0" rIns="0" bIns="0" rtlCol="0" anchor="ctr"/>
+          <a:lstStyle/>
+          <a:p>
+            <a:pPr indent="0" marL="0">
+              <a:lnSpc>
+                <a:spcPct val="120000"/>
+              </a:lnSpc>
+              <a:buNone/>
+            </a:pPr>
+            <a:r>
+              <a:rPr lang="en-US" sz="1400" dirty="0">
+                <a:solidFill>
+                  <a:srgbClr val="64748B"/>
+                </a:solidFill>
+                <a:latin typeface="Pretendard" pitchFamily="34" charset="0"/>
+                <a:ea typeface="Pretendard" pitchFamily="34" charset="-122"/>
+                <a:cs typeface="Pretendard" pitchFamily="34" charset="-120"/>
+              </a:rPr>
+              <a:t>도로 접면 조건</a:t>
+            </a:r>
+            <a:endParaRPr lang="en-US" sz="1400" dirty="0"/>
+          </a:p>
+        </p:txBody>
+      </p:sp>
+      <p:sp>
+        <p:nvSpPr>
+          <p:cNvPr id="11" name="Text 8"/>
+          <p:cNvSpPr/>
+          <p:nvPr/>
+        </p:nvSpPr>
+        <p:spPr>
+          <a:xfrm>
+            <a:off x="8170475" y="2240280"/>
+            <a:ext cx="3454292" cy="438912"/>
+          </a:xfrm>
+          <a:prstGeom prst="rect">
+            <a:avLst/>
+          </a:prstGeom>
+          <a:noFill/>
+          <a:ln/>
+        </p:spPr>
+        <p:txBody>
+          <a:bodyPr wrap="square" lIns="0" tIns="0" rIns="0" bIns="0" rtlCol="0" anchor="ctr"/>
+          <a:lstStyle/>
+          <a:p>
+            <a:pPr indent="0" marL="0">
+              <a:lnSpc>
+                <a:spcPct val="120000"/>
+              </a:lnSpc>
+              <a:buNone/>
+            </a:pPr>
+            <a:r>
+              <a:rPr lang="en-US" sz="1400" b="1" dirty="0">
+                <a:solidFill>
+                  <a:srgbClr val="0F172A"/>
+                </a:solidFill>
+                <a:latin typeface="Pretendard" pitchFamily="34" charset="0"/>
+                <a:ea typeface="Pretendard" pitchFamily="34" charset="-122"/>
+                <a:cs typeface="Pretendard" pitchFamily="34" charset="-120"/>
+              </a:rPr>
+              <a:t>서초대로 25m 메인 대로변 접면</a:t>
+            </a:r>
+            <a:endParaRPr lang="en-US" sz="1400" dirty="0"/>
+          </a:p>
+        </p:txBody>
+      </p:sp>
+      <p:sp>
+        <p:nvSpPr>
+          <p:cNvPr id="12" name="Shape 9"/>
+          <p:cNvSpPr/>
+          <p:nvPr/>
+        </p:nvSpPr>
+        <p:spPr>
+          <a:xfrm>
+            <a:off x="6053328" y="2679192"/>
+            <a:ext cx="5571439" cy="0"/>
+          </a:xfrm>
+          <a:prstGeom prst="line">
+            <a:avLst/>
+          </a:prstGeom>
+          <a:noFill/>
+          <a:ln w="3810">
+            <a:solidFill>
+              <a:srgbClr val="CBD5E1"/>
+            </a:solidFill>
+            <a:prstDash val="solid"/>
+          </a:ln>
+        </p:spPr>
+      </p:sp>
+      <p:sp>
+        <p:nvSpPr>
+          <p:cNvPr id="13" name="Text 10"/>
+          <p:cNvSpPr/>
+          <p:nvPr/>
+        </p:nvSpPr>
+        <p:spPr>
+          <a:xfrm>
+            <a:off x="6053328" y="2679192"/>
+            <a:ext cx="2117147" cy="438912"/>
+          </a:xfrm>
+          <a:prstGeom prst="rect">
+            <a:avLst/>
+          </a:prstGeom>
+          <a:noFill/>
+          <a:ln/>
+        </p:spPr>
+        <p:txBody>
+          <a:bodyPr wrap="square" lIns="0" tIns="0" rIns="0" bIns="0" rtlCol="0" anchor="ctr"/>
+          <a:lstStyle/>
+          <a:p>
+            <a:pPr indent="0" marL="0">
+              <a:lnSpc>
+                <a:spcPct val="120000"/>
+              </a:lnSpc>
+              <a:buNone/>
+            </a:pPr>
+            <a:r>
+              <a:rPr lang="en-US" sz="1400" dirty="0">
+                <a:solidFill>
+                  <a:srgbClr val="64748B"/>
+                </a:solidFill>
+                <a:latin typeface="Pretendard" pitchFamily="34" charset="0"/>
+                <a:ea typeface="Pretendard" pitchFamily="34" charset="-122"/>
+                <a:cs typeface="Pretendard" pitchFamily="34" charset="-120"/>
+              </a:rPr>
+              <a:t>차량 진출입</a:t>
+            </a:r>
+            <a:endParaRPr lang="en-US" sz="1400" dirty="0"/>
+          </a:p>
+        </p:txBody>
+      </p:sp>
+      <p:sp>
+        <p:nvSpPr>
+          <p:cNvPr id="14" name="Text 11"/>
+          <p:cNvSpPr/>
+          <p:nvPr/>
+        </p:nvSpPr>
+        <p:spPr>
+          <a:xfrm>
+            <a:off x="8170475" y="2679192"/>
+            <a:ext cx="3454292" cy="438912"/>
+          </a:xfrm>
+          <a:prstGeom prst="rect">
+            <a:avLst/>
+          </a:prstGeom>
+          <a:noFill/>
+          <a:ln/>
+        </p:spPr>
+        <p:txBody>
+          <a:bodyPr wrap="square" lIns="0" tIns="0" rIns="0" bIns="0" rtlCol="0" anchor="ctr"/>
+          <a:lstStyle/>
+          <a:p>
+            <a:pPr indent="0" marL="0">
+              <a:lnSpc>
+                <a:spcPct val="120000"/>
+              </a:lnSpc>
+              <a:buNone/>
+            </a:pPr>
+            <a:r>
+              <a:rPr lang="en-US" sz="1400" b="1" dirty="0">
+                <a:solidFill>
+                  <a:srgbClr val="0F172A"/>
+                </a:solidFill>
+                <a:latin typeface="Pretendard" pitchFamily="34" charset="0"/>
+                <a:ea typeface="Pretendard" pitchFamily="34" charset="-122"/>
+                <a:cs typeface="Pretendard" pitchFamily="34" charset="-120"/>
+              </a:rPr>
+              <a:t>경부고속도로 서초IC 및 테헤란로 3분 내 진입 가능</a:t>
+            </a:r>
+            <a:endParaRPr lang="en-US" sz="1400" dirty="0"/>
+          </a:p>
+        </p:txBody>
+      </p:sp>
+      <p:sp>
+        <p:nvSpPr>
+          <p:cNvPr id="15" name="Shape 12"/>
+          <p:cNvSpPr/>
+          <p:nvPr/>
+        </p:nvSpPr>
+        <p:spPr>
+          <a:xfrm>
+            <a:off x="6053328" y="3118104"/>
+            <a:ext cx="5571439" cy="0"/>
+          </a:xfrm>
+          <a:prstGeom prst="line">
+            <a:avLst/>
+          </a:prstGeom>
+          <a:noFill/>
+          <a:ln w="3810">
+            <a:solidFill>
+              <a:srgbClr val="CBD5E1"/>
+            </a:solidFill>
+            <a:prstDash val="solid"/>
+          </a:ln>
+        </p:spPr>
+      </p:sp>
+      <p:sp>
+        <p:nvSpPr>
+          <p:cNvPr id="16" name="Text 13"/>
+          <p:cNvSpPr/>
+          <p:nvPr/>
+        </p:nvSpPr>
+        <p:spPr>
+          <a:xfrm>
+            <a:off x="6053328" y="3118104"/>
+            <a:ext cx="2117147" cy="438912"/>
+          </a:xfrm>
+          <a:prstGeom prst="rect">
+            <a:avLst/>
+          </a:prstGeom>
+          <a:noFill/>
+          <a:ln/>
+        </p:spPr>
+        <p:txBody>
+          <a:bodyPr wrap="square" lIns="0" tIns="0" rIns="0" bIns="0" rtlCol="0" anchor="ctr"/>
+          <a:lstStyle/>
+          <a:p>
+            <a:pPr indent="0" marL="0">
+              <a:lnSpc>
+                <a:spcPct val="120000"/>
+              </a:lnSpc>
+              <a:buNone/>
+            </a:pPr>
+            <a:r>
+              <a:rPr lang="en-US" sz="1400" dirty="0">
+                <a:solidFill>
+                  <a:srgbClr val="64748B"/>
+                </a:solidFill>
+                <a:latin typeface="Pretendard" pitchFamily="34" charset="0"/>
+                <a:ea typeface="Pretendard" pitchFamily="34" charset="-122"/>
+                <a:cs typeface="Pretendard" pitchFamily="34" charset="-120"/>
+              </a:rPr>
+              <a:t>배후 수요</a:t>
+            </a:r>
+            <a:endParaRPr lang="en-US" sz="1400" dirty="0"/>
+          </a:p>
+        </p:txBody>
+      </p:sp>
+      <p:sp>
+        <p:nvSpPr>
+          <p:cNvPr id="17" name="Text 14"/>
+          <p:cNvSpPr/>
+          <p:nvPr/>
+        </p:nvSpPr>
+        <p:spPr>
+          <a:xfrm>
+            <a:off x="8170475" y="3118104"/>
+            <a:ext cx="3454292" cy="438912"/>
+          </a:xfrm>
+          <a:prstGeom prst="rect">
+            <a:avLst/>
+          </a:prstGeom>
+          <a:noFill/>
+          <a:ln/>
+        </p:spPr>
+        <p:txBody>
+          <a:bodyPr wrap="square" lIns="0" tIns="0" rIns="0" bIns="0" rtlCol="0" anchor="ctr"/>
+          <a:lstStyle/>
+          <a:p>
+            <a:pPr indent="0" marL="0">
+              <a:lnSpc>
+                <a:spcPct val="120000"/>
+              </a:lnSpc>
+              <a:buNone/>
+            </a:pPr>
+            <a:r>
+              <a:rPr lang="en-US" sz="1400" b="1" dirty="0">
+                <a:solidFill>
+                  <a:srgbClr val="0F172A"/>
+                </a:solidFill>
+                <a:latin typeface="Pretendard" pitchFamily="34" charset="0"/>
+                <a:ea typeface="Pretendard" pitchFamily="34" charset="-122"/>
+                <a:cs typeface="Pretendard" pitchFamily="34" charset="-120"/>
+              </a:rPr>
+              <a:t>강남 테헤란로 IT밸리 및 서초 법조타운 오피스 상주인구 30만 배후</a:t>
+            </a:r>
+            <a:endParaRPr lang="en-US" sz="1400" dirty="0"/>
+          </a:p>
+        </p:txBody>
+      </p:sp>
+      <p:sp>
+        <p:nvSpPr>
+          <p:cNvPr id="18" name="Shape 15"/>
+          <p:cNvSpPr/>
+          <p:nvPr/>
+        </p:nvSpPr>
+        <p:spPr>
+          <a:xfrm>
+            <a:off x="6053328" y="3557016"/>
+            <a:ext cx="5571439" cy="0"/>
+          </a:xfrm>
+          <a:prstGeom prst="line">
+            <a:avLst/>
+          </a:prstGeom>
+          <a:noFill/>
+          <a:ln w="3810">
+            <a:solidFill>
+              <a:srgbClr val="CBD5E1"/>
+            </a:solidFill>
+            <a:prstDash val="solid"/>
+          </a:ln>
+        </p:spPr>
+      </p:sp>
+      <p:sp>
+        <p:nvSpPr>
+          <p:cNvPr id="19" name="Text 16"/>
+          <p:cNvSpPr/>
+          <p:nvPr/>
+        </p:nvSpPr>
+        <p:spPr>
+          <a:xfrm>
+            <a:off x="6053328" y="3557016"/>
+            <a:ext cx="2117147" cy="438912"/>
+          </a:xfrm>
+          <a:prstGeom prst="rect">
+            <a:avLst/>
+          </a:prstGeom>
+          <a:noFill/>
+          <a:ln/>
+        </p:spPr>
+        <p:txBody>
+          <a:bodyPr wrap="square" lIns="0" tIns="0" rIns="0" bIns="0" rtlCol="0" anchor="ctr"/>
+          <a:lstStyle/>
+          <a:p>
+            <a:pPr indent="0" marL="0">
+              <a:lnSpc>
+                <a:spcPct val="120000"/>
+              </a:lnSpc>
+              <a:buNone/>
+            </a:pPr>
+            <a:r>
+              <a:rPr lang="en-US" sz="1400" dirty="0">
+                <a:solidFill>
+                  <a:srgbClr val="64748B"/>
+                </a:solidFill>
+                <a:latin typeface="Pretendard" pitchFamily="34" charset="0"/>
+                <a:ea typeface="Pretendard" pitchFamily="34" charset="-122"/>
+                <a:cs typeface="Pretendard" pitchFamily="34" charset="-120"/>
+              </a:rPr>
+              <a:t>의료 상권</a:t>
+            </a:r>
+            <a:endParaRPr lang="en-US" sz="1400" dirty="0"/>
+          </a:p>
+        </p:txBody>
+      </p:sp>
+      <p:sp>
+        <p:nvSpPr>
+          <p:cNvPr id="20" name="Text 17"/>
+          <p:cNvSpPr/>
+          <p:nvPr/>
+        </p:nvSpPr>
+        <p:spPr>
+          <a:xfrm>
+            <a:off x="8170475" y="3557016"/>
+            <a:ext cx="3454292" cy="438912"/>
+          </a:xfrm>
+          <a:prstGeom prst="rect">
+            <a:avLst/>
+          </a:prstGeom>
+          <a:noFill/>
+          <a:ln/>
+        </p:spPr>
+        <p:txBody>
+          <a:bodyPr wrap="square" lIns="0" tIns="0" rIns="0" bIns="0" rtlCol="0" anchor="ctr"/>
+          <a:lstStyle/>
+          <a:p>
+            <a:pPr indent="0" marL="0">
+              <a:lnSpc>
+                <a:spcPct val="120000"/>
+              </a:lnSpc>
+              <a:buNone/>
+            </a:pPr>
+            <a:r>
+              <a:rPr lang="en-US" sz="1400" b="1" dirty="0">
+                <a:solidFill>
+                  <a:srgbClr val="0F172A"/>
+                </a:solidFill>
+                <a:latin typeface="Pretendard" pitchFamily="34" charset="0"/>
+                <a:ea typeface="Pretendard" pitchFamily="34" charset="-122"/>
+                <a:cs typeface="Pretendard" pitchFamily="34" charset="-120"/>
+              </a:rPr>
+              <a:t>1층 약국 및 상층부 안과·피부과 전문의원 집적 의료 특화 상권</a:t>
+            </a:r>
+            <a:endParaRPr lang="en-US" sz="1400" dirty="0"/>
+          </a:p>
+        </p:txBody>
+      </p:sp>
+      <p:sp>
+        <p:nvSpPr>
+          <p:cNvPr id="21" name="Shape 18"/>
+          <p:cNvSpPr/>
+          <p:nvPr/>
+        </p:nvSpPr>
+        <p:spPr>
+          <a:xfrm>
+            <a:off x="6053328" y="3995928"/>
+            <a:ext cx="5571439" cy="0"/>
+          </a:xfrm>
+          <a:prstGeom prst="line">
+            <a:avLst/>
+          </a:prstGeom>
+          <a:noFill/>
+          <a:ln w="3810">
+            <a:solidFill>
+              <a:srgbClr val="CBD5E1"/>
+            </a:solidFill>
+            <a:prstDash val="solid"/>
+          </a:ln>
+        </p:spPr>
+      </p:sp>
+      <p:sp>
+        <p:nvSpPr>
+          <p:cNvPr id="22" name="Text 19"/>
+          <p:cNvSpPr/>
+          <p:nvPr/>
+        </p:nvSpPr>
+        <p:spPr>
+          <a:xfrm>
+            <a:off x="6053328" y="3995928"/>
+            <a:ext cx="2117147" cy="438912"/>
+          </a:xfrm>
+          <a:prstGeom prst="rect">
+            <a:avLst/>
+          </a:prstGeom>
+          <a:noFill/>
+          <a:ln/>
+        </p:spPr>
+        <p:txBody>
+          <a:bodyPr wrap="square" lIns="0" tIns="0" rIns="0" bIns="0" rtlCol="0" anchor="ctr"/>
+          <a:lstStyle/>
+          <a:p>
+            <a:pPr indent="0" marL="0">
+              <a:lnSpc>
+                <a:spcPct val="120000"/>
+              </a:lnSpc>
+              <a:buNone/>
+            </a:pPr>
+            <a:r>
+              <a:rPr lang="en-US" sz="1400" dirty="0">
+                <a:solidFill>
+                  <a:srgbClr val="64748B"/>
+                </a:solidFill>
+                <a:latin typeface="Pretendard" pitchFamily="34" charset="0"/>
+                <a:ea typeface="Pretendard" pitchFamily="34" charset="-122"/>
+                <a:cs typeface="Pretendard" pitchFamily="34" charset="-120"/>
+              </a:rPr>
+              <a:t>편의 인프라</a:t>
+            </a:r>
+            <a:endParaRPr lang="en-US" sz="1400" dirty="0"/>
+          </a:p>
+        </p:txBody>
+      </p:sp>
+      <p:sp>
+        <p:nvSpPr>
+          <p:cNvPr id="23" name="Text 20"/>
+          <p:cNvSpPr/>
+          <p:nvPr/>
+        </p:nvSpPr>
+        <p:spPr>
+          <a:xfrm>
+            <a:off x="8170475" y="3995928"/>
+            <a:ext cx="3454292" cy="438912"/>
+          </a:xfrm>
+          <a:prstGeom prst="rect">
+            <a:avLst/>
+          </a:prstGeom>
+          <a:noFill/>
+          <a:ln/>
+        </p:spPr>
+        <p:txBody>
+          <a:bodyPr wrap="square" lIns="0" tIns="0" rIns="0" bIns="0" rtlCol="0" anchor="ctr"/>
+          <a:lstStyle/>
+          <a:p>
+            <a:pPr indent="0" marL="0">
+              <a:lnSpc>
+                <a:spcPct val="120000"/>
+              </a:lnSpc>
+              <a:buNone/>
+            </a:pPr>
+            <a:r>
+              <a:rPr lang="en-US" sz="1400" b="1" dirty="0">
+                <a:solidFill>
+                  <a:srgbClr val="0F172A"/>
+                </a:solidFill>
+                <a:latin typeface="Pretendard" pitchFamily="34" charset="0"/>
+                <a:ea typeface="Pretendard" pitchFamily="34" charset="-122"/>
+                <a:cs typeface="Pretendard" pitchFamily="34" charset="-120"/>
+              </a:rPr>
+              <a:t>반경 300m 내 주요 임차 업종, 은행, 대형 베이커리 밀집</a:t>
+            </a:r>
+            <a:endParaRPr lang="en-US" sz="1400" dirty="0"/>
+          </a:p>
+        </p:txBody>
+      </p:sp>
+      <p:sp>
+        <p:nvSpPr>
+          <p:cNvPr id="24" name="Text 21"/>
           <p:cNvSpPr/>
           <p:nvPr/>
         </p:nvSpPr>
@@ -4877,7 +4911,7 @@
       </p:sp>
       <p:sp>
         <p:nvSpPr>
-          <p:cNvPr id="9" name="Shape 6"/>
+          <p:cNvPr id="25" name="Shape 22"/>
           <p:cNvSpPr/>
           <p:nvPr/>
         </p:nvSpPr>
@@ -4897,45 +4931,6 @@
             <a:prstDash val="solid"/>
           </a:ln>
         </p:spPr>
-      </p:sp>
-      <p:sp>
-        <p:nvSpPr>
-          <p:cNvPr id="10" name="Text 7"/>
-          <p:cNvSpPr/>
-          <p:nvPr/>
-        </p:nvSpPr>
-        <p:spPr>
-          <a:xfrm>
-            <a:off x="566928" y="1481328"/>
-            <a:ext cx="11057839" cy="9692640"/>
-          </a:xfrm>
-          <a:prstGeom prst="rect">
-            <a:avLst/>
-          </a:prstGeom>
-          <a:noFill/>
-          <a:ln/>
-        </p:spPr>
-        <p:txBody>
-          <a:bodyPr wrap="square" lIns="0" tIns="0" rIns="0" bIns="0" rtlCol="0" anchor="t"/>
-          <a:lstStyle/>
-          <a:p>
-            <a:pPr indent="0" marL="0">
-              <a:buNone/>
-            </a:pPr>
-            <a:r>
-              <a:rPr lang="en-US" sz="1000" dirty="0">
-                <a:solidFill>
-                  <a:srgbClr val="0F172A"/>
-                </a:solidFill>
-                <a:latin typeface="Pretendard" pitchFamily="34" charset="0"/>
-                <a:ea typeface="Pretendard" pitchFamily="34" charset="-122"/>
-                <a:cs typeface="Pretendard" pitchFamily="34" charset="-120"/>
-              </a:rPr>
-              <a:t>{"ok":true,"mocked":true,"extractedFields":{"area_signal":"역삼","asset_type":"오피스빌딩","price_band":"300억","size_signal":"3000평(약 9917.4㎡)"},"extractedFacts":{"region":"역삼","exactAddressCandidate":"역삼동 742-1","assetType":"오피스빌딩","priceText":"300억","sizeText":"3000평(약 9917.4㎡)","currentUse":"오피스","currentUseSignal":"근린생활시설","leaseSignal":"임대중","vacancySignal":"공실없음","tenantNames":["쿠팡","네이버"],"unitRentTexts":["301호: 1500만"],"sellerMotivationText":"자산 효율화","brokerNotes":["초역세권 매물"]},"detectedSensitiveFields":["exact_address","tenant_name"],"ambiguousFields":[],"warnings":[],"areaSignal":"역삼","assetType":"오피스빌딩","priceBand":"300억","sizeSignal":"3000평(약 9917.4㎡)","dealType":"매각","buildingName":"역삼 센트럴타워","exactAddress":"역삼동 742-1","totalFloorArea":9917.3,"buildYear":2015,"currentUseSignal":"근린생활시설","vacancySignal":"공실 없음","fitSummary":"초역세권 근생 빌딩으로 시행/사옥 매입에 최적화","cautionSummary":"주요 임차 업종 만기 조율 필요","hiddenFields":["exact_address","seller_motivation"],"confidence":{"areaSignal":"confirmed","assetType":"confirmed","priceBand":"ai_hypothesis","fitSummary":"ai_hypothesis"},"missingData":["sizeSignal"],"boundaryNote":"본 자료는 실거래 통계 기반 참고치입니다.","buyerType":"법인 사옥형","budgetRange":{"min":50,"max":80,"display":"50억~80억"},"preferredRegions":["강남","성수"],"assetTypes":["꼬마빌딩","사옥용"],"purchasePurpose":"사옥용 매입","mustHave":["초역세권","주차"],"niceToHave":["테라스","루프탑"],"riskTolerance":"medium","financingNote":"자본금 50% 준비","missingQuestions":["구체적인 입주 시기가 언제인가요?","선호하는 수익률이 있나요?"],"privacyNotes":["연락처 비공개"],"fitReasons":["매수자 예산(50-80억)에 부합하는 매물입니다.","요청하신 성수/강남 권역에 해당합니다."],"cautionReasons":["요청한 용도와 달리 명도 협의가 다소 필요합니다."],"recommendedNextAction":"현장 답사 제안","kakaoMessage":"안녕하세요! 요청하신 조건에 부합하는 추천 매물이 있어 안내해 드립니다. 확인해보시고 피드백 부탁드립니다.","title":"강남 역삼역 초역세권 오피스 사옥용 빌딩 매각","shortSummary":"역삼역 도보 5분 거리의 준신축급 대형 오피스빌딩입니다.","dealPoints":["초역세권","사옥 최적"],"cautionPoints":["명도 조율 필요"],"hiddenInfoNotice":["보증금 및 지번은 인가 후 확인 가능"],"gateMessage":"G1 등급 등록이 필요합니다.","kakaoText":"강남 역삼역 오피스 빌딩 매각 안내입니다.","exactUnitCandidate":"101호","floor":"1층","areaSqmText":"150㎡","spaceType":"office","depositText":"5000만","monthlyRentText":"400만","maintenanceFeeText":"50만","availableFromText":"즉시입주","leaseTermMonthsText":"24","incentivesText":"렌트프리 2개월","restrictions":[],"landlordIdentity":"김성수","currentTenant":"스타트업","vacancyReason":"이전 확장","rentNegotiation":"협의 가능","region":"성수동","areaSqm":150,"deposit":5000,"monthlyRent":400,"maintenanceFee":50,"availableFrom":"즉시입주","leaseTermMonths":24,"incentives":{"rentFreeMonths":2,"interiorSupport":"일부 인테리어 지원","freeRentDetail":"렌트프리 2개월 지원"},"shortSummaryLease":"성수역 도보 5분 거리 1층 리테일 상가 매물입니다."}</a:t>
-            </a:r>
-            <a:endParaRPr lang="en-US" sz="1000" dirty="0"/>
-          </a:p>
-        </p:txBody>
       </p:sp>
     </p:spTree>
   </p:cSld>
@@ -5142,7 +5137,7 @@
                 <a:ea typeface="Pretendard" pitchFamily="34" charset="-122"/>
                 <a:cs typeface="Pretendard" pitchFamily="34" charset="-120"/>
               </a:rPr>
-              <a:t>소재지</a:t>
+              <a:t>{"ok"</a:t>
             </a:r>
             <a:endParaRPr lang="en-US" sz="1400" dirty="0"/>
           </a:p>
@@ -5184,7 +5179,7 @@
                 <a:ea typeface="Pretendard" pitchFamily="34" charset="-122"/>
                 <a:cs typeface="Pretendard" pitchFamily="34" charset="-120"/>
               </a:rPr>
-              <a:t>이천권역</a:t>
+              <a:t>true,"mocked":true,"extractedFields":{"area_signal":"역삼","asset_type":"오피스빌딩","price_band":"300억","size_signal":"3000평(약 9917.4㎡)"},"extractedFacts":{"region":"역삼","exactAddressCandidate":"역삼동 742-1","assetType":"오피스빌딩","priceText":"300억","sizeText":"3000평(약 9917.4㎡)","currentUse":"오피스","currentUseSignal":"근린생활시설","leaseSignal":"임대중","vacancySignal":"공실없음","tenantNames":"쿠팡","네이버","unitRentTexts":"301호: 1500만","sellerMotivationText":"자산 효율화","brokerNotes":"초역세권 매물"},"detectedSensitiveFields":"exact_address","tenant_name","ambiguousFields":,"warnings":,"areaSignal":"역삼","assetType":"오피스빌딩","priceBand":"300억","sizeSignal":"3000평(약 9917.4㎡)","dealType":"매각","buildingName":"역삼 센트럴타워","exactAddress":"역삼동 742-1","totalFloorArea":9917.3,"buildYear":2015,"currentUseSignal":"근린생활시설","vacancySignal":"공실 없음","fitSummary":"초역세권 근생 빌딩으로 시행/사옥 매입에 최적화","cautionSummary":"주요 임차 업종 만기 조율 필요","hiddenFields":"exact_address","seller_motivation","confidence":{"areaSignal":"confirmed","assetType":"confirmed","priceBand":"ai_hypothesis","fitSummary":"ai_hypothesis"},"missingData":"sizeSignal","boundaryNote":"본 자료는 실거래 통계 기반 참고치입니다.","buyerType":"법인 사옥형","budgetRange":{"min":50,"max":80,"display":"50억~80억"},"preferredRegions":"강남","성수","assetTypes":"꼬마빌딩","사옥용","purchasePurpose":"사옥용 매입","mustHave":"초역세권","주차","niceToHave":"테라스","루프탑","riskTolerance":"medium","financingNote":"자본금 50% 준비","missingQuestions":"구체적인 입주 시기가 언제인가요?","선호하는 수익률이 있나요?","privacyNotes":"연락처 비공개","fitReasons":"매수자 예산(50-80억)에 부합하는 매물입니다.","요청하신 성수/강남 권역에 해당합니다.","cautionReasons":"요청한 용도와 달리 명도 협의가 다소 필요합니다.","recommendedNextAction":"현장 답사 제안","kakaoMessage":"안녕하세요! 요청하신 조건에 부합하는 추천 매물이 있어 안내해 드립니다. 확인해보시고 피드백 부탁드립니다.","title":"강남 역삼역 초역세권 오피스 사옥용 빌딩 매각","shortSummary":"역삼역 도보 5분 거리의 준신축급 대형 오피스빌딩입니다.","dealPoints":"초역세권","사옥 최적","cautionPoints":"명도 조율 필요","hiddenInfoNotice":"보증금 및 지번은 인가 후 확인 가능","gateMessage":"G1 등급 등록이 필요합니다.","kakaoText":"강남 역삼역 오피스 빌딩 매각 안내입니다.","exactUnitCandidate":"101호","floor":"1층","areaSqmText":"150㎡","spaceType":"office","depositText":"5000만","monthlyRentText":"400만","maintenanceFeeText":"50만","availableFromText":"즉시입주","leaseTermMonthsText":"24","incentivesText":"렌트프리 2개월","restrictions":,"landlordIdentity":"김성수","currentTenant":"스타트업","vacancyReason":"이전 확장","rentNegotiation":"협의 가능","region":"성수동","areaSqm":150,"deposit":5000,"monthlyRent":400,"maintenanceFee":50,"availableFrom":"즉시입주","leaseTermMonths":24,"incentives":{"rentFreeMonths":2,"interiorSupport":"일부 인테리어 지원","freeRentDetail":"렌트프리 2개월 지원"},"shortSummaryLease":"성수역 도보 5분 거리 1층 리테일 상가 매물입니다."}</a:t>
             </a:r>
             <a:endParaRPr lang="en-US" sz="1400" dirty="0"/>
           </a:p>
@@ -5193,862 +5188,6 @@
       <p:sp>
         <p:nvSpPr>
           <p:cNvPr id="8" name="Shape 6"/>
-          <p:cNvSpPr/>
-          <p:nvPr/>
-        </p:nvSpPr>
-        <p:spPr>
-          <a:xfrm>
-            <a:off x="566928" y="2048256"/>
-            <a:ext cx="6858000" cy="0"/>
-          </a:xfrm>
-          <a:prstGeom prst="line">
-            <a:avLst/>
-          </a:prstGeom>
-          <a:noFill/>
-          <a:ln w="3810">
-            <a:solidFill>
-              <a:srgbClr val="CBD5E1"/>
-            </a:solidFill>
-            <a:prstDash val="solid"/>
-          </a:ln>
-        </p:spPr>
-      </p:sp>
-      <p:sp>
-        <p:nvSpPr>
-          <p:cNvPr id="9" name="Text 7"/>
-          <p:cNvSpPr/>
-          <p:nvPr/>
-        </p:nvSpPr>
-        <p:spPr>
-          <a:xfrm>
-            <a:off x="566928" y="2048256"/>
-            <a:ext cx="2606040" cy="402336"/>
-          </a:xfrm>
-          <a:prstGeom prst="rect">
-            <a:avLst/>
-          </a:prstGeom>
-          <a:noFill/>
-          <a:ln/>
-        </p:spPr>
-        <p:txBody>
-          <a:bodyPr wrap="square" lIns="0" tIns="0" rIns="0" bIns="0" rtlCol="0" anchor="ctr"/>
-          <a:lstStyle/>
-          <a:p>
-            <a:pPr indent="0" marL="0">
-              <a:lnSpc>
-                <a:spcPct val="120000"/>
-              </a:lnSpc>
-              <a:buNone/>
-            </a:pPr>
-            <a:r>
-              <a:rPr lang="en-US" sz="1400" dirty="0">
-                <a:solidFill>
-                  <a:srgbClr val="64748B"/>
-                </a:solidFill>
-                <a:latin typeface="Pretendard" pitchFamily="34" charset="0"/>
-                <a:ea typeface="Pretendard" pitchFamily="34" charset="-122"/>
-                <a:cs typeface="Pretendard" pitchFamily="34" charset="-120"/>
-              </a:rPr>
-              <a:t>주요 용도</a:t>
-            </a:r>
-            <a:endParaRPr lang="en-US" sz="1400" dirty="0"/>
-          </a:p>
-        </p:txBody>
-      </p:sp>
-      <p:sp>
-        <p:nvSpPr>
-          <p:cNvPr id="10" name="Text 8"/>
-          <p:cNvSpPr/>
-          <p:nvPr/>
-        </p:nvSpPr>
-        <p:spPr>
-          <a:xfrm>
-            <a:off x="3172968" y="2048256"/>
-            <a:ext cx="4251960" cy="402336"/>
-          </a:xfrm>
-          <a:prstGeom prst="rect">
-            <a:avLst/>
-          </a:prstGeom>
-          <a:noFill/>
-          <a:ln/>
-        </p:spPr>
-        <p:txBody>
-          <a:bodyPr wrap="square" lIns="0" tIns="0" rIns="0" bIns="0" rtlCol="0" anchor="ctr"/>
-          <a:lstStyle/>
-          <a:p>
-            <a:pPr indent="0" marL="0">
-              <a:lnSpc>
-                <a:spcPct val="120000"/>
-              </a:lnSpc>
-              <a:buNone/>
-            </a:pPr>
-            <a:r>
-              <a:rPr lang="en-US" sz="1400" b="1" dirty="0">
-                <a:solidFill>
-                  <a:srgbClr val="0F172A"/>
-                </a:solidFill>
-                <a:latin typeface="Pretendard" pitchFamily="34" charset="0"/>
-                <a:ea typeface="Pretendard" pitchFamily="34" charset="-122"/>
-                <a:cs typeface="Pretendard" pitchFamily="34" charset="-120"/>
-              </a:rPr>
-              <a:t>근린생활시설 / 메디컬</a:t>
-            </a:r>
-            <a:endParaRPr lang="en-US" sz="1400" dirty="0"/>
-          </a:p>
-        </p:txBody>
-      </p:sp>
-      <p:sp>
-        <p:nvSpPr>
-          <p:cNvPr id="11" name="Shape 9"/>
-          <p:cNvSpPr/>
-          <p:nvPr/>
-        </p:nvSpPr>
-        <p:spPr>
-          <a:xfrm>
-            <a:off x="566928" y="2450592"/>
-            <a:ext cx="6858000" cy="0"/>
-          </a:xfrm>
-          <a:prstGeom prst="line">
-            <a:avLst/>
-          </a:prstGeom>
-          <a:noFill/>
-          <a:ln w="3810">
-            <a:solidFill>
-              <a:srgbClr val="CBD5E1"/>
-            </a:solidFill>
-            <a:prstDash val="solid"/>
-          </a:ln>
-        </p:spPr>
-      </p:sp>
-      <p:sp>
-        <p:nvSpPr>
-          <p:cNvPr id="12" name="Text 10"/>
-          <p:cNvSpPr/>
-          <p:nvPr/>
-        </p:nvSpPr>
-        <p:spPr>
-          <a:xfrm>
-            <a:off x="566928" y="2450592"/>
-            <a:ext cx="2606040" cy="402336"/>
-          </a:xfrm>
-          <a:prstGeom prst="rect">
-            <a:avLst/>
-          </a:prstGeom>
-          <a:noFill/>
-          <a:ln/>
-        </p:spPr>
-        <p:txBody>
-          <a:bodyPr wrap="square" lIns="0" tIns="0" rIns="0" bIns="0" rtlCol="0" anchor="ctr"/>
-          <a:lstStyle/>
-          <a:p>
-            <a:pPr indent="0" marL="0">
-              <a:lnSpc>
-                <a:spcPct val="120000"/>
-              </a:lnSpc>
-              <a:buNone/>
-            </a:pPr>
-            <a:r>
-              <a:rPr lang="en-US" sz="1400" dirty="0">
-                <a:solidFill>
-                  <a:srgbClr val="64748B"/>
-                </a:solidFill>
-                <a:latin typeface="Pretendard" pitchFamily="34" charset="0"/>
-                <a:ea typeface="Pretendard" pitchFamily="34" charset="-122"/>
-                <a:cs typeface="Pretendard" pitchFamily="34" charset="-120"/>
-              </a:rPr>
-              <a:t>연면적</a:t>
-            </a:r>
-            <a:endParaRPr lang="en-US" sz="1400" dirty="0"/>
-          </a:p>
-        </p:txBody>
-      </p:sp>
-      <p:sp>
-        <p:nvSpPr>
-          <p:cNvPr id="13" name="Text 11"/>
-          <p:cNvSpPr/>
-          <p:nvPr/>
-        </p:nvSpPr>
-        <p:spPr>
-          <a:xfrm>
-            <a:off x="3172968" y="2450592"/>
-            <a:ext cx="4251960" cy="402336"/>
-          </a:xfrm>
-          <a:prstGeom prst="rect">
-            <a:avLst/>
-          </a:prstGeom>
-          <a:noFill/>
-          <a:ln/>
-        </p:spPr>
-        <p:txBody>
-          <a:bodyPr wrap="square" lIns="0" tIns="0" rIns="0" bIns="0" rtlCol="0" anchor="ctr"/>
-          <a:lstStyle/>
-          <a:p>
-            <a:pPr indent="0" marL="0">
-              <a:lnSpc>
-                <a:spcPct val="120000"/>
-              </a:lnSpc>
-              <a:buNone/>
-            </a:pPr>
-            <a:r>
-              <a:rPr lang="en-US" sz="1400" b="1" dirty="0">
-                <a:solidFill>
-                  <a:srgbClr val="0F172A"/>
-                </a:solidFill>
-                <a:latin typeface="Pretendard" pitchFamily="34" charset="0"/>
-                <a:ea typeface="Pretendard" pitchFamily="34" charset="-122"/>
-                <a:cs typeface="Pretendard" pitchFamily="34" charset="-120"/>
-              </a:rPr>
-              <a:t>5,000㎡ (약 1513평(약 5001.7㎡))</a:t>
-            </a:r>
-            <a:endParaRPr lang="en-US" sz="1400" dirty="0"/>
-          </a:p>
-        </p:txBody>
-      </p:sp>
-      <p:sp>
-        <p:nvSpPr>
-          <p:cNvPr id="14" name="Shape 12"/>
-          <p:cNvSpPr/>
-          <p:nvPr/>
-        </p:nvSpPr>
-        <p:spPr>
-          <a:xfrm>
-            <a:off x="566928" y="2852928"/>
-            <a:ext cx="6858000" cy="0"/>
-          </a:xfrm>
-          <a:prstGeom prst="line">
-            <a:avLst/>
-          </a:prstGeom>
-          <a:noFill/>
-          <a:ln w="3810">
-            <a:solidFill>
-              <a:srgbClr val="CBD5E1"/>
-            </a:solidFill>
-            <a:prstDash val="solid"/>
-          </a:ln>
-        </p:spPr>
-      </p:sp>
-      <p:sp>
-        <p:nvSpPr>
-          <p:cNvPr id="15" name="Text 13"/>
-          <p:cNvSpPr/>
-          <p:nvPr/>
-        </p:nvSpPr>
-        <p:spPr>
-          <a:xfrm>
-            <a:off x="566928" y="2852928"/>
-            <a:ext cx="2606040" cy="402336"/>
-          </a:xfrm>
-          <a:prstGeom prst="rect">
-            <a:avLst/>
-          </a:prstGeom>
-          <a:noFill/>
-          <a:ln/>
-        </p:spPr>
-        <p:txBody>
-          <a:bodyPr wrap="square" lIns="0" tIns="0" rIns="0" bIns="0" rtlCol="0" anchor="ctr"/>
-          <a:lstStyle/>
-          <a:p>
-            <a:pPr indent="0" marL="0">
-              <a:lnSpc>
-                <a:spcPct val="120000"/>
-              </a:lnSpc>
-              <a:buNone/>
-            </a:pPr>
-            <a:r>
-              <a:rPr lang="en-US" sz="1400" dirty="0">
-                <a:solidFill>
-                  <a:srgbClr val="64748B"/>
-                </a:solidFill>
-                <a:latin typeface="Pretendard" pitchFamily="34" charset="0"/>
-                <a:ea typeface="Pretendard" pitchFamily="34" charset="-122"/>
-                <a:cs typeface="Pretendard" pitchFamily="34" charset="-120"/>
-              </a:rPr>
-              <a:t>대지면적</a:t>
-            </a:r>
-            <a:endParaRPr lang="en-US" sz="1400" dirty="0"/>
-          </a:p>
-        </p:txBody>
-      </p:sp>
-      <p:sp>
-        <p:nvSpPr>
-          <p:cNvPr id="16" name="Text 14"/>
-          <p:cNvSpPr/>
-          <p:nvPr/>
-        </p:nvSpPr>
-        <p:spPr>
-          <a:xfrm>
-            <a:off x="3172968" y="2852928"/>
-            <a:ext cx="4251960" cy="402336"/>
-          </a:xfrm>
-          <a:prstGeom prst="rect">
-            <a:avLst/>
-          </a:prstGeom>
-          <a:noFill/>
-          <a:ln/>
-        </p:spPr>
-        <p:txBody>
-          <a:bodyPr wrap="square" lIns="0" tIns="0" rIns="0" bIns="0" rtlCol="0" anchor="ctr"/>
-          <a:lstStyle/>
-          <a:p>
-            <a:pPr indent="0" marL="0">
-              <a:lnSpc>
-                <a:spcPct val="120000"/>
-              </a:lnSpc>
-              <a:buNone/>
-            </a:pPr>
-            <a:r>
-              <a:rPr lang="en-US" sz="1400" b="1" dirty="0">
-                <a:solidFill>
-                  <a:srgbClr val="0F172A"/>
-                </a:solidFill>
-                <a:latin typeface="Pretendard" pitchFamily="34" charset="0"/>
-                <a:ea typeface="Pretendard" pitchFamily="34" charset="-122"/>
-                <a:cs typeface="Pretendard" pitchFamily="34" charset="-120"/>
-              </a:rPr>
-              <a:t>1,000㎡ (약 303평(약 1001.7㎡))</a:t>
-            </a:r>
-            <a:endParaRPr lang="en-US" sz="1400" dirty="0"/>
-          </a:p>
-        </p:txBody>
-      </p:sp>
-      <p:sp>
-        <p:nvSpPr>
-          <p:cNvPr id="17" name="Shape 15"/>
-          <p:cNvSpPr/>
-          <p:nvPr/>
-        </p:nvSpPr>
-        <p:spPr>
-          <a:xfrm>
-            <a:off x="566928" y="3255264"/>
-            <a:ext cx="6858000" cy="0"/>
-          </a:xfrm>
-          <a:prstGeom prst="line">
-            <a:avLst/>
-          </a:prstGeom>
-          <a:noFill/>
-          <a:ln w="3810">
-            <a:solidFill>
-              <a:srgbClr val="CBD5E1"/>
-            </a:solidFill>
-            <a:prstDash val="solid"/>
-          </a:ln>
-        </p:spPr>
-      </p:sp>
-      <p:sp>
-        <p:nvSpPr>
-          <p:cNvPr id="18" name="Text 16"/>
-          <p:cNvSpPr/>
-          <p:nvPr/>
-        </p:nvSpPr>
-        <p:spPr>
-          <a:xfrm>
-            <a:off x="566928" y="3255264"/>
-            <a:ext cx="2606040" cy="402336"/>
-          </a:xfrm>
-          <a:prstGeom prst="rect">
-            <a:avLst/>
-          </a:prstGeom>
-          <a:noFill/>
-          <a:ln/>
-        </p:spPr>
-        <p:txBody>
-          <a:bodyPr wrap="square" lIns="0" tIns="0" rIns="0" bIns="0" rtlCol="0" anchor="ctr"/>
-          <a:lstStyle/>
-          <a:p>
-            <a:pPr indent="0" marL="0">
-              <a:lnSpc>
-                <a:spcPct val="120000"/>
-              </a:lnSpc>
-              <a:buNone/>
-            </a:pPr>
-            <a:r>
-              <a:rPr lang="en-US" sz="1400" dirty="0">
-                <a:solidFill>
-                  <a:srgbClr val="64748B"/>
-                </a:solidFill>
-                <a:latin typeface="Pretendard" pitchFamily="34" charset="0"/>
-                <a:ea typeface="Pretendard" pitchFamily="34" charset="-122"/>
-                <a:cs typeface="Pretendard" pitchFamily="34" charset="-120"/>
-              </a:rPr>
-              <a:t>용도지역</a:t>
-            </a:r>
-            <a:endParaRPr lang="en-US" sz="1400" dirty="0"/>
-          </a:p>
-        </p:txBody>
-      </p:sp>
-      <p:sp>
-        <p:nvSpPr>
-          <p:cNvPr id="19" name="Text 17"/>
-          <p:cNvSpPr/>
-          <p:nvPr/>
-        </p:nvSpPr>
-        <p:spPr>
-          <a:xfrm>
-            <a:off x="3172968" y="3255264"/>
-            <a:ext cx="4251960" cy="402336"/>
-          </a:xfrm>
-          <a:prstGeom prst="rect">
-            <a:avLst/>
-          </a:prstGeom>
-          <a:noFill/>
-          <a:ln/>
-        </p:spPr>
-        <p:txBody>
-          <a:bodyPr wrap="square" lIns="0" tIns="0" rIns="0" bIns="0" rtlCol="0" anchor="ctr"/>
-          <a:lstStyle/>
-          <a:p>
-            <a:pPr indent="0" marL="0">
-              <a:lnSpc>
-                <a:spcPct val="120000"/>
-              </a:lnSpc>
-              <a:buNone/>
-            </a:pPr>
-            <a:r>
-              <a:rPr lang="en-US" sz="1400" b="1" dirty="0">
-                <a:solidFill>
-                  <a:srgbClr val="0F172A"/>
-                </a:solidFill>
-                <a:latin typeface="Pretendard" pitchFamily="34" charset="0"/>
-                <a:ea typeface="Pretendard" pitchFamily="34" charset="-122"/>
-                <a:cs typeface="Pretendard" pitchFamily="34" charset="-120"/>
-              </a:rPr>
-              <a:t>일반상업지역</a:t>
-            </a:r>
-            <a:endParaRPr lang="en-US" sz="1400" dirty="0"/>
-          </a:p>
-        </p:txBody>
-      </p:sp>
-      <p:sp>
-        <p:nvSpPr>
-          <p:cNvPr id="20" name="Shape 18"/>
-          <p:cNvSpPr/>
-          <p:nvPr/>
-        </p:nvSpPr>
-        <p:spPr>
-          <a:xfrm>
-            <a:off x="566928" y="3657600"/>
-            <a:ext cx="6858000" cy="0"/>
-          </a:xfrm>
-          <a:prstGeom prst="line">
-            <a:avLst/>
-          </a:prstGeom>
-          <a:noFill/>
-          <a:ln w="3810">
-            <a:solidFill>
-              <a:srgbClr val="CBD5E1"/>
-            </a:solidFill>
-            <a:prstDash val="solid"/>
-          </a:ln>
-        </p:spPr>
-      </p:sp>
-      <p:sp>
-        <p:nvSpPr>
-          <p:cNvPr id="21" name="Text 19"/>
-          <p:cNvSpPr/>
-          <p:nvPr/>
-        </p:nvSpPr>
-        <p:spPr>
-          <a:xfrm>
-            <a:off x="566928" y="3657600"/>
-            <a:ext cx="2606040" cy="402336"/>
-          </a:xfrm>
-          <a:prstGeom prst="rect">
-            <a:avLst/>
-          </a:prstGeom>
-          <a:noFill/>
-          <a:ln/>
-        </p:spPr>
-        <p:txBody>
-          <a:bodyPr wrap="square" lIns="0" tIns="0" rIns="0" bIns="0" rtlCol="0" anchor="ctr"/>
-          <a:lstStyle/>
-          <a:p>
-            <a:pPr indent="0" marL="0">
-              <a:lnSpc>
-                <a:spcPct val="120000"/>
-              </a:lnSpc>
-              <a:buNone/>
-            </a:pPr>
-            <a:r>
-              <a:rPr lang="en-US" sz="1400" dirty="0">
-                <a:solidFill>
-                  <a:srgbClr val="64748B"/>
-                </a:solidFill>
-                <a:latin typeface="Pretendard" pitchFamily="34" charset="0"/>
-                <a:ea typeface="Pretendard" pitchFamily="34" charset="-122"/>
-                <a:cs typeface="Pretendard" pitchFamily="34" charset="-120"/>
-              </a:rPr>
-              <a:t>승강기</a:t>
-            </a:r>
-            <a:endParaRPr lang="en-US" sz="1400" dirty="0"/>
-          </a:p>
-        </p:txBody>
-      </p:sp>
-      <p:sp>
-        <p:nvSpPr>
-          <p:cNvPr id="22" name="Text 20"/>
-          <p:cNvSpPr/>
-          <p:nvPr/>
-        </p:nvSpPr>
-        <p:spPr>
-          <a:xfrm>
-            <a:off x="3172968" y="3657600"/>
-            <a:ext cx="4251960" cy="402336"/>
-          </a:xfrm>
-          <a:prstGeom prst="rect">
-            <a:avLst/>
-          </a:prstGeom>
-          <a:noFill/>
-          <a:ln/>
-        </p:spPr>
-        <p:txBody>
-          <a:bodyPr wrap="square" lIns="0" tIns="0" rIns="0" bIns="0" rtlCol="0" anchor="ctr"/>
-          <a:lstStyle/>
-          <a:p>
-            <a:pPr indent="0" marL="0">
-              <a:lnSpc>
-                <a:spcPct val="120000"/>
-              </a:lnSpc>
-              <a:buNone/>
-            </a:pPr>
-            <a:r>
-              <a:rPr lang="en-US" sz="1400" b="1" dirty="0">
-                <a:solidFill>
-                  <a:srgbClr val="0F172A"/>
-                </a:solidFill>
-                <a:latin typeface="Pretendard" pitchFamily="34" charset="0"/>
-                <a:ea typeface="Pretendard" pitchFamily="34" charset="-122"/>
-                <a:cs typeface="Pretendard" pitchFamily="34" charset="-120"/>
-              </a:rPr>
-              <a:t>1대 (15인승 침대용)</a:t>
-            </a:r>
-            <a:endParaRPr lang="en-US" sz="1400" dirty="0"/>
-          </a:p>
-        </p:txBody>
-      </p:sp>
-      <p:sp>
-        <p:nvSpPr>
-          <p:cNvPr id="23" name="Shape 21"/>
-          <p:cNvSpPr/>
-          <p:nvPr/>
-        </p:nvSpPr>
-        <p:spPr>
-          <a:xfrm>
-            <a:off x="566928" y="4059936"/>
-            <a:ext cx="6858000" cy="0"/>
-          </a:xfrm>
-          <a:prstGeom prst="line">
-            <a:avLst/>
-          </a:prstGeom>
-          <a:noFill/>
-          <a:ln w="3810">
-            <a:solidFill>
-              <a:srgbClr val="CBD5E1"/>
-            </a:solidFill>
-            <a:prstDash val="solid"/>
-          </a:ln>
-        </p:spPr>
-      </p:sp>
-      <p:sp>
-        <p:nvSpPr>
-          <p:cNvPr id="24" name="Text 22"/>
-          <p:cNvSpPr/>
-          <p:nvPr/>
-        </p:nvSpPr>
-        <p:spPr>
-          <a:xfrm>
-            <a:off x="566928" y="4059936"/>
-            <a:ext cx="2606040" cy="402336"/>
-          </a:xfrm>
-          <a:prstGeom prst="rect">
-            <a:avLst/>
-          </a:prstGeom>
-          <a:noFill/>
-          <a:ln/>
-        </p:spPr>
-        <p:txBody>
-          <a:bodyPr wrap="square" lIns="0" tIns="0" rIns="0" bIns="0" rtlCol="0" anchor="ctr"/>
-          <a:lstStyle/>
-          <a:p>
-            <a:pPr indent="0" marL="0">
-              <a:lnSpc>
-                <a:spcPct val="120000"/>
-              </a:lnSpc>
-              <a:buNone/>
-            </a:pPr>
-            <a:r>
-              <a:rPr lang="en-US" sz="1400" dirty="0">
-                <a:solidFill>
-                  <a:srgbClr val="64748B"/>
-                </a:solidFill>
-                <a:latin typeface="Pretendard" pitchFamily="34" charset="0"/>
-                <a:ea typeface="Pretendard" pitchFamily="34" charset="-122"/>
-                <a:cs typeface="Pretendard" pitchFamily="34" charset="-120"/>
-              </a:rPr>
-              <a:t>주차 대수</a:t>
-            </a:r>
-            <a:endParaRPr lang="en-US" sz="1400" dirty="0"/>
-          </a:p>
-        </p:txBody>
-      </p:sp>
-      <p:sp>
-        <p:nvSpPr>
-          <p:cNvPr id="25" name="Text 23"/>
-          <p:cNvSpPr/>
-          <p:nvPr/>
-        </p:nvSpPr>
-        <p:spPr>
-          <a:xfrm>
-            <a:off x="3172968" y="4059936"/>
-            <a:ext cx="4251960" cy="402336"/>
-          </a:xfrm>
-          <a:prstGeom prst="rect">
-            <a:avLst/>
-          </a:prstGeom>
-          <a:noFill/>
-          <a:ln/>
-        </p:spPr>
-        <p:txBody>
-          <a:bodyPr wrap="square" lIns="0" tIns="0" rIns="0" bIns="0" rtlCol="0" anchor="ctr"/>
-          <a:lstStyle/>
-          <a:p>
-            <a:pPr indent="0" marL="0">
-              <a:lnSpc>
-                <a:spcPct val="120000"/>
-              </a:lnSpc>
-              <a:buNone/>
-            </a:pPr>
-            <a:r>
-              <a:rPr lang="en-US" sz="1400" b="1" dirty="0">
-                <a:solidFill>
-                  <a:srgbClr val="0F172A"/>
-                </a:solidFill>
-                <a:latin typeface="Pretendard" pitchFamily="34" charset="0"/>
-                <a:ea typeface="Pretendard" pitchFamily="34" charset="-122"/>
-                <a:cs typeface="Pretendard" pitchFamily="34" charset="-120"/>
-              </a:rPr>
-              <a:t>18대 (자주식 완비)</a:t>
-            </a:r>
-            <a:endParaRPr lang="en-US" sz="1400" dirty="0"/>
-          </a:p>
-        </p:txBody>
-      </p:sp>
-      <p:sp>
-        <p:nvSpPr>
-          <p:cNvPr id="26" name="Shape 24"/>
-          <p:cNvSpPr/>
-          <p:nvPr/>
-        </p:nvSpPr>
-        <p:spPr>
-          <a:xfrm>
-            <a:off x="566928" y="4462272"/>
-            <a:ext cx="6858000" cy="0"/>
-          </a:xfrm>
-          <a:prstGeom prst="line">
-            <a:avLst/>
-          </a:prstGeom>
-          <a:noFill/>
-          <a:ln w="3810">
-            <a:solidFill>
-              <a:srgbClr val="CBD5E1"/>
-            </a:solidFill>
-            <a:prstDash val="solid"/>
-          </a:ln>
-        </p:spPr>
-      </p:sp>
-      <p:sp>
-        <p:nvSpPr>
-          <p:cNvPr id="27" name="Text 25"/>
-          <p:cNvSpPr/>
-          <p:nvPr/>
-        </p:nvSpPr>
-        <p:spPr>
-          <a:xfrm>
-            <a:off x="566928" y="4462272"/>
-            <a:ext cx="2606040" cy="402336"/>
-          </a:xfrm>
-          <a:prstGeom prst="rect">
-            <a:avLst/>
-          </a:prstGeom>
-          <a:noFill/>
-          <a:ln/>
-        </p:spPr>
-        <p:txBody>
-          <a:bodyPr wrap="square" lIns="0" tIns="0" rIns="0" bIns="0" rtlCol="0" anchor="ctr"/>
-          <a:lstStyle/>
-          <a:p>
-            <a:pPr indent="0" marL="0">
-              <a:lnSpc>
-                <a:spcPct val="120000"/>
-              </a:lnSpc>
-              <a:buNone/>
-            </a:pPr>
-            <a:r>
-              <a:rPr lang="en-US" sz="1400" dirty="0">
-                <a:solidFill>
-                  <a:srgbClr val="64748B"/>
-                </a:solidFill>
-                <a:latin typeface="Pretendard" pitchFamily="34" charset="0"/>
-                <a:ea typeface="Pretendard" pitchFamily="34" charset="-122"/>
-                <a:cs typeface="Pretendard" pitchFamily="34" charset="-120"/>
-              </a:rPr>
-              <a:t>주구조</a:t>
-            </a:r>
-            <a:endParaRPr lang="en-US" sz="1400" dirty="0"/>
-          </a:p>
-        </p:txBody>
-      </p:sp>
-      <p:sp>
-        <p:nvSpPr>
-          <p:cNvPr id="28" name="Text 26"/>
-          <p:cNvSpPr/>
-          <p:nvPr/>
-        </p:nvSpPr>
-        <p:spPr>
-          <a:xfrm>
-            <a:off x="3172968" y="4462272"/>
-            <a:ext cx="4251960" cy="402336"/>
-          </a:xfrm>
-          <a:prstGeom prst="rect">
-            <a:avLst/>
-          </a:prstGeom>
-          <a:noFill/>
-          <a:ln/>
-        </p:spPr>
-        <p:txBody>
-          <a:bodyPr wrap="square" lIns="0" tIns="0" rIns="0" bIns="0" rtlCol="0" anchor="ctr"/>
-          <a:lstStyle/>
-          <a:p>
-            <a:pPr indent="0" marL="0">
-              <a:lnSpc>
-                <a:spcPct val="120000"/>
-              </a:lnSpc>
-              <a:buNone/>
-            </a:pPr>
-            <a:r>
-              <a:rPr lang="en-US" sz="1400" b="1" dirty="0">
-                <a:solidFill>
-                  <a:srgbClr val="0F172A"/>
-                </a:solidFill>
-                <a:latin typeface="Pretendard" pitchFamily="34" charset="0"/>
-                <a:ea typeface="Pretendard" pitchFamily="34" charset="-122"/>
-                <a:cs typeface="Pretendard" pitchFamily="34" charset="-120"/>
-              </a:rPr>
-              <a:t>철근콘크리트구조</a:t>
-            </a:r>
-            <a:endParaRPr lang="en-US" sz="1400" dirty="0"/>
-          </a:p>
-        </p:txBody>
-      </p:sp>
-      <p:sp>
-        <p:nvSpPr>
-          <p:cNvPr id="29" name="Shape 27"/>
-          <p:cNvSpPr/>
-          <p:nvPr/>
-        </p:nvSpPr>
-        <p:spPr>
-          <a:xfrm>
-            <a:off x="566928" y="4864608"/>
-            <a:ext cx="6858000" cy="0"/>
-          </a:xfrm>
-          <a:prstGeom prst="line">
-            <a:avLst/>
-          </a:prstGeom>
-          <a:noFill/>
-          <a:ln w="3810">
-            <a:solidFill>
-              <a:srgbClr val="CBD5E1"/>
-            </a:solidFill>
-            <a:prstDash val="solid"/>
-          </a:ln>
-        </p:spPr>
-      </p:sp>
-      <p:sp>
-        <p:nvSpPr>
-          <p:cNvPr id="30" name="Text 28"/>
-          <p:cNvSpPr/>
-          <p:nvPr/>
-        </p:nvSpPr>
-        <p:spPr>
-          <a:xfrm>
-            <a:off x="566928" y="4864608"/>
-            <a:ext cx="2606040" cy="402336"/>
-          </a:xfrm>
-          <a:prstGeom prst="rect">
-            <a:avLst/>
-          </a:prstGeom>
-          <a:noFill/>
-          <a:ln/>
-        </p:spPr>
-        <p:txBody>
-          <a:bodyPr wrap="square" lIns="0" tIns="0" rIns="0" bIns="0" rtlCol="0" anchor="ctr"/>
-          <a:lstStyle/>
-          <a:p>
-            <a:pPr indent="0" marL="0">
-              <a:lnSpc>
-                <a:spcPct val="120000"/>
-              </a:lnSpc>
-              <a:buNone/>
-            </a:pPr>
-            <a:r>
-              <a:rPr lang="en-US" sz="1400" dirty="0">
-                <a:solidFill>
-                  <a:srgbClr val="64748B"/>
-                </a:solidFill>
-                <a:latin typeface="Pretendard" pitchFamily="34" charset="0"/>
-                <a:ea typeface="Pretendard" pitchFamily="34" charset="-122"/>
-                <a:cs typeface="Pretendard" pitchFamily="34" charset="-120"/>
-              </a:rPr>
-              <a:t>매매 희망가</a:t>
-            </a:r>
-            <a:endParaRPr lang="en-US" sz="1400" dirty="0"/>
-          </a:p>
-        </p:txBody>
-      </p:sp>
-      <p:sp>
-        <p:nvSpPr>
-          <p:cNvPr id="31" name="Text 29"/>
-          <p:cNvSpPr/>
-          <p:nvPr/>
-        </p:nvSpPr>
-        <p:spPr>
-          <a:xfrm>
-            <a:off x="3172968" y="4864608"/>
-            <a:ext cx="4251960" cy="402336"/>
-          </a:xfrm>
-          <a:prstGeom prst="rect">
-            <a:avLst/>
-          </a:prstGeom>
-          <a:noFill/>
-          <a:ln/>
-        </p:spPr>
-        <p:txBody>
-          <a:bodyPr wrap="square" lIns="0" tIns="0" rIns="0" bIns="0" rtlCol="0" anchor="ctr"/>
-          <a:lstStyle/>
-          <a:p>
-            <a:pPr indent="0" marL="0">
-              <a:lnSpc>
-                <a:spcPct val="120000"/>
-              </a:lnSpc>
-              <a:buNone/>
-            </a:pPr>
-            <a:r>
-              <a:rPr lang="en-US" sz="1400" b="1" dirty="0">
-                <a:solidFill>
-                  <a:srgbClr val="0F172A"/>
-                </a:solidFill>
-                <a:latin typeface="Pretendard" pitchFamily="34" charset="0"/>
-                <a:ea typeface="Pretendard" pitchFamily="34" charset="-122"/>
-                <a:cs typeface="Pretendard" pitchFamily="34" charset="-120"/>
-              </a:rPr>
-              <a:t>450억</a:t>
-            </a:r>
-            <a:endParaRPr lang="en-US" sz="1400" dirty="0"/>
-          </a:p>
-        </p:txBody>
-      </p:sp>
-      <p:sp>
-        <p:nvSpPr>
-          <p:cNvPr id="32" name="Shape 30"/>
           <p:cNvSpPr/>
           <p:nvPr/>
         </p:nvSpPr>
@@ -6071,18 +5210,18 @@
       </p:sp>
       <p:sp>
         <p:nvSpPr>
-          <p:cNvPr id="33" name="Shape 31"/>
+          <p:cNvPr id="9" name="Shape 7"/>
           <p:cNvSpPr/>
           <p:nvPr/>
         </p:nvSpPr>
         <p:spPr>
           <a:xfrm>
             <a:off x="7784287" y="1645920"/>
-            <a:ext cx="3840480" cy="1645920"/>
+            <a:ext cx="3840480" cy="2103120"/>
           </a:xfrm>
           <a:prstGeom prst="roundRect">
             <a:avLst>
-              <a:gd name="adj" fmla="val 3333"/>
+              <a:gd name="adj" fmla="val 2609"/>
             </a:avLst>
           </a:prstGeom>
           <a:solidFill>
@@ -6093,14 +5232,14 @@
       </p:sp>
       <p:sp>
         <p:nvSpPr>
-          <p:cNvPr id="34" name="Shape 32"/>
+          <p:cNvPr id="10" name="Shape 8"/>
           <p:cNvSpPr/>
           <p:nvPr/>
         </p:nvSpPr>
         <p:spPr>
           <a:xfrm>
             <a:off x="7784287" y="1700784"/>
-            <a:ext cx="36576" cy="1536192"/>
+            <a:ext cx="36576" cy="1993392"/>
           </a:xfrm>
           <a:prstGeom prst="rect">
             <a:avLst/>
@@ -6113,7 +5252,7 @@
       </p:sp>
       <p:sp>
         <p:nvSpPr>
-          <p:cNvPr id="35" name="Text 33"/>
+          <p:cNvPr id="11" name="Text 9"/>
           <p:cNvSpPr/>
           <p:nvPr/>
         </p:nvSpPr>
@@ -6135,20 +5274,31 @@
             <a:pPr indent="0" marL="0">
               <a:buNone/>
             </a:pPr>
+            <a:r>
+              <a:rPr lang="en-US" sz="1050" b="1" dirty="0">
+                <a:solidFill>
+                  <a:srgbClr val="1D4ED8"/>
+                </a:solidFill>
+                <a:latin typeface="Pretendard" pitchFamily="34" charset="0"/>
+                <a:ea typeface="Pretendard" pitchFamily="34" charset="-122"/>
+                <a:cs typeface="Pretendard" pitchFamily="34" charset="-120"/>
+              </a:rPr>
+              <a:t>토지 및 건물 분석 포인트</a:t>
+            </a:r>
             <a:endParaRPr lang="en-US" sz="1050" dirty="0"/>
           </a:p>
         </p:txBody>
       </p:sp>
       <p:sp>
         <p:nvSpPr>
-          <p:cNvPr id="36" name="Text 34"/>
+          <p:cNvPr id="12" name="Text 10"/>
           <p:cNvSpPr/>
           <p:nvPr/>
         </p:nvSpPr>
         <p:spPr>
           <a:xfrm>
             <a:off x="7967167" y="1975104"/>
-            <a:ext cx="3511296" cy="1243584"/>
+            <a:ext cx="3511296" cy="1700784"/>
           </a:xfrm>
           <a:prstGeom prst="rect">
             <a:avLst/>
@@ -6160,11 +5310,12 @@
           <a:bodyPr wrap="square" lIns="0" tIns="0" rIns="0" bIns="0" rtlCol="0" anchor="t"/>
           <a:lstStyle/>
           <a:p>
-            <a:pPr indent="0" marL="0">
+            <a:pPr marL="342900" indent="-342900">
               <a:lnSpc>
                 <a:spcPct val="120000"/>
               </a:lnSpc>
-              <a:buNone/>
+              <a:buSzPct val="100000"/>
+              <a:buChar char="•"/>
             </a:pPr>
             <a:r>
               <a:rPr lang="en-US" sz="930" dirty="0">
@@ -6175,15 +5326,223 @@
                 <a:ea typeface="Pretendard" pitchFamily="34" charset="-122"/>
                 <a:cs typeface="Pretendard" pitchFamily="34" charset="-120"/>
               </a:rPr>
-              <a:t>본 매물은 이천권역 대로변 입지의 우량 메디컬 테넌트 만실 운영 자산입니다.</a:t>
+              <a:t>서초대로 25m 메인 도로변 우수한 가시성 확보</a:t>
             </a:r>
             <a:endParaRPr lang="en-US" sz="930" dirty="0"/>
           </a:p>
-        </p:txBody>
-      </p:sp>
-      <p:sp>
-        <p:nvSpPr>
-          <p:cNvPr id="37" name="Text 35"/>
+          <a:p>
+            <a:pPr marL="342900" indent="-342900">
+              <a:lnSpc>
+                <a:spcPct val="120000"/>
+              </a:lnSpc>
+              <a:buSzPct val="100000"/>
+              <a:buChar char="•"/>
+            </a:pPr>
+            <a:r>
+              <a:rPr lang="en-US" sz="930" dirty="0">
+                <a:solidFill>
+                  <a:srgbClr val="0F172A"/>
+                </a:solidFill>
+                <a:latin typeface="Pretendard" pitchFamily="34" charset="0"/>
+                <a:ea typeface="Pretendard" pitchFamily="34" charset="-122"/>
+                <a:cs typeface="Pretendard" pitchFamily="34" charset="-120"/>
+              </a:rPr>
+              <a:t>제3종일반주거지역 법정 용적률 완비 자산</a:t>
+            </a:r>
+            <a:endParaRPr lang="en-US" sz="930" dirty="0"/>
+          </a:p>
+          <a:p>
+            <a:pPr marL="342900" indent="-342900">
+              <a:lnSpc>
+                <a:spcPct val="120000"/>
+              </a:lnSpc>
+              <a:buSzPct val="100000"/>
+              <a:buChar char="•"/>
+            </a:pPr>
+            <a:r>
+              <a:rPr lang="en-US" sz="930" dirty="0">
+                <a:solidFill>
+                  <a:srgbClr val="0F172A"/>
+                </a:solidFill>
+                <a:latin typeface="Pretendard" pitchFamily="34" charset="0"/>
+                <a:ea typeface="Pretendard" pitchFamily="34" charset="-122"/>
+                <a:cs typeface="Pretendard" pitchFamily="34" charset="-120"/>
+              </a:rPr>
+              <a:t>침대용 승강기 완비로 병의원 입점 최적화 구조</a:t>
+            </a:r>
+            <a:endParaRPr lang="en-US" sz="930" dirty="0"/>
+          </a:p>
+        </p:txBody>
+      </p:sp>
+      <p:sp>
+        <p:nvSpPr>
+          <p:cNvPr id="13" name="Shape 11"/>
+          <p:cNvSpPr/>
+          <p:nvPr/>
+        </p:nvSpPr>
+        <p:spPr>
+          <a:xfrm>
+            <a:off x="7784287" y="3977640"/>
+            <a:ext cx="3840480" cy="2148840"/>
+          </a:xfrm>
+          <a:prstGeom prst="roundRect">
+            <a:avLst>
+              <a:gd name="adj" fmla="val 2553"/>
+            </a:avLst>
+          </a:prstGeom>
+          <a:solidFill>
+            <a:srgbClr val="DBEAFE"/>
+          </a:solidFill>
+          <a:ln/>
+        </p:spPr>
+      </p:sp>
+      <p:sp>
+        <p:nvSpPr>
+          <p:cNvPr id="14" name="Shape 12"/>
+          <p:cNvSpPr/>
+          <p:nvPr/>
+        </p:nvSpPr>
+        <p:spPr>
+          <a:xfrm>
+            <a:off x="7784287" y="4032504"/>
+            <a:ext cx="36576" cy="2039112"/>
+          </a:xfrm>
+          <a:prstGeom prst="rect">
+            <a:avLst/>
+          </a:prstGeom>
+          <a:solidFill>
+            <a:srgbClr val="1D4ED8"/>
+          </a:solidFill>
+          <a:ln/>
+        </p:spPr>
+      </p:sp>
+      <p:sp>
+        <p:nvSpPr>
+          <p:cNvPr id="15" name="Text 13"/>
+          <p:cNvSpPr/>
+          <p:nvPr/>
+        </p:nvSpPr>
+        <p:spPr>
+          <a:xfrm>
+            <a:off x="7967167" y="4087368"/>
+            <a:ext cx="3511296" cy="201168"/>
+          </a:xfrm>
+          <a:prstGeom prst="rect">
+            <a:avLst/>
+          </a:prstGeom>
+          <a:noFill/>
+          <a:ln/>
+        </p:spPr>
+        <p:txBody>
+          <a:bodyPr wrap="square" lIns="0" tIns="0" rIns="0" bIns="0" rtlCol="0" anchor="ctr"/>
+          <a:lstStyle/>
+          <a:p>
+            <a:pPr indent="0" marL="0">
+              <a:buNone/>
+            </a:pPr>
+            <a:r>
+              <a:rPr lang="en-US" sz="1050" b="1" dirty="0">
+                <a:solidFill>
+                  <a:srgbClr val="1D4ED8"/>
+                </a:solidFill>
+                <a:latin typeface="Pretendard" pitchFamily="34" charset="0"/>
+                <a:ea typeface="Pretendard" pitchFamily="34" charset="-122"/>
+                <a:cs typeface="Pretendard" pitchFamily="34" charset="-120"/>
+              </a:rPr>
+              <a:t>물건 실사 및 관리 상태</a:t>
+            </a:r>
+            <a:endParaRPr lang="en-US" sz="1050" dirty="0"/>
+          </a:p>
+        </p:txBody>
+      </p:sp>
+      <p:sp>
+        <p:nvSpPr>
+          <p:cNvPr id="16" name="Text 14"/>
+          <p:cNvSpPr/>
+          <p:nvPr/>
+        </p:nvSpPr>
+        <p:spPr>
+          <a:xfrm>
+            <a:off x="7967167" y="4306824"/>
+            <a:ext cx="3511296" cy="1746504"/>
+          </a:xfrm>
+          <a:prstGeom prst="rect">
+            <a:avLst/>
+          </a:prstGeom>
+          <a:noFill/>
+          <a:ln/>
+        </p:spPr>
+        <p:txBody>
+          <a:bodyPr wrap="square" lIns="0" tIns="0" rIns="0" bIns="0" rtlCol="0" anchor="t"/>
+          <a:lstStyle/>
+          <a:p>
+            <a:pPr marL="342900" indent="-342900">
+              <a:lnSpc>
+                <a:spcPct val="120000"/>
+              </a:lnSpc>
+              <a:buSzPct val="100000"/>
+              <a:buChar char="•"/>
+            </a:pPr>
+            <a:r>
+              <a:rPr lang="en-US" sz="930" dirty="0">
+                <a:solidFill>
+                  <a:srgbClr val="0F172A"/>
+                </a:solidFill>
+                <a:latin typeface="Pretendard" pitchFamily="34" charset="0"/>
+                <a:ea typeface="Pretendard" pitchFamily="34" charset="-122"/>
+                <a:cs typeface="Pretendard" pitchFamily="34" charset="-120"/>
+              </a:rPr>
+              <a:t>2017년 준공 신축급 상태로 누수·균열 0건</a:t>
+            </a:r>
+            <a:endParaRPr lang="en-US" sz="930" dirty="0"/>
+          </a:p>
+          <a:p>
+            <a:pPr marL="342900" indent="-342900">
+              <a:lnSpc>
+                <a:spcPct val="120000"/>
+              </a:lnSpc>
+              <a:buSzPct val="100000"/>
+              <a:buChar char="•"/>
+            </a:pPr>
+            <a:r>
+              <a:rPr lang="en-US" sz="930" dirty="0">
+                <a:solidFill>
+                  <a:srgbClr val="0F172A"/>
+                </a:solidFill>
+                <a:latin typeface="Pretendard" pitchFamily="34" charset="0"/>
+                <a:ea typeface="Pretendard" pitchFamily="34" charset="-122"/>
+                <a:cs typeface="Pretendard" pitchFamily="34" charset="-120"/>
+              </a:rPr>
+              <a:t>단독 법인 소유로 권리관계 투명</a:t>
+            </a:r>
+            <a:endParaRPr lang="en-US" sz="930" dirty="0"/>
+          </a:p>
+          <a:p>
+            <a:pPr marL="342900" indent="-342900">
+              <a:lnSpc>
+                <a:spcPct val="120000"/>
+              </a:lnSpc>
+              <a:buSzPct val="100000"/>
+              <a:buChar char="•"/>
+            </a:pPr>
+            <a:r>
+              <a:rPr lang="en-US" sz="930" dirty="0">
+                <a:solidFill>
+                  <a:srgbClr val="0F172A"/>
+                </a:solidFill>
+                <a:latin typeface="Pretendard" pitchFamily="34" charset="0"/>
+                <a:ea typeface="Pretendard" pitchFamily="34" charset="-122"/>
+                <a:cs typeface="Pretendard" pitchFamily="34" charset="-120"/>
+              </a:rPr>
+              <a:t>1금융권 담보대출 85억 원 승계 적격</a:t>
+            </a:r>
+            <a:endParaRPr lang="en-US" sz="930" dirty="0"/>
+          </a:p>
+        </p:txBody>
+      </p:sp>
+      <p:sp>
+        <p:nvSpPr>
+          <p:cNvPr id="17" name="Text 15"/>
           <p:cNvSpPr/>
           <p:nvPr/>
         </p:nvSpPr>
@@ -6222,7 +5581,7 @@
       </p:sp>
       <p:sp>
         <p:nvSpPr>
-          <p:cNvPr id="38" name="Shape 36"/>
+          <p:cNvPr id="18" name="Shape 16"/>
           <p:cNvSpPr/>
           <p:nvPr/>
         </p:nvSpPr>

--- a/docs/test/stress/e2e-outputs/operating_case16_icheon_logistics_basic.pptx
+++ b/docs/test/stress/e2e-outputs/operating_case16_icheon_logistics_basic.pptx
@@ -6421,13 +6421,52 @@
       </p:sp>
       <p:sp>
         <p:nvSpPr>
-          <p:cNvPr id="6" name="Shape 4"/>
+          <p:cNvPr id="6" name="Text 4"/>
           <p:cNvSpPr/>
           <p:nvPr/>
         </p:nvSpPr>
         <p:spPr>
           <a:xfrm>
             <a:off x="566928" y="1325880"/>
+            <a:ext cx="11057839" cy="237744"/>
+          </a:xfrm>
+          <a:prstGeom prst="rect">
+            <a:avLst/>
+          </a:prstGeom>
+          <a:noFill/>
+          <a:ln/>
+        </p:spPr>
+        <p:txBody>
+          <a:bodyPr wrap="square" lIns="0" tIns="0" rIns="0" bIns="0" rtlCol="0" anchor="ctr"/>
+          <a:lstStyle/>
+          <a:p>
+            <a:pPr indent="0" marL="0">
+              <a:buNone/>
+            </a:pPr>
+            <a:r>
+              <a:rPr lang="en-US" sz="1100" b="1" dirty="0">
+                <a:solidFill>
+                  <a:srgbClr val="10161F"/>
+                </a:solidFill>
+                <a:latin typeface="Pretendard" pitchFamily="34" charset="0"/>
+                <a:ea typeface="Pretendard" pitchFamily="34" charset="-122"/>
+                <a:cs typeface="Pretendard" pitchFamily="34" charset="-120"/>
+              </a:rPr>
+              <a:t>GOP (Gross Operating Profit) 분석</a:t>
+            </a:r>
+            <a:endParaRPr lang="en-US" sz="1100" dirty="0"/>
+          </a:p>
+        </p:txBody>
+      </p:sp>
+      <p:sp>
+        <p:nvSpPr>
+          <p:cNvPr id="7" name="Shape 5"/>
+          <p:cNvSpPr/>
+          <p:nvPr/>
+        </p:nvSpPr>
+        <p:spPr>
+          <a:xfrm>
+            <a:off x="566928" y="1737360"/>
             <a:ext cx="11057839" cy="0"/>
           </a:xfrm>
           <a:prstGeom prst="line">
@@ -6444,14 +6483,598 @@
       </p:sp>
       <p:sp>
         <p:nvSpPr>
-          <p:cNvPr id="7" name="Shape 5"/>
-          <p:cNvSpPr/>
-          <p:nvPr/>
-        </p:nvSpPr>
-        <p:spPr>
-          <a:xfrm>
-            <a:off x="566928" y="1645920"/>
-            <a:ext cx="11057839" cy="1280160"/>
+          <p:cNvPr id="8" name="Shape 6"/>
+          <p:cNvSpPr/>
+          <p:nvPr/>
+        </p:nvSpPr>
+        <p:spPr>
+          <a:xfrm>
+            <a:off x="566928" y="1965960"/>
+            <a:ext cx="3576218" cy="1188720"/>
+          </a:xfrm>
+          <a:prstGeom prst="roundRect">
+            <a:avLst>
+              <a:gd name="adj" fmla="val 4615"/>
+            </a:avLst>
+          </a:prstGeom>
+          <a:solidFill>
+            <a:srgbClr val="F7FAFC"/>
+          </a:solidFill>
+          <a:ln w="6350">
+            <a:solidFill>
+              <a:srgbClr val="CBD5E0"/>
+            </a:solidFill>
+            <a:prstDash val="solid"/>
+          </a:ln>
+        </p:spPr>
+      </p:sp>
+      <p:sp>
+        <p:nvSpPr>
+          <p:cNvPr id="9" name="Text 7"/>
+          <p:cNvSpPr/>
+          <p:nvPr/>
+        </p:nvSpPr>
+        <p:spPr>
+          <a:xfrm>
+            <a:off x="731520" y="2093976"/>
+            <a:ext cx="3247034" cy="201168"/>
+          </a:xfrm>
+          <a:prstGeom prst="rect">
+            <a:avLst/>
+          </a:prstGeom>
+          <a:noFill/>
+          <a:ln/>
+        </p:spPr>
+        <p:txBody>
+          <a:bodyPr wrap="square" lIns="0" tIns="0" rIns="0" bIns="0" rtlCol="0" anchor="ctr"/>
+          <a:lstStyle/>
+          <a:p>
+            <a:pPr indent="0" marL="0">
+              <a:buNone/>
+            </a:pPr>
+            <a:r>
+              <a:rPr lang="en-US" sz="950" dirty="0">
+                <a:solidFill>
+                  <a:srgbClr val="718096"/>
+                </a:solidFill>
+                <a:latin typeface="Pretendard" pitchFamily="34" charset="0"/>
+                <a:ea typeface="Pretendard" pitchFamily="34" charset="-122"/>
+                <a:cs typeface="Pretendard" pitchFamily="34" charset="-120"/>
+              </a:rPr>
+              <a:t>연간 총 매출</a:t>
+            </a:r>
+            <a:endParaRPr lang="en-US" sz="950" dirty="0"/>
+          </a:p>
+        </p:txBody>
+      </p:sp>
+      <p:sp>
+        <p:nvSpPr>
+          <p:cNvPr id="10" name="Text 8"/>
+          <p:cNvSpPr/>
+          <p:nvPr/>
+        </p:nvSpPr>
+        <p:spPr>
+          <a:xfrm>
+            <a:off x="731520" y="2276856"/>
+            <a:ext cx="3247034" cy="402336"/>
+          </a:xfrm>
+          <a:prstGeom prst="rect">
+            <a:avLst/>
+          </a:prstGeom>
+          <a:noFill/>
+          <a:ln/>
+        </p:spPr>
+        <p:txBody>
+          <a:bodyPr wrap="square" lIns="0" tIns="0" rIns="0" bIns="0" rtlCol="0" anchor="ctr">
+            <a:normAutofit/>
+          </a:bodyPr>
+          <a:lstStyle/>
+          <a:p>
+            <a:pPr indent="0" marL="0">
+              <a:buNone/>
+            </a:pPr>
+            <a:r>
+              <a:rPr lang="en-US" sz="2200" b="1" dirty="0">
+                <a:solidFill>
+                  <a:srgbClr val="10161F"/>
+                </a:solidFill>
+                <a:latin typeface="Pretendard" pitchFamily="34" charset="0"/>
+                <a:ea typeface="Pretendard" pitchFamily="34" charset="-122"/>
+                <a:cs typeface="Pretendard" pitchFamily="34" charset="-120"/>
+              </a:rPr>
+              <a:t>영업 매출 수지</a:t>
+            </a:r>
+            <a:endParaRPr lang="en-US" sz="2200" dirty="0"/>
+          </a:p>
+        </p:txBody>
+      </p:sp>
+      <p:sp>
+        <p:nvSpPr>
+          <p:cNvPr id="11" name="Text 9"/>
+          <p:cNvSpPr/>
+          <p:nvPr/>
+        </p:nvSpPr>
+        <p:spPr>
+          <a:xfrm>
+            <a:off x="731520" y="2642616"/>
+            <a:ext cx="3247034" cy="164592"/>
+          </a:xfrm>
+          <a:prstGeom prst="rect">
+            <a:avLst/>
+          </a:prstGeom>
+          <a:noFill/>
+          <a:ln/>
+        </p:spPr>
+        <p:txBody>
+          <a:bodyPr wrap="square" lIns="0" tIns="0" rIns="0" bIns="0" rtlCol="0" anchor="ctr"/>
+          <a:lstStyle/>
+          <a:p>
+            <a:pPr indent="0" marL="0">
+              <a:buNone/>
+            </a:pPr>
+            <a:r>
+              <a:rPr lang="en-US" sz="880" dirty="0">
+                <a:solidFill>
+                  <a:srgbClr val="718096"/>
+                </a:solidFill>
+                <a:latin typeface="Pretendard" pitchFamily="34" charset="0"/>
+                <a:ea typeface="Pretendard" pitchFamily="34" charset="-122"/>
+                <a:cs typeface="Pretendard" pitchFamily="34" charset="-120"/>
+              </a:rPr>
+              <a:t>AI/실적 추정</a:t>
+            </a:r>
+            <a:endParaRPr lang="en-US" sz="880" dirty="0"/>
+          </a:p>
+        </p:txBody>
+      </p:sp>
+      <p:sp>
+        <p:nvSpPr>
+          <p:cNvPr id="12" name="Shape 10"/>
+          <p:cNvSpPr/>
+          <p:nvPr/>
+        </p:nvSpPr>
+        <p:spPr>
+          <a:xfrm>
+            <a:off x="4307738" y="1965960"/>
+            <a:ext cx="3576218" cy="1188720"/>
+          </a:xfrm>
+          <a:prstGeom prst="roundRect">
+            <a:avLst>
+              <a:gd name="adj" fmla="val 4615"/>
+            </a:avLst>
+          </a:prstGeom>
+          <a:solidFill>
+            <a:srgbClr val="F7FAFC"/>
+          </a:solidFill>
+          <a:ln w="6350">
+            <a:solidFill>
+              <a:srgbClr val="CBD5E0"/>
+            </a:solidFill>
+            <a:prstDash val="solid"/>
+          </a:ln>
+        </p:spPr>
+      </p:sp>
+      <p:sp>
+        <p:nvSpPr>
+          <p:cNvPr id="13" name="Text 11"/>
+          <p:cNvSpPr/>
+          <p:nvPr/>
+        </p:nvSpPr>
+        <p:spPr>
+          <a:xfrm>
+            <a:off x="4472330" y="2093976"/>
+            <a:ext cx="3247034" cy="201168"/>
+          </a:xfrm>
+          <a:prstGeom prst="rect">
+            <a:avLst/>
+          </a:prstGeom>
+          <a:noFill/>
+          <a:ln/>
+        </p:spPr>
+        <p:txBody>
+          <a:bodyPr wrap="square" lIns="0" tIns="0" rIns="0" bIns="0" rtlCol="0" anchor="ctr"/>
+          <a:lstStyle/>
+          <a:p>
+            <a:pPr indent="0" marL="0">
+              <a:buNone/>
+            </a:pPr>
+            <a:r>
+              <a:rPr lang="en-US" sz="950" dirty="0">
+                <a:solidFill>
+                  <a:srgbClr val="718096"/>
+                </a:solidFill>
+                <a:latin typeface="Pretendard" pitchFamily="34" charset="0"/>
+                <a:ea typeface="Pretendard" pitchFamily="34" charset="-122"/>
+                <a:cs typeface="Pretendard" pitchFamily="34" charset="-120"/>
+              </a:rPr>
+              <a:t>운영비 (OPEX)</a:t>
+            </a:r>
+            <a:endParaRPr lang="en-US" sz="950" dirty="0"/>
+          </a:p>
+        </p:txBody>
+      </p:sp>
+      <p:sp>
+        <p:nvSpPr>
+          <p:cNvPr id="14" name="Text 12"/>
+          <p:cNvSpPr/>
+          <p:nvPr/>
+        </p:nvSpPr>
+        <p:spPr>
+          <a:xfrm>
+            <a:off x="4472330" y="2276856"/>
+            <a:ext cx="3247034" cy="402336"/>
+          </a:xfrm>
+          <a:prstGeom prst="rect">
+            <a:avLst/>
+          </a:prstGeom>
+          <a:noFill/>
+          <a:ln/>
+        </p:spPr>
+        <p:txBody>
+          <a:bodyPr wrap="square" lIns="0" tIns="0" rIns="0" bIns="0" rtlCol="0" anchor="ctr">
+            <a:normAutofit/>
+          </a:bodyPr>
+          <a:lstStyle/>
+          <a:p>
+            <a:pPr indent="0" marL="0">
+              <a:buNone/>
+            </a:pPr>
+            <a:r>
+              <a:rPr lang="en-US" sz="2200" b="1" dirty="0">
+                <a:solidFill>
+                  <a:srgbClr val="10161F"/>
+                </a:solidFill>
+                <a:latin typeface="Pretendard" pitchFamily="34" charset="0"/>
+                <a:ea typeface="Pretendard" pitchFamily="34" charset="-122"/>
+                <a:cs typeface="Pretendard" pitchFamily="34" charset="-120"/>
+              </a:rPr>
+              <a:t>인건비, 재료비, 유틸리티</a:t>
+            </a:r>
+            <a:endParaRPr lang="en-US" sz="2200" dirty="0"/>
+          </a:p>
+        </p:txBody>
+      </p:sp>
+      <p:sp>
+        <p:nvSpPr>
+          <p:cNvPr id="15" name="Text 13"/>
+          <p:cNvSpPr/>
+          <p:nvPr/>
+        </p:nvSpPr>
+        <p:spPr>
+          <a:xfrm>
+            <a:off x="4472330" y="2642616"/>
+            <a:ext cx="3247034" cy="164592"/>
+          </a:xfrm>
+          <a:prstGeom prst="rect">
+            <a:avLst/>
+          </a:prstGeom>
+          <a:noFill/>
+          <a:ln/>
+        </p:spPr>
+        <p:txBody>
+          <a:bodyPr wrap="square" lIns="0" tIns="0" rIns="0" bIns="0" rtlCol="0" anchor="ctr"/>
+          <a:lstStyle/>
+          <a:p>
+            <a:pPr indent="0" marL="0">
+              <a:buNone/>
+            </a:pPr>
+            <a:r>
+              <a:rPr lang="en-US" sz="880" dirty="0">
+                <a:solidFill>
+                  <a:srgbClr val="718096"/>
+                </a:solidFill>
+                <a:latin typeface="Pretendard" pitchFamily="34" charset="0"/>
+                <a:ea typeface="Pretendard" pitchFamily="34" charset="-122"/>
+                <a:cs typeface="Pretendard" pitchFamily="34" charset="-120"/>
+              </a:rPr>
+              <a:t>마진율 차감</a:t>
+            </a:r>
+            <a:endParaRPr lang="en-US" sz="880" dirty="0"/>
+          </a:p>
+        </p:txBody>
+      </p:sp>
+      <p:sp>
+        <p:nvSpPr>
+          <p:cNvPr id="16" name="Shape 14"/>
+          <p:cNvSpPr/>
+          <p:nvPr/>
+        </p:nvSpPr>
+        <p:spPr>
+          <a:xfrm>
+            <a:off x="8048549" y="1965960"/>
+            <a:ext cx="3576218" cy="1188720"/>
+          </a:xfrm>
+          <a:prstGeom prst="roundRect">
+            <a:avLst>
+              <a:gd name="adj" fmla="val 4615"/>
+            </a:avLst>
+          </a:prstGeom>
+          <a:solidFill>
+            <a:srgbClr val="F7FAFC"/>
+          </a:solidFill>
+          <a:ln w="6350">
+            <a:solidFill>
+              <a:srgbClr val="CBD5E0"/>
+            </a:solidFill>
+            <a:prstDash val="solid"/>
+          </a:ln>
+        </p:spPr>
+      </p:sp>
+      <p:sp>
+        <p:nvSpPr>
+          <p:cNvPr id="17" name="Text 15"/>
+          <p:cNvSpPr/>
+          <p:nvPr/>
+        </p:nvSpPr>
+        <p:spPr>
+          <a:xfrm>
+            <a:off x="8213141" y="2093976"/>
+            <a:ext cx="3247034" cy="201168"/>
+          </a:xfrm>
+          <a:prstGeom prst="rect">
+            <a:avLst/>
+          </a:prstGeom>
+          <a:noFill/>
+          <a:ln/>
+        </p:spPr>
+        <p:txBody>
+          <a:bodyPr wrap="square" lIns="0" tIns="0" rIns="0" bIns="0" rtlCol="0" anchor="ctr"/>
+          <a:lstStyle/>
+          <a:p>
+            <a:pPr indent="0" marL="0">
+              <a:buNone/>
+            </a:pPr>
+            <a:r>
+              <a:rPr lang="en-US" sz="950" dirty="0">
+                <a:solidFill>
+                  <a:srgbClr val="718096"/>
+                </a:solidFill>
+                <a:latin typeface="Pretendard" pitchFamily="34" charset="0"/>
+                <a:ea typeface="Pretendard" pitchFamily="34" charset="-122"/>
+                <a:cs typeface="Pretendard" pitchFamily="34" charset="-120"/>
+              </a:rPr>
+              <a:t>연간 GOP (영업이익)</a:t>
+            </a:r>
+            <a:endParaRPr lang="en-US" sz="950" dirty="0"/>
+          </a:p>
+        </p:txBody>
+      </p:sp>
+      <p:sp>
+        <p:nvSpPr>
+          <p:cNvPr id="18" name="Text 16"/>
+          <p:cNvSpPr/>
+          <p:nvPr/>
+        </p:nvSpPr>
+        <p:spPr>
+          <a:xfrm>
+            <a:off x="8213141" y="2276856"/>
+            <a:ext cx="3247034" cy="402336"/>
+          </a:xfrm>
+          <a:prstGeom prst="rect">
+            <a:avLst/>
+          </a:prstGeom>
+          <a:noFill/>
+          <a:ln/>
+        </p:spPr>
+        <p:txBody>
+          <a:bodyPr wrap="square" lIns="0" tIns="0" rIns="0" bIns="0" rtlCol="0" anchor="ctr">
+            <a:normAutofit/>
+          </a:bodyPr>
+          <a:lstStyle/>
+          <a:p>
+            <a:pPr indent="0" marL="0">
+              <a:buNone/>
+            </a:pPr>
+            <a:r>
+              <a:rPr lang="en-US" sz="2200" b="1" dirty="0">
+                <a:solidFill>
+                  <a:srgbClr val="10161F"/>
+                </a:solidFill>
+                <a:latin typeface="Pretendard" pitchFamily="34" charset="0"/>
+                <a:ea typeface="Pretendard" pitchFamily="34" charset="-122"/>
+                <a:cs typeface="Pretendard" pitchFamily="34" charset="-120"/>
+              </a:rPr>
+              <a:t>영업 매출 × GOP 마진율</a:t>
+            </a:r>
+            <a:endParaRPr lang="en-US" sz="2200" dirty="0"/>
+          </a:p>
+        </p:txBody>
+      </p:sp>
+      <p:sp>
+        <p:nvSpPr>
+          <p:cNvPr id="19" name="Text 17"/>
+          <p:cNvSpPr/>
+          <p:nvPr/>
+        </p:nvSpPr>
+        <p:spPr>
+          <a:xfrm>
+            <a:off x="8213141" y="2642616"/>
+            <a:ext cx="3247034" cy="164592"/>
+          </a:xfrm>
+          <a:prstGeom prst="rect">
+            <a:avLst/>
+          </a:prstGeom>
+          <a:noFill/>
+          <a:ln/>
+        </p:spPr>
+        <p:txBody>
+          <a:bodyPr wrap="square" lIns="0" tIns="0" rIns="0" bIns="0" rtlCol="0" anchor="ctr"/>
+          <a:lstStyle/>
+          <a:p>
+            <a:pPr indent="0" marL="0">
+              <a:buNone/>
+            </a:pPr>
+            <a:r>
+              <a:rPr lang="en-US" sz="880" dirty="0">
+                <a:solidFill>
+                  <a:srgbClr val="718096"/>
+                </a:solidFill>
+                <a:latin typeface="Pretendard" pitchFamily="34" charset="0"/>
+                <a:ea typeface="Pretendard" pitchFamily="34" charset="-122"/>
+                <a:cs typeface="Pretendard" pitchFamily="34" charset="-120"/>
+              </a:rPr>
+              <a:t>실질 운영 수익</a:t>
+            </a:r>
+            <a:endParaRPr lang="en-US" sz="880" dirty="0"/>
+          </a:p>
+        </p:txBody>
+      </p:sp>
+      <p:sp>
+        <p:nvSpPr>
+          <p:cNvPr id="20" name="Shape 18"/>
+          <p:cNvSpPr/>
+          <p:nvPr/>
+        </p:nvSpPr>
+        <p:spPr>
+          <a:xfrm>
+            <a:off x="566928" y="3319272"/>
+            <a:ext cx="3576218" cy="1051560"/>
+          </a:xfrm>
+          <a:prstGeom prst="roundRect">
+            <a:avLst>
+              <a:gd name="adj" fmla="val 5217"/>
+            </a:avLst>
+          </a:prstGeom>
+          <a:solidFill>
+            <a:srgbClr val="F7FAFC"/>
+          </a:solidFill>
+          <a:ln w="6350">
+            <a:solidFill>
+              <a:srgbClr val="CBD5E0"/>
+            </a:solidFill>
+            <a:prstDash val="solid"/>
+          </a:ln>
+        </p:spPr>
+      </p:sp>
+      <p:sp>
+        <p:nvSpPr>
+          <p:cNvPr id="21" name="Text 19"/>
+          <p:cNvSpPr/>
+          <p:nvPr/>
+        </p:nvSpPr>
+        <p:spPr>
+          <a:xfrm>
+            <a:off x="731520" y="3447288"/>
+            <a:ext cx="3247034" cy="201168"/>
+          </a:xfrm>
+          <a:prstGeom prst="rect">
+            <a:avLst/>
+          </a:prstGeom>
+          <a:noFill/>
+          <a:ln/>
+        </p:spPr>
+        <p:txBody>
+          <a:bodyPr wrap="square" lIns="0" tIns="0" rIns="0" bIns="0" rtlCol="0" anchor="ctr"/>
+          <a:lstStyle/>
+          <a:p>
+            <a:pPr indent="0" marL="0">
+              <a:buNone/>
+            </a:pPr>
+            <a:r>
+              <a:rPr lang="en-US" sz="950" dirty="0">
+                <a:solidFill>
+                  <a:srgbClr val="718096"/>
+                </a:solidFill>
+                <a:latin typeface="Pretendard" pitchFamily="34" charset="0"/>
+                <a:ea typeface="Pretendard" pitchFamily="34" charset="-122"/>
+                <a:cs typeface="Pretendard" pitchFamily="34" charset="-120"/>
+              </a:rPr>
+              <a:t>GOP Cap Rate</a:t>
+            </a:r>
+            <a:endParaRPr lang="en-US" sz="950" dirty="0"/>
+          </a:p>
+        </p:txBody>
+      </p:sp>
+      <p:sp>
+        <p:nvSpPr>
+          <p:cNvPr id="22" name="Text 20"/>
+          <p:cNvSpPr/>
+          <p:nvPr/>
+        </p:nvSpPr>
+        <p:spPr>
+          <a:xfrm>
+            <a:off x="731520" y="3630168"/>
+            <a:ext cx="3247034" cy="402336"/>
+          </a:xfrm>
+          <a:prstGeom prst="rect">
+            <a:avLst/>
+          </a:prstGeom>
+          <a:noFill/>
+          <a:ln/>
+        </p:spPr>
+        <p:txBody>
+          <a:bodyPr wrap="square" lIns="0" tIns="0" rIns="0" bIns="0" rtlCol="0" anchor="ctr">
+            <a:normAutofit/>
+          </a:bodyPr>
+          <a:lstStyle/>
+          <a:p>
+            <a:pPr indent="0" marL="0">
+              <a:buNone/>
+            </a:pPr>
+            <a:r>
+              <a:rPr lang="en-US" sz="1800" b="1" dirty="0">
+                <a:solidFill>
+                  <a:srgbClr val="10161F"/>
+                </a:solidFill>
+                <a:latin typeface="Pretendard" pitchFamily="34" charset="0"/>
+                <a:ea typeface="Pretendard" pitchFamily="34" charset="-122"/>
+                <a:cs typeface="Pretendard" pitchFamily="34" charset="-120"/>
+              </a:rPr>
+              <a:t>매매가 대비 GOP 비율</a:t>
+            </a:r>
+            <a:endParaRPr lang="en-US" sz="1800" dirty="0"/>
+          </a:p>
+        </p:txBody>
+      </p:sp>
+      <p:sp>
+        <p:nvSpPr>
+          <p:cNvPr id="23" name="Text 21"/>
+          <p:cNvSpPr/>
+          <p:nvPr/>
+        </p:nvSpPr>
+        <p:spPr>
+          <a:xfrm>
+            <a:off x="731520" y="3995928"/>
+            <a:ext cx="3247034" cy="164592"/>
+          </a:xfrm>
+          <a:prstGeom prst="rect">
+            <a:avLst/>
+          </a:prstGeom>
+          <a:noFill/>
+          <a:ln/>
+        </p:spPr>
+        <p:txBody>
+          <a:bodyPr wrap="square" lIns="0" tIns="0" rIns="0" bIns="0" rtlCol="0" anchor="ctr"/>
+          <a:lstStyle/>
+          <a:p>
+            <a:pPr indent="0" marL="0">
+              <a:buNone/>
+            </a:pPr>
+            <a:r>
+              <a:rPr lang="en-US" sz="880" dirty="0">
+                <a:solidFill>
+                  <a:srgbClr val="718096"/>
+                </a:solidFill>
+                <a:latin typeface="Pretendard" pitchFamily="34" charset="0"/>
+                <a:ea typeface="Pretendard" pitchFamily="34" charset="-122"/>
+                <a:cs typeface="Pretendard" pitchFamily="34" charset="-120"/>
+              </a:rPr>
+              <a:t>자산 가치 기준</a:t>
+            </a:r>
+            <a:endParaRPr lang="en-US" sz="880" dirty="0"/>
+          </a:p>
+        </p:txBody>
+      </p:sp>
+      <p:sp>
+        <p:nvSpPr>
+          <p:cNvPr id="24" name="Shape 22"/>
+          <p:cNvSpPr/>
+          <p:nvPr/>
+        </p:nvSpPr>
+        <p:spPr>
+          <a:xfrm>
+            <a:off x="566928" y="4626864"/>
+            <a:ext cx="5437480" cy="1280160"/>
           </a:xfrm>
           <a:prstGeom prst="roundRect">
             <a:avLst>
@@ -6466,13 +7089,13 @@
       </p:sp>
       <p:sp>
         <p:nvSpPr>
-          <p:cNvPr id="8" name="Shape 6"/>
-          <p:cNvSpPr/>
-          <p:nvPr/>
-        </p:nvSpPr>
-        <p:spPr>
-          <a:xfrm>
-            <a:off x="566928" y="1700784"/>
+          <p:cNvPr id="25" name="Shape 23"/>
+          <p:cNvSpPr/>
+          <p:nvPr/>
+        </p:nvSpPr>
+        <p:spPr>
+          <a:xfrm>
+            <a:off x="566928" y="4681728"/>
             <a:ext cx="36576" cy="1170432"/>
           </a:xfrm>
           <a:prstGeom prst="rect">
@@ -6486,14 +7109,14 @@
       </p:sp>
       <p:sp>
         <p:nvSpPr>
-          <p:cNvPr id="9" name="Text 7"/>
-          <p:cNvSpPr/>
-          <p:nvPr/>
-        </p:nvSpPr>
-        <p:spPr>
-          <a:xfrm>
-            <a:off x="749808" y="1755648"/>
-            <a:ext cx="10728655" cy="201168"/>
+          <p:cNvPr id="26" name="Text 24"/>
+          <p:cNvSpPr/>
+          <p:nvPr/>
+        </p:nvSpPr>
+        <p:spPr>
+          <a:xfrm>
+            <a:off x="749808" y="4736592"/>
+            <a:ext cx="5108296" cy="201168"/>
           </a:xfrm>
           <a:prstGeom prst="rect">
             <a:avLst/>
@@ -6525,14 +7148,14 @@
       </p:sp>
       <p:sp>
         <p:nvSpPr>
-          <p:cNvPr id="10" name="Text 8"/>
-          <p:cNvSpPr/>
-          <p:nvPr/>
-        </p:nvSpPr>
-        <p:spPr>
-          <a:xfrm>
-            <a:off x="749808" y="1975104"/>
-            <a:ext cx="10728655" cy="877824"/>
+          <p:cNvPr id="27" name="Text 25"/>
+          <p:cNvSpPr/>
+          <p:nvPr/>
+        </p:nvSpPr>
+        <p:spPr>
+          <a:xfrm>
+            <a:off x="749808" y="4956048"/>
+            <a:ext cx="5108296" cy="877824"/>
           </a:xfrm>
           <a:prstGeom prst="rect">
             <a:avLst/>
@@ -6559,7 +7182,7 @@
                 <a:ea typeface="Pretendard" pitchFamily="34" charset="-122"/>
                 <a:cs typeface="Pretendard" pitchFamily="34" charset="-120"/>
               </a:rPr>
-              <a:t>{"ok":true,"mocked":true,"extractedFields":{"area_signal":"역삼","asset_type":"오피스빌딩","price_band":"300억","size_signal":"3000평(약 9917.4㎡)"},"extractedFacts":{"region":"역삼","exactAddressCandidate":"역삼동 742-1","assetType":"오피스빌딩","priceText":"300억","sizeText":"3000평(약 9917.4㎡)","currentUse":"오피스","currentUseSignal":"근린생활시설","leaseSignal":"임대중","vacancySignal":"공실없음","tenantNames":["쿠팡","네이버"],"unitRentTexts":["301호: 1500만"],"sellerMotivationText":"자산 효율화","brokerNotes":["초역세권 매물"]},"detectedSensitiveFields":["exact_address","tenant_name"],"ambiguousFields":[],"warnings":[],"areaSignal":"역삼","assetType":"오피스빌딩","priceBand":"300억","sizeSignal":"3000평(약 9917.4㎡)","dealType":"매각","buildingName":"역삼 센트럴타워","exactAddress":"역삼동 742-1","totalFloorArea":9917.3,"buildYear":2015,"currentUseSignal":"근린생활시설","vacancySignal":"공실 없음","fitSummary":"초역세권 근생 빌딩으로 시행/사옥 매입에 최적화","cautionSummary":"주요 임차 업종 만기 조율 필요","hiddenFields":["exact_address","seller_motivation"],"confidence":{"areaSignal":"confirmed","assetType":"confirmed","priceBand":"ai_hypothesis","fitSummary":"ai_hypothesis"},"missingData":["sizeSignal"],"boundaryNote":"본 자료는 실거래 통계 기반 참고치입니다.","buyerType":"법인 사옥형","budgetRange":{"min":50,"max":80,"display":"50억~80억"},"preferredRegions":["강남","성수"],"assetTypes":["꼬마빌딩","사옥용"],"purchasePurpose":"사옥용 매입","mustHave":["초역세권","주차"],"niceToHave":["테라스","루프탑"],"riskTolerance":"medium","financingNote":"자본금 50% 준비","missingQuestions":["구체적인 입주 시기가 언제인가요?","선호하는 수익률이 있나요?"],"privacyNotes":["연락처 비공개"],"fitReasons":["매수자 예산(50-80억)에 부합하는 매물입니다.","요청하신 성수/강남 권역에 해당합니다."],"cautionReasons":["요청한 용도와 달리 명도 협의가 다소 필요합니다."],"recommendedNextAction":"현장 답사 제안","kakaoMessage":"안녕하세요! 요청하신 조건에 부합하는 추천 매물이 있어 안내해 드립니다. 확인해보시고 피드백 부탁드립니다.","title":"강남 역삼역 초역세권 오피스 사옥용 빌딩 매각","shortSummary":"역삼역 도보 5분 거리의 준신축급 대형 오피스빌딩입니다.","dealPoints":["초역세권","사옥 최적"],"cautionPoints":["명도 조율 필요"],"hiddenInfoNotice":["보증금 및 지번은 인가 후 확인 가능"],"gateMessage":"G1 등급 등록이 필요합니다.","kakaoText":"강남 역삼역 오피스 빌딩 매각 안내입니다.","exactUnitCandidate":"101호","floor":"1층","areaSqmText":"150㎡","spaceType":"office","depositText":"5000만","monthlyRentText":"400만","maintenanceFeeText":"50만","availableFromText":"즉시입주","leaseTermMonthsText":"24","incentivesText":"렌트프리 2개월","restrictions":[],"landlordIdentity":"김성수","currentTenant":"스타트업","vacancyReason":"이전 확장","rentNegotiation":"협의 가능","region":"성수동","areaSqm":150,"deposit":5000,"monthlyRent":400,"maintenanceFee":50,"availableFrom":"즉시입주","leaseTermMonths":24,"incentives":{"rentFreeMonths":2,"interiorSupport":"일부 인테리어 지원","freeRentDetail":"렌트프리 2개월 지원"},"shortSummaryLease":"성수역 도보 5분 거리 1층 리테일 상가 매물입니다."}</a:t>
+              <a:t>임대차 수익 구조가 아닌 영업 총매출에서 직접 운영비를 차감한 GOP 기반의 실질 수익성을 분석합니다. [주의] 객단가(ADR) 및 가동률(OCC) 관리를 통한 지속적 GOP 마진 개선이 핵심입니다.</a:t>
             </a:r>
             <a:endParaRPr lang="en-US" sz="930" dirty="0"/>
           </a:p>
@@ -6567,14 +7190,56 @@
       </p:sp>
       <p:sp>
         <p:nvSpPr>
-          <p:cNvPr id="11" name="Text 9"/>
-          <p:cNvSpPr/>
-          <p:nvPr/>
-        </p:nvSpPr>
-        <p:spPr>
-          <a:xfrm>
-            <a:off x="566928" y="6382512"/>
-            <a:ext cx="7315200" cy="219456"/>
+          <p:cNvPr id="28" name="Shape 26"/>
+          <p:cNvSpPr/>
+          <p:nvPr/>
+        </p:nvSpPr>
+        <p:spPr>
+          <a:xfrm>
+            <a:off x="6187288" y="4626864"/>
+            <a:ext cx="5437480" cy="1280160"/>
+          </a:xfrm>
+          <a:prstGeom prst="roundRect">
+            <a:avLst>
+              <a:gd name="adj" fmla="val 4286"/>
+            </a:avLst>
+          </a:prstGeom>
+          <a:solidFill>
+            <a:srgbClr val="BEE3F8"/>
+          </a:solidFill>
+          <a:ln/>
+        </p:spPr>
+      </p:sp>
+      <p:sp>
+        <p:nvSpPr>
+          <p:cNvPr id="29" name="Shape 27"/>
+          <p:cNvSpPr/>
+          <p:nvPr/>
+        </p:nvSpPr>
+        <p:spPr>
+          <a:xfrm>
+            <a:off x="6187288" y="4681728"/>
+            <a:ext cx="36576" cy="1170432"/>
+          </a:xfrm>
+          <a:prstGeom prst="rect">
+            <a:avLst/>
+          </a:prstGeom>
+          <a:solidFill>
+            <a:srgbClr val="2B6CB0"/>
+          </a:solidFill>
+          <a:ln/>
+        </p:spPr>
+      </p:sp>
+      <p:sp>
+        <p:nvSpPr>
+          <p:cNvPr id="30" name="Text 28"/>
+          <p:cNvSpPr/>
+          <p:nvPr/>
+        </p:nvSpPr>
+        <p:spPr>
+          <a:xfrm>
+            <a:off x="6370168" y="4736592"/>
+            <a:ext cx="5108296" cy="201168"/>
           </a:xfrm>
           <a:prstGeom prst="rect">
             <a:avLst/>
@@ -6589,15 +7254,85 @@
             <a:pPr indent="0" marL="0">
               <a:buNone/>
             </a:pPr>
-            <a:r>
-              <a:rPr lang="en-US" sz="800" dirty="0">
-                <a:solidFill>
-                  <a:srgbClr val="718096"/>
+            <a:endParaRPr lang="en-US" sz="1050" dirty="0"/>
+          </a:p>
+        </p:txBody>
+      </p:sp>
+      <p:sp>
+        <p:nvSpPr>
+          <p:cNvPr id="31" name="Text 29"/>
+          <p:cNvSpPr/>
+          <p:nvPr/>
+        </p:nvSpPr>
+        <p:spPr>
+          <a:xfrm>
+            <a:off x="6370168" y="4956048"/>
+            <a:ext cx="5108296" cy="877824"/>
+          </a:xfrm>
+          <a:prstGeom prst="rect">
+            <a:avLst/>
+          </a:prstGeom>
+          <a:noFill/>
+          <a:ln/>
+        </p:spPr>
+        <p:txBody>
+          <a:bodyPr wrap="square" lIns="0" tIns="0" rIns="0" bIns="0" rtlCol="0" anchor="t"/>
+          <a:lstStyle/>
+          <a:p>
+            <a:pPr indent="0" marL="0">
+              <a:lnSpc>
+                <a:spcPct val="120000"/>
+              </a:lnSpc>
+              <a:buNone/>
+            </a:pPr>
+            <a:r>
+              <a:rPr lang="en-US" sz="930" dirty="0">
+                <a:solidFill>
+                  <a:srgbClr val="10161F"/>
                 </a:solidFill>
                 <a:latin typeface="Pretendard" pitchFamily="34" charset="0"/>
                 <a:ea typeface="Pretendard" pitchFamily="34" charset="-122"/>
                 <a:cs typeface="Pretendard" pitchFamily="34" charset="-120"/>
               </a:rPr>
+              <a:t>[주의] 객단가(ADR) 및 가동률(OCC) 관리를 통한 지속적 GOP 마진 개선이 핵심입니다.</a:t>
+            </a:r>
+            <a:endParaRPr lang="en-US" sz="930" dirty="0"/>
+          </a:p>
+        </p:txBody>
+      </p:sp>
+      <p:sp>
+        <p:nvSpPr>
+          <p:cNvPr id="32" name="Text 30"/>
+          <p:cNvSpPr/>
+          <p:nvPr/>
+        </p:nvSpPr>
+        <p:spPr>
+          <a:xfrm>
+            <a:off x="566928" y="6382512"/>
+            <a:ext cx="7315200" cy="219456"/>
+          </a:xfrm>
+          <a:prstGeom prst="rect">
+            <a:avLst/>
+          </a:prstGeom>
+          <a:noFill/>
+          <a:ln/>
+        </p:spPr>
+        <p:txBody>
+          <a:bodyPr wrap="square" lIns="0" tIns="0" rIns="0" bIns="0" rtlCol="0" anchor="ctr"/>
+          <a:lstStyle/>
+          <a:p>
+            <a:pPr indent="0" marL="0">
+              <a:buNone/>
+            </a:pPr>
+            <a:r>
+              <a:rPr lang="en-US" sz="800" dirty="0">
+                <a:solidFill>
+                  <a:srgbClr val="718096"/>
+                </a:solidFill>
+                <a:latin typeface="Pretendard" pitchFamily="34" charset="0"/>
+                <a:ea typeface="Pretendard" pitchFamily="34" charset="-122"/>
+                <a:cs typeface="Pretendard" pitchFamily="34" charset="-120"/>
+              </a:rPr>
               <a:t>크리딜   |   </a:t>
             </a:r>
             <a:endParaRPr lang="en-US" sz="800" dirty="0"/>
@@ -6606,7 +7341,7 @@
       </p:sp>
       <p:sp>
         <p:nvSpPr>
-          <p:cNvPr id="12" name="Text 10"/>
+          <p:cNvPr id="33" name="Text 31"/>
           <p:cNvSpPr/>
           <p:nvPr/>
         </p:nvSpPr>
@@ -6821,11 +7556,11 @@
         <p:spPr>
           <a:xfrm>
             <a:off x="566928" y="1417320"/>
-            <a:ext cx="11057839" cy="3611880"/>
+            <a:ext cx="1992112" cy="3611880"/>
           </a:xfrm>
           <a:prstGeom prst="roundRect">
             <a:avLst>
-              <a:gd name="adj" fmla="val 1519"/>
+              <a:gd name="adj" fmla="val 2754"/>
             </a:avLst>
           </a:prstGeom>
           <a:solidFill>
@@ -6848,7 +7583,7 @@
         <p:spPr>
           <a:xfrm>
             <a:off x="566928" y="1417320"/>
-            <a:ext cx="11057839" cy="45720"/>
+            <a:ext cx="1992112" cy="45720"/>
           </a:xfrm>
           <a:prstGeom prst="rect">
             <a:avLst/>
@@ -6868,7 +7603,7 @@
         <p:spPr>
           <a:xfrm>
             <a:off x="795528" y="1618488"/>
-            <a:ext cx="10600639" cy="292608"/>
+            <a:ext cx="1534912" cy="292608"/>
           </a:xfrm>
           <a:prstGeom prst="rect">
             <a:avLst/>
@@ -6884,7 +7619,7 @@
               <a:buNone/>
             </a:pPr>
             <a:r>
-              <a:rPr lang="en-US" sz="1350" b="1" dirty="0">
+              <a:rPr lang="en-US" sz="1150" b="1" dirty="0">
                 <a:solidFill>
                   <a:srgbClr val="977024"/>
                 </a:solidFill>
@@ -6892,9 +7627,9 @@
                 <a:ea typeface="Pretendard" pitchFamily="34" charset="-122"/>
                 <a:cs typeface="Pretendard" pitchFamily="34" charset="-120"/>
               </a:rPr>
-              <a:t>용도 리스크</a:t>
-            </a:r>
-            <a:endParaRPr lang="en-US" sz="1350" dirty="0"/>
+              <a:t>건물 물리적 상태</a:t>
+            </a:r>
+            <a:endParaRPr lang="en-US" sz="1150" dirty="0"/>
           </a:p>
         </p:txBody>
       </p:sp>
@@ -6907,7 +7642,7 @@
         <p:spPr>
           <a:xfrm>
             <a:off x="795528" y="1911096"/>
-            <a:ext cx="10600639" cy="402336"/>
+            <a:ext cx="1534912" cy="402336"/>
           </a:xfrm>
           <a:prstGeom prst="rect">
             <a:avLst/>
@@ -6925,7 +7660,7 @@
               <a:buNone/>
             </a:pPr>
             <a:r>
-              <a:rPr lang="en-US" sz="1350" b="1" dirty="0">
+              <a:rPr lang="en-US" sz="1150" b="1" dirty="0">
                 <a:solidFill>
                   <a:srgbClr val="10161F"/>
                 </a:solidFill>
@@ -6933,9 +7668,9 @@
                 <a:ea typeface="Pretendard" pitchFamily="34" charset="-122"/>
                 <a:cs typeface="Pretendard" pitchFamily="34" charset="-120"/>
               </a:rPr>
-              <a:t>—</a:t>
-            </a:r>
-            <a:endParaRPr lang="en-US" sz="1350" dirty="0"/>
+              <a:t>2017년 준공 신축급 상태 (누수/균열 결함 없음)</a:t>
+            </a:r>
+            <a:endParaRPr lang="en-US" sz="1150" dirty="0"/>
           </a:p>
         </p:txBody>
       </p:sp>
@@ -6948,7 +7683,7 @@
         <p:spPr>
           <a:xfrm>
             <a:off x="795528" y="2377440"/>
-            <a:ext cx="10600639" cy="2560320"/>
+            <a:ext cx="1534912" cy="2560320"/>
           </a:xfrm>
           <a:prstGeom prst="rect">
             <a:avLst/>
@@ -6970,7 +7705,7 @@
               <a:buChar char="•"/>
             </a:pPr>
             <a:r>
-              <a:rPr lang="en-US" sz="1200" dirty="0">
+              <a:rPr lang="en-US" sz="1050" dirty="0">
                 <a:solidFill>
                   <a:srgbClr val="10161F"/>
                 </a:solidFill>
@@ -6978,22 +7713,69 @@
                 <a:ea typeface="Pretendard" pitchFamily="34" charset="-122"/>
                 <a:cs typeface="Pretendard" pitchFamily="34" charset="-120"/>
               </a:rPr>
-              <a:t>{"ok":true,"mocked":true,"extractedFields":{"area_signal":"역삼","asset_type":"오피스빌딩","price_band":"300억","size_signal":"3000평(약 9917.4㎡)"},"extractedFacts":{"region":"역삼","exactAddressCandidate":"역삼동 7</a:t>
-            </a:r>
-            <a:endParaRPr lang="en-US" sz="1200" dirty="0"/>
-          </a:p>
-        </p:txBody>
-      </p:sp>
-      <p:sp>
-        <p:nvSpPr>
-          <p:cNvPr id="11" name="Text 9"/>
-          <p:cNvSpPr/>
-          <p:nvPr/>
-        </p:nvSpPr>
-        <p:spPr>
-          <a:xfrm>
-            <a:off x="566928" y="6382512"/>
-            <a:ext cx="7315200" cy="219456"/>
+              <a:t>준공 10년 미만으로 대규모 수선비용 발생 가능성 낮음</a:t>
+            </a:r>
+            <a:endParaRPr lang="en-US" sz="1050" dirty="0"/>
+          </a:p>
+        </p:txBody>
+      </p:sp>
+      <p:sp>
+        <p:nvSpPr>
+          <p:cNvPr id="11" name="Shape 9"/>
+          <p:cNvSpPr/>
+          <p:nvPr/>
+        </p:nvSpPr>
+        <p:spPr>
+          <a:xfrm>
+            <a:off x="2833360" y="1417320"/>
+            <a:ext cx="1992112" cy="3611880"/>
+          </a:xfrm>
+          <a:prstGeom prst="roundRect">
+            <a:avLst>
+              <a:gd name="adj" fmla="val 2754"/>
+            </a:avLst>
+          </a:prstGeom>
+          <a:solidFill>
+            <a:srgbClr val="F7FAFC"/>
+          </a:solidFill>
+          <a:ln w="6350">
+            <a:solidFill>
+              <a:srgbClr val="CBD5E0"/>
+            </a:solidFill>
+            <a:prstDash val="solid"/>
+          </a:ln>
+        </p:spPr>
+      </p:sp>
+      <p:sp>
+        <p:nvSpPr>
+          <p:cNvPr id="12" name="Shape 10"/>
+          <p:cNvSpPr/>
+          <p:nvPr/>
+        </p:nvSpPr>
+        <p:spPr>
+          <a:xfrm>
+            <a:off x="2833360" y="1417320"/>
+            <a:ext cx="1992112" cy="45720"/>
+          </a:xfrm>
+          <a:prstGeom prst="rect">
+            <a:avLst/>
+          </a:prstGeom>
+          <a:solidFill>
+            <a:srgbClr val="B98A2E"/>
+          </a:solidFill>
+          <a:ln/>
+        </p:spPr>
+      </p:sp>
+      <p:sp>
+        <p:nvSpPr>
+          <p:cNvPr id="13" name="Text 11"/>
+          <p:cNvSpPr/>
+          <p:nvPr/>
+        </p:nvSpPr>
+        <p:spPr>
+          <a:xfrm>
+            <a:off x="3061960" y="1618488"/>
+            <a:ext cx="1534912" cy="292608"/>
           </a:xfrm>
           <a:prstGeom prst="rect">
             <a:avLst/>
@@ -7009,14 +7791,721 @@
               <a:buNone/>
             </a:pPr>
             <a:r>
-              <a:rPr lang="en-US" sz="800" dirty="0">
-                <a:solidFill>
-                  <a:srgbClr val="718096"/>
+              <a:rPr lang="en-US" sz="1150" b="1" dirty="0">
+                <a:solidFill>
+                  <a:srgbClr val="977024"/>
                 </a:solidFill>
                 <a:latin typeface="Pretendard" pitchFamily="34" charset="0"/>
                 <a:ea typeface="Pretendard" pitchFamily="34" charset="-122"/>
                 <a:cs typeface="Pretendard" pitchFamily="34" charset="-120"/>
               </a:rPr>
+              <a:t>승강기 및 설비</a:t>
+            </a:r>
+            <a:endParaRPr lang="en-US" sz="1150" dirty="0"/>
+          </a:p>
+        </p:txBody>
+      </p:sp>
+      <p:sp>
+        <p:nvSpPr>
+          <p:cNvPr id="14" name="Text 12"/>
+          <p:cNvSpPr/>
+          <p:nvPr/>
+        </p:nvSpPr>
+        <p:spPr>
+          <a:xfrm>
+            <a:off x="3061960" y="1911096"/>
+            <a:ext cx="1534912" cy="402336"/>
+          </a:xfrm>
+          <a:prstGeom prst="rect">
+            <a:avLst/>
+          </a:prstGeom>
+          <a:noFill/>
+          <a:ln/>
+        </p:spPr>
+        <p:txBody>
+          <a:bodyPr wrap="square" lIns="0" tIns="0" rIns="0" bIns="0" rtlCol="0" anchor="ctr">
+            <a:normAutofit/>
+          </a:bodyPr>
+          <a:lstStyle/>
+          <a:p>
+            <a:pPr indent="0" marL="0">
+              <a:buNone/>
+            </a:pPr>
+            <a:r>
+              <a:rPr lang="en-US" sz="1150" b="1" dirty="0">
+                <a:solidFill>
+                  <a:srgbClr val="10161F"/>
+                </a:solidFill>
+                <a:latin typeface="Pretendard" pitchFamily="34" charset="0"/>
+                <a:ea typeface="Pretendard" pitchFamily="34" charset="-122"/>
+                <a:cs typeface="Pretendard" pitchFamily="34" charset="-120"/>
+              </a:rPr>
+              <a:t>15인승 침대용 승강기 및 냉난방 설비 양호</a:t>
+            </a:r>
+            <a:endParaRPr lang="en-US" sz="1150" dirty="0"/>
+          </a:p>
+        </p:txBody>
+      </p:sp>
+      <p:sp>
+        <p:nvSpPr>
+          <p:cNvPr id="15" name="Text 13"/>
+          <p:cNvSpPr/>
+          <p:nvPr/>
+        </p:nvSpPr>
+        <p:spPr>
+          <a:xfrm>
+            <a:off x="3061960" y="2377440"/>
+            <a:ext cx="1534912" cy="2560320"/>
+          </a:xfrm>
+          <a:prstGeom prst="rect">
+            <a:avLst/>
+          </a:prstGeom>
+          <a:noFill/>
+          <a:ln/>
+        </p:spPr>
+        <p:txBody>
+          <a:bodyPr wrap="square" lIns="0" tIns="0" rIns="0" bIns="0" rtlCol="0" anchor="t">
+            <a:normAutofit/>
+          </a:bodyPr>
+          <a:lstStyle/>
+          <a:p>
+            <a:pPr marL="342900" indent="-342900">
+              <a:lnSpc>
+                <a:spcPct val="125000"/>
+              </a:lnSpc>
+              <a:buSzPct val="100000"/>
+              <a:buChar char="•"/>
+            </a:pPr>
+            <a:r>
+              <a:rPr lang="en-US" sz="1050" dirty="0">
+                <a:solidFill>
+                  <a:srgbClr val="10161F"/>
+                </a:solidFill>
+                <a:latin typeface="Pretendard" pitchFamily="34" charset="0"/>
+                <a:ea typeface="Pretendard" pitchFamily="34" charset="-122"/>
+                <a:cs typeface="Pretendard" pitchFamily="34" charset="-120"/>
+              </a:rPr>
+              <a:t>주기적 정기 점검 계약 유지로 관리 리스크 최소화</a:t>
+            </a:r>
+            <a:endParaRPr lang="en-US" sz="1050" dirty="0"/>
+          </a:p>
+        </p:txBody>
+      </p:sp>
+      <p:sp>
+        <p:nvSpPr>
+          <p:cNvPr id="16" name="Shape 14"/>
+          <p:cNvSpPr/>
+          <p:nvPr/>
+        </p:nvSpPr>
+        <p:spPr>
+          <a:xfrm>
+            <a:off x="5099792" y="1417320"/>
+            <a:ext cx="1992112" cy="3611880"/>
+          </a:xfrm>
+          <a:prstGeom prst="roundRect">
+            <a:avLst>
+              <a:gd name="adj" fmla="val 2754"/>
+            </a:avLst>
+          </a:prstGeom>
+          <a:solidFill>
+            <a:srgbClr val="F7FAFC"/>
+          </a:solidFill>
+          <a:ln w="6350">
+            <a:solidFill>
+              <a:srgbClr val="CBD5E0"/>
+            </a:solidFill>
+            <a:prstDash val="solid"/>
+          </a:ln>
+        </p:spPr>
+      </p:sp>
+      <p:sp>
+        <p:nvSpPr>
+          <p:cNvPr id="17" name="Shape 15"/>
+          <p:cNvSpPr/>
+          <p:nvPr/>
+        </p:nvSpPr>
+        <p:spPr>
+          <a:xfrm>
+            <a:off x="5099792" y="1417320"/>
+            <a:ext cx="1992112" cy="45720"/>
+          </a:xfrm>
+          <a:prstGeom prst="rect">
+            <a:avLst/>
+          </a:prstGeom>
+          <a:solidFill>
+            <a:srgbClr val="B98A2E"/>
+          </a:solidFill>
+          <a:ln/>
+        </p:spPr>
+      </p:sp>
+      <p:sp>
+        <p:nvSpPr>
+          <p:cNvPr id="18" name="Text 16"/>
+          <p:cNvSpPr/>
+          <p:nvPr/>
+        </p:nvSpPr>
+        <p:spPr>
+          <a:xfrm>
+            <a:off x="5328392" y="1618488"/>
+            <a:ext cx="1534912" cy="292608"/>
+          </a:xfrm>
+          <a:prstGeom prst="rect">
+            <a:avLst/>
+          </a:prstGeom>
+          <a:noFill/>
+          <a:ln/>
+        </p:spPr>
+        <p:txBody>
+          <a:bodyPr wrap="square" lIns="0" tIns="0" rIns="0" bIns="0" rtlCol="0" anchor="ctr"/>
+          <a:lstStyle/>
+          <a:p>
+            <a:pPr indent="0" marL="0">
+              <a:buNone/>
+            </a:pPr>
+            <a:r>
+              <a:rPr lang="en-US" sz="1150" b="1" dirty="0">
+                <a:solidFill>
+                  <a:srgbClr val="977024"/>
+                </a:solidFill>
+                <a:latin typeface="Pretendard" pitchFamily="34" charset="0"/>
+                <a:ea typeface="Pretendard" pitchFamily="34" charset="-122"/>
+                <a:cs typeface="Pretendard" pitchFamily="34" charset="-120"/>
+              </a:rPr>
+              <a:t>임차인 이탈 위험</a:t>
+            </a:r>
+            <a:endParaRPr lang="en-US" sz="1150" dirty="0"/>
+          </a:p>
+        </p:txBody>
+      </p:sp>
+      <p:sp>
+        <p:nvSpPr>
+          <p:cNvPr id="19" name="Text 17"/>
+          <p:cNvSpPr/>
+          <p:nvPr/>
+        </p:nvSpPr>
+        <p:spPr>
+          <a:xfrm>
+            <a:off x="5328392" y="1911096"/>
+            <a:ext cx="1534912" cy="402336"/>
+          </a:xfrm>
+          <a:prstGeom prst="rect">
+            <a:avLst/>
+          </a:prstGeom>
+          <a:noFill/>
+          <a:ln/>
+        </p:spPr>
+        <p:txBody>
+          <a:bodyPr wrap="square" lIns="0" tIns="0" rIns="0" bIns="0" rtlCol="0" anchor="ctr">
+            <a:normAutofit/>
+          </a:bodyPr>
+          <a:lstStyle/>
+          <a:p>
+            <a:pPr indent="0" marL="0">
+              <a:buNone/>
+            </a:pPr>
+            <a:r>
+              <a:rPr lang="en-US" sz="1150" b="1" dirty="0">
+                <a:solidFill>
+                  <a:srgbClr val="10161F"/>
+                </a:solidFill>
+                <a:latin typeface="Pretendard" pitchFamily="34" charset="0"/>
+                <a:ea typeface="Pretendard" pitchFamily="34" charset="-122"/>
+                <a:cs typeface="Pretendard" pitchFamily="34" charset="-120"/>
+              </a:rPr>
+              <a:t>병의원/약국 인테리어 투자비(호실당 5억↑) 존속</a:t>
+            </a:r>
+            <a:endParaRPr lang="en-US" sz="1150" dirty="0"/>
+          </a:p>
+        </p:txBody>
+      </p:sp>
+      <p:sp>
+        <p:nvSpPr>
+          <p:cNvPr id="20" name="Text 18"/>
+          <p:cNvSpPr/>
+          <p:nvPr/>
+        </p:nvSpPr>
+        <p:spPr>
+          <a:xfrm>
+            <a:off x="5328392" y="2377440"/>
+            <a:ext cx="1534912" cy="2560320"/>
+          </a:xfrm>
+          <a:prstGeom prst="rect">
+            <a:avLst/>
+          </a:prstGeom>
+          <a:noFill/>
+          <a:ln/>
+        </p:spPr>
+        <p:txBody>
+          <a:bodyPr wrap="square" lIns="0" tIns="0" rIns="0" bIns="0" rtlCol="0" anchor="t">
+            <a:normAutofit/>
+          </a:bodyPr>
+          <a:lstStyle/>
+          <a:p>
+            <a:pPr marL="342900" indent="-342900">
+              <a:lnSpc>
+                <a:spcPct val="125000"/>
+              </a:lnSpc>
+              <a:buSzPct val="100000"/>
+              <a:buChar char="•"/>
+            </a:pPr>
+            <a:r>
+              <a:rPr lang="en-US" sz="1050" dirty="0">
+                <a:solidFill>
+                  <a:srgbClr val="10161F"/>
+                </a:solidFill>
+                <a:latin typeface="Pretendard" pitchFamily="34" charset="0"/>
+                <a:ea typeface="Pretendard" pitchFamily="34" charset="-122"/>
+                <a:cs typeface="Pretendard" pitchFamily="34" charset="-120"/>
+              </a:rPr>
+              <a:t>WALE 3.5년 확보 및 만기 6개월 전 재계약 협상 개시</a:t>
+            </a:r>
+            <a:endParaRPr lang="en-US" sz="1050" dirty="0"/>
+          </a:p>
+        </p:txBody>
+      </p:sp>
+      <p:sp>
+        <p:nvSpPr>
+          <p:cNvPr id="21" name="Shape 19"/>
+          <p:cNvSpPr/>
+          <p:nvPr/>
+        </p:nvSpPr>
+        <p:spPr>
+          <a:xfrm>
+            <a:off x="7366224" y="1417320"/>
+            <a:ext cx="1992112" cy="3611880"/>
+          </a:xfrm>
+          <a:prstGeom prst="roundRect">
+            <a:avLst>
+              <a:gd name="adj" fmla="val 2754"/>
+            </a:avLst>
+          </a:prstGeom>
+          <a:solidFill>
+            <a:srgbClr val="F7FAFC"/>
+          </a:solidFill>
+          <a:ln w="6350">
+            <a:solidFill>
+              <a:srgbClr val="CBD5E0"/>
+            </a:solidFill>
+            <a:prstDash val="solid"/>
+          </a:ln>
+        </p:spPr>
+      </p:sp>
+      <p:sp>
+        <p:nvSpPr>
+          <p:cNvPr id="22" name="Shape 20"/>
+          <p:cNvSpPr/>
+          <p:nvPr/>
+        </p:nvSpPr>
+        <p:spPr>
+          <a:xfrm>
+            <a:off x="7366224" y="1417320"/>
+            <a:ext cx="1992112" cy="45720"/>
+          </a:xfrm>
+          <a:prstGeom prst="rect">
+            <a:avLst/>
+          </a:prstGeom>
+          <a:solidFill>
+            <a:srgbClr val="B98A2E"/>
+          </a:solidFill>
+          <a:ln/>
+        </p:spPr>
+      </p:sp>
+      <p:sp>
+        <p:nvSpPr>
+          <p:cNvPr id="23" name="Text 21"/>
+          <p:cNvSpPr/>
+          <p:nvPr/>
+        </p:nvSpPr>
+        <p:spPr>
+          <a:xfrm>
+            <a:off x="7594824" y="1618488"/>
+            <a:ext cx="1534912" cy="292608"/>
+          </a:xfrm>
+          <a:prstGeom prst="rect">
+            <a:avLst/>
+          </a:prstGeom>
+          <a:noFill/>
+          <a:ln/>
+        </p:spPr>
+        <p:txBody>
+          <a:bodyPr wrap="square" lIns="0" tIns="0" rIns="0" bIns="0" rtlCol="0" anchor="ctr"/>
+          <a:lstStyle/>
+          <a:p>
+            <a:pPr indent="0" marL="0">
+              <a:buNone/>
+            </a:pPr>
+            <a:r>
+              <a:rPr lang="en-US" sz="1150" b="1" dirty="0">
+                <a:solidFill>
+                  <a:srgbClr val="977024"/>
+                </a:solidFill>
+                <a:latin typeface="Pretendard" pitchFamily="34" charset="0"/>
+                <a:ea typeface="Pretendard" pitchFamily="34" charset="-122"/>
+                <a:cs typeface="Pretendard" pitchFamily="34" charset="-120"/>
+              </a:rPr>
+              <a:t>명도 및 분쟁</a:t>
+            </a:r>
+            <a:endParaRPr lang="en-US" sz="1150" dirty="0"/>
+          </a:p>
+        </p:txBody>
+      </p:sp>
+      <p:sp>
+        <p:nvSpPr>
+          <p:cNvPr id="24" name="Text 22"/>
+          <p:cNvSpPr/>
+          <p:nvPr/>
+        </p:nvSpPr>
+        <p:spPr>
+          <a:xfrm>
+            <a:off x="7594824" y="1911096"/>
+            <a:ext cx="1534912" cy="402336"/>
+          </a:xfrm>
+          <a:prstGeom prst="rect">
+            <a:avLst/>
+          </a:prstGeom>
+          <a:noFill/>
+          <a:ln/>
+        </p:spPr>
+        <p:txBody>
+          <a:bodyPr wrap="square" lIns="0" tIns="0" rIns="0" bIns="0" rtlCol="0" anchor="ctr">
+            <a:normAutofit/>
+          </a:bodyPr>
+          <a:lstStyle/>
+          <a:p>
+            <a:pPr indent="0" marL="0">
+              <a:buNone/>
+            </a:pPr>
+            <a:r>
+              <a:rPr lang="en-US" sz="1150" b="1" dirty="0">
+                <a:solidFill>
+                  <a:srgbClr val="10161F"/>
+                </a:solidFill>
+                <a:latin typeface="Pretendard" pitchFamily="34" charset="0"/>
+                <a:ea typeface="Pretendard" pitchFamily="34" charset="-122"/>
+                <a:cs typeface="Pretendard" pitchFamily="34" charset="-120"/>
+              </a:rPr>
+              <a:t>전층 정상 임대차 상태 (임대료 연체 0건)</a:t>
+            </a:r>
+            <a:endParaRPr lang="en-US" sz="1150" dirty="0"/>
+          </a:p>
+        </p:txBody>
+      </p:sp>
+      <p:sp>
+        <p:nvSpPr>
+          <p:cNvPr id="25" name="Text 23"/>
+          <p:cNvSpPr/>
+          <p:nvPr/>
+        </p:nvSpPr>
+        <p:spPr>
+          <a:xfrm>
+            <a:off x="7594824" y="2377440"/>
+            <a:ext cx="1534912" cy="2560320"/>
+          </a:xfrm>
+          <a:prstGeom prst="rect">
+            <a:avLst/>
+          </a:prstGeom>
+          <a:noFill/>
+          <a:ln/>
+        </p:spPr>
+        <p:txBody>
+          <a:bodyPr wrap="square" lIns="0" tIns="0" rIns="0" bIns="0" rtlCol="0" anchor="t">
+            <a:normAutofit/>
+          </a:bodyPr>
+          <a:lstStyle/>
+          <a:p>
+            <a:pPr marL="342900" indent="-342900">
+              <a:lnSpc>
+                <a:spcPct val="125000"/>
+              </a:lnSpc>
+              <a:buSzPct val="100000"/>
+              <a:buChar char="•"/>
+            </a:pPr>
+            <a:r>
+              <a:rPr lang="en-US" sz="1050" dirty="0">
+                <a:solidFill>
+                  <a:srgbClr val="10161F"/>
+                </a:solidFill>
+                <a:latin typeface="Pretendard" pitchFamily="34" charset="0"/>
+                <a:ea typeface="Pretendard" pitchFamily="34" charset="-122"/>
+                <a:cs typeface="Pretendard" pitchFamily="34" charset="-120"/>
+              </a:rPr>
+              <a:t>임대차 분쟁 및 소송 이력 없음 (명도 리스크 극소)</a:t>
+            </a:r>
+            <a:endParaRPr lang="en-US" sz="1050" dirty="0"/>
+          </a:p>
+        </p:txBody>
+      </p:sp>
+      <p:sp>
+        <p:nvSpPr>
+          <p:cNvPr id="26" name="Shape 24"/>
+          <p:cNvSpPr/>
+          <p:nvPr/>
+        </p:nvSpPr>
+        <p:spPr>
+          <a:xfrm>
+            <a:off x="9632655" y="1417320"/>
+            <a:ext cx="1992112" cy="3611880"/>
+          </a:xfrm>
+          <a:prstGeom prst="roundRect">
+            <a:avLst>
+              <a:gd name="adj" fmla="val 2754"/>
+            </a:avLst>
+          </a:prstGeom>
+          <a:solidFill>
+            <a:srgbClr val="F7FAFC"/>
+          </a:solidFill>
+          <a:ln w="6350">
+            <a:solidFill>
+              <a:srgbClr val="CBD5E0"/>
+            </a:solidFill>
+            <a:prstDash val="solid"/>
+          </a:ln>
+        </p:spPr>
+      </p:sp>
+      <p:sp>
+        <p:nvSpPr>
+          <p:cNvPr id="27" name="Shape 25"/>
+          <p:cNvSpPr/>
+          <p:nvPr/>
+        </p:nvSpPr>
+        <p:spPr>
+          <a:xfrm>
+            <a:off x="9632655" y="1417320"/>
+            <a:ext cx="1992112" cy="45720"/>
+          </a:xfrm>
+          <a:prstGeom prst="rect">
+            <a:avLst/>
+          </a:prstGeom>
+          <a:solidFill>
+            <a:srgbClr val="B98A2E"/>
+          </a:solidFill>
+          <a:ln/>
+        </p:spPr>
+      </p:sp>
+      <p:sp>
+        <p:nvSpPr>
+          <p:cNvPr id="28" name="Text 26"/>
+          <p:cNvSpPr/>
+          <p:nvPr/>
+        </p:nvSpPr>
+        <p:spPr>
+          <a:xfrm>
+            <a:off x="9861255" y="1618488"/>
+            <a:ext cx="1534912" cy="292608"/>
+          </a:xfrm>
+          <a:prstGeom prst="rect">
+            <a:avLst/>
+          </a:prstGeom>
+          <a:noFill/>
+          <a:ln/>
+        </p:spPr>
+        <p:txBody>
+          <a:bodyPr wrap="square" lIns="0" tIns="0" rIns="0" bIns="0" rtlCol="0" anchor="ctr"/>
+          <a:lstStyle/>
+          <a:p>
+            <a:pPr indent="0" marL="0">
+              <a:buNone/>
+            </a:pPr>
+            <a:r>
+              <a:rPr lang="en-US" sz="1150" b="1" dirty="0">
+                <a:solidFill>
+                  <a:srgbClr val="977024"/>
+                </a:solidFill>
+                <a:latin typeface="Pretendard" pitchFamily="34" charset="0"/>
+                <a:ea typeface="Pretendard" pitchFamily="34" charset="-122"/>
+                <a:cs typeface="Pretendard" pitchFamily="34" charset="-120"/>
+              </a:rPr>
+              <a:t>권리관계 및 금융</a:t>
+            </a:r>
+            <a:endParaRPr lang="en-US" sz="1150" dirty="0"/>
+          </a:p>
+        </p:txBody>
+      </p:sp>
+      <p:sp>
+        <p:nvSpPr>
+          <p:cNvPr id="29" name="Text 27"/>
+          <p:cNvSpPr/>
+          <p:nvPr/>
+        </p:nvSpPr>
+        <p:spPr>
+          <a:xfrm>
+            <a:off x="9861255" y="1911096"/>
+            <a:ext cx="1534912" cy="402336"/>
+          </a:xfrm>
+          <a:prstGeom prst="rect">
+            <a:avLst/>
+          </a:prstGeom>
+          <a:noFill/>
+          <a:ln/>
+        </p:spPr>
+        <p:txBody>
+          <a:bodyPr wrap="square" lIns="0" tIns="0" rIns="0" bIns="0" rtlCol="0" anchor="ctr">
+            <a:normAutofit/>
+          </a:bodyPr>
+          <a:lstStyle/>
+          <a:p>
+            <a:pPr indent="0" marL="0">
+              <a:buNone/>
+            </a:pPr>
+            <a:r>
+              <a:rPr lang="en-US" sz="1150" b="1" dirty="0">
+                <a:solidFill>
+                  <a:srgbClr val="10161F"/>
+                </a:solidFill>
+                <a:latin typeface="Pretendard" pitchFamily="34" charset="0"/>
+                <a:ea typeface="Pretendard" pitchFamily="34" charset="-122"/>
+                <a:cs typeface="Pretendard" pitchFamily="34" charset="-120"/>
+              </a:rPr>
+              <a:t>단독 법인 소유 (가압류/가처분 일체 없음)</a:t>
+            </a:r>
+            <a:endParaRPr lang="en-US" sz="1150" dirty="0"/>
+          </a:p>
+        </p:txBody>
+      </p:sp>
+      <p:sp>
+        <p:nvSpPr>
+          <p:cNvPr id="30" name="Text 28"/>
+          <p:cNvSpPr/>
+          <p:nvPr/>
+        </p:nvSpPr>
+        <p:spPr>
+          <a:xfrm>
+            <a:off x="9861255" y="2377440"/>
+            <a:ext cx="1534912" cy="2560320"/>
+          </a:xfrm>
+          <a:prstGeom prst="rect">
+            <a:avLst/>
+          </a:prstGeom>
+          <a:noFill/>
+          <a:ln/>
+        </p:spPr>
+        <p:txBody>
+          <a:bodyPr wrap="square" lIns="0" tIns="0" rIns="0" bIns="0" rtlCol="0" anchor="t">
+            <a:normAutofit/>
+          </a:bodyPr>
+          <a:lstStyle/>
+          <a:p>
+            <a:pPr marL="342900" indent="-342900">
+              <a:lnSpc>
+                <a:spcPct val="125000"/>
+              </a:lnSpc>
+              <a:buSzPct val="100000"/>
+              <a:buChar char="•"/>
+            </a:pPr>
+            <a:r>
+              <a:rPr lang="en-US" sz="1050" dirty="0">
+                <a:solidFill>
+                  <a:srgbClr val="10161F"/>
+                </a:solidFill>
+                <a:latin typeface="Pretendard" pitchFamily="34" charset="0"/>
+                <a:ea typeface="Pretendard" pitchFamily="34" charset="-122"/>
+                <a:cs typeface="Pretendard" pitchFamily="34" charset="-120"/>
+              </a:rPr>
+              <a:t>1금융권 기존 담보대출 85억(연 4.1%) 승계 적격 판정</a:t>
+            </a:r>
+            <a:endParaRPr lang="en-US" sz="1050" dirty="0"/>
+          </a:p>
+        </p:txBody>
+      </p:sp>
+      <p:sp>
+        <p:nvSpPr>
+          <p:cNvPr id="31" name="Shape 29"/>
+          <p:cNvSpPr/>
+          <p:nvPr/>
+        </p:nvSpPr>
+        <p:spPr>
+          <a:xfrm>
+            <a:off x="566928" y="5193792"/>
+            <a:ext cx="11057839" cy="621792"/>
+          </a:xfrm>
+          <a:prstGeom prst="roundRect">
+            <a:avLst>
+              <a:gd name="adj" fmla="val 8824"/>
+            </a:avLst>
+          </a:prstGeom>
+          <a:solidFill>
+            <a:srgbClr val="F7FAFC"/>
+          </a:solidFill>
+          <a:ln w="6350">
+            <a:solidFill>
+              <a:srgbClr val="CBD5E0"/>
+            </a:solidFill>
+            <a:prstDash val="solid"/>
+          </a:ln>
+        </p:spPr>
+      </p:sp>
+      <p:sp>
+        <p:nvSpPr>
+          <p:cNvPr id="32" name="Text 30"/>
+          <p:cNvSpPr/>
+          <p:nvPr/>
+        </p:nvSpPr>
+        <p:spPr>
+          <a:xfrm>
+            <a:off x="795528" y="5193792"/>
+            <a:ext cx="10600639" cy="621792"/>
+          </a:xfrm>
+          <a:prstGeom prst="rect">
+            <a:avLst/>
+          </a:prstGeom>
+          <a:noFill/>
+          <a:ln/>
+        </p:spPr>
+        <p:txBody>
+          <a:bodyPr wrap="square" lIns="0" tIns="0" rIns="0" bIns="0" rtlCol="0" anchor="ctr"/>
+          <a:lstStyle/>
+          <a:p>
+            <a:pPr indent="0" marL="0">
+              <a:buNone/>
+            </a:pPr>
+            <a:r>
+              <a:rPr lang="en-US" sz="1200" dirty="0">
+                <a:solidFill>
+                  <a:srgbClr val="10161F"/>
+                </a:solidFill>
+                <a:latin typeface="Pretendard" pitchFamily="34" charset="0"/>
+                <a:ea typeface="Pretendard" pitchFamily="34" charset="-122"/>
+                <a:cs typeface="Pretendard" pitchFamily="34" charset="-120"/>
+              </a:rPr>
+              <a:t>실사 총평: 자산의 물리적·권리적 하자가 없으며, 세부 임대차 계약서 및 등기사항증명서는 LOI 접수 후 원본 열람 가능합니다.</a:t>
+            </a:r>
+            <a:endParaRPr lang="en-US" sz="1200" dirty="0"/>
+          </a:p>
+        </p:txBody>
+      </p:sp>
+      <p:sp>
+        <p:nvSpPr>
+          <p:cNvPr id="33" name="Text 31"/>
+          <p:cNvSpPr/>
+          <p:nvPr/>
+        </p:nvSpPr>
+        <p:spPr>
+          <a:xfrm>
+            <a:off x="566928" y="6382512"/>
+            <a:ext cx="7315200" cy="219456"/>
+          </a:xfrm>
+          <a:prstGeom prst="rect">
+            <a:avLst/>
+          </a:prstGeom>
+          <a:noFill/>
+          <a:ln/>
+        </p:spPr>
+        <p:txBody>
+          <a:bodyPr wrap="square" lIns="0" tIns="0" rIns="0" bIns="0" rtlCol="0" anchor="ctr"/>
+          <a:lstStyle/>
+          <a:p>
+            <a:pPr indent="0" marL="0">
+              <a:buNone/>
+            </a:pPr>
+            <a:r>
+              <a:rPr lang="en-US" sz="800" dirty="0">
+                <a:solidFill>
+                  <a:srgbClr val="718096"/>
+                </a:solidFill>
+                <a:latin typeface="Pretendard" pitchFamily="34" charset="0"/>
+                <a:ea typeface="Pretendard" pitchFamily="34" charset="-122"/>
+                <a:cs typeface="Pretendard" pitchFamily="34" charset="-120"/>
+              </a:rPr>
               <a:t>크리딜   |   </a:t>
             </a:r>
             <a:endParaRPr lang="en-US" sz="800" dirty="0"/>
@@ -7025,7 +8514,7 @@
       </p:sp>
       <p:sp>
         <p:nvSpPr>
-          <p:cNvPr id="12" name="Text 10"/>
+          <p:cNvPr id="34" name="Text 32"/>
           <p:cNvSpPr/>
           <p:nvPr/>
         </p:nvSpPr>
@@ -9279,11 +10768,11 @@
         <p:spPr>
           <a:xfrm>
             <a:off x="566928" y="1572768"/>
-            <a:ext cx="2490140" cy="3200400"/>
+            <a:ext cx="11057839" cy="3200400"/>
           </a:xfrm>
           <a:prstGeom prst="roundRect">
             <a:avLst>
-              <a:gd name="adj" fmla="val 2203"/>
+              <a:gd name="adj" fmla="val 1714"/>
             </a:avLst>
           </a:prstGeom>
           <a:solidFill>
@@ -9365,7 +10854,7 @@
         <p:spPr>
           <a:xfrm>
             <a:off x="786384" y="2304288"/>
-            <a:ext cx="2051228" cy="365760"/>
+            <a:ext cx="10618927" cy="365760"/>
           </a:xfrm>
           <a:prstGeom prst="rect">
             <a:avLst/>
@@ -9389,7 +10878,7 @@
                 <a:ea typeface="Pretendard" pitchFamily="34" charset="-122"/>
                 <a:cs typeface="Pretendard" pitchFamily="34" charset="-120"/>
               </a:rPr>
-              <a:t>초기 관심 표명 → 담당자 연락</a:t>
+              <a:t>{"ok"</a:t>
             </a:r>
             <a:endParaRPr lang="en-US" sz="1600" dirty="0"/>
           </a:p>
@@ -9404,7 +10893,7 @@
         <p:spPr>
           <a:xfrm>
             <a:off x="786384" y="2761488"/>
-            <a:ext cx="2051228" cy="1828800"/>
+            <a:ext cx="10618927" cy="1828800"/>
           </a:xfrm>
           <a:prstGeom prst="rect">
             <a:avLst/>
@@ -9419,147 +10908,8 @@
             <a:pPr indent="0" marL="0">
               <a:buNone/>
             </a:pPr>
-            <a:endParaRPr lang="en-US" sz="1100" dirty="0"/>
-          </a:p>
-        </p:txBody>
-      </p:sp>
-      <p:sp>
-        <p:nvSpPr>
-          <p:cNvPr id="11" name="Shape 9"/>
-          <p:cNvSpPr/>
-          <p:nvPr/>
-        </p:nvSpPr>
-        <p:spPr>
-          <a:xfrm>
-            <a:off x="3148508" y="3035808"/>
-            <a:ext cx="182880" cy="274320"/>
-          </a:xfrm>
-          <a:prstGeom prst="rightArrow">
-            <a:avLst/>
-          </a:prstGeom>
-          <a:solidFill>
-            <a:srgbClr val="CBD5E0"/>
-          </a:solidFill>
-          <a:ln w="6350">
-            <a:solidFill>
-              <a:srgbClr val="718096"/>
-            </a:solidFill>
-            <a:prstDash val="solid"/>
-          </a:ln>
-        </p:spPr>
-      </p:sp>
-      <p:sp>
-        <p:nvSpPr>
-          <p:cNvPr id="12" name="Shape 10"/>
-          <p:cNvSpPr/>
-          <p:nvPr/>
-        </p:nvSpPr>
-        <p:spPr>
-          <a:xfrm>
-            <a:off x="3422828" y="1572768"/>
-            <a:ext cx="2490140" cy="3200400"/>
-          </a:xfrm>
-          <a:prstGeom prst="roundRect">
-            <a:avLst>
-              <a:gd name="adj" fmla="val 2203"/>
-            </a:avLst>
-          </a:prstGeom>
-          <a:solidFill>
-            <a:srgbClr val="F7FAFC"/>
-          </a:solidFill>
-          <a:ln w="6350">
-            <a:solidFill>
-              <a:srgbClr val="CBD5E0"/>
-            </a:solidFill>
-            <a:prstDash val="solid"/>
-          </a:ln>
-        </p:spPr>
-      </p:sp>
-      <p:sp>
-        <p:nvSpPr>
-          <p:cNvPr id="13" name="Shape 11"/>
-          <p:cNvSpPr/>
-          <p:nvPr/>
-        </p:nvSpPr>
-        <p:spPr>
-          <a:xfrm>
-            <a:off x="3642284" y="1792224"/>
-            <a:ext cx="384048" cy="384048"/>
-          </a:xfrm>
-          <a:prstGeom prst="ellipse">
-            <a:avLst/>
-          </a:prstGeom>
-          <a:solidFill>
-            <a:srgbClr val="B98A2E"/>
-          </a:solidFill>
-          <a:ln/>
-        </p:spPr>
-      </p:sp>
-      <p:sp>
-        <p:nvSpPr>
-          <p:cNvPr id="14" name="Text 12"/>
-          <p:cNvSpPr/>
-          <p:nvPr/>
-        </p:nvSpPr>
-        <p:spPr>
-          <a:xfrm>
-            <a:off x="3642284" y="1792224"/>
-            <a:ext cx="384048" cy="384048"/>
-          </a:xfrm>
-          <a:prstGeom prst="rect">
-            <a:avLst/>
-          </a:prstGeom>
-          <a:noFill/>
-          <a:ln/>
-        </p:spPr>
-        <p:txBody>
-          <a:bodyPr wrap="square" lIns="0" tIns="0" rIns="0" bIns="0" rtlCol="0" anchor="ctr"/>
-          <a:lstStyle/>
-          <a:p>
-            <a:pPr algn="ctr" indent="0" marL="0">
-              <a:buNone/>
-            </a:pPr>
-            <a:r>
-              <a:rPr lang="en-US" sz="1300" b="1" dirty="0">
-                <a:solidFill>
-                  <a:srgbClr val="FFFFFF"/>
-                </a:solidFill>
-                <a:latin typeface="Arial" pitchFamily="34" charset="0"/>
-                <a:ea typeface="Arial" pitchFamily="34" charset="-122"/>
-                <a:cs typeface="Arial" pitchFamily="34" charset="-120"/>
-              </a:rPr>
-              <a:t>STEP 2</a:t>
-            </a:r>
-            <a:endParaRPr lang="en-US" sz="1300" dirty="0"/>
-          </a:p>
-        </p:txBody>
-      </p:sp>
-      <p:sp>
-        <p:nvSpPr>
-          <p:cNvPr id="15" name="Text 13"/>
-          <p:cNvSpPr/>
-          <p:nvPr/>
-        </p:nvSpPr>
-        <p:spPr>
-          <a:xfrm>
-            <a:off x="3642284" y="2304288"/>
-            <a:ext cx="2051228" cy="365760"/>
-          </a:xfrm>
-          <a:prstGeom prst="rect">
-            <a:avLst/>
-          </a:prstGeom>
-          <a:noFill/>
-          <a:ln/>
-        </p:spPr>
-        <p:txBody>
-          <a:bodyPr wrap="square" rtlCol="0" anchor="ctr"/>
-          <a:lstStyle/>
-          <a:p>
-            <a:pPr indent="0" marL="0">
-              <a:buNone/>
-            </a:pPr>
-            <a:r>
-              <a:rPr lang="en-US" sz="1600" b="1" dirty="0">
+            <a:r>
+              <a:rPr lang="en-US" sz="1100" dirty="0">
                 <a:solidFill>
                   <a:srgbClr val="10161F"/>
                 </a:solidFill>
@@ -9567,429 +10917,45 @@
                 <a:ea typeface="Pretendard" pitchFamily="34" charset="-122"/>
                 <a:cs typeface="Pretendard" pitchFamily="34" charset="-120"/>
               </a:rPr>
-              <a:t>NDA 체결 → 임차인 정보 및 임대차계약서 제공</a:t>
-            </a:r>
-            <a:endParaRPr lang="en-US" sz="1600" dirty="0"/>
-          </a:p>
-        </p:txBody>
-      </p:sp>
-      <p:sp>
-        <p:nvSpPr>
-          <p:cNvPr id="16" name="Text 14"/>
-          <p:cNvSpPr/>
-          <p:nvPr/>
-        </p:nvSpPr>
-        <p:spPr>
-          <a:xfrm>
-            <a:off x="3642284" y="2761488"/>
-            <a:ext cx="2051228" cy="1828800"/>
-          </a:xfrm>
-          <a:prstGeom prst="rect">
-            <a:avLst/>
-          </a:prstGeom>
-          <a:noFill/>
-          <a:ln/>
-        </p:spPr>
-        <p:txBody>
-          <a:bodyPr wrap="square" rtlCol="0" anchor="t"/>
+              <a:t>true,"mocked":true,"extractedFields":{"area_signal":"역삼","asset_type":"오피스빌딩","price_band":"300억","size_signal":"3000평(약 9917.4㎡)"},"extractedFacts":{"region":"역삼","exactAddressCandidate":"역삼동 742-1","assetType":"오피스빌딩","priceText":"300억","sizeText":"3000평(약 9917.4㎡)","currentUse":"오피스","currentUseSignal":"근린생활시설","leaseSignal":"임대중","vacancySignal":"공실없음","tenantNames":["쿠팡","네이버"],"unitRentTexts":["301호: 1500만"],"sellerMotivationText":"자산 효율화","brokerNotes":["초역세권 매물"]},"detectedSensitiveFields":["exact_address","tenant_name"],"ambiguousFields":[],"warnings":[],"areaSignal":"역삼","assetType":"오피스빌딩","priceBand":"300억","sizeSignal":"3000평(약 9917.4㎡)","dealType":"매각","buildingName":"역삼 센트럴타워","exactAddress":"역삼동 742-1","totalFloorArea":9917.3,"buildYear":2015,"currentUseSignal":"근린생활시설","vacancySignal":"공실 없음","fitSummary":"초역세권 근생 빌딩으로 시행/사옥 매입에 최적화","cautionSummary":"주요 임차 업종 만기 조율 필요","hiddenFields":["exact_address","seller_motivation"],"confidence":{"areaSignal":"confirmed","assetType":"confirmed","priceBand":"ai_hypothesis","fitSummary":"ai_hypothesis"},"missingData":["sizeSignal"],"boundaryNote":"본 자료는 실거래 통계 기반 참고치입니다.","buyerType":"법인 사옥형","budgetRange":{"min":50,"max":80,"display":"50억~80억"},"preferredRegions":["강남","성수"],"assetTypes":["꼬마빌딩","사옥용"],"purchasePurpose":"사옥용 매입","mustHave":["초역세권","주차"],"niceToHave":["테라스","루프탑"],"riskTolerance":"medium","financingNote":"자본금 50% 준비","missingQuestions":["구체적인 입주 시기가 언제인가요?","선호하는 수익률이 있나요?"],"privacyNotes":["연락처 비공개"],"fitReasons":["매수자 예산(50-80억)에 부합하는 매물입니다.","요청하신 성수/강남 권역에 해당합니다."],"cautionReasons":["요청한 용도와 달리 명도 협의가 다소 필요합니다."],"recommendedNextAction":"현장 답사 제안","kakaoMessage":"안녕하세요! 요청하신 조건에 부합하는 추천 매물이 있어 안내해 드립니다. 확인해보시고 피드백 부탁드립니다.","title":"강남 역삼역 초역세권 오피스 사옥용 빌딩 매각","shortSummary":"역삼역 도보 5분 거리의 준신축급 대형 오피스빌딩입니다.","dealPoints":["초역세권","사옥 최적"],"cautionPoints":["명도 조율 필요"],"hiddenInfoNotice":["보증금 및 지번은 인가 후 확인 가능"],"gateMessage":"G1 등급 등록이 필요합니다.","kakaoText":"강남 역삼역 오피스 빌딩 매각 안내입니다.","exactUnitCandidate":"101호","floor":"1층","areaSqmText":"150㎡","spaceType":"office","depositText":"5000만","monthlyRentText":"400만","maintenanceFeeText":"50만","availableFromText":"즉시입주","leaseTermMonthsText":"24","incentivesText":"렌트프리 2개월","restrictions":[],"landlordIdentity":"김성수","currentTenant":"스타트업","vacancyReason":"이전 확장","rentNegotiation":"협의 가능","region":"성수동","areaSqm":150,"deposit":5000,"monthlyRent":400,"maintenanceFee":50,"availableFrom":"즉시입주","leaseTermMonths":24,"incentives":{"rentFreeMonths":2,"interiorSupport":"일부 인테리어 지원","freeRentDetail":"렌트프리 2개월 지원"},"shortSummaryLease":"성수역 도보 5분 거리 1층 리테일 상가 매물입니다."}</a:t>
+            </a:r>
+            <a:endParaRPr lang="en-US" sz="1100" dirty="0"/>
+          </a:p>
+        </p:txBody>
+      </p:sp>
+      <p:sp>
+        <p:nvSpPr>
+          <p:cNvPr id="11" name="Text 9"/>
+          <p:cNvSpPr/>
+          <p:nvPr/>
+        </p:nvSpPr>
+        <p:spPr>
+          <a:xfrm>
+            <a:off x="566928" y="6382512"/>
+            <a:ext cx="7315200" cy="219456"/>
+          </a:xfrm>
+          <a:prstGeom prst="rect">
+            <a:avLst/>
+          </a:prstGeom>
+          <a:noFill/>
+          <a:ln/>
+        </p:spPr>
+        <p:txBody>
+          <a:bodyPr wrap="square" lIns="0" tIns="0" rIns="0" bIns="0" rtlCol="0" anchor="ctr"/>
           <a:lstStyle/>
           <a:p>
             <a:pPr indent="0" marL="0">
               <a:buNone/>
             </a:pPr>
-            <a:endParaRPr lang="en-US" sz="1100" dirty="0"/>
-          </a:p>
-        </p:txBody>
-      </p:sp>
-      <p:sp>
-        <p:nvSpPr>
-          <p:cNvPr id="17" name="Shape 15"/>
-          <p:cNvSpPr/>
-          <p:nvPr/>
-        </p:nvSpPr>
-        <p:spPr>
-          <a:xfrm>
-            <a:off x="6004408" y="3035808"/>
-            <a:ext cx="182880" cy="274320"/>
-          </a:xfrm>
-          <a:prstGeom prst="rightArrow">
-            <a:avLst/>
-          </a:prstGeom>
-          <a:solidFill>
-            <a:srgbClr val="CBD5E0"/>
-          </a:solidFill>
-          <a:ln w="6350">
-            <a:solidFill>
-              <a:srgbClr val="718096"/>
-            </a:solidFill>
-            <a:prstDash val="solid"/>
-          </a:ln>
-        </p:spPr>
-      </p:sp>
-      <p:sp>
-        <p:nvSpPr>
-          <p:cNvPr id="18" name="Shape 16"/>
-          <p:cNvSpPr/>
-          <p:nvPr/>
-        </p:nvSpPr>
-        <p:spPr>
-          <a:xfrm>
-            <a:off x="6278728" y="1572768"/>
-            <a:ext cx="2490140" cy="3200400"/>
-          </a:xfrm>
-          <a:prstGeom prst="roundRect">
-            <a:avLst>
-              <a:gd name="adj" fmla="val 2203"/>
-            </a:avLst>
-          </a:prstGeom>
-          <a:solidFill>
-            <a:srgbClr val="F7FAFC"/>
-          </a:solidFill>
-          <a:ln w="6350">
-            <a:solidFill>
-              <a:srgbClr val="CBD5E0"/>
-            </a:solidFill>
-            <a:prstDash val="solid"/>
-          </a:ln>
-        </p:spPr>
-      </p:sp>
-      <p:sp>
-        <p:nvSpPr>
-          <p:cNvPr id="19" name="Shape 17"/>
-          <p:cNvSpPr/>
-          <p:nvPr/>
-        </p:nvSpPr>
-        <p:spPr>
-          <a:xfrm>
-            <a:off x="6498184" y="1792224"/>
-            <a:ext cx="384048" cy="384048"/>
-          </a:xfrm>
-          <a:prstGeom prst="ellipse">
-            <a:avLst/>
-          </a:prstGeom>
-          <a:solidFill>
-            <a:srgbClr val="B98A2E"/>
-          </a:solidFill>
-          <a:ln/>
-        </p:spPr>
-      </p:sp>
-      <p:sp>
-        <p:nvSpPr>
-          <p:cNvPr id="20" name="Text 18"/>
-          <p:cNvSpPr/>
-          <p:nvPr/>
-        </p:nvSpPr>
-        <p:spPr>
-          <a:xfrm>
-            <a:off x="6498184" y="1792224"/>
-            <a:ext cx="384048" cy="384048"/>
-          </a:xfrm>
-          <a:prstGeom prst="rect">
-            <a:avLst/>
-          </a:prstGeom>
-          <a:noFill/>
-          <a:ln/>
-        </p:spPr>
-        <p:txBody>
-          <a:bodyPr wrap="square" lIns="0" tIns="0" rIns="0" bIns="0" rtlCol="0" anchor="ctr"/>
-          <a:lstStyle/>
-          <a:p>
-            <a:pPr algn="ctr" indent="0" marL="0">
-              <a:buNone/>
-            </a:pPr>
-            <a:r>
-              <a:rPr lang="en-US" sz="1300" b="1" dirty="0">
-                <a:solidFill>
-                  <a:srgbClr val="FFFFFF"/>
-                </a:solidFill>
-                <a:latin typeface="Arial" pitchFamily="34" charset="0"/>
-                <a:ea typeface="Arial" pitchFamily="34" charset="-122"/>
-                <a:cs typeface="Arial" pitchFamily="34" charset="-120"/>
-              </a:rPr>
-              <a:t>STEP 3</a:t>
-            </a:r>
-            <a:endParaRPr lang="en-US" sz="1300" dirty="0"/>
-          </a:p>
-        </p:txBody>
-      </p:sp>
-      <p:sp>
-        <p:nvSpPr>
-          <p:cNvPr id="21" name="Text 19"/>
-          <p:cNvSpPr/>
-          <p:nvPr/>
-        </p:nvSpPr>
-        <p:spPr>
-          <a:xfrm>
-            <a:off x="6498184" y="2304288"/>
-            <a:ext cx="2051228" cy="365760"/>
-          </a:xfrm>
-          <a:prstGeom prst="rect">
-            <a:avLst/>
-          </a:prstGeom>
-          <a:noFill/>
-          <a:ln/>
-        </p:spPr>
-        <p:txBody>
-          <a:bodyPr wrap="square" rtlCol="0" anchor="ctr"/>
-          <a:lstStyle/>
-          <a:p>
-            <a:pPr indent="0" marL="0">
-              <a:buNone/>
-            </a:pPr>
-            <a:r>
-              <a:rPr lang="en-US" sz="1600" b="1" dirty="0">
-                <a:solidFill>
-                  <a:srgbClr val="10161F"/>
+            <a:r>
+              <a:rPr lang="en-US" sz="800" dirty="0">
+                <a:solidFill>
+                  <a:srgbClr val="718096"/>
                 </a:solidFill>
                 <a:latin typeface="Pretendard" pitchFamily="34" charset="0"/>
                 <a:ea typeface="Pretendard" pitchFamily="34" charset="-122"/>
                 <a:cs typeface="Pretendard" pitchFamily="34" charset="-120"/>
               </a:rPr>
-              <a:t>현장 실사 일정 조율 → 건물 컨디션 및 설비 직접 확인</a:t>
-            </a:r>
-            <a:endParaRPr lang="en-US" sz="1600" dirty="0"/>
-          </a:p>
-        </p:txBody>
-      </p:sp>
-      <p:sp>
-        <p:nvSpPr>
-          <p:cNvPr id="22" name="Text 20"/>
-          <p:cNvSpPr/>
-          <p:nvPr/>
-        </p:nvSpPr>
-        <p:spPr>
-          <a:xfrm>
-            <a:off x="6498184" y="2761488"/>
-            <a:ext cx="2051228" cy="1828800"/>
-          </a:xfrm>
-          <a:prstGeom prst="rect">
-            <a:avLst/>
-          </a:prstGeom>
-          <a:noFill/>
-          <a:ln/>
-        </p:spPr>
-        <p:txBody>
-          <a:bodyPr wrap="square" rtlCol="0" anchor="t"/>
-          <a:lstStyle/>
-          <a:p>
-            <a:pPr indent="0" marL="0">
-              <a:buNone/>
-            </a:pPr>
-            <a:endParaRPr lang="en-US" sz="1100" dirty="0"/>
-          </a:p>
-        </p:txBody>
-      </p:sp>
-      <p:sp>
-        <p:nvSpPr>
-          <p:cNvPr id="23" name="Shape 21"/>
-          <p:cNvSpPr/>
-          <p:nvPr/>
-        </p:nvSpPr>
-        <p:spPr>
-          <a:xfrm>
-            <a:off x="8860307" y="3035808"/>
-            <a:ext cx="182880" cy="274320"/>
-          </a:xfrm>
-          <a:prstGeom prst="rightArrow">
-            <a:avLst/>
-          </a:prstGeom>
-          <a:solidFill>
-            <a:srgbClr val="CBD5E0"/>
-          </a:solidFill>
-          <a:ln w="6350">
-            <a:solidFill>
-              <a:srgbClr val="718096"/>
-            </a:solidFill>
-            <a:prstDash val="solid"/>
-          </a:ln>
-        </p:spPr>
-      </p:sp>
-      <p:sp>
-        <p:nvSpPr>
-          <p:cNvPr id="24" name="Shape 22"/>
-          <p:cNvSpPr/>
-          <p:nvPr/>
-        </p:nvSpPr>
-        <p:spPr>
-          <a:xfrm>
-            <a:off x="9134627" y="1572768"/>
-            <a:ext cx="2490140" cy="3200400"/>
-          </a:xfrm>
-          <a:prstGeom prst="roundRect">
-            <a:avLst>
-              <a:gd name="adj" fmla="val 2203"/>
-            </a:avLst>
-          </a:prstGeom>
-          <a:solidFill>
-            <a:srgbClr val="F7FAFC"/>
-          </a:solidFill>
-          <a:ln w="6350">
-            <a:solidFill>
-              <a:srgbClr val="CBD5E0"/>
-            </a:solidFill>
-            <a:prstDash val="solid"/>
-          </a:ln>
-        </p:spPr>
-      </p:sp>
-      <p:sp>
-        <p:nvSpPr>
-          <p:cNvPr id="25" name="Shape 23"/>
-          <p:cNvSpPr/>
-          <p:nvPr/>
-        </p:nvSpPr>
-        <p:spPr>
-          <a:xfrm>
-            <a:off x="9354083" y="1792224"/>
-            <a:ext cx="384048" cy="384048"/>
-          </a:xfrm>
-          <a:prstGeom prst="ellipse">
-            <a:avLst/>
-          </a:prstGeom>
-          <a:solidFill>
-            <a:srgbClr val="B98A2E"/>
-          </a:solidFill>
-          <a:ln/>
-        </p:spPr>
-      </p:sp>
-      <p:sp>
-        <p:nvSpPr>
-          <p:cNvPr id="26" name="Text 24"/>
-          <p:cNvSpPr/>
-          <p:nvPr/>
-        </p:nvSpPr>
-        <p:spPr>
-          <a:xfrm>
-            <a:off x="9354083" y="1792224"/>
-            <a:ext cx="384048" cy="384048"/>
-          </a:xfrm>
-          <a:prstGeom prst="rect">
-            <a:avLst/>
-          </a:prstGeom>
-          <a:noFill/>
-          <a:ln/>
-        </p:spPr>
-        <p:txBody>
-          <a:bodyPr wrap="square" lIns="0" tIns="0" rIns="0" bIns="0" rtlCol="0" anchor="ctr"/>
-          <a:lstStyle/>
-          <a:p>
-            <a:pPr algn="ctr" indent="0" marL="0">
-              <a:buNone/>
-            </a:pPr>
-            <a:r>
-              <a:rPr lang="en-US" sz="1300" b="1" dirty="0">
-                <a:solidFill>
-                  <a:srgbClr val="FFFFFF"/>
-                </a:solidFill>
-                <a:latin typeface="Arial" pitchFamily="34" charset="0"/>
-                <a:ea typeface="Arial" pitchFamily="34" charset="-122"/>
-                <a:cs typeface="Arial" pitchFamily="34" charset="-120"/>
-              </a:rPr>
-              <a:t>STEP 4</a:t>
-            </a:r>
-            <a:endParaRPr lang="en-US" sz="1300" dirty="0"/>
-          </a:p>
-        </p:txBody>
-      </p:sp>
-      <p:sp>
-        <p:nvSpPr>
-          <p:cNvPr id="27" name="Text 25"/>
-          <p:cNvSpPr/>
-          <p:nvPr/>
-        </p:nvSpPr>
-        <p:spPr>
-          <a:xfrm>
-            <a:off x="9354083" y="2304288"/>
-            <a:ext cx="2051228" cy="365760"/>
-          </a:xfrm>
-          <a:prstGeom prst="rect">
-            <a:avLst/>
-          </a:prstGeom>
-          <a:noFill/>
-          <a:ln/>
-        </p:spPr>
-        <p:txBody>
-          <a:bodyPr wrap="square" rtlCol="0" anchor="ctr"/>
-          <a:lstStyle/>
-          <a:p>
-            <a:pPr indent="0" marL="0">
-              <a:buNone/>
-            </a:pPr>
-            <a:r>
-              <a:rPr lang="en-US" sz="1600" b="1" dirty="0">
-                <a:solidFill>
-                  <a:srgbClr val="10161F"/>
-                </a:solidFill>
-                <a:latin typeface="Pretendard" pitchFamily="34" charset="0"/>
-                <a:ea typeface="Pretendard" pitchFamily="34" charset="-122"/>
-                <a:cs typeface="Pretendard" pitchFamily="34" charset="-120"/>
-              </a:rPr>
-              <a:t>LOI(투자의향서) 제출 → 가격 협의 개시</a:t>
-            </a:r>
-            <a:endParaRPr lang="en-US" sz="1600" dirty="0"/>
-          </a:p>
-        </p:txBody>
-      </p:sp>
-      <p:sp>
-        <p:nvSpPr>
-          <p:cNvPr id="28" name="Text 26"/>
-          <p:cNvSpPr/>
-          <p:nvPr/>
-        </p:nvSpPr>
-        <p:spPr>
-          <a:xfrm>
-            <a:off x="9354083" y="2761488"/>
-            <a:ext cx="2051228" cy="1828800"/>
-          </a:xfrm>
-          <a:prstGeom prst="rect">
-            <a:avLst/>
-          </a:prstGeom>
-          <a:noFill/>
-          <a:ln/>
-        </p:spPr>
-        <p:txBody>
-          <a:bodyPr wrap="square" rtlCol="0" anchor="t"/>
-          <a:lstStyle/>
-          <a:p>
-            <a:pPr indent="0" marL="0">
-              <a:buNone/>
-            </a:pPr>
-            <a:endParaRPr lang="en-US" sz="1100" dirty="0"/>
-          </a:p>
-        </p:txBody>
-      </p:sp>
-      <p:sp>
-        <p:nvSpPr>
-          <p:cNvPr id="29" name="Text 27"/>
-          <p:cNvSpPr/>
-          <p:nvPr/>
-        </p:nvSpPr>
-        <p:spPr>
-          <a:xfrm>
-            <a:off x="566928" y="6382512"/>
-            <a:ext cx="7315200" cy="219456"/>
-          </a:xfrm>
-          <a:prstGeom prst="rect">
-            <a:avLst/>
-          </a:prstGeom>
-          <a:noFill/>
-          <a:ln/>
-        </p:spPr>
-        <p:txBody>
-          <a:bodyPr wrap="square" lIns="0" tIns="0" rIns="0" bIns="0" rtlCol="0" anchor="ctr"/>
-          <a:lstStyle/>
-          <a:p>
-            <a:pPr indent="0" marL="0">
-              <a:buNone/>
-            </a:pPr>
-            <a:r>
-              <a:rPr lang="en-US" sz="800" dirty="0">
-                <a:solidFill>
-                  <a:srgbClr val="718096"/>
-                </a:solidFill>
-                <a:latin typeface="Pretendard" pitchFamily="34" charset="0"/>
-                <a:ea typeface="Pretendard" pitchFamily="34" charset="-122"/>
-                <a:cs typeface="Pretendard" pitchFamily="34" charset="-120"/>
-              </a:rPr>
               <a:t>크리딜   |   </a:t>
             </a:r>
             <a:endParaRPr lang="en-US" sz="800" dirty="0"/>
@@ -9998,7 +10964,7 @@
       </p:sp>
       <p:sp>
         <p:nvSpPr>
-          <p:cNvPr id="30" name="Text 28"/>
+          <p:cNvPr id="12" name="Text 10"/>
           <p:cNvSpPr/>
           <p:nvPr/>
         </p:nvSpPr>

--- a/docs/test/stress/e2e-outputs/operating_case16_icheon_logistics_basic.pptx
+++ b/docs/test/stress/e2e-outputs/operating_case16_icheon_logistics_basic.pptx
@@ -7556,11 +7556,11 @@
         <p:spPr>
           <a:xfrm>
             <a:off x="566928" y="1417320"/>
-            <a:ext cx="1992112" cy="3611880"/>
+            <a:ext cx="11057839" cy="3657600"/>
           </a:xfrm>
           <a:prstGeom prst="roundRect">
             <a:avLst>
-              <a:gd name="adj" fmla="val 2754"/>
+              <a:gd name="adj" fmla="val 1500"/>
             </a:avLst>
           </a:prstGeom>
           <a:solidFill>
@@ -7583,7 +7583,7 @@
         <p:spPr>
           <a:xfrm>
             <a:off x="566928" y="1417320"/>
-            <a:ext cx="1992112" cy="45720"/>
+            <a:ext cx="11057839" cy="45720"/>
           </a:xfrm>
           <a:prstGeom prst="rect">
             <a:avLst/>
@@ -7603,7 +7603,7 @@
         <p:spPr>
           <a:xfrm>
             <a:off x="795528" y="1618488"/>
-            <a:ext cx="1534912" cy="292608"/>
+            <a:ext cx="10600639" cy="292608"/>
           </a:xfrm>
           <a:prstGeom prst="rect">
             <a:avLst/>
@@ -7619,7 +7619,7 @@
               <a:buNone/>
             </a:pPr>
             <a:r>
-              <a:rPr lang="en-US" sz="1150" b="1" dirty="0">
+              <a:rPr lang="en-US" sz="1350" b="1" dirty="0">
                 <a:solidFill>
                   <a:srgbClr val="977024"/>
                 </a:solidFill>
@@ -7627,9 +7627,9 @@
                 <a:ea typeface="Pretendard" pitchFamily="34" charset="-122"/>
                 <a:cs typeface="Pretendard" pitchFamily="34" charset="-120"/>
               </a:rPr>
-              <a:t>건물 물리적 상태</a:t>
-            </a:r>
-            <a:endParaRPr lang="en-US" sz="1150" dirty="0"/>
+              <a:t>용도 리스크</a:t>
+            </a:r>
+            <a:endParaRPr lang="en-US" sz="1350" dirty="0"/>
           </a:p>
         </p:txBody>
       </p:sp>
@@ -7641,8 +7641,8 @@
         </p:nvSpPr>
         <p:spPr>
           <a:xfrm>
-            <a:off x="795528" y="1911096"/>
-            <a:ext cx="1534912" cy="402336"/>
+            <a:off x="795528" y="1947672"/>
+            <a:ext cx="10600639" cy="365760"/>
           </a:xfrm>
           <a:prstGeom prst="rect">
             <a:avLst/>
@@ -7660,7 +7660,7 @@
               <a:buNone/>
             </a:pPr>
             <a:r>
-              <a:rPr lang="en-US" sz="1150" b="1" dirty="0">
+              <a:rPr lang="en-US" sz="1250" b="1" dirty="0">
                 <a:solidFill>
                   <a:srgbClr val="10161F"/>
                 </a:solidFill>
@@ -7668,9 +7668,9 @@
                 <a:ea typeface="Pretendard" pitchFamily="34" charset="-122"/>
                 <a:cs typeface="Pretendard" pitchFamily="34" charset="-120"/>
               </a:rPr>
-              <a:t>2017년 준공 신축급 상태 (누수/균열 결함 없음)</a:t>
-            </a:r>
-            <a:endParaRPr lang="en-US" sz="1150" dirty="0"/>
+              <a:t>—</a:t>
+            </a:r>
+            <a:endParaRPr lang="en-US" sz="1250" dirty="0"/>
           </a:p>
         </p:txBody>
       </p:sp>
@@ -7683,7 +7683,7 @@
         <p:spPr>
           <a:xfrm>
             <a:off x="795528" y="2377440"/>
-            <a:ext cx="1534912" cy="2560320"/>
+            <a:ext cx="10600639" cy="2606040"/>
           </a:xfrm>
           <a:prstGeom prst="rect">
             <a:avLst/>
@@ -7705,7 +7705,7 @@
               <a:buChar char="•"/>
             </a:pPr>
             <a:r>
-              <a:rPr lang="en-US" sz="1050" dirty="0">
+              <a:rPr lang="en-US" sz="1100" dirty="0">
                 <a:solidFill>
                   <a:srgbClr val="10161F"/>
                 </a:solidFill>
@@ -7713,9 +7713,9 @@
                 <a:ea typeface="Pretendard" pitchFamily="34" charset="-122"/>
                 <a:cs typeface="Pretendard" pitchFamily="34" charset="-120"/>
               </a:rPr>
-              <a:t>준공 10년 미만으로 대규모 수선비용 발생 가능성 낮음</a:t>
-            </a:r>
-            <a:endParaRPr lang="en-US" sz="1050" dirty="0"/>
+              <a:t>{"ok":true,"mocked":true,"extractedFields":{"area_signal":"역삼","asset_type":"오피스빌딩","price_band":"300억","size_signal":"3000평(약 9917.4㎡)"},"extractedFacts":{"region":"역삼","exactAddressCandidate":"역삼동 7</a:t>
+            </a:r>
+            <a:endParaRPr lang="en-US" sz="1100" dirty="0"/>
           </a:p>
         </p:txBody>
       </p:sp>
@@ -7727,12 +7727,12 @@
         </p:nvSpPr>
         <p:spPr>
           <a:xfrm>
-            <a:off x="2833360" y="1417320"/>
-            <a:ext cx="1992112" cy="3611880"/>
+            <a:off x="566928" y="5193792"/>
+            <a:ext cx="11057839" cy="621792"/>
           </a:xfrm>
           <a:prstGeom prst="roundRect">
             <a:avLst>
-              <a:gd name="adj" fmla="val 2754"/>
+              <a:gd name="adj" fmla="val 8824"/>
             </a:avLst>
           </a:prstGeom>
           <a:solidFill>
@@ -7748,34 +7748,14 @@
       </p:sp>
       <p:sp>
         <p:nvSpPr>
-          <p:cNvPr id="12" name="Shape 10"/>
-          <p:cNvSpPr/>
-          <p:nvPr/>
-        </p:nvSpPr>
-        <p:spPr>
-          <a:xfrm>
-            <a:off x="2833360" y="1417320"/>
-            <a:ext cx="1992112" cy="45720"/>
-          </a:xfrm>
-          <a:prstGeom prst="rect">
-            <a:avLst/>
-          </a:prstGeom>
-          <a:solidFill>
-            <a:srgbClr val="B98A2E"/>
-          </a:solidFill>
-          <a:ln/>
-        </p:spPr>
-      </p:sp>
-      <p:sp>
-        <p:nvSpPr>
-          <p:cNvPr id="13" name="Text 11"/>
-          <p:cNvSpPr/>
-          <p:nvPr/>
-        </p:nvSpPr>
-        <p:spPr>
-          <a:xfrm>
-            <a:off x="3061960" y="1618488"/>
-            <a:ext cx="1534912" cy="292608"/>
+          <p:cNvPr id="12" name="Text 10"/>
+          <p:cNvSpPr/>
+          <p:nvPr/>
+        </p:nvSpPr>
+        <p:spPr>
+          <a:xfrm>
+            <a:off x="795528" y="5193792"/>
+            <a:ext cx="10600639" cy="621792"/>
           </a:xfrm>
           <a:prstGeom prst="rect">
             <a:avLst/>
@@ -7791,721 +7771,53 @@
               <a:buNone/>
             </a:pPr>
             <a:r>
-              <a:rPr lang="en-US" sz="1150" b="1" dirty="0">
-                <a:solidFill>
-                  <a:srgbClr val="977024"/>
+              <a:rPr lang="en-US" sz="1100" dirty="0">
+                <a:solidFill>
+                  <a:srgbClr val="10161F"/>
                 </a:solidFill>
                 <a:latin typeface="Pretendard" pitchFamily="34" charset="0"/>
                 <a:ea typeface="Pretendard" pitchFamily="34" charset="-122"/>
                 <a:cs typeface="Pretendard" pitchFamily="34" charset="-120"/>
               </a:rPr>
-              <a:t>승강기 및 설비</a:t>
-            </a:r>
-            <a:endParaRPr lang="en-US" sz="1150" dirty="0"/>
-          </a:p>
-        </p:txBody>
-      </p:sp>
-      <p:sp>
-        <p:nvSpPr>
-          <p:cNvPr id="14" name="Text 12"/>
-          <p:cNvSpPr/>
-          <p:nvPr/>
-        </p:nvSpPr>
-        <p:spPr>
-          <a:xfrm>
-            <a:off x="3061960" y="1911096"/>
-            <a:ext cx="1534912" cy="402336"/>
-          </a:xfrm>
-          <a:prstGeom prst="rect">
-            <a:avLst/>
-          </a:prstGeom>
-          <a:noFill/>
-          <a:ln/>
-        </p:spPr>
-        <p:txBody>
-          <a:bodyPr wrap="square" lIns="0" tIns="0" rIns="0" bIns="0" rtlCol="0" anchor="ctr">
-            <a:normAutofit/>
-          </a:bodyPr>
+              <a:t>※ 본 리스크 체크는 공부 및 브로커 확인 기반이며, 매수 전 전문 실사팀(변호사/건축사)을 통한 정밀 실사가 필요합니다.</a:t>
+            </a:r>
+            <a:endParaRPr lang="en-US" sz="1100" dirty="0"/>
+          </a:p>
+        </p:txBody>
+      </p:sp>
+      <p:sp>
+        <p:nvSpPr>
+          <p:cNvPr id="13" name="Text 11"/>
+          <p:cNvSpPr/>
+          <p:nvPr/>
+        </p:nvSpPr>
+        <p:spPr>
+          <a:xfrm>
+            <a:off x="566928" y="6382512"/>
+            <a:ext cx="7315200" cy="219456"/>
+          </a:xfrm>
+          <a:prstGeom prst="rect">
+            <a:avLst/>
+          </a:prstGeom>
+          <a:noFill/>
+          <a:ln/>
+        </p:spPr>
+        <p:txBody>
+          <a:bodyPr wrap="square" lIns="0" tIns="0" rIns="0" bIns="0" rtlCol="0" anchor="ctr"/>
           <a:lstStyle/>
           <a:p>
             <a:pPr indent="0" marL="0">
               <a:buNone/>
             </a:pPr>
             <a:r>
-              <a:rPr lang="en-US" sz="1150" b="1" dirty="0">
-                <a:solidFill>
-                  <a:srgbClr val="10161F"/>
+              <a:rPr lang="en-US" sz="800" dirty="0">
+                <a:solidFill>
+                  <a:srgbClr val="718096"/>
                 </a:solidFill>
                 <a:latin typeface="Pretendard" pitchFamily="34" charset="0"/>
                 <a:ea typeface="Pretendard" pitchFamily="34" charset="-122"/>
                 <a:cs typeface="Pretendard" pitchFamily="34" charset="-120"/>
               </a:rPr>
-              <a:t>15인승 침대용 승강기 및 냉난방 설비 양호</a:t>
-            </a:r>
-            <a:endParaRPr lang="en-US" sz="1150" dirty="0"/>
-          </a:p>
-        </p:txBody>
-      </p:sp>
-      <p:sp>
-        <p:nvSpPr>
-          <p:cNvPr id="15" name="Text 13"/>
-          <p:cNvSpPr/>
-          <p:nvPr/>
-        </p:nvSpPr>
-        <p:spPr>
-          <a:xfrm>
-            <a:off x="3061960" y="2377440"/>
-            <a:ext cx="1534912" cy="2560320"/>
-          </a:xfrm>
-          <a:prstGeom prst="rect">
-            <a:avLst/>
-          </a:prstGeom>
-          <a:noFill/>
-          <a:ln/>
-        </p:spPr>
-        <p:txBody>
-          <a:bodyPr wrap="square" lIns="0" tIns="0" rIns="0" bIns="0" rtlCol="0" anchor="t">
-            <a:normAutofit/>
-          </a:bodyPr>
-          <a:lstStyle/>
-          <a:p>
-            <a:pPr marL="342900" indent="-342900">
-              <a:lnSpc>
-                <a:spcPct val="125000"/>
-              </a:lnSpc>
-              <a:buSzPct val="100000"/>
-              <a:buChar char="•"/>
-            </a:pPr>
-            <a:r>
-              <a:rPr lang="en-US" sz="1050" dirty="0">
-                <a:solidFill>
-                  <a:srgbClr val="10161F"/>
-                </a:solidFill>
-                <a:latin typeface="Pretendard" pitchFamily="34" charset="0"/>
-                <a:ea typeface="Pretendard" pitchFamily="34" charset="-122"/>
-                <a:cs typeface="Pretendard" pitchFamily="34" charset="-120"/>
-              </a:rPr>
-              <a:t>주기적 정기 점검 계약 유지로 관리 리스크 최소화</a:t>
-            </a:r>
-            <a:endParaRPr lang="en-US" sz="1050" dirty="0"/>
-          </a:p>
-        </p:txBody>
-      </p:sp>
-      <p:sp>
-        <p:nvSpPr>
-          <p:cNvPr id="16" name="Shape 14"/>
-          <p:cNvSpPr/>
-          <p:nvPr/>
-        </p:nvSpPr>
-        <p:spPr>
-          <a:xfrm>
-            <a:off x="5099792" y="1417320"/>
-            <a:ext cx="1992112" cy="3611880"/>
-          </a:xfrm>
-          <a:prstGeom prst="roundRect">
-            <a:avLst>
-              <a:gd name="adj" fmla="val 2754"/>
-            </a:avLst>
-          </a:prstGeom>
-          <a:solidFill>
-            <a:srgbClr val="F7FAFC"/>
-          </a:solidFill>
-          <a:ln w="6350">
-            <a:solidFill>
-              <a:srgbClr val="CBD5E0"/>
-            </a:solidFill>
-            <a:prstDash val="solid"/>
-          </a:ln>
-        </p:spPr>
-      </p:sp>
-      <p:sp>
-        <p:nvSpPr>
-          <p:cNvPr id="17" name="Shape 15"/>
-          <p:cNvSpPr/>
-          <p:nvPr/>
-        </p:nvSpPr>
-        <p:spPr>
-          <a:xfrm>
-            <a:off x="5099792" y="1417320"/>
-            <a:ext cx="1992112" cy="45720"/>
-          </a:xfrm>
-          <a:prstGeom prst="rect">
-            <a:avLst/>
-          </a:prstGeom>
-          <a:solidFill>
-            <a:srgbClr val="B98A2E"/>
-          </a:solidFill>
-          <a:ln/>
-        </p:spPr>
-      </p:sp>
-      <p:sp>
-        <p:nvSpPr>
-          <p:cNvPr id="18" name="Text 16"/>
-          <p:cNvSpPr/>
-          <p:nvPr/>
-        </p:nvSpPr>
-        <p:spPr>
-          <a:xfrm>
-            <a:off x="5328392" y="1618488"/>
-            <a:ext cx="1534912" cy="292608"/>
-          </a:xfrm>
-          <a:prstGeom prst="rect">
-            <a:avLst/>
-          </a:prstGeom>
-          <a:noFill/>
-          <a:ln/>
-        </p:spPr>
-        <p:txBody>
-          <a:bodyPr wrap="square" lIns="0" tIns="0" rIns="0" bIns="0" rtlCol="0" anchor="ctr"/>
-          <a:lstStyle/>
-          <a:p>
-            <a:pPr indent="0" marL="0">
-              <a:buNone/>
-            </a:pPr>
-            <a:r>
-              <a:rPr lang="en-US" sz="1150" b="1" dirty="0">
-                <a:solidFill>
-                  <a:srgbClr val="977024"/>
-                </a:solidFill>
-                <a:latin typeface="Pretendard" pitchFamily="34" charset="0"/>
-                <a:ea typeface="Pretendard" pitchFamily="34" charset="-122"/>
-                <a:cs typeface="Pretendard" pitchFamily="34" charset="-120"/>
-              </a:rPr>
-              <a:t>임차인 이탈 위험</a:t>
-            </a:r>
-            <a:endParaRPr lang="en-US" sz="1150" dirty="0"/>
-          </a:p>
-        </p:txBody>
-      </p:sp>
-      <p:sp>
-        <p:nvSpPr>
-          <p:cNvPr id="19" name="Text 17"/>
-          <p:cNvSpPr/>
-          <p:nvPr/>
-        </p:nvSpPr>
-        <p:spPr>
-          <a:xfrm>
-            <a:off x="5328392" y="1911096"/>
-            <a:ext cx="1534912" cy="402336"/>
-          </a:xfrm>
-          <a:prstGeom prst="rect">
-            <a:avLst/>
-          </a:prstGeom>
-          <a:noFill/>
-          <a:ln/>
-        </p:spPr>
-        <p:txBody>
-          <a:bodyPr wrap="square" lIns="0" tIns="0" rIns="0" bIns="0" rtlCol="0" anchor="ctr">
-            <a:normAutofit/>
-          </a:bodyPr>
-          <a:lstStyle/>
-          <a:p>
-            <a:pPr indent="0" marL="0">
-              <a:buNone/>
-            </a:pPr>
-            <a:r>
-              <a:rPr lang="en-US" sz="1150" b="1" dirty="0">
-                <a:solidFill>
-                  <a:srgbClr val="10161F"/>
-                </a:solidFill>
-                <a:latin typeface="Pretendard" pitchFamily="34" charset="0"/>
-                <a:ea typeface="Pretendard" pitchFamily="34" charset="-122"/>
-                <a:cs typeface="Pretendard" pitchFamily="34" charset="-120"/>
-              </a:rPr>
-              <a:t>병의원/약국 인테리어 투자비(호실당 5억↑) 존속</a:t>
-            </a:r>
-            <a:endParaRPr lang="en-US" sz="1150" dirty="0"/>
-          </a:p>
-        </p:txBody>
-      </p:sp>
-      <p:sp>
-        <p:nvSpPr>
-          <p:cNvPr id="20" name="Text 18"/>
-          <p:cNvSpPr/>
-          <p:nvPr/>
-        </p:nvSpPr>
-        <p:spPr>
-          <a:xfrm>
-            <a:off x="5328392" y="2377440"/>
-            <a:ext cx="1534912" cy="2560320"/>
-          </a:xfrm>
-          <a:prstGeom prst="rect">
-            <a:avLst/>
-          </a:prstGeom>
-          <a:noFill/>
-          <a:ln/>
-        </p:spPr>
-        <p:txBody>
-          <a:bodyPr wrap="square" lIns="0" tIns="0" rIns="0" bIns="0" rtlCol="0" anchor="t">
-            <a:normAutofit/>
-          </a:bodyPr>
-          <a:lstStyle/>
-          <a:p>
-            <a:pPr marL="342900" indent="-342900">
-              <a:lnSpc>
-                <a:spcPct val="125000"/>
-              </a:lnSpc>
-              <a:buSzPct val="100000"/>
-              <a:buChar char="•"/>
-            </a:pPr>
-            <a:r>
-              <a:rPr lang="en-US" sz="1050" dirty="0">
-                <a:solidFill>
-                  <a:srgbClr val="10161F"/>
-                </a:solidFill>
-                <a:latin typeface="Pretendard" pitchFamily="34" charset="0"/>
-                <a:ea typeface="Pretendard" pitchFamily="34" charset="-122"/>
-                <a:cs typeface="Pretendard" pitchFamily="34" charset="-120"/>
-              </a:rPr>
-              <a:t>WALE 3.5년 확보 및 만기 6개월 전 재계약 협상 개시</a:t>
-            </a:r>
-            <a:endParaRPr lang="en-US" sz="1050" dirty="0"/>
-          </a:p>
-        </p:txBody>
-      </p:sp>
-      <p:sp>
-        <p:nvSpPr>
-          <p:cNvPr id="21" name="Shape 19"/>
-          <p:cNvSpPr/>
-          <p:nvPr/>
-        </p:nvSpPr>
-        <p:spPr>
-          <a:xfrm>
-            <a:off x="7366224" y="1417320"/>
-            <a:ext cx="1992112" cy="3611880"/>
-          </a:xfrm>
-          <a:prstGeom prst="roundRect">
-            <a:avLst>
-              <a:gd name="adj" fmla="val 2754"/>
-            </a:avLst>
-          </a:prstGeom>
-          <a:solidFill>
-            <a:srgbClr val="F7FAFC"/>
-          </a:solidFill>
-          <a:ln w="6350">
-            <a:solidFill>
-              <a:srgbClr val="CBD5E0"/>
-            </a:solidFill>
-            <a:prstDash val="solid"/>
-          </a:ln>
-        </p:spPr>
-      </p:sp>
-      <p:sp>
-        <p:nvSpPr>
-          <p:cNvPr id="22" name="Shape 20"/>
-          <p:cNvSpPr/>
-          <p:nvPr/>
-        </p:nvSpPr>
-        <p:spPr>
-          <a:xfrm>
-            <a:off x="7366224" y="1417320"/>
-            <a:ext cx="1992112" cy="45720"/>
-          </a:xfrm>
-          <a:prstGeom prst="rect">
-            <a:avLst/>
-          </a:prstGeom>
-          <a:solidFill>
-            <a:srgbClr val="B98A2E"/>
-          </a:solidFill>
-          <a:ln/>
-        </p:spPr>
-      </p:sp>
-      <p:sp>
-        <p:nvSpPr>
-          <p:cNvPr id="23" name="Text 21"/>
-          <p:cNvSpPr/>
-          <p:nvPr/>
-        </p:nvSpPr>
-        <p:spPr>
-          <a:xfrm>
-            <a:off x="7594824" y="1618488"/>
-            <a:ext cx="1534912" cy="292608"/>
-          </a:xfrm>
-          <a:prstGeom prst="rect">
-            <a:avLst/>
-          </a:prstGeom>
-          <a:noFill/>
-          <a:ln/>
-        </p:spPr>
-        <p:txBody>
-          <a:bodyPr wrap="square" lIns="0" tIns="0" rIns="0" bIns="0" rtlCol="0" anchor="ctr"/>
-          <a:lstStyle/>
-          <a:p>
-            <a:pPr indent="0" marL="0">
-              <a:buNone/>
-            </a:pPr>
-            <a:r>
-              <a:rPr lang="en-US" sz="1150" b="1" dirty="0">
-                <a:solidFill>
-                  <a:srgbClr val="977024"/>
-                </a:solidFill>
-                <a:latin typeface="Pretendard" pitchFamily="34" charset="0"/>
-                <a:ea typeface="Pretendard" pitchFamily="34" charset="-122"/>
-                <a:cs typeface="Pretendard" pitchFamily="34" charset="-120"/>
-              </a:rPr>
-              <a:t>명도 및 분쟁</a:t>
-            </a:r>
-            <a:endParaRPr lang="en-US" sz="1150" dirty="0"/>
-          </a:p>
-        </p:txBody>
-      </p:sp>
-      <p:sp>
-        <p:nvSpPr>
-          <p:cNvPr id="24" name="Text 22"/>
-          <p:cNvSpPr/>
-          <p:nvPr/>
-        </p:nvSpPr>
-        <p:spPr>
-          <a:xfrm>
-            <a:off x="7594824" y="1911096"/>
-            <a:ext cx="1534912" cy="402336"/>
-          </a:xfrm>
-          <a:prstGeom prst="rect">
-            <a:avLst/>
-          </a:prstGeom>
-          <a:noFill/>
-          <a:ln/>
-        </p:spPr>
-        <p:txBody>
-          <a:bodyPr wrap="square" lIns="0" tIns="0" rIns="0" bIns="0" rtlCol="0" anchor="ctr">
-            <a:normAutofit/>
-          </a:bodyPr>
-          <a:lstStyle/>
-          <a:p>
-            <a:pPr indent="0" marL="0">
-              <a:buNone/>
-            </a:pPr>
-            <a:r>
-              <a:rPr lang="en-US" sz="1150" b="1" dirty="0">
-                <a:solidFill>
-                  <a:srgbClr val="10161F"/>
-                </a:solidFill>
-                <a:latin typeface="Pretendard" pitchFamily="34" charset="0"/>
-                <a:ea typeface="Pretendard" pitchFamily="34" charset="-122"/>
-                <a:cs typeface="Pretendard" pitchFamily="34" charset="-120"/>
-              </a:rPr>
-              <a:t>전층 정상 임대차 상태 (임대료 연체 0건)</a:t>
-            </a:r>
-            <a:endParaRPr lang="en-US" sz="1150" dirty="0"/>
-          </a:p>
-        </p:txBody>
-      </p:sp>
-      <p:sp>
-        <p:nvSpPr>
-          <p:cNvPr id="25" name="Text 23"/>
-          <p:cNvSpPr/>
-          <p:nvPr/>
-        </p:nvSpPr>
-        <p:spPr>
-          <a:xfrm>
-            <a:off x="7594824" y="2377440"/>
-            <a:ext cx="1534912" cy="2560320"/>
-          </a:xfrm>
-          <a:prstGeom prst="rect">
-            <a:avLst/>
-          </a:prstGeom>
-          <a:noFill/>
-          <a:ln/>
-        </p:spPr>
-        <p:txBody>
-          <a:bodyPr wrap="square" lIns="0" tIns="0" rIns="0" bIns="0" rtlCol="0" anchor="t">
-            <a:normAutofit/>
-          </a:bodyPr>
-          <a:lstStyle/>
-          <a:p>
-            <a:pPr marL="342900" indent="-342900">
-              <a:lnSpc>
-                <a:spcPct val="125000"/>
-              </a:lnSpc>
-              <a:buSzPct val="100000"/>
-              <a:buChar char="•"/>
-            </a:pPr>
-            <a:r>
-              <a:rPr lang="en-US" sz="1050" dirty="0">
-                <a:solidFill>
-                  <a:srgbClr val="10161F"/>
-                </a:solidFill>
-                <a:latin typeface="Pretendard" pitchFamily="34" charset="0"/>
-                <a:ea typeface="Pretendard" pitchFamily="34" charset="-122"/>
-                <a:cs typeface="Pretendard" pitchFamily="34" charset="-120"/>
-              </a:rPr>
-              <a:t>임대차 분쟁 및 소송 이력 없음 (명도 리스크 극소)</a:t>
-            </a:r>
-            <a:endParaRPr lang="en-US" sz="1050" dirty="0"/>
-          </a:p>
-        </p:txBody>
-      </p:sp>
-      <p:sp>
-        <p:nvSpPr>
-          <p:cNvPr id="26" name="Shape 24"/>
-          <p:cNvSpPr/>
-          <p:nvPr/>
-        </p:nvSpPr>
-        <p:spPr>
-          <a:xfrm>
-            <a:off x="9632655" y="1417320"/>
-            <a:ext cx="1992112" cy="3611880"/>
-          </a:xfrm>
-          <a:prstGeom prst="roundRect">
-            <a:avLst>
-              <a:gd name="adj" fmla="val 2754"/>
-            </a:avLst>
-          </a:prstGeom>
-          <a:solidFill>
-            <a:srgbClr val="F7FAFC"/>
-          </a:solidFill>
-          <a:ln w="6350">
-            <a:solidFill>
-              <a:srgbClr val="CBD5E0"/>
-            </a:solidFill>
-            <a:prstDash val="solid"/>
-          </a:ln>
-        </p:spPr>
-      </p:sp>
-      <p:sp>
-        <p:nvSpPr>
-          <p:cNvPr id="27" name="Shape 25"/>
-          <p:cNvSpPr/>
-          <p:nvPr/>
-        </p:nvSpPr>
-        <p:spPr>
-          <a:xfrm>
-            <a:off x="9632655" y="1417320"/>
-            <a:ext cx="1992112" cy="45720"/>
-          </a:xfrm>
-          <a:prstGeom prst="rect">
-            <a:avLst/>
-          </a:prstGeom>
-          <a:solidFill>
-            <a:srgbClr val="B98A2E"/>
-          </a:solidFill>
-          <a:ln/>
-        </p:spPr>
-      </p:sp>
-      <p:sp>
-        <p:nvSpPr>
-          <p:cNvPr id="28" name="Text 26"/>
-          <p:cNvSpPr/>
-          <p:nvPr/>
-        </p:nvSpPr>
-        <p:spPr>
-          <a:xfrm>
-            <a:off x="9861255" y="1618488"/>
-            <a:ext cx="1534912" cy="292608"/>
-          </a:xfrm>
-          <a:prstGeom prst="rect">
-            <a:avLst/>
-          </a:prstGeom>
-          <a:noFill/>
-          <a:ln/>
-        </p:spPr>
-        <p:txBody>
-          <a:bodyPr wrap="square" lIns="0" tIns="0" rIns="0" bIns="0" rtlCol="0" anchor="ctr"/>
-          <a:lstStyle/>
-          <a:p>
-            <a:pPr indent="0" marL="0">
-              <a:buNone/>
-            </a:pPr>
-            <a:r>
-              <a:rPr lang="en-US" sz="1150" b="1" dirty="0">
-                <a:solidFill>
-                  <a:srgbClr val="977024"/>
-                </a:solidFill>
-                <a:latin typeface="Pretendard" pitchFamily="34" charset="0"/>
-                <a:ea typeface="Pretendard" pitchFamily="34" charset="-122"/>
-                <a:cs typeface="Pretendard" pitchFamily="34" charset="-120"/>
-              </a:rPr>
-              <a:t>권리관계 및 금융</a:t>
-            </a:r>
-            <a:endParaRPr lang="en-US" sz="1150" dirty="0"/>
-          </a:p>
-        </p:txBody>
-      </p:sp>
-      <p:sp>
-        <p:nvSpPr>
-          <p:cNvPr id="29" name="Text 27"/>
-          <p:cNvSpPr/>
-          <p:nvPr/>
-        </p:nvSpPr>
-        <p:spPr>
-          <a:xfrm>
-            <a:off x="9861255" y="1911096"/>
-            <a:ext cx="1534912" cy="402336"/>
-          </a:xfrm>
-          <a:prstGeom prst="rect">
-            <a:avLst/>
-          </a:prstGeom>
-          <a:noFill/>
-          <a:ln/>
-        </p:spPr>
-        <p:txBody>
-          <a:bodyPr wrap="square" lIns="0" tIns="0" rIns="0" bIns="0" rtlCol="0" anchor="ctr">
-            <a:normAutofit/>
-          </a:bodyPr>
-          <a:lstStyle/>
-          <a:p>
-            <a:pPr indent="0" marL="0">
-              <a:buNone/>
-            </a:pPr>
-            <a:r>
-              <a:rPr lang="en-US" sz="1150" b="1" dirty="0">
-                <a:solidFill>
-                  <a:srgbClr val="10161F"/>
-                </a:solidFill>
-                <a:latin typeface="Pretendard" pitchFamily="34" charset="0"/>
-                <a:ea typeface="Pretendard" pitchFamily="34" charset="-122"/>
-                <a:cs typeface="Pretendard" pitchFamily="34" charset="-120"/>
-              </a:rPr>
-              <a:t>단독 법인 소유 (가압류/가처분 일체 없음)</a:t>
-            </a:r>
-            <a:endParaRPr lang="en-US" sz="1150" dirty="0"/>
-          </a:p>
-        </p:txBody>
-      </p:sp>
-      <p:sp>
-        <p:nvSpPr>
-          <p:cNvPr id="30" name="Text 28"/>
-          <p:cNvSpPr/>
-          <p:nvPr/>
-        </p:nvSpPr>
-        <p:spPr>
-          <a:xfrm>
-            <a:off x="9861255" y="2377440"/>
-            <a:ext cx="1534912" cy="2560320"/>
-          </a:xfrm>
-          <a:prstGeom prst="rect">
-            <a:avLst/>
-          </a:prstGeom>
-          <a:noFill/>
-          <a:ln/>
-        </p:spPr>
-        <p:txBody>
-          <a:bodyPr wrap="square" lIns="0" tIns="0" rIns="0" bIns="0" rtlCol="0" anchor="t">
-            <a:normAutofit/>
-          </a:bodyPr>
-          <a:lstStyle/>
-          <a:p>
-            <a:pPr marL="342900" indent="-342900">
-              <a:lnSpc>
-                <a:spcPct val="125000"/>
-              </a:lnSpc>
-              <a:buSzPct val="100000"/>
-              <a:buChar char="•"/>
-            </a:pPr>
-            <a:r>
-              <a:rPr lang="en-US" sz="1050" dirty="0">
-                <a:solidFill>
-                  <a:srgbClr val="10161F"/>
-                </a:solidFill>
-                <a:latin typeface="Pretendard" pitchFamily="34" charset="0"/>
-                <a:ea typeface="Pretendard" pitchFamily="34" charset="-122"/>
-                <a:cs typeface="Pretendard" pitchFamily="34" charset="-120"/>
-              </a:rPr>
-              <a:t>1금융권 기존 담보대출 85억(연 4.1%) 승계 적격 판정</a:t>
-            </a:r>
-            <a:endParaRPr lang="en-US" sz="1050" dirty="0"/>
-          </a:p>
-        </p:txBody>
-      </p:sp>
-      <p:sp>
-        <p:nvSpPr>
-          <p:cNvPr id="31" name="Shape 29"/>
-          <p:cNvSpPr/>
-          <p:nvPr/>
-        </p:nvSpPr>
-        <p:spPr>
-          <a:xfrm>
-            <a:off x="566928" y="5193792"/>
-            <a:ext cx="11057839" cy="621792"/>
-          </a:xfrm>
-          <a:prstGeom prst="roundRect">
-            <a:avLst>
-              <a:gd name="adj" fmla="val 8824"/>
-            </a:avLst>
-          </a:prstGeom>
-          <a:solidFill>
-            <a:srgbClr val="F7FAFC"/>
-          </a:solidFill>
-          <a:ln w="6350">
-            <a:solidFill>
-              <a:srgbClr val="CBD5E0"/>
-            </a:solidFill>
-            <a:prstDash val="solid"/>
-          </a:ln>
-        </p:spPr>
-      </p:sp>
-      <p:sp>
-        <p:nvSpPr>
-          <p:cNvPr id="32" name="Text 30"/>
-          <p:cNvSpPr/>
-          <p:nvPr/>
-        </p:nvSpPr>
-        <p:spPr>
-          <a:xfrm>
-            <a:off x="795528" y="5193792"/>
-            <a:ext cx="10600639" cy="621792"/>
-          </a:xfrm>
-          <a:prstGeom prst="rect">
-            <a:avLst/>
-          </a:prstGeom>
-          <a:noFill/>
-          <a:ln/>
-        </p:spPr>
-        <p:txBody>
-          <a:bodyPr wrap="square" lIns="0" tIns="0" rIns="0" bIns="0" rtlCol="0" anchor="ctr"/>
-          <a:lstStyle/>
-          <a:p>
-            <a:pPr indent="0" marL="0">
-              <a:buNone/>
-            </a:pPr>
-            <a:r>
-              <a:rPr lang="en-US" sz="1200" dirty="0">
-                <a:solidFill>
-                  <a:srgbClr val="10161F"/>
-                </a:solidFill>
-                <a:latin typeface="Pretendard" pitchFamily="34" charset="0"/>
-                <a:ea typeface="Pretendard" pitchFamily="34" charset="-122"/>
-                <a:cs typeface="Pretendard" pitchFamily="34" charset="-120"/>
-              </a:rPr>
-              <a:t>실사 총평: 자산의 물리적·권리적 하자가 없으며, 세부 임대차 계약서 및 등기사항증명서는 LOI 접수 후 원본 열람 가능합니다.</a:t>
-            </a:r>
-            <a:endParaRPr lang="en-US" sz="1200" dirty="0"/>
-          </a:p>
-        </p:txBody>
-      </p:sp>
-      <p:sp>
-        <p:nvSpPr>
-          <p:cNvPr id="33" name="Text 31"/>
-          <p:cNvSpPr/>
-          <p:nvPr/>
-        </p:nvSpPr>
-        <p:spPr>
-          <a:xfrm>
-            <a:off x="566928" y="6382512"/>
-            <a:ext cx="7315200" cy="219456"/>
-          </a:xfrm>
-          <a:prstGeom prst="rect">
-            <a:avLst/>
-          </a:prstGeom>
-          <a:noFill/>
-          <a:ln/>
-        </p:spPr>
-        <p:txBody>
-          <a:bodyPr wrap="square" lIns="0" tIns="0" rIns="0" bIns="0" rtlCol="0" anchor="ctr"/>
-          <a:lstStyle/>
-          <a:p>
-            <a:pPr indent="0" marL="0">
-              <a:buNone/>
-            </a:pPr>
-            <a:r>
-              <a:rPr lang="en-US" sz="800" dirty="0">
-                <a:solidFill>
-                  <a:srgbClr val="718096"/>
-                </a:solidFill>
-                <a:latin typeface="Pretendard" pitchFamily="34" charset="0"/>
-                <a:ea typeface="Pretendard" pitchFamily="34" charset="-122"/>
-                <a:cs typeface="Pretendard" pitchFamily="34" charset="-120"/>
-              </a:rPr>
               <a:t>크리딜   |   </a:t>
             </a:r>
             <a:endParaRPr lang="en-US" sz="800" dirty="0"/>
@@ -8514,7 +7826,7 @@
       </p:sp>
       <p:sp>
         <p:nvSpPr>
-          <p:cNvPr id="34" name="Text 32"/>
+          <p:cNvPr id="14" name="Text 12"/>
           <p:cNvSpPr/>
           <p:nvPr/>
         </p:nvSpPr>
@@ -8753,645 +8065,9 @@
                 <a:ea typeface="Pretendard" pitchFamily="34" charset="-122"/>
                 <a:cs typeface="Pretendard" pitchFamily="34" charset="-120"/>
               </a:rPr>
-              <a:t>3대 핵심 투자 포인트 (Investment Highlights)</a:t>
+              <a:t>밸류업 시나리오 (AI 추정)</a:t>
             </a:r>
             <a:endParaRPr lang="en-US" sz="1100" dirty="0"/>
-          </a:p>
-        </p:txBody>
-      </p:sp>
-      <p:sp>
-        <p:nvSpPr>
-          <p:cNvPr id="7" name="Shape 5"/>
-          <p:cNvSpPr/>
-          <p:nvPr/>
-        </p:nvSpPr>
-        <p:spPr>
-          <a:xfrm>
-            <a:off x="566928" y="1481328"/>
-            <a:ext cx="3472586" cy="2560320"/>
-          </a:xfrm>
-          <a:prstGeom prst="roundRect">
-            <a:avLst>
-              <a:gd name="adj" fmla="val 2857"/>
-            </a:avLst>
-          </a:prstGeom>
-          <a:solidFill>
-            <a:srgbClr val="F7FAFC"/>
-          </a:solidFill>
-          <a:ln w="10160">
-            <a:solidFill>
-              <a:srgbClr val="CBD5E0"/>
-            </a:solidFill>
-            <a:prstDash val="solid"/>
-          </a:ln>
-        </p:spPr>
-      </p:sp>
-      <p:sp>
-        <p:nvSpPr>
-          <p:cNvPr id="8" name="Shape 6"/>
-          <p:cNvSpPr/>
-          <p:nvPr/>
-        </p:nvSpPr>
-        <p:spPr>
-          <a:xfrm>
-            <a:off x="566928" y="1481328"/>
-            <a:ext cx="3472586" cy="54864"/>
-          </a:xfrm>
-          <a:prstGeom prst="rect">
-            <a:avLst/>
-          </a:prstGeom>
-          <a:solidFill>
-            <a:srgbClr val="B98A2E"/>
-          </a:solidFill>
-          <a:ln/>
-        </p:spPr>
-      </p:sp>
-      <p:sp>
-        <p:nvSpPr>
-          <p:cNvPr id="9" name="Shape 7"/>
-          <p:cNvSpPr/>
-          <p:nvPr/>
-        </p:nvSpPr>
-        <p:spPr>
-          <a:xfrm>
-            <a:off x="795528" y="1755648"/>
-            <a:ext cx="475488" cy="292608"/>
-          </a:xfrm>
-          <a:prstGeom prst="roundRect">
-            <a:avLst>
-              <a:gd name="adj" fmla="val 12500"/>
-            </a:avLst>
-          </a:prstGeom>
-          <a:solidFill>
-            <a:srgbClr val="D9B668"/>
-          </a:solidFill>
-          <a:ln/>
-        </p:spPr>
-      </p:sp>
-      <p:sp>
-        <p:nvSpPr>
-          <p:cNvPr id="10" name="Text 8"/>
-          <p:cNvSpPr/>
-          <p:nvPr/>
-        </p:nvSpPr>
-        <p:spPr>
-          <a:xfrm>
-            <a:off x="795528" y="1755648"/>
-            <a:ext cx="475488" cy="292608"/>
-          </a:xfrm>
-          <a:prstGeom prst="rect">
-            <a:avLst/>
-          </a:prstGeom>
-          <a:noFill/>
-          <a:ln/>
-        </p:spPr>
-        <p:txBody>
-          <a:bodyPr wrap="square" lIns="0" tIns="0" rIns="0" bIns="0" rtlCol="0" anchor="ctr"/>
-          <a:lstStyle/>
-          <a:p>
-            <a:pPr algn="ctr" indent="0" marL="0">
-              <a:buNone/>
-            </a:pPr>
-            <a:r>
-              <a:rPr lang="en-US" sz="1100" b="1" dirty="0">
-                <a:solidFill>
-                  <a:srgbClr val="977024"/>
-                </a:solidFill>
-                <a:latin typeface="Arial" pitchFamily="34" charset="0"/>
-                <a:ea typeface="Arial" pitchFamily="34" charset="-122"/>
-                <a:cs typeface="Arial" pitchFamily="34" charset="-120"/>
-              </a:rPr>
-              <a:t>01</a:t>
-            </a:r>
-            <a:endParaRPr lang="en-US" sz="1100" dirty="0"/>
-          </a:p>
-        </p:txBody>
-      </p:sp>
-      <p:sp>
-        <p:nvSpPr>
-          <p:cNvPr id="11" name="Text 9"/>
-          <p:cNvSpPr/>
-          <p:nvPr/>
-        </p:nvSpPr>
-        <p:spPr>
-          <a:xfrm>
-            <a:off x="795528" y="2194560"/>
-            <a:ext cx="3015386" cy="365760"/>
-          </a:xfrm>
-          <a:prstGeom prst="rect">
-            <a:avLst/>
-          </a:prstGeom>
-          <a:noFill/>
-          <a:ln/>
-        </p:spPr>
-        <p:txBody>
-          <a:bodyPr wrap="square" lIns="0" tIns="0" rIns="0" bIns="0" rtlCol="0" anchor="t"/>
-          <a:lstStyle/>
-          <a:p>
-            <a:pPr indent="0" marL="0">
-              <a:buNone/>
-            </a:pPr>
-            <a:r>
-              <a:rPr lang="en-US" sz="1500" b="1" dirty="0">
-                <a:solidFill>
-                  <a:srgbClr val="10161F"/>
-                </a:solidFill>
-                <a:latin typeface="Pretendard" pitchFamily="34" charset="0"/>
-                <a:ea typeface="Pretendard" pitchFamily="34" charset="-122"/>
-                <a:cs typeface="Pretendard" pitchFamily="34" charset="-120"/>
-              </a:rPr>
-              <a:t>원금 안전판 확보</a:t>
-            </a:r>
-            <a:endParaRPr lang="en-US" sz="1500" dirty="0"/>
-          </a:p>
-        </p:txBody>
-      </p:sp>
-      <p:sp>
-        <p:nvSpPr>
-          <p:cNvPr id="12" name="Shape 10"/>
-          <p:cNvSpPr/>
-          <p:nvPr/>
-        </p:nvSpPr>
-        <p:spPr>
-          <a:xfrm>
-            <a:off x="795528" y="2624328"/>
-            <a:ext cx="3015386" cy="0"/>
-          </a:xfrm>
-          <a:prstGeom prst="line">
-            <a:avLst/>
-          </a:prstGeom>
-          <a:noFill/>
-          <a:ln w="6350">
-            <a:solidFill>
-              <a:srgbClr val="CBD5E0"/>
-            </a:solidFill>
-            <a:prstDash val="solid"/>
-          </a:ln>
-        </p:spPr>
-      </p:sp>
-      <p:sp>
-        <p:nvSpPr>
-          <p:cNvPr id="13" name="Text 11"/>
-          <p:cNvSpPr/>
-          <p:nvPr/>
-        </p:nvSpPr>
-        <p:spPr>
-          <a:xfrm>
-            <a:off x="795528" y="2779776"/>
-            <a:ext cx="3015386" cy="1051560"/>
-          </a:xfrm>
-          <a:prstGeom prst="rect">
-            <a:avLst/>
-          </a:prstGeom>
-          <a:noFill/>
-          <a:ln/>
-        </p:spPr>
-        <p:txBody>
-          <a:bodyPr wrap="square" lIns="0" tIns="0" rIns="0" bIns="0" rtlCol="0" anchor="t"/>
-          <a:lstStyle/>
-          <a:p>
-            <a:pPr indent="0" marL="0">
-              <a:lnSpc>
-                <a:spcPct val="130000"/>
-              </a:lnSpc>
-              <a:buNone/>
-            </a:pPr>
-            <a:r>
-              <a:rPr lang="en-US" sz="1200" dirty="0">
-                <a:solidFill>
-                  <a:srgbClr val="10161F"/>
-                </a:solidFill>
-                <a:latin typeface="Pretendard" pitchFamily="34" charset="0"/>
-                <a:ea typeface="Pretendard" pitchFamily="34" charset="-122"/>
-                <a:cs typeface="Pretendard" pitchFamily="34" charset="-120"/>
-              </a:rPr>
-              <a:t>이천권역의 핵심 입지로, 우량한 대지 지분 가치가 하방 경직성을 강력히 지지합니다.</a:t>
-            </a:r>
-            <a:endParaRPr lang="en-US" sz="1200" dirty="0"/>
-          </a:p>
-        </p:txBody>
-      </p:sp>
-      <p:sp>
-        <p:nvSpPr>
-          <p:cNvPr id="14" name="Shape 12"/>
-          <p:cNvSpPr/>
-          <p:nvPr/>
-        </p:nvSpPr>
-        <p:spPr>
-          <a:xfrm>
-            <a:off x="4359554" y="1481328"/>
-            <a:ext cx="3472586" cy="2560320"/>
-          </a:xfrm>
-          <a:prstGeom prst="roundRect">
-            <a:avLst>
-              <a:gd name="adj" fmla="val 2857"/>
-            </a:avLst>
-          </a:prstGeom>
-          <a:solidFill>
-            <a:srgbClr val="F7FAFC"/>
-          </a:solidFill>
-          <a:ln w="10160">
-            <a:solidFill>
-              <a:srgbClr val="CBD5E0"/>
-            </a:solidFill>
-            <a:prstDash val="solid"/>
-          </a:ln>
-        </p:spPr>
-      </p:sp>
-      <p:sp>
-        <p:nvSpPr>
-          <p:cNvPr id="15" name="Shape 13"/>
-          <p:cNvSpPr/>
-          <p:nvPr/>
-        </p:nvSpPr>
-        <p:spPr>
-          <a:xfrm>
-            <a:off x="4359554" y="1481328"/>
-            <a:ext cx="3472586" cy="54864"/>
-          </a:xfrm>
-          <a:prstGeom prst="rect">
-            <a:avLst/>
-          </a:prstGeom>
-          <a:solidFill>
-            <a:srgbClr val="B98A2E"/>
-          </a:solidFill>
-          <a:ln/>
-        </p:spPr>
-      </p:sp>
-      <p:sp>
-        <p:nvSpPr>
-          <p:cNvPr id="16" name="Shape 14"/>
-          <p:cNvSpPr/>
-          <p:nvPr/>
-        </p:nvSpPr>
-        <p:spPr>
-          <a:xfrm>
-            <a:off x="4588154" y="1755648"/>
-            <a:ext cx="475488" cy="292608"/>
-          </a:xfrm>
-          <a:prstGeom prst="roundRect">
-            <a:avLst>
-              <a:gd name="adj" fmla="val 12500"/>
-            </a:avLst>
-          </a:prstGeom>
-          <a:solidFill>
-            <a:srgbClr val="D9B668"/>
-          </a:solidFill>
-          <a:ln/>
-        </p:spPr>
-      </p:sp>
-      <p:sp>
-        <p:nvSpPr>
-          <p:cNvPr id="17" name="Text 15"/>
-          <p:cNvSpPr/>
-          <p:nvPr/>
-        </p:nvSpPr>
-        <p:spPr>
-          <a:xfrm>
-            <a:off x="4588154" y="1755648"/>
-            <a:ext cx="475488" cy="292608"/>
-          </a:xfrm>
-          <a:prstGeom prst="rect">
-            <a:avLst/>
-          </a:prstGeom>
-          <a:noFill/>
-          <a:ln/>
-        </p:spPr>
-        <p:txBody>
-          <a:bodyPr wrap="square" lIns="0" tIns="0" rIns="0" bIns="0" rtlCol="0" anchor="ctr"/>
-          <a:lstStyle/>
-          <a:p>
-            <a:pPr algn="ctr" indent="0" marL="0">
-              <a:buNone/>
-            </a:pPr>
-            <a:r>
-              <a:rPr lang="en-US" sz="1100" b="1" dirty="0">
-                <a:solidFill>
-                  <a:srgbClr val="977024"/>
-                </a:solidFill>
-                <a:latin typeface="Arial" pitchFamily="34" charset="0"/>
-                <a:ea typeface="Arial" pitchFamily="34" charset="-122"/>
-                <a:cs typeface="Arial" pitchFamily="34" charset="-120"/>
-              </a:rPr>
-              <a:t>02</a:t>
-            </a:r>
-            <a:endParaRPr lang="en-US" sz="1100" dirty="0"/>
-          </a:p>
-        </p:txBody>
-      </p:sp>
-      <p:sp>
-        <p:nvSpPr>
-          <p:cNvPr id="18" name="Text 16"/>
-          <p:cNvSpPr/>
-          <p:nvPr/>
-        </p:nvSpPr>
-        <p:spPr>
-          <a:xfrm>
-            <a:off x="4588154" y="2194560"/>
-            <a:ext cx="3015386" cy="365760"/>
-          </a:xfrm>
-          <a:prstGeom prst="rect">
-            <a:avLst/>
-          </a:prstGeom>
-          <a:noFill/>
-          <a:ln/>
-        </p:spPr>
-        <p:txBody>
-          <a:bodyPr wrap="square" lIns="0" tIns="0" rIns="0" bIns="0" rtlCol="0" anchor="t"/>
-          <a:lstStyle/>
-          <a:p>
-            <a:pPr indent="0" marL="0">
-              <a:buNone/>
-            </a:pPr>
-            <a:r>
-              <a:rPr lang="en-US" sz="1500" b="1" dirty="0">
-                <a:solidFill>
-                  <a:srgbClr val="10161F"/>
-                </a:solidFill>
-                <a:latin typeface="Pretendard" pitchFamily="34" charset="0"/>
-                <a:ea typeface="Pretendard" pitchFamily="34" charset="-122"/>
-                <a:cs typeface="Pretendard" pitchFamily="34" charset="-120"/>
-              </a:rPr>
-              <a:t>확실한 월 현금흐름</a:t>
-            </a:r>
-            <a:endParaRPr lang="en-US" sz="1500" dirty="0"/>
-          </a:p>
-        </p:txBody>
-      </p:sp>
-      <p:sp>
-        <p:nvSpPr>
-          <p:cNvPr id="19" name="Shape 17"/>
-          <p:cNvSpPr/>
-          <p:nvPr/>
-        </p:nvSpPr>
-        <p:spPr>
-          <a:xfrm>
-            <a:off x="4588154" y="2624328"/>
-            <a:ext cx="3015386" cy="0"/>
-          </a:xfrm>
-          <a:prstGeom prst="line">
-            <a:avLst/>
-          </a:prstGeom>
-          <a:noFill/>
-          <a:ln w="6350">
-            <a:solidFill>
-              <a:srgbClr val="CBD5E0"/>
-            </a:solidFill>
-            <a:prstDash val="solid"/>
-          </a:ln>
-        </p:spPr>
-      </p:sp>
-      <p:sp>
-        <p:nvSpPr>
-          <p:cNvPr id="20" name="Text 18"/>
-          <p:cNvSpPr/>
-          <p:nvPr/>
-        </p:nvSpPr>
-        <p:spPr>
-          <a:xfrm>
-            <a:off x="4588154" y="2779776"/>
-            <a:ext cx="3015386" cy="1051560"/>
-          </a:xfrm>
-          <a:prstGeom prst="rect">
-            <a:avLst/>
-          </a:prstGeom>
-          <a:noFill/>
-          <a:ln/>
-        </p:spPr>
-        <p:txBody>
-          <a:bodyPr wrap="square" lIns="0" tIns="0" rIns="0" bIns="0" rtlCol="0" anchor="t"/>
-          <a:lstStyle/>
-          <a:p>
-            <a:pPr indent="0" marL="0">
-              <a:lnSpc>
-                <a:spcPct val="130000"/>
-              </a:lnSpc>
-              <a:buNone/>
-            </a:pPr>
-            <a:r>
-              <a:rPr lang="en-US" sz="1200" dirty="0">
-                <a:solidFill>
-                  <a:srgbClr val="10161F"/>
-                </a:solidFill>
-                <a:latin typeface="Pretendard" pitchFamily="34" charset="0"/>
-                <a:ea typeface="Pretendard" pitchFamily="34" charset="-122"/>
-                <a:cs typeface="Pretendard" pitchFamily="34" charset="-120"/>
-              </a:rPr>
-              <a:t>우량 테넌트 만실 운영 및 장기 임대차 구조를 기반으로 매월 안정적인 순영업소득(NOI) 창출이 기대됩니다.</a:t>
-            </a:r>
-            <a:endParaRPr lang="en-US" sz="1200" dirty="0"/>
-          </a:p>
-        </p:txBody>
-      </p:sp>
-      <p:sp>
-        <p:nvSpPr>
-          <p:cNvPr id="21" name="Shape 19"/>
-          <p:cNvSpPr/>
-          <p:nvPr/>
-        </p:nvSpPr>
-        <p:spPr>
-          <a:xfrm>
-            <a:off x="8152181" y="1481328"/>
-            <a:ext cx="3472586" cy="2560320"/>
-          </a:xfrm>
-          <a:prstGeom prst="roundRect">
-            <a:avLst>
-              <a:gd name="adj" fmla="val 2857"/>
-            </a:avLst>
-          </a:prstGeom>
-          <a:solidFill>
-            <a:srgbClr val="F7FAFC"/>
-          </a:solidFill>
-          <a:ln w="10160">
-            <a:solidFill>
-              <a:srgbClr val="CBD5E0"/>
-            </a:solidFill>
-            <a:prstDash val="solid"/>
-          </a:ln>
-        </p:spPr>
-      </p:sp>
-      <p:sp>
-        <p:nvSpPr>
-          <p:cNvPr id="22" name="Shape 20"/>
-          <p:cNvSpPr/>
-          <p:nvPr/>
-        </p:nvSpPr>
-        <p:spPr>
-          <a:xfrm>
-            <a:off x="8152181" y="1481328"/>
-            <a:ext cx="3472586" cy="54864"/>
-          </a:xfrm>
-          <a:prstGeom prst="rect">
-            <a:avLst/>
-          </a:prstGeom>
-          <a:solidFill>
-            <a:srgbClr val="B98A2E"/>
-          </a:solidFill>
-          <a:ln/>
-        </p:spPr>
-      </p:sp>
-      <p:sp>
-        <p:nvSpPr>
-          <p:cNvPr id="23" name="Shape 21"/>
-          <p:cNvSpPr/>
-          <p:nvPr/>
-        </p:nvSpPr>
-        <p:spPr>
-          <a:xfrm>
-            <a:off x="8380781" y="1755648"/>
-            <a:ext cx="475488" cy="292608"/>
-          </a:xfrm>
-          <a:prstGeom prst="roundRect">
-            <a:avLst>
-              <a:gd name="adj" fmla="val 12500"/>
-            </a:avLst>
-          </a:prstGeom>
-          <a:solidFill>
-            <a:srgbClr val="D9B668"/>
-          </a:solidFill>
-          <a:ln/>
-        </p:spPr>
-      </p:sp>
-      <p:sp>
-        <p:nvSpPr>
-          <p:cNvPr id="24" name="Text 22"/>
-          <p:cNvSpPr/>
-          <p:nvPr/>
-        </p:nvSpPr>
-        <p:spPr>
-          <a:xfrm>
-            <a:off x="8380781" y="1755648"/>
-            <a:ext cx="475488" cy="292608"/>
-          </a:xfrm>
-          <a:prstGeom prst="rect">
-            <a:avLst/>
-          </a:prstGeom>
-          <a:noFill/>
-          <a:ln/>
-        </p:spPr>
-        <p:txBody>
-          <a:bodyPr wrap="square" lIns="0" tIns="0" rIns="0" bIns="0" rtlCol="0" anchor="ctr"/>
-          <a:lstStyle/>
-          <a:p>
-            <a:pPr algn="ctr" indent="0" marL="0">
-              <a:buNone/>
-            </a:pPr>
-            <a:r>
-              <a:rPr lang="en-US" sz="1100" b="1" dirty="0">
-                <a:solidFill>
-                  <a:srgbClr val="977024"/>
-                </a:solidFill>
-                <a:latin typeface="Arial" pitchFamily="34" charset="0"/>
-                <a:ea typeface="Arial" pitchFamily="34" charset="-122"/>
-                <a:cs typeface="Arial" pitchFamily="34" charset="-120"/>
-              </a:rPr>
-              <a:t>03</a:t>
-            </a:r>
-            <a:endParaRPr lang="en-US" sz="1100" dirty="0"/>
-          </a:p>
-        </p:txBody>
-      </p:sp>
-      <p:sp>
-        <p:nvSpPr>
-          <p:cNvPr id="25" name="Text 23"/>
-          <p:cNvSpPr/>
-          <p:nvPr/>
-        </p:nvSpPr>
-        <p:spPr>
-          <a:xfrm>
-            <a:off x="8380781" y="2194560"/>
-            <a:ext cx="3015386" cy="365760"/>
-          </a:xfrm>
-          <a:prstGeom prst="rect">
-            <a:avLst/>
-          </a:prstGeom>
-          <a:noFill/>
-          <a:ln/>
-        </p:spPr>
-        <p:txBody>
-          <a:bodyPr wrap="square" lIns="0" tIns="0" rIns="0" bIns="0" rtlCol="0" anchor="t"/>
-          <a:lstStyle/>
-          <a:p>
-            <a:pPr indent="0" marL="0">
-              <a:buNone/>
-            </a:pPr>
-            <a:r>
-              <a:rPr lang="en-US" sz="1500" b="1" dirty="0">
-                <a:solidFill>
-                  <a:srgbClr val="10161F"/>
-                </a:solidFill>
-                <a:latin typeface="Pretendard" pitchFamily="34" charset="0"/>
-                <a:ea typeface="Pretendard" pitchFamily="34" charset="-122"/>
-                <a:cs typeface="Pretendard" pitchFamily="34" charset="-120"/>
-              </a:rPr>
-              <a:t>가치 상승 및 출구 전략</a:t>
-            </a:r>
-            <a:endParaRPr lang="en-US" sz="1500" dirty="0"/>
-          </a:p>
-        </p:txBody>
-      </p:sp>
-      <p:sp>
-        <p:nvSpPr>
-          <p:cNvPr id="26" name="Shape 24"/>
-          <p:cNvSpPr/>
-          <p:nvPr/>
-        </p:nvSpPr>
-        <p:spPr>
-          <a:xfrm>
-            <a:off x="8380781" y="2624328"/>
-            <a:ext cx="3015386" cy="0"/>
-          </a:xfrm>
-          <a:prstGeom prst="line">
-            <a:avLst/>
-          </a:prstGeom>
-          <a:noFill/>
-          <a:ln w="6350">
-            <a:solidFill>
-              <a:srgbClr val="CBD5E0"/>
-            </a:solidFill>
-            <a:prstDash val="solid"/>
-          </a:ln>
-        </p:spPr>
-      </p:sp>
-      <p:sp>
-        <p:nvSpPr>
-          <p:cNvPr id="27" name="Text 25"/>
-          <p:cNvSpPr/>
-          <p:nvPr/>
-        </p:nvSpPr>
-        <p:spPr>
-          <a:xfrm>
-            <a:off x="8380781" y="2779776"/>
-            <a:ext cx="3015386" cy="1051560"/>
-          </a:xfrm>
-          <a:prstGeom prst="rect">
-            <a:avLst/>
-          </a:prstGeom>
-          <a:noFill/>
-          <a:ln/>
-        </p:spPr>
-        <p:txBody>
-          <a:bodyPr wrap="square" lIns="0" tIns="0" rIns="0" bIns="0" rtlCol="0" anchor="t"/>
-          <a:lstStyle/>
-          <a:p>
-            <a:pPr indent="0" marL="0">
-              <a:lnSpc>
-                <a:spcPct val="130000"/>
-              </a:lnSpc>
-              <a:buNone/>
-            </a:pPr>
-            <a:r>
-              <a:rPr lang="en-US" sz="1200" dirty="0">
-                <a:solidFill>
-                  <a:srgbClr val="10161F"/>
-                </a:solidFill>
-                <a:latin typeface="Pretendard" pitchFamily="34" charset="0"/>
-                <a:ea typeface="Pretendard" pitchFamily="34" charset="-122"/>
-                <a:cs typeface="Pretendard" pitchFamily="34" charset="-120"/>
-              </a:rPr>
-              <a:t>현행 공법 여력을 활용한 밸류업 기회와 더불어 향후 권역 지가 상승에 따른 시세차익 실현이 유력합니다.</a:t>
-            </a:r>
-            <a:endParaRPr lang="en-US" sz="1200" dirty="0"/>
           </a:p>
         </p:txBody>
       </p:sp>
@@ -9418,9 +8094,10 @@
             <a:tbl>
               <a:tblPr/>
               <a:tblGrid>
-                <a:gridCol w="3685946"/>
-                <a:gridCol w="3685946"/>
-                <a:gridCol w="3685946"/>
+                <a:gridCol w="2764460"/>
+                <a:gridCol w="2764460"/>
+                <a:gridCol w="2764460"/>
+                <a:gridCol w="2764460"/>
               </a:tblGrid>
               <a:tr h="329184">
                 <a:tc>
@@ -9440,7 +8117,7 @@
                           <a:ea typeface="Pretendard" pitchFamily="34" charset="-122"/>
                           <a:cs typeface="Pretendard" pitchFamily="34" charset="-120"/>
                         </a:rPr>
-                        <a:t>유형</a:t>
+                        <a:t>시나리오</a:t>
                       </a:r>
                       <a:endParaRPr lang="en-US" sz="1050" dirty="0">
                         <a:latin typeface="Pretendard" charset="0"/>
@@ -9508,7 +8185,21 @@
                           <a:ea typeface="Pretendard" pitchFamily="34" charset="-122"/>
                           <a:cs typeface="Pretendard" pitchFamily="34" charset="-120"/>
                         </a:rPr>
-                        <a:t>적합도</a:t>
+                        <a:t>NOI </a:t>
+                      </a:r>
+                      <a:pPr indent="0" marL="0">
+                        <a:buNone/>
+                      </a:pPr>
+                      <a:r>
+                        <a:rPr lang="en-US" sz="1050" b="1" dirty="0">
+                          <a:solidFill>
+                            <a:srgbClr val="718096"/>
+                          </a:solidFill>
+                          <a:latin typeface="Pretendard" pitchFamily="34" charset="0"/>
+                          <a:ea typeface="Pretendard" pitchFamily="34" charset="-122"/>
+                          <a:cs typeface="Pretendard" pitchFamily="34" charset="-120"/>
+                        </a:rPr>
+                        <a:t>개선</a:t>
                       </a:r>
                       <a:endParaRPr lang="en-US" sz="1050" dirty="0">
                         <a:latin typeface="Pretendard" charset="0"/>
@@ -9576,7 +8267,117 @@
                           <a:ea typeface="Pretendard" pitchFamily="34" charset="-122"/>
                           <a:cs typeface="Pretendard" pitchFamily="34" charset="-120"/>
                         </a:rPr>
-                        <a:t>이유</a:t>
+                        <a:t>개선 </a:t>
+                      </a:r>
+                      <a:pPr indent="0" marL="0">
+                        <a:buNone/>
+                      </a:pPr>
+                      <a:r>
+                        <a:rPr lang="en-US" sz="1050" b="1" dirty="0">
+                          <a:solidFill>
+                            <a:srgbClr val="718096"/>
+                          </a:solidFill>
+                          <a:latin typeface="Pretendard" pitchFamily="34" charset="0"/>
+                          <a:ea typeface="Pretendard" pitchFamily="34" charset="-122"/>
+                          <a:cs typeface="Pretendard" pitchFamily="34" charset="-120"/>
+                        </a:rPr>
+                        <a:t>Cap </a:t>
+                      </a:r>
+                      <a:pPr indent="0" marL="0">
+                        <a:buNone/>
+                      </a:pPr>
+                      <a:r>
+                        <a:rPr lang="en-US" sz="1050" b="1" dirty="0">
+                          <a:solidFill>
+                            <a:srgbClr val="718096"/>
+                          </a:solidFill>
+                          <a:latin typeface="Pretendard" pitchFamily="34" charset="0"/>
+                          <a:ea typeface="Pretendard" pitchFamily="34" charset="-122"/>
+                          <a:cs typeface="Pretendard" pitchFamily="34" charset="-120"/>
+                        </a:rPr>
+                        <a:t>Rate</a:t>
+                      </a:r>
+                      <a:endParaRPr lang="en-US" sz="1050" dirty="0">
+                        <a:latin typeface="Pretendard" charset="0"/>
+                        <a:ea typeface="Pretendard" charset="0"/>
+                        <a:cs typeface="Pretendard" charset="0"/>
+                      </a:endParaRPr>
+                    </a:p>
+                  </a:txBody>
+                  <a:tcPr marL="50800" marR="50800" marT="25400" marB="25400" anchor="ctr">
+                    <a:lnL w="3810" cap="flat" cmpd="sng" algn="ctr">
+                      <a:solidFill>
+                        <a:srgbClr val="CBD5E0"/>
+                      </a:solidFill>
+                      <a:prstDash val="solid"/>
+                      <a:round/>
+                      <a:headEnd type="none" w="med" len="med"/>
+                      <a:tailEnd type="none" w="med" len="med"/>
+                    </a:lnL>
+                    <a:lnR w="3810" cap="flat" cmpd="sng" algn="ctr">
+                      <a:solidFill>
+                        <a:srgbClr val="CBD5E0"/>
+                      </a:solidFill>
+                      <a:prstDash val="solid"/>
+                      <a:round/>
+                      <a:headEnd type="none" w="med" len="med"/>
+                      <a:tailEnd type="none" w="med" len="med"/>
+                    </a:lnR>
+                    <a:lnT w="3810" cap="flat" cmpd="sng" algn="ctr">
+                      <a:solidFill>
+                        <a:srgbClr val="CBD5E0"/>
+                      </a:solidFill>
+                      <a:prstDash val="solid"/>
+                      <a:round/>
+                      <a:headEnd type="none" w="med" len="med"/>
+                      <a:tailEnd type="none" w="med" len="med"/>
+                    </a:lnT>
+                    <a:lnB w="3810" cap="flat" cmpd="sng" algn="ctr">
+                      <a:solidFill>
+                        <a:srgbClr val="CBD5E0"/>
+                      </a:solidFill>
+                      <a:prstDash val="solid"/>
+                      <a:round/>
+                      <a:headEnd type="none" w="med" len="med"/>
+                      <a:tailEnd type="none" w="med" len="med"/>
+                    </a:lnB>
+                    <a:solidFill>
+                      <a:srgbClr val="F7FAFC"/>
+                    </a:solidFill>
+                  </a:tcPr>
+                </a:tc>
+                <a:tc>
+                  <a:txBody>
+                    <a:bodyPr/>
+                    <a:lstStyle/>
+                    <a:p>
+                      <a:pPr indent="0" marL="0">
+                        <a:buNone/>
+                      </a:pPr>
+                      <a:r>
+                        <a:rPr lang="en-US" sz="1050" b="1" dirty="0">
+                          <a:solidFill>
+                            <a:srgbClr val="718096"/>
+                          </a:solidFill>
+                          <a:latin typeface="Pretendard" pitchFamily="34" charset="0"/>
+                          <a:ea typeface="Pretendard" pitchFamily="34" charset="-122"/>
+                          <a:cs typeface="Pretendard" pitchFamily="34" charset="-120"/>
+                        </a:rPr>
+                        <a:t>투자 </a:t>
+                      </a:r>
+                      <a:pPr indent="0" marL="0">
+                        <a:buNone/>
+                      </a:pPr>
+                      <a:r>
+                        <a:rPr lang="en-US" sz="1050" b="1" dirty="0">
+                          <a:solidFill>
+                            <a:srgbClr val="718096"/>
+                          </a:solidFill>
+                          <a:latin typeface="Pretendard" pitchFamily="34" charset="0"/>
+                          <a:ea typeface="Pretendard" pitchFamily="34" charset="-122"/>
+                          <a:cs typeface="Pretendard" pitchFamily="34" charset="-120"/>
+                        </a:rPr>
+                        <a:t>비용</a:t>
                       </a:r>
                       <a:endParaRPr lang="en-US" sz="1050" dirty="0">
                         <a:latin typeface="Pretendard" charset="0"/>
@@ -9646,7 +8447,49 @@
                           <a:ea typeface="Pretendard" pitchFamily="34" charset="-122"/>
                           <a:cs typeface="Pretendard" pitchFamily="34" charset="-120"/>
                         </a:rPr>
-                        <a:t>(임대수익)</a:t>
+                        <a:t>② </a:t>
+                      </a:r>
+                      <a:pPr indent="0" marL="0">
+                        <a:buNone/>
+                      </a:pPr>
+                      <a:r>
+                        <a:rPr lang="en-US" sz="1050" b="1" dirty="0">
+                          <a:solidFill>
+                            <a:srgbClr val="10161F"/>
+                          </a:solidFill>
+                          <a:latin typeface="Pretendard" pitchFamily="34" charset="0"/>
+                          <a:ea typeface="Pretendard" pitchFamily="34" charset="-122"/>
+                          <a:cs typeface="Pretendard" pitchFamily="34" charset="-120"/>
+                        </a:rPr>
+                        <a:t>임대료 </a:t>
+                      </a:r>
+                      <a:pPr indent="0" marL="0">
+                        <a:buNone/>
+                      </a:pPr>
+                      <a:r>
+                        <a:rPr lang="en-US" sz="1050" b="1" dirty="0">
+                          <a:solidFill>
+                            <a:srgbClr val="10161F"/>
+                          </a:solidFill>
+                          <a:latin typeface="Pretendard" pitchFamily="34" charset="0"/>
+                          <a:ea typeface="Pretendard" pitchFamily="34" charset="-122"/>
+                          <a:cs typeface="Pretendard" pitchFamily="34" charset="-120"/>
+                        </a:rPr>
+                        <a:t>현실화 </a:t>
+                      </a:r>
+                      <a:pPr indent="0" marL="0">
+                        <a:buNone/>
+                      </a:pPr>
+                      <a:r>
+                        <a:rPr lang="en-US" sz="1050" b="1" dirty="0">
+                          <a:solidFill>
+                            <a:srgbClr val="10161F"/>
+                          </a:solidFill>
+                          <a:latin typeface="Pretendard" pitchFamily="34" charset="0"/>
+                          <a:ea typeface="Pretendard" pitchFamily="34" charset="-122"/>
+                          <a:cs typeface="Pretendard" pitchFamily="34" charset="-120"/>
+                        </a:rPr>
+                        <a:t>(+5%)</a:t>
                       </a:r>
                       <a:endParaRPr lang="en-US" sz="1050" dirty="0">
                         <a:latin typeface="Pretendard" charset="0"/>
@@ -9714,7 +8557,49 @@
                           <a:ea typeface="Pretendard" pitchFamily="34" charset="-122"/>
                           <a:cs typeface="Pretendard" pitchFamily="34" charset="-120"/>
                         </a:rPr>
-                        <a:t>★★★★★</a:t>
+                        <a:t>+약 </a:t>
+                      </a:r>
+                      <a:pPr indent="0" marL="0">
+                        <a:buNone/>
+                      </a:pPr>
+                      <a:r>
+                        <a:rPr lang="en-US" sz="1050" dirty="0">
+                          <a:solidFill>
+                            <a:srgbClr val="10161F"/>
+                          </a:solidFill>
+                          <a:latin typeface="Pretendard" pitchFamily="34" charset="0"/>
+                          <a:ea typeface="Pretendard" pitchFamily="34" charset="-122"/>
+                          <a:cs typeface="Pretendard" pitchFamily="34" charset="-120"/>
+                        </a:rPr>
+                        <a:t>0.61억 </a:t>
+                      </a:r>
+                      <a:pPr indent="0" marL="0">
+                        <a:buNone/>
+                      </a:pPr>
+                      <a:r>
+                        <a:rPr lang="en-US" sz="1050" dirty="0">
+                          <a:solidFill>
+                            <a:srgbClr val="10161F"/>
+                          </a:solidFill>
+                          <a:latin typeface="Pretendard" pitchFamily="34" charset="0"/>
+                          <a:ea typeface="Pretendard" pitchFamily="34" charset="-122"/>
+                          <a:cs typeface="Pretendard" pitchFamily="34" charset="-120"/>
+                        </a:rPr>
+                        <a:t>원 </a:t>
+                      </a:r>
+                      <a:pPr indent="0" marL="0">
+                        <a:buNone/>
+                      </a:pPr>
+                      <a:r>
+                        <a:rPr lang="en-US" sz="1050" dirty="0">
+                          <a:solidFill>
+                            <a:srgbClr val="10161F"/>
+                          </a:solidFill>
+                          <a:latin typeface="Pretendard" pitchFamily="34" charset="0"/>
+                          <a:ea typeface="Pretendard" pitchFamily="34" charset="-122"/>
+                          <a:cs typeface="Pretendard" pitchFamily="34" charset="-120"/>
+                        </a:rPr>
+                        <a:t>(+5%)</a:t>
                       </a:r>
                       <a:endParaRPr lang="en-US" sz="1050" dirty="0">
                         <a:latin typeface="Pretendard" charset="0"/>
@@ -9782,8 +8667,62 @@
                           <a:ea typeface="Pretendard" pitchFamily="34" charset="-122"/>
                           <a:cs typeface="Pretendard" pitchFamily="34" charset="-120"/>
                         </a:rPr>
-                        <a:t>소형 </a:t>
+                        <a:t>2.86%</a:t>
                       </a:r>
+                      <a:endParaRPr lang="en-US" sz="1050" dirty="0">
+                        <a:latin typeface="Pretendard" charset="0"/>
+                        <a:ea typeface="Pretendard" charset="0"/>
+                        <a:cs typeface="Pretendard" charset="0"/>
+                      </a:endParaRPr>
+                    </a:p>
+                  </a:txBody>
+                  <a:tcPr marL="50800" marR="50800" marT="25400" marB="25400" anchor="ctr">
+                    <a:lnL w="3810" cap="flat" cmpd="sng" algn="ctr">
+                      <a:solidFill>
+                        <a:srgbClr val="CBD5E0"/>
+                      </a:solidFill>
+                      <a:prstDash val="solid"/>
+                      <a:round/>
+                      <a:headEnd type="none" w="med" len="med"/>
+                      <a:tailEnd type="none" w="med" len="med"/>
+                    </a:lnL>
+                    <a:lnR w="3810" cap="flat" cmpd="sng" algn="ctr">
+                      <a:solidFill>
+                        <a:srgbClr val="CBD5E0"/>
+                      </a:solidFill>
+                      <a:prstDash val="solid"/>
+                      <a:round/>
+                      <a:headEnd type="none" w="med" len="med"/>
+                      <a:tailEnd type="none" w="med" len="med"/>
+                    </a:lnR>
+                    <a:lnT w="3810" cap="flat" cmpd="sng" algn="ctr">
+                      <a:solidFill>
+                        <a:srgbClr val="CBD5E0"/>
+                      </a:solidFill>
+                      <a:prstDash val="solid"/>
+                      <a:round/>
+                      <a:headEnd type="none" w="med" len="med"/>
+                      <a:tailEnd type="none" w="med" len="med"/>
+                    </a:lnT>
+                    <a:lnB w="3810" cap="flat" cmpd="sng" algn="ctr">
+                      <a:solidFill>
+                        <a:srgbClr val="CBD5E0"/>
+                      </a:solidFill>
+                      <a:prstDash val="solid"/>
+                      <a:round/>
+                      <a:headEnd type="none" w="med" len="med"/>
+                      <a:tailEnd type="none" w="med" len="med"/>
+                    </a:lnB>
+                    <a:solidFill>
+                      <a:srgbClr val="FFFFFF"/>
+                    </a:solidFill>
+                  </a:tcPr>
+                </a:tc>
+                <a:tc>
+                  <a:txBody>
+                    <a:bodyPr/>
+                    <a:lstStyle/>
+                    <a:p>
                       <a:pPr indent="0" marL="0">
                         <a:buNone/>
                       </a:pPr>
@@ -9796,49 +8735,7 @@
                           <a:ea typeface="Pretendard" pitchFamily="34" charset="-122"/>
                           <a:cs typeface="Pretendard" pitchFamily="34" charset="-120"/>
                         </a:rPr>
-                        <a:t>빌딩 </a:t>
-                      </a:r>
-                      <a:pPr indent="0" marL="0">
-                        <a:buNone/>
-                      </a:pPr>
-                      <a:r>
-                        <a:rPr lang="en-US" sz="1050" dirty="0">
-                          <a:solidFill>
-                            <a:srgbClr val="10161F"/>
-                          </a:solidFill>
-                          <a:latin typeface="Pretendard" pitchFamily="34" charset="0"/>
-                          <a:ea typeface="Pretendard" pitchFamily="34" charset="-122"/>
-                          <a:cs typeface="Pretendard" pitchFamily="34" charset="-120"/>
-                        </a:rPr>
-                        <a:t>안정 </a:t>
-                      </a:r>
-                      <a:pPr indent="0" marL="0">
-                        <a:buNone/>
-                      </a:pPr>
-                      <a:r>
-                        <a:rPr lang="en-US" sz="1050" dirty="0">
-                          <a:solidFill>
-                            <a:srgbClr val="10161F"/>
-                          </a:solidFill>
-                          <a:latin typeface="Pretendard" pitchFamily="34" charset="0"/>
-                          <a:ea typeface="Pretendard" pitchFamily="34" charset="-122"/>
-                          <a:cs typeface="Pretendard" pitchFamily="34" charset="-120"/>
-                        </a:rPr>
-                        <a:t>수익 </a:t>
-                      </a:r>
-                      <a:pPr indent="0" marL="0">
-                        <a:buNone/>
-                      </a:pPr>
-                      <a:r>
-                        <a:rPr lang="en-US" sz="1050" dirty="0">
-                          <a:solidFill>
-                            <a:srgbClr val="10161F"/>
-                          </a:solidFill>
-                          <a:latin typeface="Pretendard" pitchFamily="34" charset="0"/>
-                          <a:ea typeface="Pretendard" pitchFamily="34" charset="-122"/>
-                          <a:cs typeface="Pretendard" pitchFamily="34" charset="-120"/>
-                        </a:rPr>
-                        <a:t>최적</a:t>
+                        <a:t>불필요</a:t>
                       </a:r>
                       <a:endParaRPr lang="en-US" sz="1050" dirty="0">
                         <a:latin typeface="Pretendard" charset="0"/>
@@ -9908,7 +8805,7 @@
                           <a:ea typeface="Pretendard" pitchFamily="34" charset="-122"/>
                           <a:cs typeface="Pretendard" pitchFamily="34" charset="-120"/>
                         </a:rPr>
-                        <a:t>법인 </a:t>
+                        <a:t>③ </a:t>
                       </a:r>
                       <a:pPr indent="0" marL="0">
                         <a:buNone/>
@@ -9922,7 +8819,7 @@
                           <a:ea typeface="Pretendard" pitchFamily="34" charset="-122"/>
                           <a:cs typeface="Pretendard" pitchFamily="34" charset="-120"/>
                         </a:rPr>
-                        <a:t>사옥 </a:t>
+                        <a:t>리모델링 </a:t>
                       </a:r>
                       <a:pPr indent="0" marL="0">
                         <a:buNone/>
@@ -9936,7 +8833,35 @@
                           <a:ea typeface="Pretendard" pitchFamily="34" charset="-122"/>
                           <a:cs typeface="Pretendard" pitchFamily="34" charset="-120"/>
                         </a:rPr>
-                        <a:t>이전</a:t>
+                        <a:t>후 </a:t>
+                      </a:r>
+                      <a:pPr indent="0" marL="0">
+                        <a:buNone/>
+                      </a:pPr>
+                      <a:r>
+                        <a:rPr lang="en-US" sz="1050" b="1" dirty="0">
+                          <a:solidFill>
+                            <a:srgbClr val="10161F"/>
+                          </a:solidFill>
+                          <a:latin typeface="Pretendard" pitchFamily="34" charset="0"/>
+                          <a:ea typeface="Pretendard" pitchFamily="34" charset="-122"/>
+                          <a:cs typeface="Pretendard" pitchFamily="34" charset="-120"/>
+                        </a:rPr>
+                        <a:t>임대료 </a:t>
+                      </a:r>
+                      <a:pPr indent="0" marL="0">
+                        <a:buNone/>
+                      </a:pPr>
+                      <a:r>
+                        <a:rPr lang="en-US" sz="1050" b="1" dirty="0">
+                          <a:solidFill>
+                            <a:srgbClr val="10161F"/>
+                          </a:solidFill>
+                          <a:latin typeface="Pretendard" pitchFamily="34" charset="0"/>
+                          <a:ea typeface="Pretendard" pitchFamily="34" charset="-122"/>
+                          <a:cs typeface="Pretendard" pitchFamily="34" charset="-120"/>
+                        </a:rPr>
+                        <a:t>상승</a:t>
                       </a:r>
                       <a:endParaRPr lang="en-US" sz="1050" dirty="0">
                         <a:latin typeface="Pretendard" charset="0"/>
@@ -10004,7 +8929,49 @@
                           <a:ea typeface="Pretendard" pitchFamily="34" charset="-122"/>
                           <a:cs typeface="Pretendard" pitchFamily="34" charset="-120"/>
                         </a:rPr>
-                        <a:t>★★★★</a:t>
+                        <a:t>+약 </a:t>
+                      </a:r>
+                      <a:pPr indent="0" marL="0">
+                        <a:buNone/>
+                      </a:pPr>
+                      <a:r>
+                        <a:rPr lang="en-US" sz="1050" dirty="0">
+                          <a:solidFill>
+                            <a:srgbClr val="10161F"/>
+                          </a:solidFill>
+                          <a:latin typeface="Pretendard" pitchFamily="34" charset="0"/>
+                          <a:ea typeface="Pretendard" pitchFamily="34" charset="-122"/>
+                          <a:cs typeface="Pretendard" pitchFamily="34" charset="-120"/>
+                        </a:rPr>
+                        <a:t>0.98억 </a:t>
+                      </a:r>
+                      <a:pPr indent="0" marL="0">
+                        <a:buNone/>
+                      </a:pPr>
+                      <a:r>
+                        <a:rPr lang="en-US" sz="1050" dirty="0">
+                          <a:solidFill>
+                            <a:srgbClr val="10161F"/>
+                          </a:solidFill>
+                          <a:latin typeface="Pretendard" pitchFamily="34" charset="0"/>
+                          <a:ea typeface="Pretendard" pitchFamily="34" charset="-122"/>
+                          <a:cs typeface="Pretendard" pitchFamily="34" charset="-120"/>
+                        </a:rPr>
+                        <a:t>원 </a:t>
+                      </a:r>
+                      <a:pPr indent="0" marL="0">
+                        <a:buNone/>
+                      </a:pPr>
+                      <a:r>
+                        <a:rPr lang="en-US" sz="1050" dirty="0">
+                          <a:solidFill>
+                            <a:srgbClr val="10161F"/>
+                          </a:solidFill>
+                          <a:latin typeface="Pretendard" pitchFamily="34" charset="0"/>
+                          <a:ea typeface="Pretendard" pitchFamily="34" charset="-122"/>
+                          <a:cs typeface="Pretendard" pitchFamily="34" charset="-120"/>
+                        </a:rPr>
+                        <a:t>(+8%)</a:t>
                       </a:r>
                       <a:endParaRPr lang="en-US" sz="1050" dirty="0">
                         <a:latin typeface="Pretendard" charset="0"/>
@@ -10072,7 +9039,75 @@
                           <a:ea typeface="Pretendard" pitchFamily="34" charset="-122"/>
                           <a:cs typeface="Pretendard" pitchFamily="34" charset="-120"/>
                         </a:rPr>
-                        <a:t>이천권역 </a:t>
+                        <a:t>2.94%</a:t>
+                      </a:r>
+                      <a:endParaRPr lang="en-US" sz="1050" dirty="0">
+                        <a:latin typeface="Pretendard" charset="0"/>
+                        <a:ea typeface="Pretendard" charset="0"/>
+                        <a:cs typeface="Pretendard" charset="0"/>
+                      </a:endParaRPr>
+                    </a:p>
+                  </a:txBody>
+                  <a:tcPr marL="50800" marR="50800" marT="25400" marB="25400" anchor="ctr">
+                    <a:lnL w="3810" cap="flat" cmpd="sng" algn="ctr">
+                      <a:solidFill>
+                        <a:srgbClr val="CBD5E0"/>
+                      </a:solidFill>
+                      <a:prstDash val="solid"/>
+                      <a:round/>
+                      <a:headEnd type="none" w="med" len="med"/>
+                      <a:tailEnd type="none" w="med" len="med"/>
+                    </a:lnL>
+                    <a:lnR w="3810" cap="flat" cmpd="sng" algn="ctr">
+                      <a:solidFill>
+                        <a:srgbClr val="CBD5E0"/>
+                      </a:solidFill>
+                      <a:prstDash val="solid"/>
+                      <a:round/>
+                      <a:headEnd type="none" w="med" len="med"/>
+                      <a:tailEnd type="none" w="med" len="med"/>
+                    </a:lnR>
+                    <a:lnT w="3810" cap="flat" cmpd="sng" algn="ctr">
+                      <a:solidFill>
+                        <a:srgbClr val="CBD5E0"/>
+                      </a:solidFill>
+                      <a:prstDash val="solid"/>
+                      <a:round/>
+                      <a:headEnd type="none" w="med" len="med"/>
+                      <a:tailEnd type="none" w="med" len="med"/>
+                    </a:lnT>
+                    <a:lnB w="3810" cap="flat" cmpd="sng" algn="ctr">
+                      <a:solidFill>
+                        <a:srgbClr val="CBD5E0"/>
+                      </a:solidFill>
+                      <a:prstDash val="solid"/>
+                      <a:round/>
+                      <a:headEnd type="none" w="med" len="med"/>
+                      <a:tailEnd type="none" w="med" len="med"/>
+                    </a:lnB>
+                    <a:solidFill>
+                      <a:srgbClr val="F7FAFC"/>
+                    </a:solidFill>
+                  </a:tcPr>
+                </a:tc>
+                <a:tc>
+                  <a:txBody>
+                    <a:bodyPr/>
+                    <a:lstStyle/>
+                    <a:p>
+                      <a:pPr indent="0" marL="0">
+                        <a:buNone/>
+                      </a:pPr>
+                      <a:r>
+                        <a:rPr lang="en-US" sz="1050" dirty="0">
+                          <a:solidFill>
+                            <a:srgbClr val="10161F"/>
+                          </a:solidFill>
+                          <a:latin typeface="Pretendard" pitchFamily="34" charset="0"/>
+                          <a:ea typeface="Pretendard" pitchFamily="34" charset="-122"/>
+                          <a:cs typeface="Pretendard" pitchFamily="34" charset="-120"/>
+                        </a:rPr>
+                        <a:t>약 </a:t>
                       </a:r>
                       <a:pPr indent="0" marL="0">
                         <a:buNone/>
@@ -10086,7 +9121,21 @@
                           <a:ea typeface="Pretendard" pitchFamily="34" charset="-122"/>
                           <a:cs typeface="Pretendard" pitchFamily="34" charset="-120"/>
                         </a:rPr>
-                        <a:t>직주근접</a:t>
+                        <a:t>15.00억 </a:t>
+                      </a:r>
+                      <a:pPr indent="0" marL="0">
+                        <a:buNone/>
+                      </a:pPr>
+                      <a:r>
+                        <a:rPr lang="en-US" sz="1050" dirty="0">
+                          <a:solidFill>
+                            <a:srgbClr val="10161F"/>
+                          </a:solidFill>
+                          <a:latin typeface="Pretendard" pitchFamily="34" charset="0"/>
+                          <a:ea typeface="Pretendard" pitchFamily="34" charset="-122"/>
+                          <a:cs typeface="Pretendard" pitchFamily="34" charset="-120"/>
+                        </a:rPr>
+                        <a:t>원</a:t>
                       </a:r>
                       <a:endParaRPr lang="en-US" sz="1050" dirty="0">
                         <a:latin typeface="Pretendard" charset="0"/>
@@ -10138,281 +9187,19 @@
                   </a:tcPr>
                 </a:tc>
               </a:tr>
-              <a:tr h="329184">
-                <a:tc>
-                  <a:txBody>
-                    <a:bodyPr/>
-                    <a:lstStyle/>
-                    <a:p>
-                      <a:pPr indent="0" marL="0">
-                        <a:buNone/>
-                      </a:pPr>
-                      <a:r>
-                        <a:rPr lang="en-US" sz="1050" b="1" dirty="0">
-                          <a:solidFill>
-                            <a:srgbClr val="10161F"/>
-                          </a:solidFill>
-                          <a:latin typeface="Pretendard" pitchFamily="34" charset="0"/>
-                          <a:ea typeface="Pretendard" pitchFamily="34" charset="-122"/>
-                          <a:cs typeface="Pretendard" pitchFamily="34" charset="-120"/>
-                        </a:rPr>
-                        <a:t>소규모 </a:t>
-                      </a:r>
-                      <a:pPr indent="0" marL="0">
-                        <a:buNone/>
-                      </a:pPr>
-                      <a:r>
-                        <a:rPr lang="en-US" sz="1050" b="1" dirty="0">
-                          <a:solidFill>
-                            <a:srgbClr val="10161F"/>
-                          </a:solidFill>
-                          <a:latin typeface="Pretendard" pitchFamily="34" charset="0"/>
-                          <a:ea typeface="Pretendard" pitchFamily="34" charset="-122"/>
-                          <a:cs typeface="Pretendard" pitchFamily="34" charset="-120"/>
-                        </a:rPr>
-                        <a:t>개발업체</a:t>
-                      </a:r>
-                      <a:endParaRPr lang="en-US" sz="1050" dirty="0">
-                        <a:latin typeface="Pretendard" charset="0"/>
-                        <a:ea typeface="Pretendard" charset="0"/>
-                        <a:cs typeface="Pretendard" charset="0"/>
-                      </a:endParaRPr>
-                    </a:p>
-                  </a:txBody>
-                  <a:tcPr marL="50800" marR="50800" marT="25400" marB="25400" anchor="ctr">
-                    <a:lnL w="3810" cap="flat" cmpd="sng" algn="ctr">
-                      <a:solidFill>
-                        <a:srgbClr val="CBD5E0"/>
-                      </a:solidFill>
-                      <a:prstDash val="solid"/>
-                      <a:round/>
-                      <a:headEnd type="none" w="med" len="med"/>
-                      <a:tailEnd type="none" w="med" len="med"/>
-                    </a:lnL>
-                    <a:lnR w="3810" cap="flat" cmpd="sng" algn="ctr">
-                      <a:solidFill>
-                        <a:srgbClr val="CBD5E0"/>
-                      </a:solidFill>
-                      <a:prstDash val="solid"/>
-                      <a:round/>
-                      <a:headEnd type="none" w="med" len="med"/>
-                      <a:tailEnd type="none" w="med" len="med"/>
-                    </a:lnR>
-                    <a:lnT w="3810" cap="flat" cmpd="sng" algn="ctr">
-                      <a:solidFill>
-                        <a:srgbClr val="CBD5E0"/>
-                      </a:solidFill>
-                      <a:prstDash val="solid"/>
-                      <a:round/>
-                      <a:headEnd type="none" w="med" len="med"/>
-                      <a:tailEnd type="none" w="med" len="med"/>
-                    </a:lnT>
-                    <a:lnB w="3810" cap="flat" cmpd="sng" algn="ctr">
-                      <a:solidFill>
-                        <a:srgbClr val="CBD5E0"/>
-                      </a:solidFill>
-                      <a:prstDash val="solid"/>
-                      <a:round/>
-                      <a:headEnd type="none" w="med" len="med"/>
-                      <a:tailEnd type="none" w="med" len="med"/>
-                    </a:lnB>
-                    <a:solidFill>
-                      <a:srgbClr val="FFFFFF"/>
-                    </a:solidFill>
-                  </a:tcPr>
-                </a:tc>
-                <a:tc>
-                  <a:txBody>
-                    <a:bodyPr/>
-                    <a:lstStyle/>
-                    <a:p>
-                      <a:pPr indent="0" marL="0">
-                        <a:buNone/>
-                      </a:pPr>
-                      <a:r>
-                        <a:rPr lang="en-US" sz="1050" dirty="0">
-                          <a:solidFill>
-                            <a:srgbClr val="10161F"/>
-                          </a:solidFill>
-                          <a:latin typeface="Pretendard" pitchFamily="34" charset="0"/>
-                          <a:ea typeface="Pretendard" pitchFamily="34" charset="-122"/>
-                          <a:cs typeface="Pretendard" pitchFamily="34" charset="-120"/>
-                        </a:rPr>
-                        <a:t>★★★</a:t>
-                      </a:r>
-                      <a:endParaRPr lang="en-US" sz="1050" dirty="0">
-                        <a:latin typeface="Pretendard" charset="0"/>
-                        <a:ea typeface="Pretendard" charset="0"/>
-                        <a:cs typeface="Pretendard" charset="0"/>
-                      </a:endParaRPr>
-                    </a:p>
-                  </a:txBody>
-                  <a:tcPr marL="50800" marR="50800" marT="25400" marB="25400" anchor="ctr">
-                    <a:lnL w="3810" cap="flat" cmpd="sng" algn="ctr">
-                      <a:solidFill>
-                        <a:srgbClr val="CBD5E0"/>
-                      </a:solidFill>
-                      <a:prstDash val="solid"/>
-                      <a:round/>
-                      <a:headEnd type="none" w="med" len="med"/>
-                      <a:tailEnd type="none" w="med" len="med"/>
-                    </a:lnL>
-                    <a:lnR w="3810" cap="flat" cmpd="sng" algn="ctr">
-                      <a:solidFill>
-                        <a:srgbClr val="CBD5E0"/>
-                      </a:solidFill>
-                      <a:prstDash val="solid"/>
-                      <a:round/>
-                      <a:headEnd type="none" w="med" len="med"/>
-                      <a:tailEnd type="none" w="med" len="med"/>
-                    </a:lnR>
-                    <a:lnT w="3810" cap="flat" cmpd="sng" algn="ctr">
-                      <a:solidFill>
-                        <a:srgbClr val="CBD5E0"/>
-                      </a:solidFill>
-                      <a:prstDash val="solid"/>
-                      <a:round/>
-                      <a:headEnd type="none" w="med" len="med"/>
-                      <a:tailEnd type="none" w="med" len="med"/>
-                    </a:lnT>
-                    <a:lnB w="3810" cap="flat" cmpd="sng" algn="ctr">
-                      <a:solidFill>
-                        <a:srgbClr val="CBD5E0"/>
-                      </a:solidFill>
-                      <a:prstDash val="solid"/>
-                      <a:round/>
-                      <a:headEnd type="none" w="med" len="med"/>
-                      <a:tailEnd type="none" w="med" len="med"/>
-                    </a:lnB>
-                    <a:solidFill>
-                      <a:srgbClr val="FFFFFF"/>
-                    </a:solidFill>
-                  </a:tcPr>
-                </a:tc>
-                <a:tc>
-                  <a:txBody>
-                    <a:bodyPr/>
-                    <a:lstStyle/>
-                    <a:p>
-                      <a:pPr indent="0" marL="0">
-                        <a:buNone/>
-                      </a:pPr>
-                      <a:r>
-                        <a:rPr lang="en-US" sz="1050" dirty="0">
-                          <a:solidFill>
-                            <a:srgbClr val="10161F"/>
-                          </a:solidFill>
-                          <a:latin typeface="Pretendard" pitchFamily="34" charset="0"/>
-                          <a:ea typeface="Pretendard" pitchFamily="34" charset="-122"/>
-                          <a:cs typeface="Pretendard" pitchFamily="34" charset="-120"/>
-                        </a:rPr>
-                        <a:t>밸류업 </a:t>
-                      </a:r>
-                      <a:pPr indent="0" marL="0">
-                        <a:buNone/>
-                      </a:pPr>
-                      <a:r>
-                        <a:rPr lang="en-US" sz="1050" dirty="0">
-                          <a:solidFill>
-                            <a:srgbClr val="10161F"/>
-                          </a:solidFill>
-                          <a:latin typeface="Pretendard" pitchFamily="34" charset="0"/>
-                          <a:ea typeface="Pretendard" pitchFamily="34" charset="-122"/>
-                          <a:cs typeface="Pretendard" pitchFamily="34" charset="-120"/>
-                        </a:rPr>
-                        <a:t>후 </a:t>
-                      </a:r>
-                      <a:pPr indent="0" marL="0">
-                        <a:buNone/>
-                      </a:pPr>
-                      <a:r>
-                        <a:rPr lang="en-US" sz="1050" dirty="0">
-                          <a:solidFill>
-                            <a:srgbClr val="10161F"/>
-                          </a:solidFill>
-                          <a:latin typeface="Pretendard" pitchFamily="34" charset="0"/>
-                          <a:ea typeface="Pretendard" pitchFamily="34" charset="-122"/>
-                          <a:cs typeface="Pretendard" pitchFamily="34" charset="-120"/>
-                        </a:rPr>
-                        <a:t>매각 </a:t>
-                      </a:r>
-                      <a:pPr indent="0" marL="0">
-                        <a:buNone/>
-                      </a:pPr>
-                      <a:r>
-                        <a:rPr lang="en-US" sz="1050" dirty="0">
-                          <a:solidFill>
-                            <a:srgbClr val="10161F"/>
-                          </a:solidFill>
-                          <a:latin typeface="Pretendard" pitchFamily="34" charset="0"/>
-                          <a:ea typeface="Pretendard" pitchFamily="34" charset="-122"/>
-                          <a:cs typeface="Pretendard" pitchFamily="34" charset="-120"/>
-                        </a:rPr>
-                        <a:t>시나리오</a:t>
-                      </a:r>
-                      <a:endParaRPr lang="en-US" sz="1050" dirty="0">
-                        <a:latin typeface="Pretendard" charset="0"/>
-                        <a:ea typeface="Pretendard" charset="0"/>
-                        <a:cs typeface="Pretendard" charset="0"/>
-                      </a:endParaRPr>
-                    </a:p>
-                  </a:txBody>
-                  <a:tcPr marL="50800" marR="50800" marT="25400" marB="25400" anchor="ctr">
-                    <a:lnL w="3810" cap="flat" cmpd="sng" algn="ctr">
-                      <a:solidFill>
-                        <a:srgbClr val="CBD5E0"/>
-                      </a:solidFill>
-                      <a:prstDash val="solid"/>
-                      <a:round/>
-                      <a:headEnd type="none" w="med" len="med"/>
-                      <a:tailEnd type="none" w="med" len="med"/>
-                    </a:lnL>
-                    <a:lnR w="3810" cap="flat" cmpd="sng" algn="ctr">
-                      <a:solidFill>
-                        <a:srgbClr val="CBD5E0"/>
-                      </a:solidFill>
-                      <a:prstDash val="solid"/>
-                      <a:round/>
-                      <a:headEnd type="none" w="med" len="med"/>
-                      <a:tailEnd type="none" w="med" len="med"/>
-                    </a:lnR>
-                    <a:lnT w="3810" cap="flat" cmpd="sng" algn="ctr">
-                      <a:solidFill>
-                        <a:srgbClr val="CBD5E0"/>
-                      </a:solidFill>
-                      <a:prstDash val="solid"/>
-                      <a:round/>
-                      <a:headEnd type="none" w="med" len="med"/>
-                      <a:tailEnd type="none" w="med" len="med"/>
-                    </a:lnT>
-                    <a:lnB w="3810" cap="flat" cmpd="sng" algn="ctr">
-                      <a:solidFill>
-                        <a:srgbClr val="CBD5E0"/>
-                      </a:solidFill>
-                      <a:prstDash val="solid"/>
-                      <a:round/>
-                      <a:headEnd type="none" w="med" len="med"/>
-                      <a:tailEnd type="none" w="med" len="med"/>
-                    </a:lnB>
-                    <a:solidFill>
-                      <a:srgbClr val="FFFFFF"/>
-                    </a:solidFill>
-                  </a:tcPr>
-                </a:tc>
-              </a:tr>
             </a:tbl>
           </a:graphicData>
         </a:graphic>
       </p:graphicFrame>
       <p:sp>
         <p:nvSpPr>
-          <p:cNvPr id="29" name="Shape 26"/>
-          <p:cNvSpPr/>
-          <p:nvPr/>
-        </p:nvSpPr>
-        <p:spPr>
-          <a:xfrm>
-            <a:off x="566928" y="5678424"/>
+          <p:cNvPr id="8" name="Shape 5"/>
+          <p:cNvSpPr/>
+          <p:nvPr/>
+        </p:nvSpPr>
+        <p:spPr>
+          <a:xfrm>
+            <a:off x="566928" y="5349240"/>
             <a:ext cx="11057839" cy="804672"/>
           </a:xfrm>
           <a:prstGeom prst="roundRect">
@@ -10433,13 +9220,13 @@
       </p:sp>
       <p:sp>
         <p:nvSpPr>
-          <p:cNvPr id="30" name="Text 27"/>
-          <p:cNvSpPr/>
-          <p:nvPr/>
-        </p:nvSpPr>
-        <p:spPr>
-          <a:xfrm>
-            <a:off x="749808" y="5788152"/>
+          <p:cNvPr id="9" name="Text 6"/>
+          <p:cNvSpPr/>
+          <p:nvPr/>
+        </p:nvSpPr>
+        <p:spPr>
+          <a:xfrm>
+            <a:off x="749808" y="5458968"/>
             <a:ext cx="1691640" cy="256032"/>
           </a:xfrm>
           <a:prstGeom prst="rect">
@@ -10472,13 +9259,13 @@
       </p:sp>
       <p:sp>
         <p:nvSpPr>
-          <p:cNvPr id="31" name="Text 28"/>
-          <p:cNvSpPr/>
-          <p:nvPr/>
-        </p:nvSpPr>
-        <p:spPr>
-          <a:xfrm>
-            <a:off x="2487168" y="5751576"/>
+          <p:cNvPr id="10" name="Text 7"/>
+          <p:cNvSpPr/>
+          <p:nvPr/>
+        </p:nvSpPr>
+        <p:spPr>
+          <a:xfrm>
+            <a:off x="2487168" y="5422392"/>
             <a:ext cx="8954719" cy="658368"/>
           </a:xfrm>
           <a:prstGeom prst="rect">
@@ -10506,7 +9293,7 @@
                 <a:ea typeface="Pretendard" pitchFamily="34" charset="-122"/>
                 <a:cs typeface="Pretendard" pitchFamily="34" charset="-120"/>
               </a:rPr>
-              <a:t>[참고] 종합 가치 제안: 이천권역 핵심 상권의 희소성 높은 우량 자산으로, 안정적인 임대 수익과 향후 공법상 밸류업 및 권역 지가 상승에 따른 자본 이득(Capital Gain)을 동시에 실현할 수 있는 전략적 매물입니다.</a:t>
+              <a:t>{"ok":true,"mocked":true,"extractedFields":{"area_signal":"역삼","asset_type":"오피스빌딩","price_band":"300억","size_signal":"3000평(약 9917.4㎡)"},"extractedFacts":{"region":"역삼","exactAddressCandidate":"역삼동 742-1","assetType":"오피스빌딩","priceText":"300억","sizeText":"3000평(약 9917.4㎡)","currentUse":"오피스","currentUseSignal":"근린생활시설","leaseSignal":"임대중","vacancySignal":"공실없음","tenantNames":["쿠팡","네이버"],"unitRentTexts":["301호: 1500만"],"sellerMotivationText":"자산 효율화","brokerNotes":["초역세권 매물"]},"detectedSensitiveFields":["exact_address","tenant_name"],"ambiguousFields":[],"warnings":[],"areaSignal":"역삼","assetType":"오피스빌딩","priceBand":"300억","sizeSignal":"3000평(약 9917.4㎡)","dealType":"매각","buildingName":"역삼 센트럴타워","exactAddress":"역삼동 742-1","totalFloorArea":9917.3,"buildYear":2015,"currentUseSignal":"근린생활시설","vacancySignal":"공실 없음","fitSummary":"초역세권 근생 빌딩으로 시행/사옥 매입에 최적화","cautionSummary":"주요 임차 업종 만기 조율 필요","hiddenFields":["exact_address","seller_motivation"],"confidence":{"areaSignal":"confirmed","assetType":"confirmed","priceBand":"ai_hypothesis","fitSummary":"ai_hypothesis"},"missingData":["sizeSignal"],"boundaryNote":"본 자료는 실거래 통계 기반 참고치입니다.","buyerType":"법인 사옥형","budgetRange":{"min":50,"max":80,"display":"50억~80억"},"preferredRegions":["강남","성수"],"assetTypes":["꼬마빌딩","사옥용"],"purchasePurpose":"사옥용 매입","mustHave":["초역세권","주차"],"niceToHave":["테라스","루프탑"],"riskTolerance":"medium","financingNote":"자본금 50% 준비","missingQuestions":["구체적인 입주 시기가 언제인가요?","선호하는 수익률이 있나요?"],"privacyNotes":["연락처 비공개"],"fitReasons":["매수자 예산(50-80억)에 부합하는 매물입니다.","요청하신 성수/강남 권역에 해당합니다."],"cautionReasons":["요청한 용도와 달리 명도 협의가 다소 필요합니다."],"recommendedNextAction":"현장 답사 제안","kakaoMessage":"안녕하세요! 요청하신 조건에 부합하는 추천 매물이 있어 안내해 드립니다. 확인해보시고 피드백 부탁드립니다.","title":"강남 역삼역 초역세권 오피스 사옥용 빌딩 매각","shortSummary":"역삼역 도보 5분 거리의 준신축급 대형 오피스빌딩입니다.","dealPoints":["초역세권","사옥 최적"],"cautionPoints":["명도 조율 필요"],"hiddenInfoNotice":["보증금 및 지번은 인가 후 확인 가능"],"gateMessage":"G1 등급 등록이 필요합니다.","kakaoText":"강남 역삼역 오피스 빌딩 매각 안내입니다.","exactUnitCandidate":"101호","floor":"1층","areaSqmText":"150㎡","spaceType":"office","depositText":"5000만","monthlyRentText":"400만","maintenanceFeeText":"50만","availableFromText":"즉시입주","leaseTermMonthsText":"24","incentivesText":"렌트프리 2개월","restrictions":[],"landlordIdentity":"김성수","currentTenant":"스타트업","vacancyReason":"이전 확장","rentNegotiation":"협의 가능","region":"성수동","areaSqm":150,"deposit":5000,"monthlyRent":400,"maintenanceFee":50,"availableFrom":"즉시입주","leaseTermMonths":24,"incentives":{"rentFreeMonths":2,"interiorSupport":"일부 인테리어 지원","freeRentDetail":"렌트프리 2개월 지원"},"shortSummaryLease":"성수역 도보 5분 거리 1층 리테일 상가 매물입니다."}</a:t>
             </a:r>
             <a:endParaRPr lang="en-US" sz="1100" dirty="0"/>
           </a:p>
@@ -10514,7 +9301,7 @@
       </p:sp>
       <p:sp>
         <p:nvSpPr>
-          <p:cNvPr id="32" name="Text 29"/>
+          <p:cNvPr id="11" name="Text 8"/>
           <p:cNvSpPr/>
           <p:nvPr/>
         </p:nvSpPr>
@@ -10553,7 +9340,7 @@
       </p:sp>
       <p:sp>
         <p:nvSpPr>
-          <p:cNvPr id="33" name="Text 30"/>
+          <p:cNvPr id="12" name="Text 9"/>
           <p:cNvSpPr/>
           <p:nvPr/>
         </p:nvSpPr>

--- a/docs/test/stress/e2e-outputs/operating_case16_icheon_logistics_basic.pptx
+++ b/docs/test/stress/e2e-outputs/operating_case16_icheon_logistics_basic.pptx
@@ -1905,7 +1905,7 @@
                 <a:ea typeface="Arial" pitchFamily="34" charset="-122"/>
                 <a:cs typeface="Arial" pitchFamily="34" charset="-120"/>
               </a:rPr>
-              <a:t>BASIC IM</a:t>
+              <a:t>INVESTMENT MEMORANDUM</a:t>
             </a:r>
             <a:endParaRPr lang="en-US" sz="1000" dirty="0"/>
           </a:p>
@@ -3988,7 +3988,7 @@
                 <a:ea typeface="Pretendard" pitchFamily="34" charset="-122"/>
                 <a:cs typeface="Pretendard" pitchFamily="34" charset="-120"/>
               </a:rPr>
-              <a:t>이천권역 내 물류센터, 매각 희망가 450억. 입지·임대차 현황을 감안할 때 투자 검토 가치가 있는 물건입니다.</a:t>
+              <a:t>이천권역 소재 물류센터, 희망가 450억 투자 검토 자료입니다.</a:t>
             </a:r>
             <a:endParaRPr lang="en-US" sz="1500" dirty="0"/>
           </a:p>
@@ -4398,7 +4398,7 @@
                 <a:ea typeface="Pretendard" pitchFamily="34" charset="-122"/>
                 <a:cs typeface="Pretendard" pitchFamily="34" charset="-120"/>
               </a:rPr>
-              <a:t>{"ok"</a:t>
+              <a:t>주요 용도</a:t>
             </a:r>
             <a:endParaRPr lang="en-US" sz="950" dirty="0"/>
           </a:p>
@@ -4435,11 +4435,11 @@
                 <a:solidFill>
                   <a:srgbClr val="10161F"/>
                 </a:solidFill>
-                <a:latin typeface="Arial" pitchFamily="34" charset="0"/>
-                <a:ea typeface="Arial" pitchFamily="34" charset="-122"/>
-                <a:cs typeface="Arial" pitchFamily="34" charset="-120"/>
-              </a:rPr>
-              <a:t>true,"mocked"</a:t>
+                <a:latin typeface="Pretendard" pitchFamily="34" charset="0"/>
+                <a:ea typeface="Pretendard" pitchFamily="34" charset="-122"/>
+                <a:cs typeface="Pretendard" pitchFamily="34" charset="-120"/>
+              </a:rPr>
+              <a:t>확인 필요</a:t>
             </a:r>
             <a:endParaRPr lang="en-US" sz="2000" dirty="0"/>
           </a:p>
@@ -4447,13 +4447,441 @@
       </p:sp>
       <p:sp>
         <p:nvSpPr>
-          <p:cNvPr id="20" name="Text 18"/>
-          <p:cNvSpPr/>
-          <p:nvPr/>
-        </p:nvSpPr>
-        <p:spPr>
-          <a:xfrm>
-            <a:off x="566928" y="3502152"/>
+          <p:cNvPr id="20" name="Shape 18"/>
+          <p:cNvSpPr/>
+          <p:nvPr/>
+        </p:nvSpPr>
+        <p:spPr>
+          <a:xfrm>
+            <a:off x="566928" y="3429000"/>
+            <a:ext cx="2627300" cy="1280160"/>
+          </a:xfrm>
+          <a:prstGeom prst="roundRect">
+            <a:avLst>
+              <a:gd name="adj" fmla="val 4286"/>
+            </a:avLst>
+          </a:prstGeom>
+          <a:solidFill>
+            <a:srgbClr val="F7FAFC"/>
+          </a:solidFill>
+          <a:ln w="6350">
+            <a:solidFill>
+              <a:srgbClr val="CBD5E0"/>
+            </a:solidFill>
+            <a:prstDash val="solid"/>
+          </a:ln>
+        </p:spPr>
+      </p:sp>
+      <p:sp>
+        <p:nvSpPr>
+          <p:cNvPr id="21" name="Text 19"/>
+          <p:cNvSpPr/>
+          <p:nvPr/>
+        </p:nvSpPr>
+        <p:spPr>
+          <a:xfrm>
+            <a:off x="731520" y="3557016"/>
+            <a:ext cx="2298116" cy="201168"/>
+          </a:xfrm>
+          <a:prstGeom prst="rect">
+            <a:avLst/>
+          </a:prstGeom>
+          <a:noFill/>
+          <a:ln/>
+        </p:spPr>
+        <p:txBody>
+          <a:bodyPr wrap="square" lIns="0" tIns="0" rIns="0" bIns="0" rtlCol="0" anchor="ctr"/>
+          <a:lstStyle/>
+          <a:p>
+            <a:pPr indent="0" marL="0">
+              <a:buNone/>
+            </a:pPr>
+            <a:r>
+              <a:rPr lang="en-US" sz="950" dirty="0">
+                <a:solidFill>
+                  <a:srgbClr val="718096"/>
+                </a:solidFill>
+                <a:latin typeface="Pretendard" pitchFamily="34" charset="0"/>
+                <a:ea typeface="Pretendard" pitchFamily="34" charset="-122"/>
+                <a:cs typeface="Pretendard" pitchFamily="34" charset="-120"/>
+              </a:rPr>
+              <a:t>연면적</a:t>
+            </a:r>
+            <a:endParaRPr lang="en-US" sz="950" dirty="0"/>
+          </a:p>
+        </p:txBody>
+      </p:sp>
+      <p:sp>
+        <p:nvSpPr>
+          <p:cNvPr id="22" name="Text 20"/>
+          <p:cNvSpPr/>
+          <p:nvPr/>
+        </p:nvSpPr>
+        <p:spPr>
+          <a:xfrm>
+            <a:off x="731520" y="3739896"/>
+            <a:ext cx="2298116" cy="402336"/>
+          </a:xfrm>
+          <a:prstGeom prst="rect">
+            <a:avLst/>
+          </a:prstGeom>
+          <a:noFill/>
+          <a:ln/>
+        </p:spPr>
+        <p:txBody>
+          <a:bodyPr wrap="square" lIns="0" tIns="0" rIns="0" bIns="0" rtlCol="0" anchor="ctr">
+            <a:normAutofit/>
+          </a:bodyPr>
+          <a:lstStyle/>
+          <a:p>
+            <a:pPr indent="0" marL="0">
+              <a:buNone/>
+            </a:pPr>
+            <a:r>
+              <a:rPr lang="en-US" sz="2000" b="1" dirty="0">
+                <a:solidFill>
+                  <a:srgbClr val="10161F"/>
+                </a:solidFill>
+                <a:latin typeface="Pretendard" pitchFamily="34" charset="0"/>
+                <a:ea typeface="Pretendard" pitchFamily="34" charset="-122"/>
+                <a:cs typeface="Pretendard" pitchFamily="34" charset="-120"/>
+              </a:rPr>
+              <a:t>5,000㎡ (약 1513평(약 5001.7㎡))</a:t>
+            </a:r>
+            <a:endParaRPr lang="en-US" sz="2000" dirty="0"/>
+          </a:p>
+        </p:txBody>
+      </p:sp>
+      <p:sp>
+        <p:nvSpPr>
+          <p:cNvPr id="23" name="Shape 21"/>
+          <p:cNvSpPr/>
+          <p:nvPr/>
+        </p:nvSpPr>
+        <p:spPr>
+          <a:xfrm>
+            <a:off x="3377108" y="3429000"/>
+            <a:ext cx="2627300" cy="1280160"/>
+          </a:xfrm>
+          <a:prstGeom prst="roundRect">
+            <a:avLst>
+              <a:gd name="adj" fmla="val 4286"/>
+            </a:avLst>
+          </a:prstGeom>
+          <a:solidFill>
+            <a:srgbClr val="F7FAFC"/>
+          </a:solidFill>
+          <a:ln w="6350">
+            <a:solidFill>
+              <a:srgbClr val="CBD5E0"/>
+            </a:solidFill>
+            <a:prstDash val="solid"/>
+          </a:ln>
+        </p:spPr>
+      </p:sp>
+      <p:sp>
+        <p:nvSpPr>
+          <p:cNvPr id="24" name="Text 22"/>
+          <p:cNvSpPr/>
+          <p:nvPr/>
+        </p:nvSpPr>
+        <p:spPr>
+          <a:xfrm>
+            <a:off x="3541700" y="3557016"/>
+            <a:ext cx="2298116" cy="201168"/>
+          </a:xfrm>
+          <a:prstGeom prst="rect">
+            <a:avLst/>
+          </a:prstGeom>
+          <a:noFill/>
+          <a:ln/>
+        </p:spPr>
+        <p:txBody>
+          <a:bodyPr wrap="square" lIns="0" tIns="0" rIns="0" bIns="0" rtlCol="0" anchor="ctr"/>
+          <a:lstStyle/>
+          <a:p>
+            <a:pPr indent="0" marL="0">
+              <a:buNone/>
+            </a:pPr>
+            <a:r>
+              <a:rPr lang="en-US" sz="950" dirty="0">
+                <a:solidFill>
+                  <a:srgbClr val="718096"/>
+                </a:solidFill>
+                <a:latin typeface="Pretendard" pitchFamily="34" charset="0"/>
+                <a:ea typeface="Pretendard" pitchFamily="34" charset="-122"/>
+                <a:cs typeface="Pretendard" pitchFamily="34" charset="-120"/>
+              </a:rPr>
+              <a:t>대지면적</a:t>
+            </a:r>
+            <a:endParaRPr lang="en-US" sz="950" dirty="0"/>
+          </a:p>
+        </p:txBody>
+      </p:sp>
+      <p:sp>
+        <p:nvSpPr>
+          <p:cNvPr id="25" name="Text 23"/>
+          <p:cNvSpPr/>
+          <p:nvPr/>
+        </p:nvSpPr>
+        <p:spPr>
+          <a:xfrm>
+            <a:off x="3541700" y="3739896"/>
+            <a:ext cx="2298116" cy="402336"/>
+          </a:xfrm>
+          <a:prstGeom prst="rect">
+            <a:avLst/>
+          </a:prstGeom>
+          <a:noFill/>
+          <a:ln/>
+        </p:spPr>
+        <p:txBody>
+          <a:bodyPr wrap="square" lIns="0" tIns="0" rIns="0" bIns="0" rtlCol="0" anchor="ctr">
+            <a:normAutofit/>
+          </a:bodyPr>
+          <a:lstStyle/>
+          <a:p>
+            <a:pPr indent="0" marL="0">
+              <a:buNone/>
+            </a:pPr>
+            <a:r>
+              <a:rPr lang="en-US" sz="2000" b="1" dirty="0">
+                <a:solidFill>
+                  <a:srgbClr val="10161F"/>
+                </a:solidFill>
+                <a:latin typeface="Pretendard" pitchFamily="34" charset="0"/>
+                <a:ea typeface="Pretendard" pitchFamily="34" charset="-122"/>
+                <a:cs typeface="Pretendard" pitchFamily="34" charset="-120"/>
+              </a:rPr>
+              <a:t>1,000㎡ (약 303평(약 1001.7㎡))</a:t>
+            </a:r>
+            <a:endParaRPr lang="en-US" sz="2000" dirty="0"/>
+          </a:p>
+        </p:txBody>
+      </p:sp>
+      <p:sp>
+        <p:nvSpPr>
+          <p:cNvPr id="26" name="Shape 24"/>
+          <p:cNvSpPr/>
+          <p:nvPr/>
+        </p:nvSpPr>
+        <p:spPr>
+          <a:xfrm>
+            <a:off x="6187288" y="3429000"/>
+            <a:ext cx="2627300" cy="1280160"/>
+          </a:xfrm>
+          <a:prstGeom prst="roundRect">
+            <a:avLst>
+              <a:gd name="adj" fmla="val 4286"/>
+            </a:avLst>
+          </a:prstGeom>
+          <a:solidFill>
+            <a:srgbClr val="F7FAFC"/>
+          </a:solidFill>
+          <a:ln w="6350">
+            <a:solidFill>
+              <a:srgbClr val="CBD5E0"/>
+            </a:solidFill>
+            <a:prstDash val="solid"/>
+          </a:ln>
+        </p:spPr>
+      </p:sp>
+      <p:sp>
+        <p:nvSpPr>
+          <p:cNvPr id="27" name="Text 25"/>
+          <p:cNvSpPr/>
+          <p:nvPr/>
+        </p:nvSpPr>
+        <p:spPr>
+          <a:xfrm>
+            <a:off x="6351880" y="3557016"/>
+            <a:ext cx="2298116" cy="201168"/>
+          </a:xfrm>
+          <a:prstGeom prst="rect">
+            <a:avLst/>
+          </a:prstGeom>
+          <a:noFill/>
+          <a:ln/>
+        </p:spPr>
+        <p:txBody>
+          <a:bodyPr wrap="square" lIns="0" tIns="0" rIns="0" bIns="0" rtlCol="0" anchor="ctr"/>
+          <a:lstStyle/>
+          <a:p>
+            <a:pPr indent="0" marL="0">
+              <a:buNone/>
+            </a:pPr>
+            <a:r>
+              <a:rPr lang="en-US" sz="950" dirty="0">
+                <a:solidFill>
+                  <a:srgbClr val="718096"/>
+                </a:solidFill>
+                <a:latin typeface="Pretendard" pitchFamily="34" charset="0"/>
+                <a:ea typeface="Pretendard" pitchFamily="34" charset="-122"/>
+                <a:cs typeface="Pretendard" pitchFamily="34" charset="-120"/>
+              </a:rPr>
+              <a:t>용도지역</a:t>
+            </a:r>
+            <a:endParaRPr lang="en-US" sz="950" dirty="0"/>
+          </a:p>
+        </p:txBody>
+      </p:sp>
+      <p:sp>
+        <p:nvSpPr>
+          <p:cNvPr id="28" name="Text 26"/>
+          <p:cNvSpPr/>
+          <p:nvPr/>
+        </p:nvSpPr>
+        <p:spPr>
+          <a:xfrm>
+            <a:off x="6351880" y="3739896"/>
+            <a:ext cx="2298116" cy="402336"/>
+          </a:xfrm>
+          <a:prstGeom prst="rect">
+            <a:avLst/>
+          </a:prstGeom>
+          <a:noFill/>
+          <a:ln/>
+        </p:spPr>
+        <p:txBody>
+          <a:bodyPr wrap="square" lIns="0" tIns="0" rIns="0" bIns="0" rtlCol="0" anchor="ctr">
+            <a:normAutofit/>
+          </a:bodyPr>
+          <a:lstStyle/>
+          <a:p>
+            <a:pPr indent="0" marL="0">
+              <a:buNone/>
+            </a:pPr>
+            <a:r>
+              <a:rPr lang="en-US" sz="2000" b="1" dirty="0">
+                <a:solidFill>
+                  <a:srgbClr val="10161F"/>
+                </a:solidFill>
+                <a:latin typeface="Pretendard" pitchFamily="34" charset="0"/>
+                <a:ea typeface="Pretendard" pitchFamily="34" charset="-122"/>
+                <a:cs typeface="Pretendard" pitchFamily="34" charset="-120"/>
+              </a:rPr>
+              <a:t>일반상업지역</a:t>
+            </a:r>
+            <a:endParaRPr lang="en-US" sz="2000" dirty="0"/>
+          </a:p>
+        </p:txBody>
+      </p:sp>
+      <p:sp>
+        <p:nvSpPr>
+          <p:cNvPr id="29" name="Shape 27"/>
+          <p:cNvSpPr/>
+          <p:nvPr/>
+        </p:nvSpPr>
+        <p:spPr>
+          <a:xfrm>
+            <a:off x="8997467" y="3429000"/>
+            <a:ext cx="2627300" cy="1280160"/>
+          </a:xfrm>
+          <a:prstGeom prst="roundRect">
+            <a:avLst>
+              <a:gd name="adj" fmla="val 4286"/>
+            </a:avLst>
+          </a:prstGeom>
+          <a:solidFill>
+            <a:srgbClr val="F7FAFC"/>
+          </a:solidFill>
+          <a:ln w="6350">
+            <a:solidFill>
+              <a:srgbClr val="CBD5E0"/>
+            </a:solidFill>
+            <a:prstDash val="solid"/>
+          </a:ln>
+        </p:spPr>
+      </p:sp>
+      <p:sp>
+        <p:nvSpPr>
+          <p:cNvPr id="30" name="Text 28"/>
+          <p:cNvSpPr/>
+          <p:nvPr/>
+        </p:nvSpPr>
+        <p:spPr>
+          <a:xfrm>
+            <a:off x="9162059" y="3557016"/>
+            <a:ext cx="2298116" cy="201168"/>
+          </a:xfrm>
+          <a:prstGeom prst="rect">
+            <a:avLst/>
+          </a:prstGeom>
+          <a:noFill/>
+          <a:ln/>
+        </p:spPr>
+        <p:txBody>
+          <a:bodyPr wrap="square" lIns="0" tIns="0" rIns="0" bIns="0" rtlCol="0" anchor="ctr"/>
+          <a:lstStyle/>
+          <a:p>
+            <a:pPr indent="0" marL="0">
+              <a:buNone/>
+            </a:pPr>
+            <a:r>
+              <a:rPr lang="en-US" sz="950" dirty="0">
+                <a:solidFill>
+                  <a:srgbClr val="718096"/>
+                </a:solidFill>
+                <a:latin typeface="Pretendard" pitchFamily="34" charset="0"/>
+                <a:ea typeface="Pretendard" pitchFamily="34" charset="-122"/>
+                <a:cs typeface="Pretendard" pitchFamily="34" charset="-120"/>
+              </a:rPr>
+              <a:t>매매 희망가</a:t>
+            </a:r>
+            <a:endParaRPr lang="en-US" sz="950" dirty="0"/>
+          </a:p>
+        </p:txBody>
+      </p:sp>
+      <p:sp>
+        <p:nvSpPr>
+          <p:cNvPr id="31" name="Text 29"/>
+          <p:cNvSpPr/>
+          <p:nvPr/>
+        </p:nvSpPr>
+        <p:spPr>
+          <a:xfrm>
+            <a:off x="9162059" y="3739896"/>
+            <a:ext cx="2298116" cy="402336"/>
+          </a:xfrm>
+          <a:prstGeom prst="rect">
+            <a:avLst/>
+          </a:prstGeom>
+          <a:noFill/>
+          <a:ln/>
+        </p:spPr>
+        <p:txBody>
+          <a:bodyPr wrap="square" lIns="0" tIns="0" rIns="0" bIns="0" rtlCol="0" anchor="ctr">
+            <a:normAutofit/>
+          </a:bodyPr>
+          <a:lstStyle/>
+          <a:p>
+            <a:pPr indent="0" marL="0">
+              <a:buNone/>
+            </a:pPr>
+            <a:r>
+              <a:rPr lang="en-US" sz="2000" b="1" dirty="0">
+                <a:solidFill>
+                  <a:srgbClr val="10161F"/>
+                </a:solidFill>
+                <a:latin typeface="Pretendard" pitchFamily="34" charset="0"/>
+                <a:ea typeface="Pretendard" pitchFamily="34" charset="-122"/>
+                <a:cs typeface="Pretendard" pitchFamily="34" charset="-120"/>
+              </a:rPr>
+              <a:t>450억</a:t>
+            </a:r>
+            <a:endParaRPr lang="en-US" sz="2000" dirty="0"/>
+          </a:p>
+        </p:txBody>
+      </p:sp>
+      <p:sp>
+        <p:nvSpPr>
+          <p:cNvPr id="32" name="Text 30"/>
+          <p:cNvSpPr/>
+          <p:nvPr/>
+        </p:nvSpPr>
+        <p:spPr>
+          <a:xfrm>
+            <a:off x="566928" y="4901184"/>
             <a:ext cx="11057839" cy="274320"/>
           </a:xfrm>
           <a:prstGeom prst="rect">
@@ -4486,13 +4914,13 @@
       </p:sp>
       <p:sp>
         <p:nvSpPr>
-          <p:cNvPr id="21" name="Shape 19"/>
-          <p:cNvSpPr/>
-          <p:nvPr/>
-        </p:nvSpPr>
-        <p:spPr>
-          <a:xfrm>
-            <a:off x="566928" y="3831336"/>
+          <p:cNvPr id="33" name="Shape 31"/>
+          <p:cNvSpPr/>
+          <p:nvPr/>
+        </p:nvSpPr>
+        <p:spPr>
+          <a:xfrm>
+            <a:off x="566928" y="5230368"/>
             <a:ext cx="11057839" cy="585216"/>
           </a:xfrm>
           <a:prstGeom prst="roundRect">
@@ -4513,13 +4941,13 @@
       </p:sp>
       <p:sp>
         <p:nvSpPr>
-          <p:cNvPr id="22" name="Shape 20"/>
-          <p:cNvSpPr/>
-          <p:nvPr/>
-        </p:nvSpPr>
-        <p:spPr>
-          <a:xfrm>
-            <a:off x="676656" y="3941064"/>
+          <p:cNvPr id="34" name="Shape 32"/>
+          <p:cNvSpPr/>
+          <p:nvPr/>
+        </p:nvSpPr>
+        <p:spPr>
+          <a:xfrm>
+            <a:off x="676656" y="5340096"/>
             <a:ext cx="411480" cy="365760"/>
           </a:xfrm>
           <a:prstGeom prst="roundRect">
@@ -4540,13 +4968,13 @@
       </p:sp>
       <p:sp>
         <p:nvSpPr>
-          <p:cNvPr id="23" name="Text 21"/>
-          <p:cNvSpPr/>
-          <p:nvPr/>
-        </p:nvSpPr>
-        <p:spPr>
-          <a:xfrm>
-            <a:off x="676656" y="3941064"/>
+          <p:cNvPr id="35" name="Text 33"/>
+          <p:cNvSpPr/>
+          <p:nvPr/>
+        </p:nvSpPr>
+        <p:spPr>
+          <a:xfrm>
+            <a:off x="676656" y="5340096"/>
             <a:ext cx="411480" cy="365760"/>
           </a:xfrm>
           <a:prstGeom prst="rect">
@@ -4579,13 +5007,13 @@
       </p:sp>
       <p:sp>
         <p:nvSpPr>
-          <p:cNvPr id="24" name="Text 22"/>
-          <p:cNvSpPr/>
-          <p:nvPr/>
-        </p:nvSpPr>
-        <p:spPr>
-          <a:xfrm>
-            <a:off x="1207008" y="3904488"/>
+          <p:cNvPr id="36" name="Text 34"/>
+          <p:cNvSpPr/>
+          <p:nvPr/>
+        </p:nvSpPr>
+        <p:spPr>
+          <a:xfrm>
+            <a:off x="1207008" y="5303520"/>
             <a:ext cx="10280599" cy="438912"/>
           </a:xfrm>
           <a:prstGeom prst="rect">
@@ -4610,7 +5038,7 @@
                 <a:ea typeface="Pretendard" pitchFamily="34" charset="-122"/>
                 <a:cs typeface="Pretendard" pitchFamily="34" charset="-120"/>
               </a:rPr>
-              <a:t>원금 안전판: 이천권역 핵심 입지 및 우량 대지 지분 가치로 하방 경직성 확보</a:t>
+              <a:t>입지 가치: 이천권역 소재 자산으로 중장기 자산 가치 및 안정적 수요 검토</a:t>
             </a:r>
             <a:endParaRPr lang="en-US" sz="1150" dirty="0"/>
           </a:p>
@@ -4618,271 +5046,7 @@
       </p:sp>
       <p:sp>
         <p:nvSpPr>
-          <p:cNvPr id="25" name="Shape 23"/>
-          <p:cNvSpPr/>
-          <p:nvPr/>
-        </p:nvSpPr>
-        <p:spPr>
-          <a:xfrm>
-            <a:off x="566928" y="4526280"/>
-            <a:ext cx="11057839" cy="585216"/>
-          </a:xfrm>
-          <a:prstGeom prst="roundRect">
-            <a:avLst>
-              <a:gd name="adj" fmla="val 7813"/>
-            </a:avLst>
-          </a:prstGeom>
-          <a:solidFill>
-            <a:srgbClr val="F8F9FA"/>
-          </a:solidFill>
-          <a:ln w="7620">
-            <a:solidFill>
-              <a:srgbClr val="E2E8F0"/>
-            </a:solidFill>
-            <a:prstDash val="solid"/>
-          </a:ln>
-        </p:spPr>
-      </p:sp>
-      <p:sp>
-        <p:nvSpPr>
-          <p:cNvPr id="26" name="Shape 24"/>
-          <p:cNvSpPr/>
-          <p:nvPr/>
-        </p:nvSpPr>
-        <p:spPr>
-          <a:xfrm>
-            <a:off x="676656" y="4636008"/>
-            <a:ext cx="411480" cy="365760"/>
-          </a:xfrm>
-          <a:prstGeom prst="roundRect">
-            <a:avLst>
-              <a:gd name="adj" fmla="val 10000"/>
-            </a:avLst>
-          </a:prstGeom>
-          <a:solidFill>
-            <a:srgbClr val="F3EBDA"/>
-          </a:solidFill>
-          <a:ln w="6350">
-            <a:solidFill>
-              <a:srgbClr val="D9B668"/>
-            </a:solidFill>
-            <a:prstDash val="solid"/>
-          </a:ln>
-        </p:spPr>
-      </p:sp>
-      <p:sp>
-        <p:nvSpPr>
-          <p:cNvPr id="27" name="Text 25"/>
-          <p:cNvSpPr/>
-          <p:nvPr/>
-        </p:nvSpPr>
-        <p:spPr>
-          <a:xfrm>
-            <a:off x="676656" y="4636008"/>
-            <a:ext cx="411480" cy="365760"/>
-          </a:xfrm>
-          <a:prstGeom prst="rect">
-            <a:avLst/>
-          </a:prstGeom>
-          <a:noFill/>
-          <a:ln/>
-        </p:spPr>
-        <p:txBody>
-          <a:bodyPr wrap="square" lIns="0" tIns="0" rIns="0" bIns="0" rtlCol="0" anchor="ctr"/>
-          <a:lstStyle/>
-          <a:p>
-            <a:pPr algn="ctr" indent="0" marL="0">
-              <a:buNone/>
-            </a:pPr>
-            <a:r>
-              <a:rPr lang="en-US" sz="1000" b="1" dirty="0">
-                <a:solidFill>
-                  <a:srgbClr val="977024"/>
-                </a:solidFill>
-                <a:latin typeface="Arial" pitchFamily="34" charset="0"/>
-                <a:ea typeface="Arial" pitchFamily="34" charset="-122"/>
-                <a:cs typeface="Arial" pitchFamily="34" charset="-120"/>
-              </a:rPr>
-              <a:t>02</a:t>
-            </a:r>
-            <a:endParaRPr lang="en-US" sz="1000" dirty="0"/>
-          </a:p>
-        </p:txBody>
-      </p:sp>
-      <p:sp>
-        <p:nvSpPr>
-          <p:cNvPr id="28" name="Text 26"/>
-          <p:cNvSpPr/>
-          <p:nvPr/>
-        </p:nvSpPr>
-        <p:spPr>
-          <a:xfrm>
-            <a:off x="1207008" y="4599432"/>
-            <a:ext cx="10280599" cy="438912"/>
-          </a:xfrm>
-          <a:prstGeom prst="rect">
-            <a:avLst/>
-          </a:prstGeom>
-          <a:noFill/>
-          <a:ln/>
-        </p:spPr>
-        <p:txBody>
-          <a:bodyPr wrap="square" lIns="0" tIns="0" rIns="0" bIns="0" rtlCol="0" anchor="ctr"/>
-          <a:lstStyle/>
-          <a:p>
-            <a:pPr indent="0" marL="0">
-              <a:buNone/>
-            </a:pPr>
-            <a:r>
-              <a:rPr lang="en-US" sz="1150" dirty="0">
-                <a:solidFill>
-                  <a:srgbClr val="10161F"/>
-                </a:solidFill>
-                <a:latin typeface="Pretendard" pitchFamily="34" charset="0"/>
-                <a:ea typeface="Pretendard" pitchFamily="34" charset="-122"/>
-                <a:cs typeface="Pretendard" pitchFamily="34" charset="-120"/>
-              </a:rPr>
-              <a:t>수익 안정성: 매각 희망가 450억 대비 안정적인 월 임대수익 창출 구조</a:t>
-            </a:r>
-            <a:endParaRPr lang="en-US" sz="1150" dirty="0"/>
-          </a:p>
-        </p:txBody>
-      </p:sp>
-      <p:sp>
-        <p:nvSpPr>
-          <p:cNvPr id="29" name="Shape 27"/>
-          <p:cNvSpPr/>
-          <p:nvPr/>
-        </p:nvSpPr>
-        <p:spPr>
-          <a:xfrm>
-            <a:off x="566928" y="5221224"/>
-            <a:ext cx="11057839" cy="585216"/>
-          </a:xfrm>
-          <a:prstGeom prst="roundRect">
-            <a:avLst>
-              <a:gd name="adj" fmla="val 7813"/>
-            </a:avLst>
-          </a:prstGeom>
-          <a:solidFill>
-            <a:srgbClr val="F8F9FA"/>
-          </a:solidFill>
-          <a:ln w="7620">
-            <a:solidFill>
-              <a:srgbClr val="E2E8F0"/>
-            </a:solidFill>
-            <a:prstDash val="solid"/>
-          </a:ln>
-        </p:spPr>
-      </p:sp>
-      <p:sp>
-        <p:nvSpPr>
-          <p:cNvPr id="30" name="Shape 28"/>
-          <p:cNvSpPr/>
-          <p:nvPr/>
-        </p:nvSpPr>
-        <p:spPr>
-          <a:xfrm>
-            <a:off x="676656" y="5330952"/>
-            <a:ext cx="411480" cy="365760"/>
-          </a:xfrm>
-          <a:prstGeom prst="roundRect">
-            <a:avLst>
-              <a:gd name="adj" fmla="val 10000"/>
-            </a:avLst>
-          </a:prstGeom>
-          <a:solidFill>
-            <a:srgbClr val="F3EBDA"/>
-          </a:solidFill>
-          <a:ln w="6350">
-            <a:solidFill>
-              <a:srgbClr val="D9B668"/>
-            </a:solidFill>
-            <a:prstDash val="solid"/>
-          </a:ln>
-        </p:spPr>
-      </p:sp>
-      <p:sp>
-        <p:nvSpPr>
-          <p:cNvPr id="31" name="Text 29"/>
-          <p:cNvSpPr/>
-          <p:nvPr/>
-        </p:nvSpPr>
-        <p:spPr>
-          <a:xfrm>
-            <a:off x="676656" y="5330952"/>
-            <a:ext cx="411480" cy="365760"/>
-          </a:xfrm>
-          <a:prstGeom prst="rect">
-            <a:avLst/>
-          </a:prstGeom>
-          <a:noFill/>
-          <a:ln/>
-        </p:spPr>
-        <p:txBody>
-          <a:bodyPr wrap="square" lIns="0" tIns="0" rIns="0" bIns="0" rtlCol="0" anchor="ctr"/>
-          <a:lstStyle/>
-          <a:p>
-            <a:pPr algn="ctr" indent="0" marL="0">
-              <a:buNone/>
-            </a:pPr>
-            <a:r>
-              <a:rPr lang="en-US" sz="1000" b="1" dirty="0">
-                <a:solidFill>
-                  <a:srgbClr val="977024"/>
-                </a:solidFill>
-                <a:latin typeface="Arial" pitchFamily="34" charset="0"/>
-                <a:ea typeface="Arial" pitchFamily="34" charset="-122"/>
-                <a:cs typeface="Arial" pitchFamily="34" charset="-120"/>
-              </a:rPr>
-              <a:t>03</a:t>
-            </a:r>
-            <a:endParaRPr lang="en-US" sz="1000" dirty="0"/>
-          </a:p>
-        </p:txBody>
-      </p:sp>
-      <p:sp>
-        <p:nvSpPr>
-          <p:cNvPr id="32" name="Text 30"/>
-          <p:cNvSpPr/>
-          <p:nvPr/>
-        </p:nvSpPr>
-        <p:spPr>
-          <a:xfrm>
-            <a:off x="1207008" y="5294376"/>
-            <a:ext cx="10280599" cy="438912"/>
-          </a:xfrm>
-          <a:prstGeom prst="rect">
-            <a:avLst/>
-          </a:prstGeom>
-          <a:noFill/>
-          <a:ln/>
-        </p:spPr>
-        <p:txBody>
-          <a:bodyPr wrap="square" lIns="0" tIns="0" rIns="0" bIns="0" rtlCol="0" anchor="ctr"/>
-          <a:lstStyle/>
-          <a:p>
-            <a:pPr indent="0" marL="0">
-              <a:buNone/>
-            </a:pPr>
-            <a:r>
-              <a:rPr lang="en-US" sz="1150" dirty="0">
-                <a:solidFill>
-                  <a:srgbClr val="10161F"/>
-                </a:solidFill>
-                <a:latin typeface="Pretendard" pitchFamily="34" charset="0"/>
-                <a:ea typeface="Pretendard" pitchFamily="34" charset="-122"/>
-                <a:cs typeface="Pretendard" pitchFamily="34" charset="-120"/>
-              </a:rPr>
-              <a:t>미래 가치: 향후 권역 지가 상승 및 공법상 잔여 용적률 활용 밸류업 기회</a:t>
-            </a:r>
-            <a:endParaRPr lang="en-US" sz="1150" dirty="0"/>
-          </a:p>
-        </p:txBody>
-      </p:sp>
-      <p:sp>
-        <p:nvSpPr>
-          <p:cNvPr id="33" name="Text 31"/>
+          <p:cNvPr id="37" name="Text 35"/>
           <p:cNvSpPr/>
           <p:nvPr/>
         </p:nvSpPr>
@@ -4921,7 +5085,7 @@
       </p:sp>
       <p:sp>
         <p:nvSpPr>
-          <p:cNvPr id="34" name="Text 32"/>
+          <p:cNvPr id="38" name="Text 36"/>
           <p:cNvSpPr/>
           <p:nvPr/>
         </p:nvSpPr>
@@ -5346,7 +5510,7 @@
                 <a:ea typeface="Pretendard" pitchFamily="34" charset="-122"/>
                 <a:cs typeface="Pretendard" pitchFamily="34" charset="-120"/>
               </a:rPr>
-              <a:t>{"ok":true,"mocked":true,"extractedFields":{"area_signal":"역삼","asset_type":"오피스빌딩","price_band":"300억","size_signal":"3000평(약 9917.4㎡)"},"extractedFacts":{"region":"역삼","exactAddressCandidate":"역삼동 742-1","assetType":"오피스빌딩","priceText":"300억","sizeText":"3000평(약 9917.4㎡)","currentUse":"오피스","currentUseSignal":"근린생활시설","leaseSignal":"임대중","vacancySignal":"공실없음","tenantNames":["쿠팡","네이버"],"unitRentTexts":["301호: 1500만"],"sellerMotivationText":"자산 효율화","brokerNotes":["초역세권 매물"]},"detectedSensitiveFields":["exact_address","tenant_name"],"ambiguousFields":[],"warnings":[],"areaSignal":"역삼","assetType":"오피스빌딩","priceBand":"300억","sizeSignal":"3000평(약 9917.4㎡)","dealType":"매각","buildingName":"역삼 센트럴타워","exactAddress":"역삼동 742-1","totalFloorArea":9917.3,"buildYear":2015,"currentUseSignal":"근린생활시설","vacancySignal":"공실 없음","fitSummary":"초역세권 근생 빌딩으로 시행/사옥 매입에 최적화","cautionSummary":"주요 임차 업종 만기 조율 필요","hiddenFields":["exact_address","seller_motivation"],"confidence":{"areaSignal":"confirmed","assetType":"confirmed","priceBand":"ai_hypothesis","fitSummary":"ai_hypothesis"},"missingData":["sizeSignal"],"boundaryNote":"본 자료는 실거래 통계 기반 참고치입니다.","buyerType":"법인 사옥형","budgetRange":{"min":50,"max":80,"display":"50억~80억"},"preferredRegions":["강남","성수"],"assetTypes":["꼬마빌딩","사옥용"],"purchasePurpose":"사옥용 매입","mustHave":["초역세권","주차"],"niceToHave":["테라스","루프탑"],"riskTolerance":"medium","financingNote":"자본금 50% 준비","missingQuestions":["구체적인 입주 시기가 언제인가요?","선호하는 수익률이 있나요?"],"privacyNotes":["연락처 비공개"],"fitReasons":["매수자 예산(50-80억)에 부합하는 매물입니다.","요청하신 성수/강남 권역에 해당합니다."],"cautionReasons":["요청한 용도와 달리 명도 협의가 다소 필요합니다."],"recommendedNextAction":"현장 답사 제안","kakaoMessage":"안녕하세요! 요청하신 조건에 부합하는 추천 매물이 있어 안내해 드립니다. 확인해보시고 피드백 부탁드립니다.","title":"강남 역삼역 초역세권 오피스 사옥용 빌딩 매각","shortSummary":"역삼역 도보 5분 거리의 준신축급 대형 오피스빌딩입니다.","dealPoints":["초역세권","사옥 최적"],"cautionPoints":["명도 조율 필요"],"hiddenInfoNotice":["보증금 및 지번은 인가 후 확인 가능"],"gateMessage":"G1 등급 등록이 필요합니다.","kakaoText":"강남 역삼역 오피스 빌딩 매각 안내입니다.","exactUnitCandidate":"101호","floor":"1층","areaSqmText":"150㎡","spaceType":"office","depositText":"5000만","monthlyRentText":"400만","maintenanceFeeText":"50만","availableFromText":"즉시입주","leaseTermMonthsText":"24","incentivesText":"렌트프리 2개월","restrictions":[],"landlordIdentity":"김성수","currentTenant":"스타트업","vacancyReason":"이전 확장","rentNegotiation":"협의 가능","region":"성수동","areaSqm":150,"deposit":5000,"monthlyRent":400,"maintenanceFee":50,"availableFrom":"즉시입주","leaseTermMonths":24,"incentives":{"rentFreeMonths":2,"interiorSupport":"일부 인테리어 지원","freeRentDetail":"렌트프리 2개월 지원"},"shortSummaryLease":"성수역 도보 5분 거리 1층 리테일 상가 매물입니다."}</a:t>
+              <a:t>{"ok":true,"mocked":true,"extractedFields":{"area_signal":"역삼","asset_type":"오피스빌딩","price_band":"300억","size_signal":"3000평(약 9917.4㎡)"},"extractedFacts":{"region":"역삼","exactAddressCandidate":"역삼동 742-1","assetType":"오피스빌딩","priceText":"300억","sizeText":"3000평(약 9917.4㎡)","currentUse":"오피스","currentUseSignal":"근린생활시설","leaseSignal":"임대중","vacancySignal":"공실없음","tenantNames":["쿠팡","네이버"],"unitRentTexts":["301호: 1500만"],"sellerMotivationText":"자산 효율화","brokerNotes":["초역세권 매물"]},"detectedSensitiveFields":["exact_address","tenant_name"],"ambiguousFields":[],"warnings":[],"areaSignal":"역삼","assetType":"오피스빌딩","priceBand":"300억","sizeSignal":"3000평(약 9917.4㎡)","dealType":"매각","buildingName":"역삼 센트럴타워","exactAddress":"역삼동 742-1","totalFloorArea":9917.3,"buildYear":2015,"currentUseSignal":"근린생활시설","vacancySignal":"공실 없음","fitSummary":"초역세권 근생 빌딩으로 시행/사옥 매입에 최적화","cautionSummary":"주요 임차인 만기 조율 필요","hiddenFields":["exact_address","seller_motivation"],"confidence":{"areaSignal":"confirmed","assetType":"confirmed","priceBand":"ai_hypothesis","fitSummary":"ai_hypothesis"},"missingData":["sizeSignal"],"boundaryNote":"본 자료는 실거래 통계 기반 참고치입니다.","buyerType":"법인 사옥형","budgetRange":{"min":50,"max":80,"display":"50억~80억"},"preferredRegions":["강남","성수"],"assetTypes":["꼬마빌딩","사옥용"],"purchasePurpose":"사옥용 매입","mustHave":["초역세권","주차"],"niceToHave":["테라스","루프탑"],"riskTolerance":"medium","financingNote":"자본금 50% 준비","missingQuestions":["구체적인 입주 시기가 언제인가요?","선호하는 수익률이 있나요?"],"privacyNotes":["연락처 비공개"],"fitReasons":["매수자 예산(50-80억)에 부합하는 매물입니다.","요청하신 성수/강남 권역에 해당합니다."],"cautionReasons":["요청한 용도와 달리 명도 협의가 다소 필요합니다."],"recommendedNextAction":"현장 답사 제안","kakaoMessage":"안녕하세요! 요청하신 조건에 부합하는 추천 매물이 있어 안내해 드립니다. 확인해보시고 피드백 부탁드립니다.","title":"강남 역삼역 초역세권 오피스 사옥용 빌딩 매각","shortSummary":"역삼역 도보 5분 거리의 준신축급 대형 오피스빌딩입니다.","dealPoints":["초역세권","사옥 최적"],"cautionPoints":["명도 조율 필요"],"hiddenInfoNotice":["보증금 및 지번은 인가 후 확인 가능"],"gateMessage":"G1 등급 등록이 필요합니다.","kakaoText":"강남 역삼역 오피스 빌딩 매각 안내입니다.","exactUnitCandidate":"101호","floor":"1층","areaSqmText":"150㎡","spaceType":"office","depositText":"5000만","monthlyRentText":"400만","maintenanceFeeText":"50만","availableFromText":"즉시입주","leaseTermMonthsText":"24","incentivesText":"렌트프리 2개월","restrictions":[],"landlordIdentity":"김성수","currentTenant":"스타트업","vacancyReason":"이전 확장","rentNegotiation":"협의 가능","region":"성수동","areaSqm":150,"deposit":5000,"monthlyRent":400,"maintenanceFee":50,"availableFrom":"즉시입주","leaseTermMonths":24,"incentives":{"rentFreeMonths":2,"interiorSupport":"일부 인테리어 지원","freeRentDetail":"렌트프리 2개월 지원"},"shortSummaryLease":"성수역 도보 5분 거리 1층 리테일 상가 매물입니다."}</a:t>
             </a:r>
             <a:endParaRPr lang="en-US" sz="1000" dirty="0"/>
           </a:p>
@@ -5596,7 +5760,7 @@
                 <a:ea typeface="Pretendard" pitchFamily="34" charset="-122"/>
                 <a:cs typeface="Pretendard" pitchFamily="34" charset="-120"/>
               </a:rPr>
-              <a:t>{"ok"</a:t>
+              <a:t>주요 용도</a:t>
             </a:r>
             <a:endParaRPr lang="en-US" sz="1400" dirty="0"/>
           </a:p>
@@ -5638,7 +5802,7 @@
                 <a:ea typeface="Pretendard" pitchFamily="34" charset="-122"/>
                 <a:cs typeface="Pretendard" pitchFamily="34" charset="-120"/>
               </a:rPr>
-              <a:t>true,"mocked":true,"extractedFields":{"area_signal":"역삼","asset_type":"오피스빌딩","price_band":"300억","size_signal":"3000평(약 9917.4㎡)"},"extractedFacts":{"region":"역삼","exactAddressCandidate":"역삼동 742-1","assetType":"오피스빌딩","priceText":"300억","sizeText":"3000평(약 9917.4㎡)","currentUse":"오피스","currentUseSignal":"근린생활시설","leaseSignal":"임대중","vacancySignal":"공실없음","tenantNames":"쿠팡","네이버","unitRentTexts":"301호: 1500만","sellerMotivationText":"자산 효율화","brokerNotes":"초역세권 매물"},"detectedSensitiveFields":"exact_address","tenant_name","ambiguousFields":,"warnings":,"areaSignal":"역삼","assetType":"오피스빌딩","priceBand":"300억","sizeSignal":"3000평(약 9917.4㎡)","dealType":"매각","buildingName":"역삼 센트럴타워","exactAddress":"역삼동 742-1","totalFloorArea":9917.3,"buildYear":2015,"currentUseSignal":"근린생활시설","vacancySignal":"공실 없음","fitSummary":"초역세권 근생 빌딩으로 시행/사옥 매입에 최적화","cautionSummary":"주요 임차 업종 만기 조율 필요","hiddenFields":"exact_address","seller_motivation","confidence":{"areaSignal":"confirmed","assetType":"confirmed","priceBand":"ai_hypothesis","fitSummary":"ai_hypothesis"},"missingData":"sizeSignal","boundaryNote":"본 자료는 실거래 통계 기반 참고치입니다.","buyerType":"법인 사옥형","budgetRange":{"min":50,"max":80,"display":"50억~80억"},"preferredRegions":"강남","성수","assetTypes":"꼬마빌딩","사옥용","purchasePurpose":"사옥용 매입","mustHave":"초역세권","주차","niceToHave":"테라스","루프탑","riskTolerance":"medium","financingNote":"자본금 50% 준비","missingQuestions":"구체적인 입주 시기가 언제인가요?","선호하는 수익률이 있나요?","privacyNotes":"연락처 비공개","fitReasons":"매수자 예산(50-80억)에 부합하는 매물입니다.","요청하신 성수/강남 권역에 해당합니다.","cautionReasons":"요청한 용도와 달리 명도 협의가 다소 필요합니다.","recommendedNextAction":"현장 답사 제안","kakaoMessage":"안녕하세요! 요청하신 조건에 부합하는 추천 매물이 있어 안내해 드립니다. 확인해보시고 피드백 부탁드립니다.","title":"강남 역삼역 초역세권 오피스 사옥용 빌딩 매각","shortSummary":"역삼역 도보 5분 거리의 준신축급 대형 오피스빌딩입니다.","dealPoints":"초역세권","사옥 최적","cautionPoints":"명도 조율 필요","hiddenInfoNotice":"보증금 및 지번은 인가 후 확인 가능","gateMessage":"G1 등급 등록이 필요합니다.","kakaoText":"강남 역삼역 오피스 빌딩 매각 안내입니다.","exactUnitCandidate":"101호","floor":"1층","areaSqmText":"150㎡","spaceType":"office","depositText":"5000만","monthlyRentText":"400만","maintenanceFeeText":"50만","availableFromText":"즉시입주","leaseTermMonthsText":"24","incentivesText":"렌트프리 2개월","restrictions":,"landlordIdentity":"김성수","currentTenant":"스타트업","vacancyReason":"이전 확장","rentNegotiation":"협의 가능","region":"성수동","areaSqm":150,"deposit":5000,"monthlyRent":400,"maintenanceFee":50,"availableFrom":"즉시입주","leaseTermMonths":24,"incentives":{"rentFreeMonths":2,"interiorSupport":"일부 인테리어 지원","freeRentDetail":"렌트프리 2개월 지원"},"shortSummaryLease":"성수역 도보 5분 거리 1층 리테일 상가 매물입니다."}</a:t>
+              <a:t>확인 필요</a:t>
             </a:r>
             <a:endParaRPr lang="en-US" sz="1400" dirty="0"/>
           </a:p>
@@ -5647,6 +5811,434 @@
       <p:sp>
         <p:nvSpPr>
           <p:cNvPr id="9" name="Shape 7"/>
+          <p:cNvSpPr/>
+          <p:nvPr/>
+        </p:nvSpPr>
+        <p:spPr>
+          <a:xfrm>
+            <a:off x="566928" y="2048256"/>
+            <a:ext cx="6858000" cy="0"/>
+          </a:xfrm>
+          <a:prstGeom prst="line">
+            <a:avLst/>
+          </a:prstGeom>
+          <a:noFill/>
+          <a:ln w="3810">
+            <a:solidFill>
+              <a:srgbClr val="CBD5E0"/>
+            </a:solidFill>
+            <a:prstDash val="solid"/>
+          </a:ln>
+        </p:spPr>
+      </p:sp>
+      <p:sp>
+        <p:nvSpPr>
+          <p:cNvPr id="10" name="Text 8"/>
+          <p:cNvSpPr/>
+          <p:nvPr/>
+        </p:nvSpPr>
+        <p:spPr>
+          <a:xfrm>
+            <a:off x="566928" y="2048256"/>
+            <a:ext cx="2606040" cy="402336"/>
+          </a:xfrm>
+          <a:prstGeom prst="rect">
+            <a:avLst/>
+          </a:prstGeom>
+          <a:noFill/>
+          <a:ln/>
+        </p:spPr>
+        <p:txBody>
+          <a:bodyPr wrap="square" lIns="0" tIns="0" rIns="0" bIns="0" rtlCol="0" anchor="ctr"/>
+          <a:lstStyle/>
+          <a:p>
+            <a:pPr indent="0" marL="0">
+              <a:lnSpc>
+                <a:spcPct val="120000"/>
+              </a:lnSpc>
+              <a:buNone/>
+            </a:pPr>
+            <a:r>
+              <a:rPr lang="en-US" sz="1400" dirty="0">
+                <a:solidFill>
+                  <a:srgbClr val="718096"/>
+                </a:solidFill>
+                <a:latin typeface="Pretendard" pitchFamily="34" charset="0"/>
+                <a:ea typeface="Pretendard" pitchFamily="34" charset="-122"/>
+                <a:cs typeface="Pretendard" pitchFamily="34" charset="-120"/>
+              </a:rPr>
+              <a:t>연면적</a:t>
+            </a:r>
+            <a:endParaRPr lang="en-US" sz="1400" dirty="0"/>
+          </a:p>
+        </p:txBody>
+      </p:sp>
+      <p:sp>
+        <p:nvSpPr>
+          <p:cNvPr id="11" name="Text 9"/>
+          <p:cNvSpPr/>
+          <p:nvPr/>
+        </p:nvSpPr>
+        <p:spPr>
+          <a:xfrm>
+            <a:off x="3172968" y="2048256"/>
+            <a:ext cx="4251960" cy="402336"/>
+          </a:xfrm>
+          <a:prstGeom prst="rect">
+            <a:avLst/>
+          </a:prstGeom>
+          <a:noFill/>
+          <a:ln/>
+        </p:spPr>
+        <p:txBody>
+          <a:bodyPr wrap="square" lIns="0" tIns="0" rIns="0" bIns="0" rtlCol="0" anchor="ctr"/>
+          <a:lstStyle/>
+          <a:p>
+            <a:pPr indent="0" marL="0">
+              <a:lnSpc>
+                <a:spcPct val="120000"/>
+              </a:lnSpc>
+              <a:buNone/>
+            </a:pPr>
+            <a:r>
+              <a:rPr lang="en-US" sz="1400" b="1" dirty="0">
+                <a:solidFill>
+                  <a:srgbClr val="10161F"/>
+                </a:solidFill>
+                <a:latin typeface="Pretendard" pitchFamily="34" charset="0"/>
+                <a:ea typeface="Pretendard" pitchFamily="34" charset="-122"/>
+                <a:cs typeface="Pretendard" pitchFamily="34" charset="-120"/>
+              </a:rPr>
+              <a:t>5,000㎡ (약 1513평(약 5001.7㎡))</a:t>
+            </a:r>
+            <a:endParaRPr lang="en-US" sz="1400" dirty="0"/>
+          </a:p>
+        </p:txBody>
+      </p:sp>
+      <p:sp>
+        <p:nvSpPr>
+          <p:cNvPr id="12" name="Shape 10"/>
+          <p:cNvSpPr/>
+          <p:nvPr/>
+        </p:nvSpPr>
+        <p:spPr>
+          <a:xfrm>
+            <a:off x="566928" y="2450592"/>
+            <a:ext cx="6858000" cy="0"/>
+          </a:xfrm>
+          <a:prstGeom prst="line">
+            <a:avLst/>
+          </a:prstGeom>
+          <a:noFill/>
+          <a:ln w="3810">
+            <a:solidFill>
+              <a:srgbClr val="CBD5E0"/>
+            </a:solidFill>
+            <a:prstDash val="solid"/>
+          </a:ln>
+        </p:spPr>
+      </p:sp>
+      <p:sp>
+        <p:nvSpPr>
+          <p:cNvPr id="13" name="Text 11"/>
+          <p:cNvSpPr/>
+          <p:nvPr/>
+        </p:nvSpPr>
+        <p:spPr>
+          <a:xfrm>
+            <a:off x="566928" y="2450592"/>
+            <a:ext cx="2606040" cy="402336"/>
+          </a:xfrm>
+          <a:prstGeom prst="rect">
+            <a:avLst/>
+          </a:prstGeom>
+          <a:noFill/>
+          <a:ln/>
+        </p:spPr>
+        <p:txBody>
+          <a:bodyPr wrap="square" lIns="0" tIns="0" rIns="0" bIns="0" rtlCol="0" anchor="ctr"/>
+          <a:lstStyle/>
+          <a:p>
+            <a:pPr indent="0" marL="0">
+              <a:lnSpc>
+                <a:spcPct val="120000"/>
+              </a:lnSpc>
+              <a:buNone/>
+            </a:pPr>
+            <a:r>
+              <a:rPr lang="en-US" sz="1400" dirty="0">
+                <a:solidFill>
+                  <a:srgbClr val="718096"/>
+                </a:solidFill>
+                <a:latin typeface="Pretendard" pitchFamily="34" charset="0"/>
+                <a:ea typeface="Pretendard" pitchFamily="34" charset="-122"/>
+                <a:cs typeface="Pretendard" pitchFamily="34" charset="-120"/>
+              </a:rPr>
+              <a:t>대지면적</a:t>
+            </a:r>
+            <a:endParaRPr lang="en-US" sz="1400" dirty="0"/>
+          </a:p>
+        </p:txBody>
+      </p:sp>
+      <p:sp>
+        <p:nvSpPr>
+          <p:cNvPr id="14" name="Text 12"/>
+          <p:cNvSpPr/>
+          <p:nvPr/>
+        </p:nvSpPr>
+        <p:spPr>
+          <a:xfrm>
+            <a:off x="3172968" y="2450592"/>
+            <a:ext cx="4251960" cy="402336"/>
+          </a:xfrm>
+          <a:prstGeom prst="rect">
+            <a:avLst/>
+          </a:prstGeom>
+          <a:noFill/>
+          <a:ln/>
+        </p:spPr>
+        <p:txBody>
+          <a:bodyPr wrap="square" lIns="0" tIns="0" rIns="0" bIns="0" rtlCol="0" anchor="ctr"/>
+          <a:lstStyle/>
+          <a:p>
+            <a:pPr indent="0" marL="0">
+              <a:lnSpc>
+                <a:spcPct val="120000"/>
+              </a:lnSpc>
+              <a:buNone/>
+            </a:pPr>
+            <a:r>
+              <a:rPr lang="en-US" sz="1400" b="1" dirty="0">
+                <a:solidFill>
+                  <a:srgbClr val="10161F"/>
+                </a:solidFill>
+                <a:latin typeface="Pretendard" pitchFamily="34" charset="0"/>
+                <a:ea typeface="Pretendard" pitchFamily="34" charset="-122"/>
+                <a:cs typeface="Pretendard" pitchFamily="34" charset="-120"/>
+              </a:rPr>
+              <a:t>1,000㎡ (약 303평(약 1001.7㎡))</a:t>
+            </a:r>
+            <a:endParaRPr lang="en-US" sz="1400" dirty="0"/>
+          </a:p>
+        </p:txBody>
+      </p:sp>
+      <p:sp>
+        <p:nvSpPr>
+          <p:cNvPr id="15" name="Shape 13"/>
+          <p:cNvSpPr/>
+          <p:nvPr/>
+        </p:nvSpPr>
+        <p:spPr>
+          <a:xfrm>
+            <a:off x="566928" y="2852928"/>
+            <a:ext cx="6858000" cy="0"/>
+          </a:xfrm>
+          <a:prstGeom prst="line">
+            <a:avLst/>
+          </a:prstGeom>
+          <a:noFill/>
+          <a:ln w="3810">
+            <a:solidFill>
+              <a:srgbClr val="CBD5E0"/>
+            </a:solidFill>
+            <a:prstDash val="solid"/>
+          </a:ln>
+        </p:spPr>
+      </p:sp>
+      <p:sp>
+        <p:nvSpPr>
+          <p:cNvPr id="16" name="Text 14"/>
+          <p:cNvSpPr/>
+          <p:nvPr/>
+        </p:nvSpPr>
+        <p:spPr>
+          <a:xfrm>
+            <a:off x="566928" y="2852928"/>
+            <a:ext cx="2606040" cy="402336"/>
+          </a:xfrm>
+          <a:prstGeom prst="rect">
+            <a:avLst/>
+          </a:prstGeom>
+          <a:noFill/>
+          <a:ln/>
+        </p:spPr>
+        <p:txBody>
+          <a:bodyPr wrap="square" lIns="0" tIns="0" rIns="0" bIns="0" rtlCol="0" anchor="ctr"/>
+          <a:lstStyle/>
+          <a:p>
+            <a:pPr indent="0" marL="0">
+              <a:lnSpc>
+                <a:spcPct val="120000"/>
+              </a:lnSpc>
+              <a:buNone/>
+            </a:pPr>
+            <a:r>
+              <a:rPr lang="en-US" sz="1400" dirty="0">
+                <a:solidFill>
+                  <a:srgbClr val="718096"/>
+                </a:solidFill>
+                <a:latin typeface="Pretendard" pitchFamily="34" charset="0"/>
+                <a:ea typeface="Pretendard" pitchFamily="34" charset="-122"/>
+                <a:cs typeface="Pretendard" pitchFamily="34" charset="-120"/>
+              </a:rPr>
+              <a:t>용도지역</a:t>
+            </a:r>
+            <a:endParaRPr lang="en-US" sz="1400" dirty="0"/>
+          </a:p>
+        </p:txBody>
+      </p:sp>
+      <p:sp>
+        <p:nvSpPr>
+          <p:cNvPr id="17" name="Text 15"/>
+          <p:cNvSpPr/>
+          <p:nvPr/>
+        </p:nvSpPr>
+        <p:spPr>
+          <a:xfrm>
+            <a:off x="3172968" y="2852928"/>
+            <a:ext cx="4251960" cy="402336"/>
+          </a:xfrm>
+          <a:prstGeom prst="rect">
+            <a:avLst/>
+          </a:prstGeom>
+          <a:noFill/>
+          <a:ln/>
+        </p:spPr>
+        <p:txBody>
+          <a:bodyPr wrap="square" lIns="0" tIns="0" rIns="0" bIns="0" rtlCol="0" anchor="ctr"/>
+          <a:lstStyle/>
+          <a:p>
+            <a:pPr indent="0" marL="0">
+              <a:lnSpc>
+                <a:spcPct val="120000"/>
+              </a:lnSpc>
+              <a:buNone/>
+            </a:pPr>
+            <a:r>
+              <a:rPr lang="en-US" sz="1400" b="1" dirty="0">
+                <a:solidFill>
+                  <a:srgbClr val="10161F"/>
+                </a:solidFill>
+                <a:latin typeface="Pretendard" pitchFamily="34" charset="0"/>
+                <a:ea typeface="Pretendard" pitchFamily="34" charset="-122"/>
+                <a:cs typeface="Pretendard" pitchFamily="34" charset="-120"/>
+              </a:rPr>
+              <a:t>일반상업지역</a:t>
+            </a:r>
+            <a:endParaRPr lang="en-US" sz="1400" dirty="0"/>
+          </a:p>
+        </p:txBody>
+      </p:sp>
+      <p:sp>
+        <p:nvSpPr>
+          <p:cNvPr id="18" name="Shape 16"/>
+          <p:cNvSpPr/>
+          <p:nvPr/>
+        </p:nvSpPr>
+        <p:spPr>
+          <a:xfrm>
+            <a:off x="566928" y="3255264"/>
+            <a:ext cx="6858000" cy="0"/>
+          </a:xfrm>
+          <a:prstGeom prst="line">
+            <a:avLst/>
+          </a:prstGeom>
+          <a:noFill/>
+          <a:ln w="3810">
+            <a:solidFill>
+              <a:srgbClr val="CBD5E0"/>
+            </a:solidFill>
+            <a:prstDash val="solid"/>
+          </a:ln>
+        </p:spPr>
+      </p:sp>
+      <p:sp>
+        <p:nvSpPr>
+          <p:cNvPr id="19" name="Text 17"/>
+          <p:cNvSpPr/>
+          <p:nvPr/>
+        </p:nvSpPr>
+        <p:spPr>
+          <a:xfrm>
+            <a:off x="566928" y="3255264"/>
+            <a:ext cx="2606040" cy="402336"/>
+          </a:xfrm>
+          <a:prstGeom prst="rect">
+            <a:avLst/>
+          </a:prstGeom>
+          <a:noFill/>
+          <a:ln/>
+        </p:spPr>
+        <p:txBody>
+          <a:bodyPr wrap="square" lIns="0" tIns="0" rIns="0" bIns="0" rtlCol="0" anchor="ctr"/>
+          <a:lstStyle/>
+          <a:p>
+            <a:pPr indent="0" marL="0">
+              <a:lnSpc>
+                <a:spcPct val="120000"/>
+              </a:lnSpc>
+              <a:buNone/>
+            </a:pPr>
+            <a:r>
+              <a:rPr lang="en-US" sz="1400" dirty="0">
+                <a:solidFill>
+                  <a:srgbClr val="718096"/>
+                </a:solidFill>
+                <a:latin typeface="Pretendard" pitchFamily="34" charset="0"/>
+                <a:ea typeface="Pretendard" pitchFamily="34" charset="-122"/>
+                <a:cs typeface="Pretendard" pitchFamily="34" charset="-120"/>
+              </a:rPr>
+              <a:t>매매 희망가</a:t>
+            </a:r>
+            <a:endParaRPr lang="en-US" sz="1400" dirty="0"/>
+          </a:p>
+        </p:txBody>
+      </p:sp>
+      <p:sp>
+        <p:nvSpPr>
+          <p:cNvPr id="20" name="Text 18"/>
+          <p:cNvSpPr/>
+          <p:nvPr/>
+        </p:nvSpPr>
+        <p:spPr>
+          <a:xfrm>
+            <a:off x="3172968" y="3255264"/>
+            <a:ext cx="4251960" cy="402336"/>
+          </a:xfrm>
+          <a:prstGeom prst="rect">
+            <a:avLst/>
+          </a:prstGeom>
+          <a:noFill/>
+          <a:ln/>
+        </p:spPr>
+        <p:txBody>
+          <a:bodyPr wrap="square" lIns="0" tIns="0" rIns="0" bIns="0" rtlCol="0" anchor="ctr"/>
+          <a:lstStyle/>
+          <a:p>
+            <a:pPr indent="0" marL="0">
+              <a:lnSpc>
+                <a:spcPct val="120000"/>
+              </a:lnSpc>
+              <a:buNone/>
+            </a:pPr>
+            <a:r>
+              <a:rPr lang="en-US" sz="1400" b="1" dirty="0">
+                <a:solidFill>
+                  <a:srgbClr val="10161F"/>
+                </a:solidFill>
+                <a:latin typeface="Pretendard" pitchFamily="34" charset="0"/>
+                <a:ea typeface="Pretendard" pitchFamily="34" charset="-122"/>
+                <a:cs typeface="Pretendard" pitchFamily="34" charset="-120"/>
+              </a:rPr>
+              <a:t>450억</a:t>
+            </a:r>
+            <a:endParaRPr lang="en-US" sz="1400" dirty="0"/>
+          </a:p>
+        </p:txBody>
+      </p:sp>
+      <p:sp>
+        <p:nvSpPr>
+          <p:cNvPr id="21" name="Shape 19"/>
           <p:cNvSpPr/>
           <p:nvPr/>
         </p:nvSpPr>
@@ -5669,7 +6261,7 @@
       </p:sp>
       <p:sp>
         <p:nvSpPr>
-          <p:cNvPr id="10" name="Shape 8"/>
+          <p:cNvPr id="22" name="Shape 20"/>
           <p:cNvSpPr/>
           <p:nvPr/>
         </p:nvSpPr>
@@ -5684,14 +6276,14 @@
             </a:avLst>
           </a:prstGeom>
           <a:solidFill>
-            <a:srgbClr val="F3EBDA"/>
+            <a:srgbClr val="BEE3F8"/>
           </a:solidFill>
           <a:ln/>
         </p:spPr>
       </p:sp>
       <p:sp>
         <p:nvSpPr>
-          <p:cNvPr id="11" name="Shape 9"/>
+          <p:cNvPr id="23" name="Shape 21"/>
           <p:cNvSpPr/>
           <p:nvPr/>
         </p:nvSpPr>
@@ -5704,14 +6296,14 @@
             <a:avLst/>
           </a:prstGeom>
           <a:solidFill>
-            <a:srgbClr val="977024"/>
+            <a:srgbClr val="2B6CB0"/>
           </a:solidFill>
           <a:ln/>
         </p:spPr>
       </p:sp>
       <p:sp>
         <p:nvSpPr>
-          <p:cNvPr id="12" name="Text 10"/>
+          <p:cNvPr id="24" name="Text 22"/>
           <p:cNvSpPr/>
           <p:nvPr/>
         </p:nvSpPr>
@@ -5733,13 +6325,24 @@
             <a:pPr indent="0" marL="0">
               <a:buNone/>
             </a:pPr>
+            <a:r>
+              <a:rPr lang="en-US" sz="1050" b="1" dirty="0">
+                <a:solidFill>
+                  <a:srgbClr val="2B6CB0"/>
+                </a:solidFill>
+                <a:latin typeface="Pretendard" pitchFamily="34" charset="0"/>
+                <a:ea typeface="Pretendard" pitchFamily="34" charset="-122"/>
+                <a:cs typeface="Pretendard" pitchFamily="34" charset="-120"/>
+              </a:rPr>
+              <a:t>토지 및 건물 분석 포인트</a:t>
+            </a:r>
             <a:endParaRPr lang="en-US" sz="1050" dirty="0"/>
           </a:p>
         </p:txBody>
       </p:sp>
       <p:sp>
         <p:nvSpPr>
-          <p:cNvPr id="13" name="Text 11"/>
+          <p:cNvPr id="25" name="Text 23"/>
           <p:cNvSpPr/>
           <p:nvPr/>
         </p:nvSpPr>
@@ -5758,11 +6361,12 @@
           <a:bodyPr wrap="square" lIns="0" tIns="0" rIns="0" bIns="0" rtlCol="0" anchor="t"/>
           <a:lstStyle/>
           <a:p>
-            <a:pPr indent="0" marL="0">
+            <a:pPr marL="342900" indent="-342900">
               <a:lnSpc>
                 <a:spcPct val="120000"/>
               </a:lnSpc>
-              <a:buNone/>
+              <a:buSzPct val="100000"/>
+              <a:buChar char="•"/>
             </a:pPr>
             <a:r>
               <a:rPr lang="en-US" sz="930" dirty="0">
@@ -5773,15 +6377,223 @@
                 <a:ea typeface="Pretendard" pitchFamily="34" charset="-122"/>
                 <a:cs typeface="Pretendard" pitchFamily="34" charset="-120"/>
               </a:rPr>
-              <a:t>{"ok":true,"mocked":true,"extractedFields":{"area_signal":"역삼","asset_type":"오피스빌딩","price_band":"300억","size_signal":"3</a:t>
+              <a:t>물건 접면 도로 및 교통 여건은 현장 확인 사항입니다</a:t>
             </a:r>
             <a:endParaRPr lang="en-US" sz="930" dirty="0"/>
           </a:p>
-        </p:txBody>
-      </p:sp>
-      <p:sp>
-        <p:nvSpPr>
-          <p:cNvPr id="14" name="Text 12"/>
+          <a:p>
+            <a:pPr marL="342900" indent="-342900">
+              <a:lnSpc>
+                <a:spcPct val="120000"/>
+              </a:lnSpc>
+              <a:buSzPct val="100000"/>
+              <a:buChar char="•"/>
+            </a:pPr>
+            <a:r>
+              <a:rPr lang="en-US" sz="930" dirty="0">
+                <a:solidFill>
+                  <a:srgbClr val="10161F"/>
+                </a:solidFill>
+                <a:latin typeface="Pretendard" pitchFamily="34" charset="0"/>
+                <a:ea typeface="Pretendard" pitchFamily="34" charset="-122"/>
+                <a:cs typeface="Pretendard" pitchFamily="34" charset="-120"/>
+              </a:rPr>
+              <a:t>상세 건물 제원은 실사 자료를 참조하시기 바랍니다</a:t>
+            </a:r>
+            <a:endParaRPr lang="en-US" sz="930" dirty="0"/>
+          </a:p>
+          <a:p>
+            <a:pPr marL="342900" indent="-342900">
+              <a:lnSpc>
+                <a:spcPct val="120000"/>
+              </a:lnSpc>
+              <a:buSzPct val="100000"/>
+              <a:buChar char="•"/>
+            </a:pPr>
+            <a:r>
+              <a:rPr lang="en-US" sz="930" dirty="0">
+                <a:solidFill>
+                  <a:srgbClr val="10161F"/>
+                </a:solidFill>
+                <a:latin typeface="Pretendard" pitchFamily="34" charset="0"/>
+                <a:ea typeface="Pretendard" pitchFamily="34" charset="-122"/>
+                <a:cs typeface="Pretendard" pitchFamily="34" charset="-120"/>
+              </a:rPr>
+              <a:t>건물 현황 및 규모는 첨부 대장을 기준으로 합니다</a:t>
+            </a:r>
+            <a:endParaRPr lang="en-US" sz="930" dirty="0"/>
+          </a:p>
+        </p:txBody>
+      </p:sp>
+      <p:sp>
+        <p:nvSpPr>
+          <p:cNvPr id="26" name="Shape 24"/>
+          <p:cNvSpPr/>
+          <p:nvPr/>
+        </p:nvSpPr>
+        <p:spPr>
+          <a:xfrm>
+            <a:off x="7784287" y="3977640"/>
+            <a:ext cx="3840480" cy="2148840"/>
+          </a:xfrm>
+          <a:prstGeom prst="roundRect">
+            <a:avLst>
+              <a:gd name="adj" fmla="val 2553"/>
+            </a:avLst>
+          </a:prstGeom>
+          <a:solidFill>
+            <a:srgbClr val="BEE3F8"/>
+          </a:solidFill>
+          <a:ln/>
+        </p:spPr>
+      </p:sp>
+      <p:sp>
+        <p:nvSpPr>
+          <p:cNvPr id="27" name="Shape 25"/>
+          <p:cNvSpPr/>
+          <p:nvPr/>
+        </p:nvSpPr>
+        <p:spPr>
+          <a:xfrm>
+            <a:off x="7784287" y="4032504"/>
+            <a:ext cx="36576" cy="2039112"/>
+          </a:xfrm>
+          <a:prstGeom prst="rect">
+            <a:avLst/>
+          </a:prstGeom>
+          <a:solidFill>
+            <a:srgbClr val="2B6CB0"/>
+          </a:solidFill>
+          <a:ln/>
+        </p:spPr>
+      </p:sp>
+      <p:sp>
+        <p:nvSpPr>
+          <p:cNvPr id="28" name="Text 26"/>
+          <p:cNvSpPr/>
+          <p:nvPr/>
+        </p:nvSpPr>
+        <p:spPr>
+          <a:xfrm>
+            <a:off x="7967167" y="4087368"/>
+            <a:ext cx="3511296" cy="201168"/>
+          </a:xfrm>
+          <a:prstGeom prst="rect">
+            <a:avLst/>
+          </a:prstGeom>
+          <a:noFill/>
+          <a:ln/>
+        </p:spPr>
+        <p:txBody>
+          <a:bodyPr wrap="square" lIns="0" tIns="0" rIns="0" bIns="0" rtlCol="0" anchor="ctr"/>
+          <a:lstStyle/>
+          <a:p>
+            <a:pPr indent="0" marL="0">
+              <a:buNone/>
+            </a:pPr>
+            <a:r>
+              <a:rPr lang="en-US" sz="1050" b="1" dirty="0">
+                <a:solidFill>
+                  <a:srgbClr val="2B6CB0"/>
+                </a:solidFill>
+                <a:latin typeface="Pretendard" pitchFamily="34" charset="0"/>
+                <a:ea typeface="Pretendard" pitchFamily="34" charset="-122"/>
+                <a:cs typeface="Pretendard" pitchFamily="34" charset="-120"/>
+              </a:rPr>
+              <a:t>물건 실사 및 관리 상태</a:t>
+            </a:r>
+            <a:endParaRPr lang="en-US" sz="1050" dirty="0"/>
+          </a:p>
+        </p:txBody>
+      </p:sp>
+      <p:sp>
+        <p:nvSpPr>
+          <p:cNvPr id="29" name="Text 27"/>
+          <p:cNvSpPr/>
+          <p:nvPr/>
+        </p:nvSpPr>
+        <p:spPr>
+          <a:xfrm>
+            <a:off x="7967167" y="4306824"/>
+            <a:ext cx="3511296" cy="1746504"/>
+          </a:xfrm>
+          <a:prstGeom prst="rect">
+            <a:avLst/>
+          </a:prstGeom>
+          <a:noFill/>
+          <a:ln/>
+        </p:spPr>
+        <p:txBody>
+          <a:bodyPr wrap="square" lIns="0" tIns="0" rIns="0" bIns="0" rtlCol="0" anchor="t"/>
+          <a:lstStyle/>
+          <a:p>
+            <a:pPr marL="342900" indent="-342900">
+              <a:lnSpc>
+                <a:spcPct val="120000"/>
+              </a:lnSpc>
+              <a:buSzPct val="100000"/>
+              <a:buChar char="•"/>
+            </a:pPr>
+            <a:r>
+              <a:rPr lang="en-US" sz="930" dirty="0">
+                <a:solidFill>
+                  <a:srgbClr val="10161F"/>
+                </a:solidFill>
+                <a:latin typeface="Pretendard" pitchFamily="34" charset="0"/>
+                <a:ea typeface="Pretendard" pitchFamily="34" charset="-122"/>
+                <a:cs typeface="Pretendard" pitchFamily="34" charset="-120"/>
+              </a:rPr>
+              <a:t>건물 상태 및 설비 현황은 실사 보고서를 참조하십시오</a:t>
+            </a:r>
+            <a:endParaRPr lang="en-US" sz="930" dirty="0"/>
+          </a:p>
+          <a:p>
+            <a:pPr marL="342900" indent="-342900">
+              <a:lnSpc>
+                <a:spcPct val="120000"/>
+              </a:lnSpc>
+              <a:buSzPct val="100000"/>
+              <a:buChar char="•"/>
+            </a:pPr>
+            <a:r>
+              <a:rPr lang="en-US" sz="930" dirty="0">
+                <a:solidFill>
+                  <a:srgbClr val="10161F"/>
+                </a:solidFill>
+                <a:latin typeface="Pretendard" pitchFamily="34" charset="0"/>
+                <a:ea typeface="Pretendard" pitchFamily="34" charset="-122"/>
+                <a:cs typeface="Pretendard" pitchFamily="34" charset="-120"/>
+              </a:rPr>
+              <a:t>자금 조달 및 대출 조건은 금융 자문 후 확정됩니다</a:t>
+            </a:r>
+            <a:endParaRPr lang="en-US" sz="930" dirty="0"/>
+          </a:p>
+          <a:p>
+            <a:pPr marL="342900" indent="-342900">
+              <a:lnSpc>
+                <a:spcPct val="120000"/>
+              </a:lnSpc>
+              <a:buSzPct val="100000"/>
+              <a:buChar char="•"/>
+            </a:pPr>
+            <a:r>
+              <a:rPr lang="en-US" sz="930" dirty="0">
+                <a:solidFill>
+                  <a:srgbClr val="10161F"/>
+                </a:solidFill>
+                <a:latin typeface="Pretendard" pitchFamily="34" charset="0"/>
+                <a:ea typeface="Pretendard" pitchFamily="34" charset="-122"/>
+                <a:cs typeface="Pretendard" pitchFamily="34" charset="-120"/>
+              </a:rPr>
+              <a:t>상세 실사 단계에서 구체적인 계약 조건 및 세무 검토가 진행됩니다</a:t>
+            </a:r>
+            <a:endParaRPr lang="en-US" sz="930" dirty="0"/>
+          </a:p>
+        </p:txBody>
+      </p:sp>
+      <p:sp>
+        <p:nvSpPr>
+          <p:cNvPr id="30" name="Text 28"/>
           <p:cNvSpPr/>
           <p:nvPr/>
         </p:nvSpPr>
@@ -5820,7 +6632,7 @@
       </p:sp>
       <p:sp>
         <p:nvSpPr>
-          <p:cNvPr id="15" name="Text 13"/>
+          <p:cNvPr id="31" name="Text 29"/>
           <p:cNvSpPr/>
           <p:nvPr/>
         </p:nvSpPr>
@@ -6143,7 +6955,7 @@
                 <a:ea typeface="Pretendard" pitchFamily="34" charset="-122"/>
                 <a:cs typeface="Pretendard" pitchFamily="34" charset="-120"/>
               </a:rPr>
-              <a:t>대기업 장기 책임임차(Master Lease) 및 첨단 설비 스펙을 바탕으로 공실 리스크 없는 안정적인 운영 성과를 확보하고 있습니다.</a:t>
+              <a:t>상세 투자 포인트 및 자산 분석 내용은 IM 본문을 참조하시기 바랍니다.</a:t>
             </a:r>
             <a:endParaRPr lang="en-US" sz="930" dirty="0"/>
           </a:p>
@@ -7074,7 +7886,7 @@
         <p:spPr>
           <a:xfrm>
             <a:off x="566928" y="4626864"/>
-            <a:ext cx="5437480" cy="1280160"/>
+            <a:ext cx="11057839" cy="1280160"/>
           </a:xfrm>
           <a:prstGeom prst="roundRect">
             <a:avLst>
@@ -7116,7 +7928,7 @@
         <p:spPr>
           <a:xfrm>
             <a:off x="749808" y="4736592"/>
-            <a:ext cx="5108296" cy="201168"/>
+            <a:ext cx="10728655" cy="201168"/>
           </a:xfrm>
           <a:prstGeom prst="rect">
             <a:avLst/>
@@ -7155,7 +7967,7 @@
         <p:spPr>
           <a:xfrm>
             <a:off x="749808" y="4956048"/>
-            <a:ext cx="5108296" cy="877824"/>
+            <a:ext cx="10728655" cy="877824"/>
           </a:xfrm>
           <a:prstGeom prst="rect">
             <a:avLst/>
@@ -7182,7 +7994,7 @@
                 <a:ea typeface="Pretendard" pitchFamily="34" charset="-122"/>
                 <a:cs typeface="Pretendard" pitchFamily="34" charset="-120"/>
               </a:rPr>
-              <a:t>임대차 수익 구조가 아닌 영업 총매출에서 직접 운영비를 차감한 GOP 기반의 실질 수익성을 분석합니다. [주의] 객단가(ADR) 및 가동률(OCC) 관리를 통한 지속적 GOP 마진 개선이 핵심입니다.</a:t>
+              <a:t>임대차 수익 구조가 아닌 영업 총매출에서 직접 운영비를 차감한 GOP 기반의 실질 수익성을 분석합니다. ### GOP 수익성 분석</a:t>
             </a:r>
             <a:endParaRPr lang="en-US" sz="930" dirty="0"/>
           </a:p>
@@ -7190,119 +8002,7 @@
       </p:sp>
       <p:sp>
         <p:nvSpPr>
-          <p:cNvPr id="28" name="Shape 26"/>
-          <p:cNvSpPr/>
-          <p:nvPr/>
-        </p:nvSpPr>
-        <p:spPr>
-          <a:xfrm>
-            <a:off x="6187288" y="4626864"/>
-            <a:ext cx="5437480" cy="1280160"/>
-          </a:xfrm>
-          <a:prstGeom prst="roundRect">
-            <a:avLst>
-              <a:gd name="adj" fmla="val 4286"/>
-            </a:avLst>
-          </a:prstGeom>
-          <a:solidFill>
-            <a:srgbClr val="BEE3F8"/>
-          </a:solidFill>
-          <a:ln/>
-        </p:spPr>
-      </p:sp>
-      <p:sp>
-        <p:nvSpPr>
-          <p:cNvPr id="29" name="Shape 27"/>
-          <p:cNvSpPr/>
-          <p:nvPr/>
-        </p:nvSpPr>
-        <p:spPr>
-          <a:xfrm>
-            <a:off x="6187288" y="4681728"/>
-            <a:ext cx="36576" cy="1170432"/>
-          </a:xfrm>
-          <a:prstGeom prst="rect">
-            <a:avLst/>
-          </a:prstGeom>
-          <a:solidFill>
-            <a:srgbClr val="2B6CB0"/>
-          </a:solidFill>
-          <a:ln/>
-        </p:spPr>
-      </p:sp>
-      <p:sp>
-        <p:nvSpPr>
-          <p:cNvPr id="30" name="Text 28"/>
-          <p:cNvSpPr/>
-          <p:nvPr/>
-        </p:nvSpPr>
-        <p:spPr>
-          <a:xfrm>
-            <a:off x="6370168" y="4736592"/>
-            <a:ext cx="5108296" cy="201168"/>
-          </a:xfrm>
-          <a:prstGeom prst="rect">
-            <a:avLst/>
-          </a:prstGeom>
-          <a:noFill/>
-          <a:ln/>
-        </p:spPr>
-        <p:txBody>
-          <a:bodyPr wrap="square" lIns="0" tIns="0" rIns="0" bIns="0" rtlCol="0" anchor="ctr"/>
-          <a:lstStyle/>
-          <a:p>
-            <a:pPr indent="0" marL="0">
-              <a:buNone/>
-            </a:pPr>
-            <a:endParaRPr lang="en-US" sz="1050" dirty="0"/>
-          </a:p>
-        </p:txBody>
-      </p:sp>
-      <p:sp>
-        <p:nvSpPr>
-          <p:cNvPr id="31" name="Text 29"/>
-          <p:cNvSpPr/>
-          <p:nvPr/>
-        </p:nvSpPr>
-        <p:spPr>
-          <a:xfrm>
-            <a:off x="6370168" y="4956048"/>
-            <a:ext cx="5108296" cy="877824"/>
-          </a:xfrm>
-          <a:prstGeom prst="rect">
-            <a:avLst/>
-          </a:prstGeom>
-          <a:noFill/>
-          <a:ln/>
-        </p:spPr>
-        <p:txBody>
-          <a:bodyPr wrap="square" lIns="0" tIns="0" rIns="0" bIns="0" rtlCol="0" anchor="t"/>
-          <a:lstStyle/>
-          <a:p>
-            <a:pPr indent="0" marL="0">
-              <a:lnSpc>
-                <a:spcPct val="120000"/>
-              </a:lnSpc>
-              <a:buNone/>
-            </a:pPr>
-            <a:r>
-              <a:rPr lang="en-US" sz="930" dirty="0">
-                <a:solidFill>
-                  <a:srgbClr val="10161F"/>
-                </a:solidFill>
-                <a:latin typeface="Pretendard" pitchFamily="34" charset="0"/>
-                <a:ea typeface="Pretendard" pitchFamily="34" charset="-122"/>
-                <a:cs typeface="Pretendard" pitchFamily="34" charset="-120"/>
-              </a:rPr>
-              <a:t>[주의] 객단가(ADR) 및 가동률(OCC) 관리를 통한 지속적 GOP 마진 개선이 핵심입니다.</a:t>
-            </a:r>
-            <a:endParaRPr lang="en-US" sz="930" dirty="0"/>
-          </a:p>
-        </p:txBody>
-      </p:sp>
-      <p:sp>
-        <p:nvSpPr>
-          <p:cNvPr id="32" name="Text 30"/>
+          <p:cNvPr id="28" name="Text 26"/>
           <p:cNvSpPr/>
           <p:nvPr/>
         </p:nvSpPr>
@@ -7341,7 +8041,7 @@
       </p:sp>
       <p:sp>
         <p:nvSpPr>
-          <p:cNvPr id="33" name="Text 31"/>
+          <p:cNvPr id="29" name="Text 27"/>
           <p:cNvSpPr/>
           <p:nvPr/>
         </p:nvSpPr>
@@ -7556,11 +8256,11 @@
         <p:spPr>
           <a:xfrm>
             <a:off x="566928" y="1417320"/>
-            <a:ext cx="11057839" cy="3657600"/>
+            <a:ext cx="3515258" cy="3657600"/>
           </a:xfrm>
           <a:prstGeom prst="roundRect">
             <a:avLst>
-              <a:gd name="adj" fmla="val 1500"/>
+              <a:gd name="adj" fmla="val 1561"/>
             </a:avLst>
           </a:prstGeom>
           <a:solidFill>
@@ -7583,7 +8283,7 @@
         <p:spPr>
           <a:xfrm>
             <a:off x="566928" y="1417320"/>
-            <a:ext cx="11057839" cy="45720"/>
+            <a:ext cx="3515258" cy="45720"/>
           </a:xfrm>
           <a:prstGeom prst="rect">
             <a:avLst/>
@@ -7603,7 +8303,7 @@
         <p:spPr>
           <a:xfrm>
             <a:off x="795528" y="1618488"/>
-            <a:ext cx="10600639" cy="292608"/>
+            <a:ext cx="3058058" cy="292608"/>
           </a:xfrm>
           <a:prstGeom prst="rect">
             <a:avLst/>
@@ -7627,7 +8327,7 @@
                 <a:ea typeface="Pretendard" pitchFamily="34" charset="-122"/>
                 <a:cs typeface="Pretendard" pitchFamily="34" charset="-120"/>
               </a:rPr>
-              <a:t>용도 리스크</a:t>
+              <a:t>건물 물리적 상태</a:t>
             </a:r>
             <a:endParaRPr lang="en-US" sz="1350" dirty="0"/>
           </a:p>
@@ -7642,7 +8342,7 @@
         <p:spPr>
           <a:xfrm>
             <a:off x="795528" y="1947672"/>
-            <a:ext cx="10600639" cy="365760"/>
+            <a:ext cx="3058058" cy="365760"/>
           </a:xfrm>
           <a:prstGeom prst="rect">
             <a:avLst/>
@@ -7668,7 +8368,7 @@
                 <a:ea typeface="Pretendard" pitchFamily="34" charset="-122"/>
                 <a:cs typeface="Pretendard" pitchFamily="34" charset="-120"/>
               </a:rPr>
-              <a:t>—</a:t>
+              <a:t>준공연도 확인 필요, 구조 확인 필요</a:t>
             </a:r>
             <a:endParaRPr lang="en-US" sz="1250" dirty="0"/>
           </a:p>
@@ -7683,7 +8383,7 @@
         <p:spPr>
           <a:xfrm>
             <a:off x="795528" y="2377440"/>
-            <a:ext cx="10600639" cy="2606040"/>
+            <a:ext cx="3058058" cy="2606040"/>
           </a:xfrm>
           <a:prstGeom prst="rect">
             <a:avLst/>
@@ -7713,10 +8413,58 @@
                 <a:ea typeface="Pretendard" pitchFamily="34" charset="-122"/>
                 <a:cs typeface="Pretendard" pitchFamily="34" charset="-120"/>
               </a:rPr>
-              <a:t>{"ok":true,"mocked":true,"extractedFields":{"area_signal":"역삼","asset_type":"오피스빌딩","price_band":"300억","size_signal":"3000평(약 9917.4㎡)"},"extractedFacts":{"region":"역삼","exactAddressCandidate":"역삼동 7</a:t>
+              <a:t>누수</a:t>
             </a:r>
             <a:endParaRPr lang="en-US" sz="1100" dirty="0"/>
           </a:p>
+          <a:p>
+            <a:pPr marL="342900" indent="-342900">
+              <a:lnSpc>
+                <a:spcPct val="125000"/>
+              </a:lnSpc>
+              <a:spcBef>
+                <a:spcPts val="600"/>
+              </a:spcBef>
+              <a:buSzPct val="100000"/>
+              <a:buChar char="•"/>
+            </a:pPr>
+            <a:r>
+              <a:rPr lang="en-US" sz="1100" dirty="0">
+                <a:solidFill>
+                  <a:srgbClr val="10161F"/>
+                </a:solidFill>
+                <a:latin typeface="Pretendard" pitchFamily="34" charset="0"/>
+                <a:ea typeface="Pretendard" pitchFamily="34" charset="-122"/>
+                <a:cs typeface="Pretendard" pitchFamily="34" charset="-120"/>
+              </a:rPr>
+              <a:t>균열</a:t>
+            </a:r>
+            <a:endParaRPr lang="en-US" sz="1100" dirty="0"/>
+          </a:p>
+          <a:p>
+            <a:pPr marL="342900" indent="-342900">
+              <a:lnSpc>
+                <a:spcPct val="125000"/>
+              </a:lnSpc>
+              <a:spcBef>
+                <a:spcPts val="600"/>
+              </a:spcBef>
+              <a:buSzPct val="100000"/>
+              <a:buChar char="•"/>
+            </a:pPr>
+            <a:r>
+              <a:rPr lang="en-US" sz="1100" dirty="0">
+                <a:solidFill>
+                  <a:srgbClr val="10161F"/>
+                </a:solidFill>
+                <a:latin typeface="Pretendard" pitchFamily="34" charset="0"/>
+                <a:ea typeface="Pretendard" pitchFamily="34" charset="-122"/>
+                <a:cs typeface="Pretendard" pitchFamily="34" charset="-120"/>
+              </a:rPr>
+              <a:t>설비 노후 여부 현장 점검 필요</a:t>
+            </a:r>
+            <a:endParaRPr lang="en-US" sz="1100" dirty="0"/>
+          </a:p>
         </p:txBody>
       </p:sp>
       <p:sp>
@@ -7727,12 +8475,12 @@
         </p:nvSpPr>
         <p:spPr>
           <a:xfrm>
-            <a:off x="566928" y="5193792"/>
-            <a:ext cx="11057839" cy="621792"/>
+            <a:off x="4338218" y="1417320"/>
+            <a:ext cx="3515258" cy="3657600"/>
           </a:xfrm>
           <a:prstGeom prst="roundRect">
             <a:avLst>
-              <a:gd name="adj" fmla="val 8824"/>
+              <a:gd name="adj" fmla="val 1561"/>
             </a:avLst>
           </a:prstGeom>
           <a:solidFill>
@@ -7748,7 +8496,351 @@
       </p:sp>
       <p:sp>
         <p:nvSpPr>
-          <p:cNvPr id="12" name="Text 10"/>
+          <p:cNvPr id="12" name="Shape 10"/>
+          <p:cNvSpPr/>
+          <p:nvPr/>
+        </p:nvSpPr>
+        <p:spPr>
+          <a:xfrm>
+            <a:off x="4338218" y="1417320"/>
+            <a:ext cx="3515258" cy="45720"/>
+          </a:xfrm>
+          <a:prstGeom prst="rect">
+            <a:avLst/>
+          </a:prstGeom>
+          <a:solidFill>
+            <a:srgbClr val="B98A2E"/>
+          </a:solidFill>
+          <a:ln/>
+        </p:spPr>
+      </p:sp>
+      <p:sp>
+        <p:nvSpPr>
+          <p:cNvPr id="13" name="Text 11"/>
+          <p:cNvSpPr/>
+          <p:nvPr/>
+        </p:nvSpPr>
+        <p:spPr>
+          <a:xfrm>
+            <a:off x="4566818" y="1618488"/>
+            <a:ext cx="3058058" cy="292608"/>
+          </a:xfrm>
+          <a:prstGeom prst="rect">
+            <a:avLst/>
+          </a:prstGeom>
+          <a:noFill/>
+          <a:ln/>
+        </p:spPr>
+        <p:txBody>
+          <a:bodyPr wrap="square" lIns="0" tIns="0" rIns="0" bIns="0" rtlCol="0" anchor="ctr"/>
+          <a:lstStyle/>
+          <a:p>
+            <a:pPr indent="0" marL="0">
+              <a:buNone/>
+            </a:pPr>
+            <a:r>
+              <a:rPr lang="en-US" sz="1350" b="1" dirty="0">
+                <a:solidFill>
+                  <a:srgbClr val="977024"/>
+                </a:solidFill>
+                <a:latin typeface="Pretendard" pitchFamily="34" charset="0"/>
+                <a:ea typeface="Pretendard" pitchFamily="34" charset="-122"/>
+                <a:cs typeface="Pretendard" pitchFamily="34" charset="-120"/>
+              </a:rPr>
+              <a:t>승강기 및 설비</a:t>
+            </a:r>
+            <a:endParaRPr lang="en-US" sz="1350" dirty="0"/>
+          </a:p>
+        </p:txBody>
+      </p:sp>
+      <p:sp>
+        <p:nvSpPr>
+          <p:cNvPr id="14" name="Text 12"/>
+          <p:cNvSpPr/>
+          <p:nvPr/>
+        </p:nvSpPr>
+        <p:spPr>
+          <a:xfrm>
+            <a:off x="4566818" y="1947672"/>
+            <a:ext cx="3058058" cy="365760"/>
+          </a:xfrm>
+          <a:prstGeom prst="rect">
+            <a:avLst/>
+          </a:prstGeom>
+          <a:noFill/>
+          <a:ln/>
+        </p:spPr>
+        <p:txBody>
+          <a:bodyPr wrap="square" lIns="0" tIns="0" rIns="0" bIns="0" rtlCol="0" anchor="ctr">
+            <a:normAutofit/>
+          </a:bodyPr>
+          <a:lstStyle/>
+          <a:p>
+            <a:pPr indent="0" marL="0">
+              <a:buNone/>
+            </a:pPr>
+            <a:r>
+              <a:rPr lang="en-US" sz="1250" b="1" dirty="0">
+                <a:solidFill>
+                  <a:srgbClr val="10161F"/>
+                </a:solidFill>
+                <a:latin typeface="Pretendard" pitchFamily="34" charset="0"/>
+                <a:ea typeface="Pretendard" pitchFamily="34" charset="-122"/>
+                <a:cs typeface="Pretendard" pitchFamily="34" charset="-120"/>
+              </a:rPr>
+              <a:t>승강기 정보 확인 필요</a:t>
+            </a:r>
+            <a:endParaRPr lang="en-US" sz="1250" dirty="0"/>
+          </a:p>
+        </p:txBody>
+      </p:sp>
+      <p:sp>
+        <p:nvSpPr>
+          <p:cNvPr id="15" name="Text 13"/>
+          <p:cNvSpPr/>
+          <p:nvPr/>
+        </p:nvSpPr>
+        <p:spPr>
+          <a:xfrm>
+            <a:off x="4566818" y="2377440"/>
+            <a:ext cx="3058058" cy="2606040"/>
+          </a:xfrm>
+          <a:prstGeom prst="rect">
+            <a:avLst/>
+          </a:prstGeom>
+          <a:noFill/>
+          <a:ln/>
+        </p:spPr>
+        <p:txBody>
+          <a:bodyPr wrap="square" lIns="0" tIns="0" rIns="0" bIns="0" rtlCol="0" anchor="t">
+            <a:normAutofit/>
+          </a:bodyPr>
+          <a:lstStyle/>
+          <a:p>
+            <a:pPr marL="342900" indent="-342900">
+              <a:lnSpc>
+                <a:spcPct val="125000"/>
+              </a:lnSpc>
+              <a:buSzPct val="100000"/>
+              <a:buChar char="•"/>
+            </a:pPr>
+            <a:r>
+              <a:rPr lang="en-US" sz="1100" dirty="0">
+                <a:solidFill>
+                  <a:srgbClr val="10161F"/>
+                </a:solidFill>
+                <a:latin typeface="Pretendard" pitchFamily="34" charset="0"/>
+                <a:ea typeface="Pretendard" pitchFamily="34" charset="-122"/>
+                <a:cs typeface="Pretendard" pitchFamily="34" charset="-120"/>
+              </a:rPr>
+              <a:t>정기검사 이력, 냉난방 설비 상태 확인 필요</a:t>
+            </a:r>
+            <a:endParaRPr lang="en-US" sz="1100" dirty="0"/>
+          </a:p>
+        </p:txBody>
+      </p:sp>
+      <p:sp>
+        <p:nvSpPr>
+          <p:cNvPr id="16" name="Shape 14"/>
+          <p:cNvSpPr/>
+          <p:nvPr/>
+        </p:nvSpPr>
+        <p:spPr>
+          <a:xfrm>
+            <a:off x="8109509" y="1417320"/>
+            <a:ext cx="3515258" cy="3657600"/>
+          </a:xfrm>
+          <a:prstGeom prst="roundRect">
+            <a:avLst>
+              <a:gd name="adj" fmla="val 1561"/>
+            </a:avLst>
+          </a:prstGeom>
+          <a:solidFill>
+            <a:srgbClr val="F7FAFC"/>
+          </a:solidFill>
+          <a:ln w="6350">
+            <a:solidFill>
+              <a:srgbClr val="CBD5E0"/>
+            </a:solidFill>
+            <a:prstDash val="solid"/>
+          </a:ln>
+        </p:spPr>
+      </p:sp>
+      <p:sp>
+        <p:nvSpPr>
+          <p:cNvPr id="17" name="Shape 15"/>
+          <p:cNvSpPr/>
+          <p:nvPr/>
+        </p:nvSpPr>
+        <p:spPr>
+          <a:xfrm>
+            <a:off x="8109509" y="1417320"/>
+            <a:ext cx="3515258" cy="45720"/>
+          </a:xfrm>
+          <a:prstGeom prst="rect">
+            <a:avLst/>
+          </a:prstGeom>
+          <a:solidFill>
+            <a:srgbClr val="B98A2E"/>
+          </a:solidFill>
+          <a:ln/>
+        </p:spPr>
+      </p:sp>
+      <p:sp>
+        <p:nvSpPr>
+          <p:cNvPr id="18" name="Text 16"/>
+          <p:cNvSpPr/>
+          <p:nvPr/>
+        </p:nvSpPr>
+        <p:spPr>
+          <a:xfrm>
+            <a:off x="8338109" y="1618488"/>
+            <a:ext cx="3058058" cy="292608"/>
+          </a:xfrm>
+          <a:prstGeom prst="rect">
+            <a:avLst/>
+          </a:prstGeom>
+          <a:noFill/>
+          <a:ln/>
+        </p:spPr>
+        <p:txBody>
+          <a:bodyPr wrap="square" lIns="0" tIns="0" rIns="0" bIns="0" rtlCol="0" anchor="ctr"/>
+          <a:lstStyle/>
+          <a:p>
+            <a:pPr indent="0" marL="0">
+              <a:buNone/>
+            </a:pPr>
+            <a:r>
+              <a:rPr lang="en-US" sz="1350" b="1" dirty="0">
+                <a:solidFill>
+                  <a:srgbClr val="977024"/>
+                </a:solidFill>
+                <a:latin typeface="Pretendard" pitchFamily="34" charset="0"/>
+                <a:ea typeface="Pretendard" pitchFamily="34" charset="-122"/>
+                <a:cs typeface="Pretendard" pitchFamily="34" charset="-120"/>
+              </a:rPr>
+              <a:t>임차인 이탈 위험</a:t>
+            </a:r>
+            <a:endParaRPr lang="en-US" sz="1350" dirty="0"/>
+          </a:p>
+        </p:txBody>
+      </p:sp>
+      <p:sp>
+        <p:nvSpPr>
+          <p:cNvPr id="19" name="Text 17"/>
+          <p:cNvSpPr/>
+          <p:nvPr/>
+        </p:nvSpPr>
+        <p:spPr>
+          <a:xfrm>
+            <a:off x="8338109" y="1947672"/>
+            <a:ext cx="3058058" cy="365760"/>
+          </a:xfrm>
+          <a:prstGeom prst="rect">
+            <a:avLst/>
+          </a:prstGeom>
+          <a:noFill/>
+          <a:ln/>
+        </p:spPr>
+        <p:txBody>
+          <a:bodyPr wrap="square" lIns="0" tIns="0" rIns="0" bIns="0" rtlCol="0" anchor="ctr">
+            <a:normAutofit/>
+          </a:bodyPr>
+          <a:lstStyle/>
+          <a:p>
+            <a:pPr indent="0" marL="0">
+              <a:buNone/>
+            </a:pPr>
+            <a:r>
+              <a:rPr lang="en-US" sz="1250" b="1" dirty="0">
+                <a:solidFill>
+                  <a:srgbClr val="10161F"/>
+                </a:solidFill>
+                <a:latin typeface="Pretendard" pitchFamily="34" charset="0"/>
+                <a:ea typeface="Pretendard" pitchFamily="34" charset="-122"/>
+                <a:cs typeface="Pretendard" pitchFamily="34" charset="-120"/>
+              </a:rPr>
+              <a:t>임대차 계약 현황 LOI 접수 후 열람</a:t>
+            </a:r>
+            <a:endParaRPr lang="en-US" sz="1250" dirty="0"/>
+          </a:p>
+        </p:txBody>
+      </p:sp>
+      <p:sp>
+        <p:nvSpPr>
+          <p:cNvPr id="20" name="Text 18"/>
+          <p:cNvSpPr/>
+          <p:nvPr/>
+        </p:nvSpPr>
+        <p:spPr>
+          <a:xfrm>
+            <a:off x="8338109" y="2377440"/>
+            <a:ext cx="3058058" cy="2606040"/>
+          </a:xfrm>
+          <a:prstGeom prst="rect">
+            <a:avLst/>
+          </a:prstGeom>
+          <a:noFill/>
+          <a:ln/>
+        </p:spPr>
+        <p:txBody>
+          <a:bodyPr wrap="square" lIns="0" tIns="0" rIns="0" bIns="0" rtlCol="0" anchor="t">
+            <a:normAutofit/>
+          </a:bodyPr>
+          <a:lstStyle/>
+          <a:p>
+            <a:pPr marL="342900" indent="-342900">
+              <a:lnSpc>
+                <a:spcPct val="125000"/>
+              </a:lnSpc>
+              <a:buSzPct val="100000"/>
+              <a:buChar char="•"/>
+            </a:pPr>
+            <a:r>
+              <a:rPr lang="en-US" sz="1100" dirty="0">
+                <a:solidFill>
+                  <a:srgbClr val="10161F"/>
+                </a:solidFill>
+                <a:latin typeface="Pretendard" pitchFamily="34" charset="0"/>
+                <a:ea typeface="Pretendard" pitchFamily="34" charset="-122"/>
+                <a:cs typeface="Pretendard" pitchFamily="34" charset="-120"/>
+              </a:rPr>
+              <a:t>잔여 계약기간(WALE), 임차인 신용도 확인 필요</a:t>
+            </a:r>
+            <a:endParaRPr lang="en-US" sz="1100" dirty="0"/>
+          </a:p>
+        </p:txBody>
+      </p:sp>
+      <p:sp>
+        <p:nvSpPr>
+          <p:cNvPr id="21" name="Shape 19"/>
+          <p:cNvSpPr/>
+          <p:nvPr/>
+        </p:nvSpPr>
+        <p:spPr>
+          <a:xfrm>
+            <a:off x="566928" y="5193792"/>
+            <a:ext cx="11057839" cy="621792"/>
+          </a:xfrm>
+          <a:prstGeom prst="roundRect">
+            <a:avLst>
+              <a:gd name="adj" fmla="val 8824"/>
+            </a:avLst>
+          </a:prstGeom>
+          <a:solidFill>
+            <a:srgbClr val="F7FAFC"/>
+          </a:solidFill>
+          <a:ln w="6350">
+            <a:solidFill>
+              <a:srgbClr val="CBD5E0"/>
+            </a:solidFill>
+            <a:prstDash val="solid"/>
+          </a:ln>
+        </p:spPr>
+      </p:sp>
+      <p:sp>
+        <p:nvSpPr>
+          <p:cNvPr id="22" name="Text 20"/>
           <p:cNvSpPr/>
           <p:nvPr/>
         </p:nvSpPr>
@@ -7787,7 +8879,7 @@
       </p:sp>
       <p:sp>
         <p:nvSpPr>
-          <p:cNvPr id="13" name="Text 11"/>
+          <p:cNvPr id="23" name="Text 21"/>
           <p:cNvSpPr/>
           <p:nvPr/>
         </p:nvSpPr>
@@ -7826,7 +8918,7 @@
       </p:sp>
       <p:sp>
         <p:nvSpPr>
-          <p:cNvPr id="14" name="Text 12"/>
+          <p:cNvPr id="24" name="Text 22"/>
           <p:cNvSpPr/>
           <p:nvPr/>
         </p:nvSpPr>
@@ -8032,45 +9124,6 @@
           </a:p>
         </p:txBody>
       </p:sp>
-      <p:sp>
-        <p:nvSpPr>
-          <p:cNvPr id="6" name="Text 4"/>
-          <p:cNvSpPr/>
-          <p:nvPr/>
-        </p:nvSpPr>
-        <p:spPr>
-          <a:xfrm>
-            <a:off x="1133856" y="1005840"/>
-            <a:ext cx="10490911" cy="237744"/>
-          </a:xfrm>
-          <a:prstGeom prst="rect">
-            <a:avLst/>
-          </a:prstGeom>
-          <a:noFill/>
-          <a:ln/>
-        </p:spPr>
-        <p:txBody>
-          <a:bodyPr wrap="square" lIns="0" tIns="0" rIns="0" bIns="0" rtlCol="0" anchor="ctr"/>
-          <a:lstStyle/>
-          <a:p>
-            <a:pPr indent="0" marL="0">
-              <a:buNone/>
-            </a:pPr>
-            <a:r>
-              <a:rPr lang="en-US" sz="1100" dirty="0">
-                <a:solidFill>
-                  <a:srgbClr val="718096"/>
-                </a:solidFill>
-                <a:latin typeface="Pretendard" pitchFamily="34" charset="0"/>
-                <a:ea typeface="Pretendard" pitchFamily="34" charset="-122"/>
-                <a:cs typeface="Pretendard" pitchFamily="34" charset="-120"/>
-              </a:rPr>
-              <a:t>밸류업 시나리오 (AI 추정)</a:t>
-            </a:r>
-            <a:endParaRPr lang="en-US" sz="1100" dirty="0"/>
-          </a:p>
-        </p:txBody>
-      </p:sp>
       <p:graphicFrame>
         <p:nvGraphicFramePr>
           <p:cNvPr id="9" name="Table 0"/>
@@ -8086,7 +9139,7 @@
           </p:nvPr>
         </p:nvGraphicFramePr>
         <p:xfrm>
-          <a:off x="566928" y="4178808"/>
+          <a:off x="566928" y="4023360"/>
           <a:ext cx="11057839" cy="914400"/>
         </p:xfrm>
         <a:graphic>
@@ -9193,13 +10246,13 @@
       </p:graphicFrame>
       <p:sp>
         <p:nvSpPr>
-          <p:cNvPr id="8" name="Shape 5"/>
-          <p:cNvSpPr/>
-          <p:nvPr/>
-        </p:nvSpPr>
-        <p:spPr>
-          <a:xfrm>
-            <a:off x="566928" y="5349240"/>
+          <p:cNvPr id="7" name="Shape 4"/>
+          <p:cNvSpPr/>
+          <p:nvPr/>
+        </p:nvSpPr>
+        <p:spPr>
+          <a:xfrm>
+            <a:off x="566928" y="5193792"/>
             <a:ext cx="11057839" cy="804672"/>
           </a:xfrm>
           <a:prstGeom prst="roundRect">
@@ -9220,52 +10273,52 @@
       </p:sp>
       <p:sp>
         <p:nvSpPr>
+          <p:cNvPr id="8" name="Text 5"/>
+          <p:cNvSpPr/>
+          <p:nvPr/>
+        </p:nvSpPr>
+        <p:spPr>
+          <a:xfrm>
+            <a:off x="749808" y="5303520"/>
+            <a:ext cx="1691640" cy="256032"/>
+          </a:xfrm>
+          <a:prstGeom prst="rect">
+            <a:avLst/>
+          </a:prstGeom>
+          <a:noFill/>
+          <a:ln/>
+        </p:spPr>
+        <p:txBody>
+          <a:bodyPr wrap="square" lIns="0" tIns="0" rIns="0" bIns="0" rtlCol="0" anchor="ctr"/>
+          <a:lstStyle/>
+          <a:p>
+            <a:pPr indent="0" marL="0">
+              <a:buNone/>
+            </a:pPr>
+            <a:r>
+              <a:rPr lang="en-US" sz="1050" b="1" dirty="0">
+                <a:solidFill>
+                  <a:srgbClr val="977024"/>
+                </a:solidFill>
+                <a:latin typeface="Pretendard" pitchFamily="34" charset="0"/>
+                <a:ea typeface="Pretendard" pitchFamily="34" charset="-122"/>
+                <a:cs typeface="Pretendard" pitchFamily="34" charset="-120"/>
+              </a:rPr>
+              <a:t>종합 가치 제안</a:t>
+            </a:r>
+            <a:endParaRPr lang="en-US" sz="1050" dirty="0"/>
+          </a:p>
+        </p:txBody>
+      </p:sp>
+      <p:sp>
+        <p:nvSpPr>
           <p:cNvPr id="9" name="Text 6"/>
           <p:cNvSpPr/>
           <p:nvPr/>
         </p:nvSpPr>
         <p:spPr>
           <a:xfrm>
-            <a:off x="749808" y="5458968"/>
-            <a:ext cx="1691640" cy="256032"/>
-          </a:xfrm>
-          <a:prstGeom prst="rect">
-            <a:avLst/>
-          </a:prstGeom>
-          <a:noFill/>
-          <a:ln/>
-        </p:spPr>
-        <p:txBody>
-          <a:bodyPr wrap="square" lIns="0" tIns="0" rIns="0" bIns="0" rtlCol="0" anchor="ctr"/>
-          <a:lstStyle/>
-          <a:p>
-            <a:pPr indent="0" marL="0">
-              <a:buNone/>
-            </a:pPr>
-            <a:r>
-              <a:rPr lang="en-US" sz="1050" b="1" dirty="0">
-                <a:solidFill>
-                  <a:srgbClr val="977024"/>
-                </a:solidFill>
-                <a:latin typeface="Pretendard" pitchFamily="34" charset="0"/>
-                <a:ea typeface="Pretendard" pitchFamily="34" charset="-122"/>
-                <a:cs typeface="Pretendard" pitchFamily="34" charset="-120"/>
-              </a:rPr>
-              <a:t>종합 가치 제안</a:t>
-            </a:r>
-            <a:endParaRPr lang="en-US" sz="1050" dirty="0"/>
-          </a:p>
-        </p:txBody>
-      </p:sp>
-      <p:sp>
-        <p:nvSpPr>
-          <p:cNvPr id="10" name="Text 7"/>
-          <p:cNvSpPr/>
-          <p:nvPr/>
-        </p:nvSpPr>
-        <p:spPr>
-          <a:xfrm>
-            <a:off x="2487168" y="5422392"/>
+            <a:off x="2487168" y="5266944"/>
             <a:ext cx="8954719" cy="658368"/>
           </a:xfrm>
           <a:prstGeom prst="rect">
@@ -9293,7 +10346,7 @@
                 <a:ea typeface="Pretendard" pitchFamily="34" charset="-122"/>
                 <a:cs typeface="Pretendard" pitchFamily="34" charset="-120"/>
               </a:rPr>
-              <a:t>{"ok":true,"mocked":true,"extractedFields":{"area_signal":"역삼","asset_type":"오피스빌딩","price_band":"300억","size_signal":"3000평(약 9917.4㎡)"},"extractedFacts":{"region":"역삼","exactAddressCandidate":"역삼동 742-1","assetType":"오피스빌딩","priceText":"300억","sizeText":"3000평(약 9917.4㎡)","currentUse":"오피스","currentUseSignal":"근린생활시설","leaseSignal":"임대중","vacancySignal":"공실없음","tenantNames":["쿠팡","네이버"],"unitRentTexts":["301호: 1500만"],"sellerMotivationText":"자산 효율화","brokerNotes":["초역세권 매물"]},"detectedSensitiveFields":["exact_address","tenant_name"],"ambiguousFields":[],"warnings":[],"areaSignal":"역삼","assetType":"오피스빌딩","priceBand":"300억","sizeSignal":"3000평(약 9917.4㎡)","dealType":"매각","buildingName":"역삼 센트럴타워","exactAddress":"역삼동 742-1","totalFloorArea":9917.3,"buildYear":2015,"currentUseSignal":"근린생활시설","vacancySignal":"공실 없음","fitSummary":"초역세권 근생 빌딩으로 시행/사옥 매입에 최적화","cautionSummary":"주요 임차 업종 만기 조율 필요","hiddenFields":["exact_address","seller_motivation"],"confidence":{"areaSignal":"confirmed","assetType":"confirmed","priceBand":"ai_hypothesis","fitSummary":"ai_hypothesis"},"missingData":["sizeSignal"],"boundaryNote":"본 자료는 실거래 통계 기반 참고치입니다.","buyerType":"법인 사옥형","budgetRange":{"min":50,"max":80,"display":"50억~80억"},"preferredRegions":["강남","성수"],"assetTypes":["꼬마빌딩","사옥용"],"purchasePurpose":"사옥용 매입","mustHave":["초역세권","주차"],"niceToHave":["테라스","루프탑"],"riskTolerance":"medium","financingNote":"자본금 50% 준비","missingQuestions":["구체적인 입주 시기가 언제인가요?","선호하는 수익률이 있나요?"],"privacyNotes":["연락처 비공개"],"fitReasons":["매수자 예산(50-80억)에 부합하는 매물입니다.","요청하신 성수/강남 권역에 해당합니다."],"cautionReasons":["요청한 용도와 달리 명도 협의가 다소 필요합니다."],"recommendedNextAction":"현장 답사 제안","kakaoMessage":"안녕하세요! 요청하신 조건에 부합하는 추천 매물이 있어 안내해 드립니다. 확인해보시고 피드백 부탁드립니다.","title":"강남 역삼역 초역세권 오피스 사옥용 빌딩 매각","shortSummary":"역삼역 도보 5분 거리의 준신축급 대형 오피스빌딩입니다.","dealPoints":["초역세권","사옥 최적"],"cautionPoints":["명도 조율 필요"],"hiddenInfoNotice":["보증금 및 지번은 인가 후 확인 가능"],"gateMessage":"G1 등급 등록이 필요합니다.","kakaoText":"강남 역삼역 오피스 빌딩 매각 안내입니다.","exactUnitCandidate":"101호","floor":"1층","areaSqmText":"150㎡","spaceType":"office","depositText":"5000만","monthlyRentText":"400만","maintenanceFeeText":"50만","availableFromText":"즉시입주","leaseTermMonthsText":"24","incentivesText":"렌트프리 2개월","restrictions":[],"landlordIdentity":"김성수","currentTenant":"스타트업","vacancyReason":"이전 확장","rentNegotiation":"협의 가능","region":"성수동","areaSqm":150,"deposit":5000,"monthlyRent":400,"maintenanceFee":50,"availableFrom":"즉시입주","leaseTermMonths":24,"incentives":{"rentFreeMonths":2,"interiorSupport":"일부 인테리어 지원","freeRentDetail":"렌트프리 2개월 지원"},"shortSummaryLease":"성수역 도보 5분 거리 1층 리테일 상가 매물입니다."}</a:t>
+              <a:t>{"ok":true,"mocked":true,"extractedFields":{"area_signal":"역삼","asset_type":"오피스빌딩","price_band":"300억","size_signal":"3000평(약 9917.4㎡)"},"extractedFacts":{"region":"역삼","exactAddressCandidate":"역삼동 742-1","assetType":"오피스빌딩","priceText":"300억","sizeText":"3000평(약 9917.4㎡)","currentUse":"오피스","currentUseSignal":"근린생활시설","leaseSignal":"임대중","vacancySignal":"공실없음","tenantNames":["쿠팡","네이버"],"unitRentTexts":["301호: 1500만"],"sellerMotivationText":"자산 효율화","brokerNotes":["초역세권 매물"]},"detectedSensitiveFields":["exact_address","tenant_name"],"ambiguousFields":[],"warnings":[],"areaSignal":"역삼","assetType":"오피스빌딩","priceBand":"300억","sizeSignal":"3000평(약 9917.4㎡)","dealType":"매각","buildingName":"역삼 센트럴타워","exactAddress":"역삼동 742-1","totalFloorArea":9917.3,"buildYear":2015,"currentUseSignal":"근린생활시설","vacancySignal":"공실 없음","fitSummary":"초역세권 근생 빌딩으로 시행/사옥 매입에 최적화","cautionSummary":"주요 임차인 만기 조율 필요","hiddenFields":["exact_address","seller_motivation"],"confidence":{"areaSignal":"confirmed","assetType":"confirmed","priceBand":"ai_hypothesis","fitSummary":"ai_hypothesis"},"missingData":["sizeSignal"],"boundaryNote":"본 자료는 실거래 통계 기반 참고치입니다.","buyerType":"법인 사옥형","budgetRange":{"min":50,"max":80,"display":"50억~80억"},"preferredRegions":["강남","성수"],"assetTypes":["꼬마빌딩","사옥용"],"purchasePurpose":"사옥용 매입","mustHave":["초역세권","주차"],"niceToHave":["테라스","루프탑"],"riskTolerance":"medium","financingNote":"자본금 50% 준비","missingQuestions":["구체적인 입주 시기가 언제인가요?","선호하는 수익률이 있나요?"],"privacyNotes":["연락처 비공개"],"fitReasons":["매수자 예산(50-80억)에 부합하는 매물입니다.","요청하신 성수/강남 권역에 해당합니다."],"cautionReasons":["요청한 용도와 달리 명도 협의가 다소 필요합니다."],"recommendedNextAction":"현장 답사 제안","kakaoMessage":"안녕하세요! 요청하신 조건에 부합하는 추천 매물이 있어 안내해 드립니다. 확인해보시고 피드백 부탁드립니다.","title":"강남 역삼역 초역세권 오피스 사옥용 빌딩 매각","shortSummary":"역삼역 도보 5분 거리의 준신축급 대형 오피스빌딩입니다.","dealPoints":["초역세권","사옥 최적"],"cautionPoints":["명도 조율 필요"],"hiddenInfoNotice":["보증금 및 지번은 인가 후 확인 가능"],"gateMessage":"G1 등급 등록이 필요합니다.","kakaoText":"강남 역삼역 오피스 빌딩 매각 안내입니다.","exactUnitCandidate":"101호","floor":"1층","areaSqmText":"150㎡","spaceType":"office","depositText":"5000만","monthlyRentText":"400만","maintenanceFeeText":"50만","availableFromText":"즉시입주","leaseTermMonthsText":"24","incentivesText":"렌트프리 2개월","restrictions":[],"landlordIdentity":"김성수","currentTenant":"스타트업","vacancyReason":"이전 확장","rentNegotiation":"협의 가능","region":"성수동","areaSqm":150,"deposit":5000,"monthlyRent":400,"maintenanceFee":50,"availableFrom":"즉시입주","leaseTermMonths":24,"incentives":{"rentFreeMonths":2,"interiorSupport":"일부 인테리어 지원","freeRentDetail":"렌트프리 2개월 지원"},"shortSummaryLease":"성수역 도보 5분 거리 1층 리테일 상가 매물입니다."} ### 밸류업 시나리오 (AI 추정)</a:t>
             </a:r>
             <a:endParaRPr lang="en-US" sz="1100" dirty="0"/>
           </a:p>
@@ -9301,7 +10354,7 @@
       </p:sp>
       <p:sp>
         <p:nvSpPr>
-          <p:cNvPr id="11" name="Text 8"/>
+          <p:cNvPr id="10" name="Text 7"/>
           <p:cNvSpPr/>
           <p:nvPr/>
         </p:nvSpPr>
@@ -9340,7 +10393,7 @@
       </p:sp>
       <p:sp>
         <p:nvSpPr>
-          <p:cNvPr id="12" name="Text 9"/>
+          <p:cNvPr id="11" name="Text 8"/>
           <p:cNvSpPr/>
           <p:nvPr/>
         </p:nvSpPr>
@@ -9555,11 +10608,11 @@
         <p:spPr>
           <a:xfrm>
             <a:off x="566928" y="1572768"/>
-            <a:ext cx="11057839" cy="3200400"/>
+            <a:ext cx="2490140" cy="3200400"/>
           </a:xfrm>
           <a:prstGeom prst="roundRect">
             <a:avLst>
-              <a:gd name="adj" fmla="val 1714"/>
+              <a:gd name="adj" fmla="val 2203"/>
             </a:avLst>
           </a:prstGeom>
           <a:solidFill>
@@ -9582,7 +10635,7 @@
         <p:spPr>
           <a:xfrm>
             <a:off x="786384" y="1792224"/>
-            <a:ext cx="384048" cy="384048"/>
+            <a:ext cx="438912" cy="438912"/>
           </a:xfrm>
           <a:prstGeom prst="ellipse">
             <a:avLst/>
@@ -9602,7 +10655,7 @@
         <p:spPr>
           <a:xfrm>
             <a:off x="786384" y="1792224"/>
-            <a:ext cx="384048" cy="384048"/>
+            <a:ext cx="438912" cy="438912"/>
           </a:xfrm>
           <a:prstGeom prst="rect">
             <a:avLst/>
@@ -9618,7 +10671,7 @@
               <a:buNone/>
             </a:pPr>
             <a:r>
-              <a:rPr lang="en-US" sz="1300" b="1" dirty="0">
+              <a:rPr lang="en-US" sz="1400" b="1" dirty="0">
                 <a:solidFill>
                   <a:srgbClr val="FFFFFF"/>
                 </a:solidFill>
@@ -9626,9 +10679,9 @@
                 <a:ea typeface="Arial" pitchFamily="34" charset="-122"/>
                 <a:cs typeface="Arial" pitchFamily="34" charset="-120"/>
               </a:rPr>
-              <a:t>STEP 1</a:t>
-            </a:r>
-            <a:endParaRPr lang="en-US" sz="1300" dirty="0"/>
+              <a:t>01</a:t>
+            </a:r>
+            <a:endParaRPr lang="en-US" sz="1400" dirty="0"/>
           </a:p>
         </p:txBody>
       </p:sp>
@@ -9641,7 +10694,7 @@
         <p:spPr>
           <a:xfrm>
             <a:off x="786384" y="2304288"/>
-            <a:ext cx="10618927" cy="365760"/>
+            <a:ext cx="2051228" cy="365760"/>
           </a:xfrm>
           <a:prstGeom prst="rect">
             <a:avLst/>
@@ -9665,7 +10718,7 @@
                 <a:ea typeface="Pretendard" pitchFamily="34" charset="-122"/>
                 <a:cs typeface="Pretendard" pitchFamily="34" charset="-120"/>
               </a:rPr>
-              <a:t>{"ok"</a:t>
+              <a:t>1단계</a:t>
             </a:r>
             <a:endParaRPr lang="en-US" sz="1600" dirty="0"/>
           </a:p>
@@ -9680,7 +10733,7 @@
         <p:spPr>
           <a:xfrm>
             <a:off x="786384" y="2761488"/>
-            <a:ext cx="10618927" cy="1828800"/>
+            <a:ext cx="2051228" cy="1828800"/>
           </a:xfrm>
           <a:prstGeom prst="rect">
             <a:avLst/>
@@ -9704,7 +10757,7 @@
                 <a:ea typeface="Pretendard" pitchFamily="34" charset="-122"/>
                 <a:cs typeface="Pretendard" pitchFamily="34" charset="-120"/>
               </a:rPr>
-              <a:t>true,"mocked":true,"extractedFields":{"area_signal":"역삼","asset_type":"오피스빌딩","price_band":"300억","size_signal":"3000평(약 9917.4㎡)"},"extractedFacts":{"region":"역삼","exactAddressCandidate":"역삼동 742-1","assetType":"오피스빌딩","priceText":"300억","sizeText":"3000평(약 9917.4㎡)","currentUse":"오피스","currentUseSignal":"근린생활시설","leaseSignal":"임대중","vacancySignal":"공실없음","tenantNames":["쿠팡","네이버"],"unitRentTexts":["301호: 1500만"],"sellerMotivationText":"자산 효율화","brokerNotes":["초역세권 매물"]},"detectedSensitiveFields":["exact_address","tenant_name"],"ambiguousFields":[],"warnings":[],"areaSignal":"역삼","assetType":"오피스빌딩","priceBand":"300억","sizeSignal":"3000평(약 9917.4㎡)","dealType":"매각","buildingName":"역삼 센트럴타워","exactAddress":"역삼동 742-1","totalFloorArea":9917.3,"buildYear":2015,"currentUseSignal":"근린생활시설","vacancySignal":"공실 없음","fitSummary":"초역세권 근생 빌딩으로 시행/사옥 매입에 최적화","cautionSummary":"주요 임차 업종 만기 조율 필요","hiddenFields":["exact_address","seller_motivation"],"confidence":{"areaSignal":"confirmed","assetType":"confirmed","priceBand":"ai_hypothesis","fitSummary":"ai_hypothesis"},"missingData":["sizeSignal"],"boundaryNote":"본 자료는 실거래 통계 기반 참고치입니다.","buyerType":"법인 사옥형","budgetRange":{"min":50,"max":80,"display":"50억~80억"},"preferredRegions":["강남","성수"],"assetTypes":["꼬마빌딩","사옥용"],"purchasePurpose":"사옥용 매입","mustHave":["초역세권","주차"],"niceToHave":["테라스","루프탑"],"riskTolerance":"medium","financingNote":"자본금 50% 준비","missingQuestions":["구체적인 입주 시기가 언제인가요?","선호하는 수익률이 있나요?"],"privacyNotes":["연락처 비공개"],"fitReasons":["매수자 예산(50-80억)에 부합하는 매물입니다.","요청하신 성수/강남 권역에 해당합니다."],"cautionReasons":["요청한 용도와 달리 명도 협의가 다소 필요합니다."],"recommendedNextAction":"현장 답사 제안","kakaoMessage":"안녕하세요! 요청하신 조건에 부합하는 추천 매물이 있어 안내해 드립니다. 확인해보시고 피드백 부탁드립니다.","title":"강남 역삼역 초역세권 오피스 사옥용 빌딩 매각","shortSummary":"역삼역 도보 5분 거리의 준신축급 대형 오피스빌딩입니다.","dealPoints":["초역세권","사옥 최적"],"cautionPoints":["명도 조율 필요"],"hiddenInfoNotice":["보증금 및 지번은 인가 후 확인 가능"],"gateMessage":"G1 등급 등록이 필요합니다.","kakaoText":"강남 역삼역 오피스 빌딩 매각 안내입니다.","exactUnitCandidate":"101호","floor":"1층","areaSqmText":"150㎡","spaceType":"office","depositText":"5000만","monthlyRentText":"400만","maintenanceFeeText":"50만","availableFromText":"즉시입주","leaseTermMonthsText":"24","incentivesText":"렌트프리 2개월","restrictions":[],"landlordIdentity":"김성수","currentTenant":"스타트업","vacancyReason":"이전 확장","rentNegotiation":"협의 가능","region":"성수동","areaSqm":150,"deposit":5000,"monthlyRent":400,"maintenanceFee":50,"availableFrom":"즉시입주","leaseTermMonths":24,"incentives":{"rentFreeMonths":2,"interiorSupport":"일부 인테리어 지원","freeRentDetail":"렌트프리 2개월 지원"},"shortSummaryLease":"성수역 도보 5분 거리 1층 리테일 상가 매물입니다."}</a:t>
+              <a:t>초기 관심 표명 → 담당자 연락</a:t>
             </a:r>
             <a:endParaRPr lang="en-US" sz="1100" dirty="0"/>
           </a:p>
@@ -9712,7 +10765,574 @@
       </p:sp>
       <p:sp>
         <p:nvSpPr>
-          <p:cNvPr id="11" name="Text 9"/>
+          <p:cNvPr id="11" name="Shape 9"/>
+          <p:cNvSpPr/>
+          <p:nvPr/>
+        </p:nvSpPr>
+        <p:spPr>
+          <a:xfrm>
+            <a:off x="3148508" y="3035808"/>
+            <a:ext cx="182880" cy="274320"/>
+          </a:xfrm>
+          <a:prstGeom prst="rightArrow">
+            <a:avLst/>
+          </a:prstGeom>
+          <a:solidFill>
+            <a:srgbClr val="CBD5E0"/>
+          </a:solidFill>
+          <a:ln w="6350">
+            <a:solidFill>
+              <a:srgbClr val="718096"/>
+            </a:solidFill>
+            <a:prstDash val="solid"/>
+          </a:ln>
+        </p:spPr>
+      </p:sp>
+      <p:sp>
+        <p:nvSpPr>
+          <p:cNvPr id="12" name="Shape 10"/>
+          <p:cNvSpPr/>
+          <p:nvPr/>
+        </p:nvSpPr>
+        <p:spPr>
+          <a:xfrm>
+            <a:off x="3422828" y="1572768"/>
+            <a:ext cx="2490140" cy="3200400"/>
+          </a:xfrm>
+          <a:prstGeom prst="roundRect">
+            <a:avLst>
+              <a:gd name="adj" fmla="val 2203"/>
+            </a:avLst>
+          </a:prstGeom>
+          <a:solidFill>
+            <a:srgbClr val="F7FAFC"/>
+          </a:solidFill>
+          <a:ln w="6350">
+            <a:solidFill>
+              <a:srgbClr val="CBD5E0"/>
+            </a:solidFill>
+            <a:prstDash val="solid"/>
+          </a:ln>
+        </p:spPr>
+      </p:sp>
+      <p:sp>
+        <p:nvSpPr>
+          <p:cNvPr id="13" name="Shape 11"/>
+          <p:cNvSpPr/>
+          <p:nvPr/>
+        </p:nvSpPr>
+        <p:spPr>
+          <a:xfrm>
+            <a:off x="3642284" y="1792224"/>
+            <a:ext cx="438912" cy="438912"/>
+          </a:xfrm>
+          <a:prstGeom prst="ellipse">
+            <a:avLst/>
+          </a:prstGeom>
+          <a:solidFill>
+            <a:srgbClr val="B98A2E"/>
+          </a:solidFill>
+          <a:ln/>
+        </p:spPr>
+      </p:sp>
+      <p:sp>
+        <p:nvSpPr>
+          <p:cNvPr id="14" name="Text 12"/>
+          <p:cNvSpPr/>
+          <p:nvPr/>
+        </p:nvSpPr>
+        <p:spPr>
+          <a:xfrm>
+            <a:off x="3642284" y="1792224"/>
+            <a:ext cx="438912" cy="438912"/>
+          </a:xfrm>
+          <a:prstGeom prst="rect">
+            <a:avLst/>
+          </a:prstGeom>
+          <a:noFill/>
+          <a:ln/>
+        </p:spPr>
+        <p:txBody>
+          <a:bodyPr wrap="square" lIns="0" tIns="0" rIns="0" bIns="0" rtlCol="0" anchor="ctr"/>
+          <a:lstStyle/>
+          <a:p>
+            <a:pPr algn="ctr" indent="0" marL="0">
+              <a:buNone/>
+            </a:pPr>
+            <a:r>
+              <a:rPr lang="en-US" sz="1400" b="1" dirty="0">
+                <a:solidFill>
+                  <a:srgbClr val="FFFFFF"/>
+                </a:solidFill>
+                <a:latin typeface="Arial" pitchFamily="34" charset="0"/>
+                <a:ea typeface="Arial" pitchFamily="34" charset="-122"/>
+                <a:cs typeface="Arial" pitchFamily="34" charset="-120"/>
+              </a:rPr>
+              <a:t>02</a:t>
+            </a:r>
+            <a:endParaRPr lang="en-US" sz="1400" dirty="0"/>
+          </a:p>
+        </p:txBody>
+      </p:sp>
+      <p:sp>
+        <p:nvSpPr>
+          <p:cNvPr id="15" name="Text 13"/>
+          <p:cNvSpPr/>
+          <p:nvPr/>
+        </p:nvSpPr>
+        <p:spPr>
+          <a:xfrm>
+            <a:off x="3642284" y="2304288"/>
+            <a:ext cx="2051228" cy="365760"/>
+          </a:xfrm>
+          <a:prstGeom prst="rect">
+            <a:avLst/>
+          </a:prstGeom>
+          <a:noFill/>
+          <a:ln/>
+        </p:spPr>
+        <p:txBody>
+          <a:bodyPr wrap="square" rtlCol="0" anchor="ctr"/>
+          <a:lstStyle/>
+          <a:p>
+            <a:pPr indent="0" marL="0">
+              <a:buNone/>
+            </a:pPr>
+            <a:r>
+              <a:rPr lang="en-US" sz="1600" b="1" dirty="0">
+                <a:solidFill>
+                  <a:srgbClr val="10161F"/>
+                </a:solidFill>
+                <a:latin typeface="Pretendard" pitchFamily="34" charset="0"/>
+                <a:ea typeface="Pretendard" pitchFamily="34" charset="-122"/>
+                <a:cs typeface="Pretendard" pitchFamily="34" charset="-120"/>
+              </a:rPr>
+              <a:t>2단계</a:t>
+            </a:r>
+            <a:endParaRPr lang="en-US" sz="1600" dirty="0"/>
+          </a:p>
+        </p:txBody>
+      </p:sp>
+      <p:sp>
+        <p:nvSpPr>
+          <p:cNvPr id="16" name="Text 14"/>
+          <p:cNvSpPr/>
+          <p:nvPr/>
+        </p:nvSpPr>
+        <p:spPr>
+          <a:xfrm>
+            <a:off x="3642284" y="2761488"/>
+            <a:ext cx="2051228" cy="1828800"/>
+          </a:xfrm>
+          <a:prstGeom prst="rect">
+            <a:avLst/>
+          </a:prstGeom>
+          <a:noFill/>
+          <a:ln/>
+        </p:spPr>
+        <p:txBody>
+          <a:bodyPr wrap="square" rtlCol="0" anchor="t"/>
+          <a:lstStyle/>
+          <a:p>
+            <a:pPr indent="0" marL="0">
+              <a:buNone/>
+            </a:pPr>
+            <a:r>
+              <a:rPr lang="en-US" sz="1100" dirty="0">
+                <a:solidFill>
+                  <a:srgbClr val="10161F"/>
+                </a:solidFill>
+                <a:latin typeface="Pretendard" pitchFamily="34" charset="0"/>
+                <a:ea typeface="Pretendard" pitchFamily="34" charset="-122"/>
+                <a:cs typeface="Pretendard" pitchFamily="34" charset="-120"/>
+              </a:rPr>
+              <a:t>NDA 체결 → 임차인 정보 및 임대차계약서 제공</a:t>
+            </a:r>
+            <a:endParaRPr lang="en-US" sz="1100" dirty="0"/>
+          </a:p>
+        </p:txBody>
+      </p:sp>
+      <p:sp>
+        <p:nvSpPr>
+          <p:cNvPr id="17" name="Shape 15"/>
+          <p:cNvSpPr/>
+          <p:nvPr/>
+        </p:nvSpPr>
+        <p:spPr>
+          <a:xfrm>
+            <a:off x="6004408" y="3035808"/>
+            <a:ext cx="182880" cy="274320"/>
+          </a:xfrm>
+          <a:prstGeom prst="rightArrow">
+            <a:avLst/>
+          </a:prstGeom>
+          <a:solidFill>
+            <a:srgbClr val="CBD5E0"/>
+          </a:solidFill>
+          <a:ln w="6350">
+            <a:solidFill>
+              <a:srgbClr val="718096"/>
+            </a:solidFill>
+            <a:prstDash val="solid"/>
+          </a:ln>
+        </p:spPr>
+      </p:sp>
+      <p:sp>
+        <p:nvSpPr>
+          <p:cNvPr id="18" name="Shape 16"/>
+          <p:cNvSpPr/>
+          <p:nvPr/>
+        </p:nvSpPr>
+        <p:spPr>
+          <a:xfrm>
+            <a:off x="6278728" y="1572768"/>
+            <a:ext cx="2490140" cy="3200400"/>
+          </a:xfrm>
+          <a:prstGeom prst="roundRect">
+            <a:avLst>
+              <a:gd name="adj" fmla="val 2203"/>
+            </a:avLst>
+          </a:prstGeom>
+          <a:solidFill>
+            <a:srgbClr val="F7FAFC"/>
+          </a:solidFill>
+          <a:ln w="6350">
+            <a:solidFill>
+              <a:srgbClr val="CBD5E0"/>
+            </a:solidFill>
+            <a:prstDash val="solid"/>
+          </a:ln>
+        </p:spPr>
+      </p:sp>
+      <p:sp>
+        <p:nvSpPr>
+          <p:cNvPr id="19" name="Shape 17"/>
+          <p:cNvSpPr/>
+          <p:nvPr/>
+        </p:nvSpPr>
+        <p:spPr>
+          <a:xfrm>
+            <a:off x="6498184" y="1792224"/>
+            <a:ext cx="438912" cy="438912"/>
+          </a:xfrm>
+          <a:prstGeom prst="ellipse">
+            <a:avLst/>
+          </a:prstGeom>
+          <a:solidFill>
+            <a:srgbClr val="B98A2E"/>
+          </a:solidFill>
+          <a:ln/>
+        </p:spPr>
+      </p:sp>
+      <p:sp>
+        <p:nvSpPr>
+          <p:cNvPr id="20" name="Text 18"/>
+          <p:cNvSpPr/>
+          <p:nvPr/>
+        </p:nvSpPr>
+        <p:spPr>
+          <a:xfrm>
+            <a:off x="6498184" y="1792224"/>
+            <a:ext cx="438912" cy="438912"/>
+          </a:xfrm>
+          <a:prstGeom prst="rect">
+            <a:avLst/>
+          </a:prstGeom>
+          <a:noFill/>
+          <a:ln/>
+        </p:spPr>
+        <p:txBody>
+          <a:bodyPr wrap="square" lIns="0" tIns="0" rIns="0" bIns="0" rtlCol="0" anchor="ctr"/>
+          <a:lstStyle/>
+          <a:p>
+            <a:pPr algn="ctr" indent="0" marL="0">
+              <a:buNone/>
+            </a:pPr>
+            <a:r>
+              <a:rPr lang="en-US" sz="1400" b="1" dirty="0">
+                <a:solidFill>
+                  <a:srgbClr val="FFFFFF"/>
+                </a:solidFill>
+                <a:latin typeface="Arial" pitchFamily="34" charset="0"/>
+                <a:ea typeface="Arial" pitchFamily="34" charset="-122"/>
+                <a:cs typeface="Arial" pitchFamily="34" charset="-120"/>
+              </a:rPr>
+              <a:t>03</a:t>
+            </a:r>
+            <a:endParaRPr lang="en-US" sz="1400" dirty="0"/>
+          </a:p>
+        </p:txBody>
+      </p:sp>
+      <p:sp>
+        <p:nvSpPr>
+          <p:cNvPr id="21" name="Text 19"/>
+          <p:cNvSpPr/>
+          <p:nvPr/>
+        </p:nvSpPr>
+        <p:spPr>
+          <a:xfrm>
+            <a:off x="6498184" y="2304288"/>
+            <a:ext cx="2051228" cy="365760"/>
+          </a:xfrm>
+          <a:prstGeom prst="rect">
+            <a:avLst/>
+          </a:prstGeom>
+          <a:noFill/>
+          <a:ln/>
+        </p:spPr>
+        <p:txBody>
+          <a:bodyPr wrap="square" rtlCol="0" anchor="ctr"/>
+          <a:lstStyle/>
+          <a:p>
+            <a:pPr indent="0" marL="0">
+              <a:buNone/>
+            </a:pPr>
+            <a:r>
+              <a:rPr lang="en-US" sz="1600" b="1" dirty="0">
+                <a:solidFill>
+                  <a:srgbClr val="10161F"/>
+                </a:solidFill>
+                <a:latin typeface="Pretendard" pitchFamily="34" charset="0"/>
+                <a:ea typeface="Pretendard" pitchFamily="34" charset="-122"/>
+                <a:cs typeface="Pretendard" pitchFamily="34" charset="-120"/>
+              </a:rPr>
+              <a:t>3단계</a:t>
+            </a:r>
+            <a:endParaRPr lang="en-US" sz="1600" dirty="0"/>
+          </a:p>
+        </p:txBody>
+      </p:sp>
+      <p:sp>
+        <p:nvSpPr>
+          <p:cNvPr id="22" name="Text 20"/>
+          <p:cNvSpPr/>
+          <p:nvPr/>
+        </p:nvSpPr>
+        <p:spPr>
+          <a:xfrm>
+            <a:off x="6498184" y="2761488"/>
+            <a:ext cx="2051228" cy="1828800"/>
+          </a:xfrm>
+          <a:prstGeom prst="rect">
+            <a:avLst/>
+          </a:prstGeom>
+          <a:noFill/>
+          <a:ln/>
+        </p:spPr>
+        <p:txBody>
+          <a:bodyPr wrap="square" rtlCol="0" anchor="t"/>
+          <a:lstStyle/>
+          <a:p>
+            <a:pPr indent="0" marL="0">
+              <a:buNone/>
+            </a:pPr>
+            <a:r>
+              <a:rPr lang="en-US" sz="1100" dirty="0">
+                <a:solidFill>
+                  <a:srgbClr val="10161F"/>
+                </a:solidFill>
+                <a:latin typeface="Pretendard" pitchFamily="34" charset="0"/>
+                <a:ea typeface="Pretendard" pitchFamily="34" charset="-122"/>
+                <a:cs typeface="Pretendard" pitchFamily="34" charset="-120"/>
+              </a:rPr>
+              <a:t>현장 실사 일정 조율 → 건물 컨디션 및 설비 직접 확인</a:t>
+            </a:r>
+            <a:endParaRPr lang="en-US" sz="1100" dirty="0"/>
+          </a:p>
+        </p:txBody>
+      </p:sp>
+      <p:sp>
+        <p:nvSpPr>
+          <p:cNvPr id="23" name="Shape 21"/>
+          <p:cNvSpPr/>
+          <p:nvPr/>
+        </p:nvSpPr>
+        <p:spPr>
+          <a:xfrm>
+            <a:off x="8860307" y="3035808"/>
+            <a:ext cx="182880" cy="274320"/>
+          </a:xfrm>
+          <a:prstGeom prst="rightArrow">
+            <a:avLst/>
+          </a:prstGeom>
+          <a:solidFill>
+            <a:srgbClr val="CBD5E0"/>
+          </a:solidFill>
+          <a:ln w="6350">
+            <a:solidFill>
+              <a:srgbClr val="718096"/>
+            </a:solidFill>
+            <a:prstDash val="solid"/>
+          </a:ln>
+        </p:spPr>
+      </p:sp>
+      <p:sp>
+        <p:nvSpPr>
+          <p:cNvPr id="24" name="Shape 22"/>
+          <p:cNvSpPr/>
+          <p:nvPr/>
+        </p:nvSpPr>
+        <p:spPr>
+          <a:xfrm>
+            <a:off x="9134627" y="1572768"/>
+            <a:ext cx="2490140" cy="3200400"/>
+          </a:xfrm>
+          <a:prstGeom prst="roundRect">
+            <a:avLst>
+              <a:gd name="adj" fmla="val 2203"/>
+            </a:avLst>
+          </a:prstGeom>
+          <a:solidFill>
+            <a:srgbClr val="F7FAFC"/>
+          </a:solidFill>
+          <a:ln w="6350">
+            <a:solidFill>
+              <a:srgbClr val="CBD5E0"/>
+            </a:solidFill>
+            <a:prstDash val="solid"/>
+          </a:ln>
+        </p:spPr>
+      </p:sp>
+      <p:sp>
+        <p:nvSpPr>
+          <p:cNvPr id="25" name="Shape 23"/>
+          <p:cNvSpPr/>
+          <p:nvPr/>
+        </p:nvSpPr>
+        <p:spPr>
+          <a:xfrm>
+            <a:off x="9354083" y="1792224"/>
+            <a:ext cx="438912" cy="438912"/>
+          </a:xfrm>
+          <a:prstGeom prst="ellipse">
+            <a:avLst/>
+          </a:prstGeom>
+          <a:solidFill>
+            <a:srgbClr val="B98A2E"/>
+          </a:solidFill>
+          <a:ln/>
+        </p:spPr>
+      </p:sp>
+      <p:sp>
+        <p:nvSpPr>
+          <p:cNvPr id="26" name="Text 24"/>
+          <p:cNvSpPr/>
+          <p:nvPr/>
+        </p:nvSpPr>
+        <p:spPr>
+          <a:xfrm>
+            <a:off x="9354083" y="1792224"/>
+            <a:ext cx="438912" cy="438912"/>
+          </a:xfrm>
+          <a:prstGeom prst="rect">
+            <a:avLst/>
+          </a:prstGeom>
+          <a:noFill/>
+          <a:ln/>
+        </p:spPr>
+        <p:txBody>
+          <a:bodyPr wrap="square" lIns="0" tIns="0" rIns="0" bIns="0" rtlCol="0" anchor="ctr"/>
+          <a:lstStyle/>
+          <a:p>
+            <a:pPr algn="ctr" indent="0" marL="0">
+              <a:buNone/>
+            </a:pPr>
+            <a:r>
+              <a:rPr lang="en-US" sz="1400" b="1" dirty="0">
+                <a:solidFill>
+                  <a:srgbClr val="FFFFFF"/>
+                </a:solidFill>
+                <a:latin typeface="Arial" pitchFamily="34" charset="0"/>
+                <a:ea typeface="Arial" pitchFamily="34" charset="-122"/>
+                <a:cs typeface="Arial" pitchFamily="34" charset="-120"/>
+              </a:rPr>
+              <a:t>04</a:t>
+            </a:r>
+            <a:endParaRPr lang="en-US" sz="1400" dirty="0"/>
+          </a:p>
+        </p:txBody>
+      </p:sp>
+      <p:sp>
+        <p:nvSpPr>
+          <p:cNvPr id="27" name="Text 25"/>
+          <p:cNvSpPr/>
+          <p:nvPr/>
+        </p:nvSpPr>
+        <p:spPr>
+          <a:xfrm>
+            <a:off x="9354083" y="2304288"/>
+            <a:ext cx="2051228" cy="365760"/>
+          </a:xfrm>
+          <a:prstGeom prst="rect">
+            <a:avLst/>
+          </a:prstGeom>
+          <a:noFill/>
+          <a:ln/>
+        </p:spPr>
+        <p:txBody>
+          <a:bodyPr wrap="square" rtlCol="0" anchor="ctr"/>
+          <a:lstStyle/>
+          <a:p>
+            <a:pPr indent="0" marL="0">
+              <a:buNone/>
+            </a:pPr>
+            <a:r>
+              <a:rPr lang="en-US" sz="1600" b="1" dirty="0">
+                <a:solidFill>
+                  <a:srgbClr val="10161F"/>
+                </a:solidFill>
+                <a:latin typeface="Pretendard" pitchFamily="34" charset="0"/>
+                <a:ea typeface="Pretendard" pitchFamily="34" charset="-122"/>
+                <a:cs typeface="Pretendard" pitchFamily="34" charset="-120"/>
+              </a:rPr>
+              <a:t>4단계</a:t>
+            </a:r>
+            <a:endParaRPr lang="en-US" sz="1600" dirty="0"/>
+          </a:p>
+        </p:txBody>
+      </p:sp>
+      <p:sp>
+        <p:nvSpPr>
+          <p:cNvPr id="28" name="Text 26"/>
+          <p:cNvSpPr/>
+          <p:nvPr/>
+        </p:nvSpPr>
+        <p:spPr>
+          <a:xfrm>
+            <a:off x="9354083" y="2761488"/>
+            <a:ext cx="2051228" cy="1828800"/>
+          </a:xfrm>
+          <a:prstGeom prst="rect">
+            <a:avLst/>
+          </a:prstGeom>
+          <a:noFill/>
+          <a:ln/>
+        </p:spPr>
+        <p:txBody>
+          <a:bodyPr wrap="square" rtlCol="0" anchor="t"/>
+          <a:lstStyle/>
+          <a:p>
+            <a:pPr indent="0" marL="0">
+              <a:buNone/>
+            </a:pPr>
+            <a:r>
+              <a:rPr lang="en-US" sz="1100" dirty="0">
+                <a:solidFill>
+                  <a:srgbClr val="10161F"/>
+                </a:solidFill>
+                <a:latin typeface="Pretendard" pitchFamily="34" charset="0"/>
+                <a:ea typeface="Pretendard" pitchFamily="34" charset="-122"/>
+                <a:cs typeface="Pretendard" pitchFamily="34" charset="-120"/>
+              </a:rPr>
+              <a:t>LOI(투자의향서) 제출 → 가격 협의 개시</a:t>
+            </a:r>
+            <a:endParaRPr lang="en-US" sz="1100" dirty="0"/>
+          </a:p>
+        </p:txBody>
+      </p:sp>
+      <p:sp>
+        <p:nvSpPr>
+          <p:cNvPr id="29" name="Text 27"/>
           <p:cNvSpPr/>
           <p:nvPr/>
         </p:nvSpPr>
@@ -9751,7 +11371,7 @@
       </p:sp>
       <p:sp>
         <p:nvSpPr>
-          <p:cNvPr id="12" name="Text 10"/>
+          <p:cNvPr id="30" name="Text 28"/>
           <p:cNvSpPr/>
           <p:nvPr/>
         </p:nvSpPr>

--- a/docs/test/stress/e2e-outputs/operating_case16_icheon_logistics_basic.pptx
+++ b/docs/test/stress/e2e-outputs/operating_case16_icheon_logistics_basic.pptx
@@ -15,9 +15,10 @@
     <p:sldId id="263" r:id="rId9"/>
     <p:sldId id="264" r:id="rId10"/>
     <p:sldId id="265" r:id="rId11"/>
+    <p:sldId id="266" r:id="rId12"/>
   </p:sldIdLst>
   <p:notesMasterIdLst>
-    <p:notesMasterId r:id="rId12"/>
+    <p:notesMasterId r:id="rId13"/>
   </p:notesMasterIdLst>
   <p:sldSz cx="12192000" cy="6858000"/>
   <p:notesSz cx="6858000" cy="12192000"/>
@@ -623,6 +624,94 @@
             <a:fld id="{F7021451-1387-4CA6-816F-3879F97B5CBC}" type="slidenum">
               <a:rPr lang="en-US"/>
               <a:t>10</a:t>
+            </a:fld>
+            <a:endParaRPr lang="en-US"/>
+          </a:p>
+        </p:txBody>
+      </p:sp>
+    </p:spTree>
+    <p:extLst>
+      <p:ext uri="{BB962C8B-B14F-4D97-AF65-F5344CB8AC3E}">
+        <p14:creationId xmlns:p14="http://schemas.microsoft.com/office/powerpoint/2010/main" val="1024086991"/>
+      </p:ext>
+    </p:extLst>
+  </p:cSld>
+  <p:clrMapOvr>
+    <a:masterClrMapping/>
+  </p:clrMapOvr>
+</p:notes>
+</file>
+
+<file path=ppt/notesSlides/notesSlide11.xml><?xml version="1.0" encoding="utf-8"?>
+<p:notes xmlns:a="http://schemas.openxmlformats.org/drawingml/2006/main" xmlns:r="http://schemas.openxmlformats.org/officeDocument/2006/relationships" xmlns:p="http://schemas.openxmlformats.org/presentationml/2006/main">
+  <p:cSld>
+    <p:spTree>
+      <p:nvGrpSpPr>
+        <p:cNvPr id="1" name=""/>
+        <p:cNvGrpSpPr/>
+        <p:nvPr/>
+      </p:nvGrpSpPr>
+      <p:grpSpPr>
+        <a:xfrm>
+          <a:off x="0" y="0"/>
+          <a:ext cx="0" cy="0"/>
+          <a:chOff x="0" y="0"/>
+          <a:chExt cx="0" cy="0"/>
+        </a:xfrm>
+      </p:grpSpPr>
+      <p:sp>
+        <p:nvSpPr>
+          <p:cNvPr id="2" name="Slide Image Placeholder 1"/>
+          <p:cNvSpPr>
+            <a:spLocks noGrp="1" noRot="1" noChangeAspect="1"/>
+          </p:cNvSpPr>
+          <p:nvPr>
+            <p:ph type="sldImg"/>
+          </p:nvPr>
+        </p:nvSpPr>
+        <p:spPr/>
+      </p:sp>
+      <p:sp>
+        <p:nvSpPr>
+          <p:cNvPr id="3" name="Notes Placeholder 2"/>
+          <p:cNvSpPr>
+            <a:spLocks noGrp="1"/>
+          </p:cNvSpPr>
+          <p:nvPr>
+            <p:ph type="body" idx="1"/>
+          </p:nvPr>
+        </p:nvSpPr>
+        <p:spPr/>
+        <p:txBody>
+          <a:bodyPr/>
+          <a:lstStyle/>
+          <a:p>
+            <a:r>
+              <a:rPr lang="en-US" dirty="0"/>
+              <a:t/>
+            </a:r>
+            <a:endParaRPr lang="en-US" dirty="0"/>
+          </a:p>
+        </p:txBody>
+      </p:sp>
+      <p:sp>
+        <p:nvSpPr>
+          <p:cNvPr id="4" name="Slide Number Placeholder 3"/>
+          <p:cNvSpPr>
+            <a:spLocks noGrp="1"/>
+          </p:cNvSpPr>
+          <p:nvPr>
+            <p:ph type="sldNum" sz="quarter" idx="10"/>
+          </p:nvPr>
+        </p:nvSpPr>
+        <p:spPr/>
+        <p:txBody>
+          <a:bodyPr/>
+          <a:lstStyle/>
+          <a:p>
+            <a:fld id="{F7021451-1387-4CA6-816F-3879F97B5CBC}" type="slidenum">
+              <a:rPr lang="en-US"/>
+              <a:t>11</a:t>
             </a:fld>
             <a:endParaRPr lang="en-US"/>
           </a:p>
@@ -2297,6 +2386,434 @@
     <p:bg>
       <p:bgPr>
         <a:solidFill>
+          <a:srgbClr val="FFFFFF"/>
+        </a:solidFill>
+      </p:bgPr>
+    </p:bg>
+    <p:spTree>
+      <p:nvGrpSpPr>
+        <p:cNvPr id="1" name=""/>
+        <p:cNvGrpSpPr/>
+        <p:nvPr/>
+      </p:nvGrpSpPr>
+      <p:grpSpPr>
+        <a:xfrm>
+          <a:off x="0" y="0"/>
+          <a:ext cx="0" cy="0"/>
+          <a:chOff x="0" y="0"/>
+          <a:chExt cx="0" cy="0"/>
+        </a:xfrm>
+      </p:grpSpPr>
+      <p:sp>
+        <p:nvSpPr>
+          <p:cNvPr id="2" name="Shape 0"/>
+          <p:cNvSpPr/>
+          <p:nvPr/>
+        </p:nvSpPr>
+        <p:spPr>
+          <a:xfrm>
+            <a:off x="566928" y="457200"/>
+            <a:ext cx="384048" cy="384048"/>
+          </a:xfrm>
+          <a:prstGeom prst="ellipse">
+            <a:avLst/>
+          </a:prstGeom>
+          <a:solidFill>
+            <a:srgbClr val="B98A2E"/>
+          </a:solidFill>
+          <a:ln/>
+        </p:spPr>
+      </p:sp>
+      <p:sp>
+        <p:nvSpPr>
+          <p:cNvPr id="3" name="Text 1"/>
+          <p:cNvSpPr/>
+          <p:nvPr/>
+        </p:nvSpPr>
+        <p:spPr>
+          <a:xfrm>
+            <a:off x="566928" y="457200"/>
+            <a:ext cx="384048" cy="384048"/>
+          </a:xfrm>
+          <a:prstGeom prst="rect">
+            <a:avLst/>
+          </a:prstGeom>
+          <a:noFill/>
+          <a:ln/>
+        </p:spPr>
+        <p:txBody>
+          <a:bodyPr wrap="square" lIns="0" tIns="0" rIns="0" bIns="0" rtlCol="0" anchor="ctr"/>
+          <a:lstStyle/>
+          <a:p>
+            <a:pPr algn="ctr" indent="0" marL="0">
+              <a:buNone/>
+            </a:pPr>
+            <a:r>
+              <a:rPr lang="en-US" sz="1300" b="1" dirty="0">
+                <a:solidFill>
+                  <a:srgbClr val="FFFFFF"/>
+                </a:solidFill>
+                <a:latin typeface="Arial" pitchFamily="34" charset="0"/>
+                <a:ea typeface="Arial" pitchFamily="34" charset="-122"/>
+                <a:cs typeface="Arial" pitchFamily="34" charset="-120"/>
+              </a:rPr>
+              <a:t>10</a:t>
+            </a:r>
+            <a:endParaRPr lang="en-US" sz="1300" dirty="0"/>
+          </a:p>
+        </p:txBody>
+      </p:sp>
+      <p:sp>
+        <p:nvSpPr>
+          <p:cNvPr id="4" name="Text 2"/>
+          <p:cNvSpPr/>
+          <p:nvPr/>
+        </p:nvSpPr>
+        <p:spPr>
+          <a:xfrm>
+            <a:off x="1133856" y="457200"/>
+            <a:ext cx="10490911" cy="182880"/>
+          </a:xfrm>
+          <a:prstGeom prst="rect">
+            <a:avLst/>
+          </a:prstGeom>
+          <a:noFill/>
+          <a:ln/>
+        </p:spPr>
+        <p:txBody>
+          <a:bodyPr wrap="square" lIns="0" tIns="0" rIns="0" bIns="0" rtlCol="0" anchor="ctr"/>
+          <a:lstStyle/>
+          <a:p>
+            <a:pPr indent="0" marL="0">
+              <a:buNone/>
+            </a:pPr>
+            <a:r>
+              <a:rPr lang="en-US" sz="950" b="1" spc="200" kern="0" dirty="0">
+                <a:solidFill>
+                  <a:srgbClr val="B98A2E"/>
+                </a:solidFill>
+                <a:latin typeface="Arial" pitchFamily="34" charset="0"/>
+                <a:ea typeface="Arial" pitchFamily="34" charset="-122"/>
+                <a:cs typeface="Arial" pitchFamily="34" charset="-120"/>
+              </a:rPr>
+              <a:t>Process</a:t>
+            </a:r>
+            <a:endParaRPr lang="en-US" sz="950" dirty="0"/>
+          </a:p>
+        </p:txBody>
+      </p:sp>
+      <p:sp>
+        <p:nvSpPr>
+          <p:cNvPr id="5" name="Text 3"/>
+          <p:cNvSpPr/>
+          <p:nvPr/>
+        </p:nvSpPr>
+        <p:spPr>
+          <a:xfrm>
+            <a:off x="1133856" y="640080"/>
+            <a:ext cx="10490911" cy="365760"/>
+          </a:xfrm>
+          <a:prstGeom prst="rect">
+            <a:avLst/>
+          </a:prstGeom>
+          <a:noFill/>
+          <a:ln/>
+        </p:spPr>
+        <p:txBody>
+          <a:bodyPr wrap="square" lIns="0" tIns="0" rIns="0" bIns="0" rtlCol="0" anchor="ctr"/>
+          <a:lstStyle/>
+          <a:p>
+            <a:pPr indent="0" marL="0">
+              <a:buNone/>
+            </a:pPr>
+            <a:r>
+              <a:rPr lang="en-US" sz="2300" b="1" dirty="0">
+                <a:solidFill>
+                  <a:srgbClr val="10161F"/>
+                </a:solidFill>
+                <a:latin typeface="Pretendard" pitchFamily="34" charset="0"/>
+                <a:ea typeface="Pretendard" pitchFamily="34" charset="-122"/>
+                <a:cs typeface="Pretendard" pitchFamily="34" charset="-120"/>
+              </a:rPr>
+              <a:t>검토 후 다음 단계는 무엇인가</a:t>
+            </a:r>
+            <a:endParaRPr lang="en-US" sz="2300" dirty="0"/>
+          </a:p>
+        </p:txBody>
+      </p:sp>
+      <p:sp>
+        <p:nvSpPr>
+          <p:cNvPr id="6" name="Shape 4"/>
+          <p:cNvSpPr/>
+          <p:nvPr/>
+        </p:nvSpPr>
+        <p:spPr>
+          <a:xfrm>
+            <a:off x="566928" y="1572768"/>
+            <a:ext cx="11057839" cy="3200400"/>
+          </a:xfrm>
+          <a:prstGeom prst="roundRect">
+            <a:avLst>
+              <a:gd name="adj" fmla="val 1714"/>
+            </a:avLst>
+          </a:prstGeom>
+          <a:solidFill>
+            <a:srgbClr val="F7FAFC"/>
+          </a:solidFill>
+          <a:ln w="6350">
+            <a:solidFill>
+              <a:srgbClr val="CBD5E0"/>
+            </a:solidFill>
+            <a:prstDash val="solid"/>
+          </a:ln>
+        </p:spPr>
+      </p:sp>
+      <p:sp>
+        <p:nvSpPr>
+          <p:cNvPr id="7" name="Shape 5"/>
+          <p:cNvSpPr/>
+          <p:nvPr/>
+        </p:nvSpPr>
+        <p:spPr>
+          <a:xfrm>
+            <a:off x="786384" y="1792224"/>
+            <a:ext cx="438912" cy="438912"/>
+          </a:xfrm>
+          <a:prstGeom prst="ellipse">
+            <a:avLst/>
+          </a:prstGeom>
+          <a:solidFill>
+            <a:srgbClr val="B98A2E"/>
+          </a:solidFill>
+          <a:ln/>
+        </p:spPr>
+      </p:sp>
+      <p:sp>
+        <p:nvSpPr>
+          <p:cNvPr id="8" name="Text 6"/>
+          <p:cNvSpPr/>
+          <p:nvPr/>
+        </p:nvSpPr>
+        <p:spPr>
+          <a:xfrm>
+            <a:off x="786384" y="1792224"/>
+            <a:ext cx="438912" cy="438912"/>
+          </a:xfrm>
+          <a:prstGeom prst="rect">
+            <a:avLst/>
+          </a:prstGeom>
+          <a:noFill/>
+          <a:ln/>
+        </p:spPr>
+        <p:txBody>
+          <a:bodyPr wrap="square" lIns="0" tIns="0" rIns="0" bIns="0" rtlCol="0" anchor="ctr"/>
+          <a:lstStyle/>
+          <a:p>
+            <a:pPr algn="ctr" indent="0" marL="0">
+              <a:buNone/>
+            </a:pPr>
+            <a:r>
+              <a:rPr lang="en-US" sz="1400" b="1" dirty="0">
+                <a:solidFill>
+                  <a:srgbClr val="FFFFFF"/>
+                </a:solidFill>
+                <a:latin typeface="Arial" pitchFamily="34" charset="0"/>
+                <a:ea typeface="Arial" pitchFamily="34" charset="-122"/>
+                <a:cs typeface="Arial" pitchFamily="34" charset="-120"/>
+              </a:rPr>
+              <a:t>01</a:t>
+            </a:r>
+            <a:endParaRPr lang="en-US" sz="1400" dirty="0"/>
+          </a:p>
+        </p:txBody>
+      </p:sp>
+      <p:sp>
+        <p:nvSpPr>
+          <p:cNvPr id="9" name="Text 7"/>
+          <p:cNvSpPr/>
+          <p:nvPr/>
+        </p:nvSpPr>
+        <p:spPr>
+          <a:xfrm>
+            <a:off x="786384" y="2304288"/>
+            <a:ext cx="10618927" cy="365760"/>
+          </a:xfrm>
+          <a:prstGeom prst="rect">
+            <a:avLst/>
+          </a:prstGeom>
+          <a:noFill/>
+          <a:ln/>
+        </p:spPr>
+        <p:txBody>
+          <a:bodyPr wrap="square" rtlCol="0" anchor="ctr"/>
+          <a:lstStyle/>
+          <a:p>
+            <a:pPr indent="0" marL="0">
+              <a:buNone/>
+            </a:pPr>
+            <a:r>
+              <a:rPr lang="en-US" sz="1600" b="1" dirty="0">
+                <a:solidFill>
+                  <a:srgbClr val="10161F"/>
+                </a:solidFill>
+                <a:latin typeface="Pretendard" pitchFamily="34" charset="0"/>
+                <a:ea typeface="Pretendard" pitchFamily="34" charset="-122"/>
+                <a:cs typeface="Pretendard" pitchFamily="34" charset="-120"/>
+              </a:rPr>
+              <a:t>1단계</a:t>
+            </a:r>
+            <a:endParaRPr lang="en-US" sz="1600" dirty="0"/>
+          </a:p>
+        </p:txBody>
+      </p:sp>
+      <p:sp>
+        <p:nvSpPr>
+          <p:cNvPr id="10" name="Text 8"/>
+          <p:cNvSpPr/>
+          <p:nvPr/>
+        </p:nvSpPr>
+        <p:spPr>
+          <a:xfrm>
+            <a:off x="786384" y="2761488"/>
+            <a:ext cx="10618927" cy="1828800"/>
+          </a:xfrm>
+          <a:prstGeom prst="rect">
+            <a:avLst/>
+          </a:prstGeom>
+          <a:noFill/>
+          <a:ln/>
+        </p:spPr>
+        <p:txBody>
+          <a:bodyPr wrap="square" rtlCol="0" anchor="t"/>
+          <a:lstStyle/>
+          <a:p>
+            <a:pPr indent="0" marL="0">
+              <a:buNone/>
+            </a:pPr>
+            <a:r>
+              <a:rPr lang="en-US" sz="1100" dirty="0">
+                <a:solidFill>
+                  <a:srgbClr val="10161F"/>
+                </a:solidFill>
+                <a:latin typeface="Pretendard" pitchFamily="34" charset="0"/>
+                <a:ea typeface="Pretendard" pitchFamily="34" charset="-122"/>
+                <a:cs typeface="Pretendard" pitchFamily="34" charset="-120"/>
+              </a:rPr>
+              <a:t>{"ok"</a:t>
+            </a:r>
+            <a:endParaRPr lang="en-US" sz="1100" dirty="0"/>
+          </a:p>
+          <a:p>
+            <a:pPr indent="0" marL="0">
+              <a:buNone/>
+            </a:pPr>
+            <a:r>
+              <a:rPr lang="en-US" sz="1100" dirty="0">
+                <a:solidFill>
+                  <a:srgbClr val="10161F"/>
+                </a:solidFill>
+                <a:latin typeface="Pretendard" pitchFamily="34" charset="0"/>
+                <a:ea typeface="Pretendard" pitchFamily="34" charset="-122"/>
+                <a:cs typeface="Pretendard" pitchFamily="34" charset="-120"/>
+              </a:rPr>
+              <a:t>true,"mocked":true,"extractedFields":{"area_signal":"역삼","asset_type":"오피스빌딩","price_band":"300억","size_signal":"3000평(약 9917.4㎡)"},"extractedFacts":{"region":"역삼","exactAddressCandidate":"역삼동 742-1","assetType":"오피스빌딩","priceText":"300억","sizeText":"3000평(약 9917.4㎡)","currentUse":"오피스","currentUseSignal":"근린생활시설","leaseSignal":"임대중","vacancySignal":"공실없음","tenantNames":["쿠팡","네이버"],"unitRentTexts":["301호: 1500만"],"sellerMotivationText":"자산 효율화","brokerNotes":["초역세권 매물"]},"detectedSensitiveFields":["exact_address","tenant_name"],"ambiguousFields":[],"warnings":[],"areaSignal":"역삼","assetType":"오피스빌딩","priceBand":"300억","sizeSignal":"3000평(약 9917.4㎡)","dealType":"매각","buildingName":"역삼 센트럴타워","exactAddress":"역삼동 742-1","totalFloorArea":9917.3,"buildYear":2015,"currentUseSignal":"근린생활시설","vacancySignal":"공실 없음","fitSummary":"초역세권 근생 빌딩으로 시행/사옥 매입에 최적화","cautionSummary":"주요 임차인 만기 조율 필요","hiddenFields":["exact_address","seller_motivation"],"confidence":{"areaSignal":"confirmed","assetType":"confirmed","priceBand":"ai_hypothesis","fitSummary":"ai_hypothesis"},"missingData":["sizeSignal"],"boundaryNote":"본 자료는 실거래 통계 기반 참고치입니다.","buyerType":"법인 사옥형","budgetRange":{"min":50,"max":80,"display":"50억~80억"},"preferredRegions":["강남","성수"],"assetTypes":["꼬마빌딩","사옥용"],"purchasePurpose":"사옥용 매입","mustHave":["초역세권","주차"],"niceToHave":["테라스","루프탑"],"riskTolerance":"medium","financingNote":"자본금 50% 준비","missingQuestions":["구체적인 입주 시기가 언제인가요?","선호하는 수익률이 있나요?"],"privacyNotes":["연락처 비공개"],"fitReasons":["매수자 예산(50-80억)에 부합하는 매물입니다.","요청하신 성수/강남 권역에 해당합니다."],"cautionReasons":["요청한 용도와 달리 명도 협의가 다소 필요합니다."],"recommendedNextAction":"현장 답사 제안","kakaoMessage":"안녕하세요! 요청하신 조건에 부합하는 추천 매물이 있어 안내해 드립니다. 확인해보시고 피드백 부탁드립니다.","title":"강남 역삼역 초역세권 오피스 사옥용 빌딩 매각","shortSummary":"역삼역 도보 5분 거리의 준신축급 대형 오피스빌딩입니다.","dealPoints":["초역세권","사옥 최적"],"cautionPoints":["명도 조율 필요"],"hiddenInfoNotice":["보증금 및 지번은 인가 후 확인 가능"],"gateMessage":"G1 등급 등록이 필요합니다.","kakaoText":"강남 역삼역 오피스 빌딩 매각 안내입니다.","exactUnitCandidate":"101호","floor":"1층","areaSqmText":"150㎡","spaceType":"office","depositText":"5000만","monthlyRentText":"400만","maintenanceFeeText":"50만","availableFromText":"즉시입주","leaseTermMonthsText":"24","incentivesText":"렌트프리 2개월","restrictions":[],"landlordIdentity":"김성수","currentTenant":"스타트업","vacancyReason":"이전 확장","rentNegotiation":"협의 가능","region":"성수동","areaSqm":150,"deposit":5000,"monthlyRent":400,"maintenanceFee":50,"availableFrom":"즉시입주","leaseTermMonths":24,"incentives":{"rentFreeMonths":2,"interiorSupport":"일부 인테리어 지원","freeRentDetail":"렌트프리 2개월 지원"},"shortSummaryLease":"성수역 도보 5분 거리 1층 리테일 상가 매물입니다."}</a:t>
+            </a:r>
+            <a:endParaRPr lang="en-US" sz="1100" dirty="0"/>
+          </a:p>
+        </p:txBody>
+      </p:sp>
+      <p:sp>
+        <p:nvSpPr>
+          <p:cNvPr id="11" name="Text 9"/>
+          <p:cNvSpPr/>
+          <p:nvPr/>
+        </p:nvSpPr>
+        <p:spPr>
+          <a:xfrm>
+            <a:off x="566928" y="6382512"/>
+            <a:ext cx="7315200" cy="219456"/>
+          </a:xfrm>
+          <a:prstGeom prst="rect">
+            <a:avLst/>
+          </a:prstGeom>
+          <a:noFill/>
+          <a:ln/>
+        </p:spPr>
+        <p:txBody>
+          <a:bodyPr wrap="square" lIns="0" tIns="0" rIns="0" bIns="0" rtlCol="0" anchor="ctr"/>
+          <a:lstStyle/>
+          <a:p>
+            <a:pPr indent="0" marL="0">
+              <a:buNone/>
+            </a:pPr>
+            <a:r>
+              <a:rPr lang="en-US" sz="800" dirty="0">
+                <a:solidFill>
+                  <a:srgbClr val="718096"/>
+                </a:solidFill>
+                <a:latin typeface="Pretendard" pitchFamily="34" charset="0"/>
+                <a:ea typeface="Pretendard" pitchFamily="34" charset="-122"/>
+                <a:cs typeface="Pretendard" pitchFamily="34" charset="-120"/>
+              </a:rPr>
+              <a:t>크리딜   |   </a:t>
+            </a:r>
+            <a:endParaRPr lang="en-US" sz="800" dirty="0"/>
+          </a:p>
+        </p:txBody>
+      </p:sp>
+      <p:sp>
+        <p:nvSpPr>
+          <p:cNvPr id="12" name="Text 10"/>
+          <p:cNvSpPr/>
+          <p:nvPr/>
+        </p:nvSpPr>
+        <p:spPr>
+          <a:xfrm>
+            <a:off x="10710367" y="6382512"/>
+            <a:ext cx="914400" cy="219456"/>
+          </a:xfrm>
+          <a:prstGeom prst="rect">
+            <a:avLst/>
+          </a:prstGeom>
+          <a:noFill/>
+          <a:ln/>
+        </p:spPr>
+        <p:txBody>
+          <a:bodyPr wrap="square" lIns="0" tIns="0" rIns="0" bIns="0" rtlCol="0" anchor="ctr"/>
+          <a:lstStyle/>
+          <a:p>
+            <a:pPr algn="r" indent="0" marL="0">
+              <a:buNone/>
+            </a:pPr>
+            <a:r>
+              <a:rPr lang="en-US" sz="900" b="1" dirty="0">
+                <a:solidFill>
+                  <a:srgbClr val="B98A2E"/>
+                </a:solidFill>
+                <a:latin typeface="Arial" pitchFamily="34" charset="0"/>
+                <a:ea typeface="Arial" pitchFamily="34" charset="-122"/>
+                <a:cs typeface="Arial" pitchFamily="34" charset="-120"/>
+              </a:rPr>
+              <a:t>10</a:t>
+            </a:r>
+            <a:endParaRPr lang="en-US" sz="900" dirty="0"/>
+          </a:p>
+        </p:txBody>
+      </p:sp>
+    </p:spTree>
+  </p:cSld>
+  <p:clrMapOvr>
+    <a:masterClrMapping/>
+  </p:clrMapOvr>
+</p:sld>
+</file>
+
+<file path=ppt/slides/slide11.xml><?xml version="1.0" encoding="utf-8"?>
+<p:sld xmlns:a="http://schemas.openxmlformats.org/drawingml/2006/main" xmlns:r="http://schemas.openxmlformats.org/officeDocument/2006/relationships" xmlns:p="http://schemas.openxmlformats.org/presentationml/2006/main">
+  <p:cSld name="Slide 11">
+    <p:bg>
+      <p:bgPr>
+        <a:solidFill>
           <a:srgbClr val="10161F"/>
         </a:solidFill>
       </p:bgPr>
@@ -2368,7 +2885,7 @@
                 <a:ea typeface="Arial" pitchFamily="34" charset="-122"/>
                 <a:cs typeface="Arial" pitchFamily="34" charset="-120"/>
               </a:rPr>
-              <a:t>10</a:t>
+              <a:t>11</a:t>
             </a:r>
             <a:endParaRPr lang="en-US" sz="1300" dirty="0"/>
           </a:p>
@@ -3780,7 +4297,7 @@
                 <a:ea typeface="Arial" pitchFamily="34" charset="-122"/>
                 <a:cs typeface="Arial" pitchFamily="34" charset="-120"/>
               </a:rPr>
-              <a:t>10</a:t>
+              <a:t>11</a:t>
             </a:r>
             <a:endParaRPr lang="en-US" sz="900" dirty="0"/>
           </a:p>
@@ -5351,7 +5868,7 @@
                 <a:ea typeface="Pretendard" pitchFamily="34" charset="-122"/>
                 <a:cs typeface="Pretendard" pitchFamily="34" charset="-120"/>
               </a:rPr>
-              <a:t>교통 접근성</a:t>
+              <a:t>교통 접근성 상세 정보는 담당 브로커를 통해 확인하</a:t>
             </a:r>
             <a:endParaRPr lang="en-US" sz="1300" dirty="0"/>
           </a:p>
@@ -5384,16 +5901,70 @@
               </a:lnSpc>
               <a:buNone/>
             </a:pPr>
-            <a:r>
-              <a:rPr lang="en-US" sz="1300" b="1" dirty="0">
-                <a:solidFill>
-                  <a:srgbClr val="10161F"/>
+            <a:endParaRPr lang="en-US" sz="1300" dirty="0"/>
+          </a:p>
+        </p:txBody>
+      </p:sp>
+      <p:sp>
+        <p:nvSpPr>
+          <p:cNvPr id="9" name="Shape 6"/>
+          <p:cNvSpPr/>
+          <p:nvPr/>
+        </p:nvSpPr>
+        <p:spPr>
+          <a:xfrm>
+            <a:off x="6053328" y="1975104"/>
+            <a:ext cx="5571439" cy="0"/>
+          </a:xfrm>
+          <a:prstGeom prst="line">
+            <a:avLst/>
+          </a:prstGeom>
+          <a:noFill/>
+          <a:ln w="3810">
+            <a:solidFill>
+              <a:srgbClr val="CBD5E0"/>
+            </a:solidFill>
+            <a:prstDash val="solid"/>
+          </a:ln>
+        </p:spPr>
+      </p:sp>
+      <p:sp>
+        <p:nvSpPr>
+          <p:cNvPr id="10" name="Text 7"/>
+          <p:cNvSpPr/>
+          <p:nvPr/>
+        </p:nvSpPr>
+        <p:spPr>
+          <a:xfrm>
+            <a:off x="6053328" y="1975104"/>
+            <a:ext cx="2117147" cy="493776"/>
+          </a:xfrm>
+          <a:prstGeom prst="rect">
+            <a:avLst/>
+          </a:prstGeom>
+          <a:noFill/>
+          <a:ln/>
+        </p:spPr>
+        <p:txBody>
+          <a:bodyPr wrap="square" lIns="0" tIns="0" rIns="0" bIns="0" rtlCol="0" anchor="ctr"/>
+          <a:lstStyle/>
+          <a:p>
+            <a:pPr indent="0" marL="0">
+              <a:lnSpc>
+                <a:spcPct val="120000"/>
+              </a:lnSpc>
+              <a:buNone/>
+            </a:pPr>
+            <a:r>
+              <a:rPr lang="en-US" sz="1300" dirty="0">
+                <a:solidFill>
+                  <a:srgbClr val="718096"/>
                 </a:solidFill>
                 <a:latin typeface="Pretendard" pitchFamily="34" charset="0"/>
                 <a:ea typeface="Pretendard" pitchFamily="34" charset="-122"/>
                 <a:cs typeface="Pretendard" pitchFamily="34" charset="-120"/>
               </a:rPr>
-              <a:t>{"ok":true,"mocked":true,"extractedFields":{"area_signal":"역삼","asset_type":"오피스빌딩","price_band":"300억","size_signal":"3000평(약 9917.</a:t>
+              <a:t>[건물] 주변 상권</a:t>
             </a:r>
             <a:endParaRPr lang="en-US" sz="1300" dirty="0"/>
           </a:p>
@@ -5401,14 +5972,14 @@
       </p:sp>
       <p:sp>
         <p:nvSpPr>
-          <p:cNvPr id="9" name="Text 6"/>
-          <p:cNvSpPr/>
-          <p:nvPr/>
-        </p:nvSpPr>
-        <p:spPr>
-          <a:xfrm>
-            <a:off x="566928" y="6382512"/>
-            <a:ext cx="7315200" cy="219456"/>
+          <p:cNvPr id="11" name="Text 8"/>
+          <p:cNvSpPr/>
+          <p:nvPr/>
+        </p:nvSpPr>
+        <p:spPr>
+          <a:xfrm>
+            <a:off x="8170475" y="1975104"/>
+            <a:ext cx="3454292" cy="493776"/>
           </a:xfrm>
           <a:prstGeom prst="rect">
             <a:avLst/>
@@ -5421,17 +5992,155 @@
           <a:lstStyle/>
           <a:p>
             <a:pPr indent="0" marL="0">
-              <a:buNone/>
-            </a:pPr>
-            <a:r>
-              <a:rPr lang="en-US" sz="800" dirty="0">
-                <a:solidFill>
-                  <a:srgbClr val="718096"/>
+              <a:lnSpc>
+                <a:spcPct val="120000"/>
+              </a:lnSpc>
+              <a:buNone/>
+            </a:pPr>
+            <a:r>
+              <a:rPr lang="en-US" sz="1300" b="1" dirty="0">
+                <a:solidFill>
+                  <a:srgbClr val="10161F"/>
                 </a:solidFill>
                 <a:latin typeface="Pretendard" pitchFamily="34" charset="0"/>
                 <a:ea typeface="Pretendard" pitchFamily="34" charset="-122"/>
                 <a:cs typeface="Pretendard" pitchFamily="34" charset="-120"/>
               </a:rPr>
+              <a:t>이천권역 내 주요 비즈니스 및 유동인구 풍부한 상권 입지 ### [성장] 입지 평가</a:t>
+            </a:r>
+            <a:endParaRPr lang="en-US" sz="1300" dirty="0"/>
+          </a:p>
+        </p:txBody>
+      </p:sp>
+      <p:sp>
+        <p:nvSpPr>
+          <p:cNvPr id="12" name="Shape 9"/>
+          <p:cNvSpPr/>
+          <p:nvPr/>
+        </p:nvSpPr>
+        <p:spPr>
+          <a:xfrm>
+            <a:off x="6053328" y="2468880"/>
+            <a:ext cx="5571439" cy="0"/>
+          </a:xfrm>
+          <a:prstGeom prst="line">
+            <a:avLst/>
+          </a:prstGeom>
+          <a:noFill/>
+          <a:ln w="3810">
+            <a:solidFill>
+              <a:srgbClr val="CBD5E0"/>
+            </a:solidFill>
+            <a:prstDash val="solid"/>
+          </a:ln>
+        </p:spPr>
+      </p:sp>
+      <p:sp>
+        <p:nvSpPr>
+          <p:cNvPr id="13" name="Text 10"/>
+          <p:cNvSpPr/>
+          <p:nvPr/>
+        </p:nvSpPr>
+        <p:spPr>
+          <a:xfrm>
+            <a:off x="6053328" y="2468880"/>
+            <a:ext cx="2117147" cy="493776"/>
+          </a:xfrm>
+          <a:prstGeom prst="rect">
+            <a:avLst/>
+          </a:prstGeom>
+          <a:noFill/>
+          <a:ln/>
+        </p:spPr>
+        <p:txBody>
+          <a:bodyPr wrap="square" lIns="0" tIns="0" rIns="0" bIns="0" rtlCol="0" anchor="ctr"/>
+          <a:lstStyle/>
+          <a:p>
+            <a:pPr indent="0" marL="0">
+              <a:lnSpc>
+                <a:spcPct val="120000"/>
+              </a:lnSpc>
+              <a:buNone/>
+            </a:pPr>
+            <a:r>
+              <a:rPr lang="en-US" sz="1300" dirty="0">
+                <a:solidFill>
+                  <a:srgbClr val="718096"/>
+                </a:solidFill>
+                <a:latin typeface="Pretendard" pitchFamily="34" charset="0"/>
+                <a:ea typeface="Pretendard" pitchFamily="34" charset="-122"/>
+                <a:cs typeface="Pretendard" pitchFamily="34" charset="-120"/>
+              </a:rPr>
+              <a:t>이천권역 내 위치하며 접근성과 가시성이 양호한 입지</a:t>
+            </a:r>
+            <a:endParaRPr lang="en-US" sz="1300" dirty="0"/>
+          </a:p>
+        </p:txBody>
+      </p:sp>
+      <p:sp>
+        <p:nvSpPr>
+          <p:cNvPr id="14" name="Text 11"/>
+          <p:cNvSpPr/>
+          <p:nvPr/>
+        </p:nvSpPr>
+        <p:spPr>
+          <a:xfrm>
+            <a:off x="8170475" y="2468880"/>
+            <a:ext cx="3454292" cy="493776"/>
+          </a:xfrm>
+          <a:prstGeom prst="rect">
+            <a:avLst/>
+          </a:prstGeom>
+          <a:noFill/>
+          <a:ln/>
+        </p:spPr>
+        <p:txBody>
+          <a:bodyPr wrap="square" lIns="0" tIns="0" rIns="0" bIns="0" rtlCol="0" anchor="ctr"/>
+          <a:lstStyle/>
+          <a:p>
+            <a:pPr indent="0" marL="0">
+              <a:lnSpc>
+                <a:spcPct val="120000"/>
+              </a:lnSpc>
+              <a:buNone/>
+            </a:pPr>
+            <a:endParaRPr lang="en-US" sz="1300" dirty="0"/>
+          </a:p>
+        </p:txBody>
+      </p:sp>
+      <p:sp>
+        <p:nvSpPr>
+          <p:cNvPr id="15" name="Text 12"/>
+          <p:cNvSpPr/>
+          <p:nvPr/>
+        </p:nvSpPr>
+        <p:spPr>
+          <a:xfrm>
+            <a:off x="566928" y="6382512"/>
+            <a:ext cx="7315200" cy="219456"/>
+          </a:xfrm>
+          <a:prstGeom prst="rect">
+            <a:avLst/>
+          </a:prstGeom>
+          <a:noFill/>
+          <a:ln/>
+        </p:spPr>
+        <p:txBody>
+          <a:bodyPr wrap="square" lIns="0" tIns="0" rIns="0" bIns="0" rtlCol="0" anchor="ctr"/>
+          <a:lstStyle/>
+          <a:p>
+            <a:pPr indent="0" marL="0">
+              <a:buNone/>
+            </a:pPr>
+            <a:r>
+              <a:rPr lang="en-US" sz="800" dirty="0">
+                <a:solidFill>
+                  <a:srgbClr val="718096"/>
+                </a:solidFill>
+                <a:latin typeface="Pretendard" pitchFamily="34" charset="0"/>
+                <a:ea typeface="Pretendard" pitchFamily="34" charset="-122"/>
+                <a:cs typeface="Pretendard" pitchFamily="34" charset="-120"/>
+              </a:rPr>
               <a:t>크리딜   |   </a:t>
             </a:r>
             <a:endParaRPr lang="en-US" sz="800" dirty="0"/>
@@ -5440,7 +6149,7 @@
       </p:sp>
       <p:sp>
         <p:nvSpPr>
-          <p:cNvPr id="10" name="Text 7"/>
+          <p:cNvPr id="16" name="Text 13"/>
           <p:cNvSpPr/>
           <p:nvPr/>
         </p:nvSpPr>
@@ -5474,45 +6183,6 @@
               <a:t>3</a:t>
             </a:r>
             <a:endParaRPr lang="en-US" sz="900" dirty="0"/>
-          </a:p>
-        </p:txBody>
-      </p:sp>
-      <p:sp>
-        <p:nvSpPr>
-          <p:cNvPr id="11" name="Text 8"/>
-          <p:cNvSpPr/>
-          <p:nvPr/>
-        </p:nvSpPr>
-        <p:spPr>
-          <a:xfrm>
-            <a:off x="566928" y="1481328"/>
-            <a:ext cx="11057839" cy="9692640"/>
-          </a:xfrm>
-          <a:prstGeom prst="rect">
-            <a:avLst/>
-          </a:prstGeom>
-          <a:noFill/>
-          <a:ln/>
-        </p:spPr>
-        <p:txBody>
-          <a:bodyPr wrap="square" lIns="0" tIns="0" rIns="0" bIns="0" rtlCol="0" anchor="t"/>
-          <a:lstStyle/>
-          <a:p>
-            <a:pPr indent="0" marL="0">
-              <a:buNone/>
-            </a:pPr>
-            <a:r>
-              <a:rPr lang="en-US" sz="1000" dirty="0">
-                <a:solidFill>
-                  <a:srgbClr val="10161F"/>
-                </a:solidFill>
-                <a:latin typeface="Pretendard" pitchFamily="34" charset="0"/>
-                <a:ea typeface="Pretendard" pitchFamily="34" charset="-122"/>
-                <a:cs typeface="Pretendard" pitchFamily="34" charset="-120"/>
-              </a:rPr>
-              <a:t>{"ok":true,"mocked":true,"extractedFields":{"area_signal":"역삼","asset_type":"오피스빌딩","price_band":"300억","size_signal":"3000평(약 9917.4㎡)"},"extractedFacts":{"region":"역삼","exactAddressCandidate":"역삼동 742-1","assetType":"오피스빌딩","priceText":"300억","sizeText":"3000평(약 9917.4㎡)","currentUse":"오피스","currentUseSignal":"근린생활시설","leaseSignal":"임대중","vacancySignal":"공실없음","tenantNames":["쿠팡","네이버"],"unitRentTexts":["301호: 1500만"],"sellerMotivationText":"자산 효율화","brokerNotes":["초역세권 매물"]},"detectedSensitiveFields":["exact_address","tenant_name"],"ambiguousFields":[],"warnings":[],"areaSignal":"역삼","assetType":"오피스빌딩","priceBand":"300억","sizeSignal":"3000평(약 9917.4㎡)","dealType":"매각","buildingName":"역삼 센트럴타워","exactAddress":"역삼동 742-1","totalFloorArea":9917.3,"buildYear":2015,"currentUseSignal":"근린생활시설","vacancySignal":"공실 없음","fitSummary":"초역세권 근생 빌딩으로 시행/사옥 매입에 최적화","cautionSummary":"주요 임차인 만기 조율 필요","hiddenFields":["exact_address","seller_motivation"],"confidence":{"areaSignal":"confirmed","assetType":"confirmed","priceBand":"ai_hypothesis","fitSummary":"ai_hypothesis"},"missingData":["sizeSignal"],"boundaryNote":"본 자료는 실거래 통계 기반 참고치입니다.","buyerType":"법인 사옥형","budgetRange":{"min":50,"max":80,"display":"50억~80억"},"preferredRegions":["강남","성수"],"assetTypes":["꼬마빌딩","사옥용"],"purchasePurpose":"사옥용 매입","mustHave":["초역세권","주차"],"niceToHave":["테라스","루프탑"],"riskTolerance":"medium","financingNote":"자본금 50% 준비","missingQuestions":["구체적인 입주 시기가 언제인가요?","선호하는 수익률이 있나요?"],"privacyNotes":["연락처 비공개"],"fitReasons":["매수자 예산(50-80억)에 부합하는 매물입니다.","요청하신 성수/강남 권역에 해당합니다."],"cautionReasons":["요청한 용도와 달리 명도 협의가 다소 필요합니다."],"recommendedNextAction":"현장 답사 제안","kakaoMessage":"안녕하세요! 요청하신 조건에 부합하는 추천 매물이 있어 안내해 드립니다. 확인해보시고 피드백 부탁드립니다.","title":"강남 역삼역 초역세권 오피스 사옥용 빌딩 매각","shortSummary":"역삼역 도보 5분 거리의 준신축급 대형 오피스빌딩입니다.","dealPoints":["초역세권","사옥 최적"],"cautionPoints":["명도 조율 필요"],"hiddenInfoNotice":["보증금 및 지번은 인가 후 확인 가능"],"gateMessage":"G1 등급 등록이 필요합니다.","kakaoText":"강남 역삼역 오피스 빌딩 매각 안내입니다.","exactUnitCandidate":"101호","floor":"1층","areaSqmText":"150㎡","spaceType":"office","depositText":"5000만","monthlyRentText":"400만","maintenanceFeeText":"50만","availableFromText":"즉시입주","leaseTermMonthsText":"24","incentivesText":"렌트프리 2개월","restrictions":[],"landlordIdentity":"김성수","currentTenant":"스타트업","vacancyReason":"이전 확장","rentNegotiation":"협의 가능","region":"성수동","areaSqm":150,"deposit":5000,"monthlyRent":400,"maintenanceFee":50,"availableFrom":"즉시입주","leaseTermMonths":24,"incentives":{"rentFreeMonths":2,"interiorSupport":"일부 인테리어 지원","freeRentDetail":"렌트프리 2개월 지원"},"shortSummaryLease":"성수역 도보 5분 거리 1층 리테일 상가 매물입니다."}</a:t>
-            </a:r>
-            <a:endParaRPr lang="en-US" sz="1000" dirty="0"/>
           </a:p>
         </p:txBody>
       </p:sp>
@@ -7233,52 +7903,13 @@
       </p:sp>
       <p:sp>
         <p:nvSpPr>
-          <p:cNvPr id="6" name="Text 4"/>
+          <p:cNvPr id="6" name="Shape 4"/>
           <p:cNvSpPr/>
           <p:nvPr/>
         </p:nvSpPr>
         <p:spPr>
           <a:xfrm>
             <a:off x="566928" y="1325880"/>
-            <a:ext cx="11057839" cy="237744"/>
-          </a:xfrm>
-          <a:prstGeom prst="rect">
-            <a:avLst/>
-          </a:prstGeom>
-          <a:noFill/>
-          <a:ln/>
-        </p:spPr>
-        <p:txBody>
-          <a:bodyPr wrap="square" lIns="0" tIns="0" rIns="0" bIns="0" rtlCol="0" anchor="ctr"/>
-          <a:lstStyle/>
-          <a:p>
-            <a:pPr indent="0" marL="0">
-              <a:buNone/>
-            </a:pPr>
-            <a:r>
-              <a:rPr lang="en-US" sz="1100" b="1" dirty="0">
-                <a:solidFill>
-                  <a:srgbClr val="10161F"/>
-                </a:solidFill>
-                <a:latin typeface="Pretendard" pitchFamily="34" charset="0"/>
-                <a:ea typeface="Pretendard" pitchFamily="34" charset="-122"/>
-                <a:cs typeface="Pretendard" pitchFamily="34" charset="-120"/>
-              </a:rPr>
-              <a:t>GOP (Gross Operating Profit) 분석</a:t>
-            </a:r>
-            <a:endParaRPr lang="en-US" sz="1100" dirty="0"/>
-          </a:p>
-        </p:txBody>
-      </p:sp>
-      <p:sp>
-        <p:nvSpPr>
-          <p:cNvPr id="7" name="Shape 5"/>
-          <p:cNvSpPr/>
-          <p:nvPr/>
-        </p:nvSpPr>
-        <p:spPr>
-          <a:xfrm>
-            <a:off x="566928" y="1737360"/>
             <a:ext cx="11057839" cy="0"/>
           </a:xfrm>
           <a:prstGeom prst="line">
@@ -7295,597 +7926,13 @@
       </p:sp>
       <p:sp>
         <p:nvSpPr>
-          <p:cNvPr id="8" name="Shape 6"/>
-          <p:cNvSpPr/>
-          <p:nvPr/>
-        </p:nvSpPr>
-        <p:spPr>
-          <a:xfrm>
-            <a:off x="566928" y="1965960"/>
-            <a:ext cx="3576218" cy="1188720"/>
-          </a:xfrm>
-          <a:prstGeom prst="roundRect">
-            <a:avLst>
-              <a:gd name="adj" fmla="val 4615"/>
-            </a:avLst>
-          </a:prstGeom>
-          <a:solidFill>
-            <a:srgbClr val="F7FAFC"/>
-          </a:solidFill>
-          <a:ln w="6350">
-            <a:solidFill>
-              <a:srgbClr val="CBD5E0"/>
-            </a:solidFill>
-            <a:prstDash val="solid"/>
-          </a:ln>
-        </p:spPr>
-      </p:sp>
-      <p:sp>
-        <p:nvSpPr>
-          <p:cNvPr id="9" name="Text 7"/>
-          <p:cNvSpPr/>
-          <p:nvPr/>
-        </p:nvSpPr>
-        <p:spPr>
-          <a:xfrm>
-            <a:off x="731520" y="2093976"/>
-            <a:ext cx="3247034" cy="201168"/>
-          </a:xfrm>
-          <a:prstGeom prst="rect">
-            <a:avLst/>
-          </a:prstGeom>
-          <a:noFill/>
-          <a:ln/>
-        </p:spPr>
-        <p:txBody>
-          <a:bodyPr wrap="square" lIns="0" tIns="0" rIns="0" bIns="0" rtlCol="0" anchor="ctr"/>
-          <a:lstStyle/>
-          <a:p>
-            <a:pPr indent="0" marL="0">
-              <a:buNone/>
-            </a:pPr>
-            <a:r>
-              <a:rPr lang="en-US" sz="950" dirty="0">
-                <a:solidFill>
-                  <a:srgbClr val="718096"/>
-                </a:solidFill>
-                <a:latin typeface="Pretendard" pitchFamily="34" charset="0"/>
-                <a:ea typeface="Pretendard" pitchFamily="34" charset="-122"/>
-                <a:cs typeface="Pretendard" pitchFamily="34" charset="-120"/>
-              </a:rPr>
-              <a:t>연간 총 매출</a:t>
-            </a:r>
-            <a:endParaRPr lang="en-US" sz="950" dirty="0"/>
-          </a:p>
-        </p:txBody>
-      </p:sp>
-      <p:sp>
-        <p:nvSpPr>
-          <p:cNvPr id="10" name="Text 8"/>
-          <p:cNvSpPr/>
-          <p:nvPr/>
-        </p:nvSpPr>
-        <p:spPr>
-          <a:xfrm>
-            <a:off x="731520" y="2276856"/>
-            <a:ext cx="3247034" cy="402336"/>
-          </a:xfrm>
-          <a:prstGeom prst="rect">
-            <a:avLst/>
-          </a:prstGeom>
-          <a:noFill/>
-          <a:ln/>
-        </p:spPr>
-        <p:txBody>
-          <a:bodyPr wrap="square" lIns="0" tIns="0" rIns="0" bIns="0" rtlCol="0" anchor="ctr">
-            <a:normAutofit/>
-          </a:bodyPr>
-          <a:lstStyle/>
-          <a:p>
-            <a:pPr indent="0" marL="0">
-              <a:buNone/>
-            </a:pPr>
-            <a:r>
-              <a:rPr lang="en-US" sz="2200" b="1" dirty="0">
-                <a:solidFill>
-                  <a:srgbClr val="10161F"/>
-                </a:solidFill>
-                <a:latin typeface="Pretendard" pitchFamily="34" charset="0"/>
-                <a:ea typeface="Pretendard" pitchFamily="34" charset="-122"/>
-                <a:cs typeface="Pretendard" pitchFamily="34" charset="-120"/>
-              </a:rPr>
-              <a:t>영업 매출 수지</a:t>
-            </a:r>
-            <a:endParaRPr lang="en-US" sz="2200" dirty="0"/>
-          </a:p>
-        </p:txBody>
-      </p:sp>
-      <p:sp>
-        <p:nvSpPr>
-          <p:cNvPr id="11" name="Text 9"/>
-          <p:cNvSpPr/>
-          <p:nvPr/>
-        </p:nvSpPr>
-        <p:spPr>
-          <a:xfrm>
-            <a:off x="731520" y="2642616"/>
-            <a:ext cx="3247034" cy="164592"/>
-          </a:xfrm>
-          <a:prstGeom prst="rect">
-            <a:avLst/>
-          </a:prstGeom>
-          <a:noFill/>
-          <a:ln/>
-        </p:spPr>
-        <p:txBody>
-          <a:bodyPr wrap="square" lIns="0" tIns="0" rIns="0" bIns="0" rtlCol="0" anchor="ctr"/>
-          <a:lstStyle/>
-          <a:p>
-            <a:pPr indent="0" marL="0">
-              <a:buNone/>
-            </a:pPr>
-            <a:r>
-              <a:rPr lang="en-US" sz="880" dirty="0">
-                <a:solidFill>
-                  <a:srgbClr val="718096"/>
-                </a:solidFill>
-                <a:latin typeface="Pretendard" pitchFamily="34" charset="0"/>
-                <a:ea typeface="Pretendard" pitchFamily="34" charset="-122"/>
-                <a:cs typeface="Pretendard" pitchFamily="34" charset="-120"/>
-              </a:rPr>
-              <a:t>AI/실적 추정</a:t>
-            </a:r>
-            <a:endParaRPr lang="en-US" sz="880" dirty="0"/>
-          </a:p>
-        </p:txBody>
-      </p:sp>
-      <p:sp>
-        <p:nvSpPr>
-          <p:cNvPr id="12" name="Shape 10"/>
-          <p:cNvSpPr/>
-          <p:nvPr/>
-        </p:nvSpPr>
-        <p:spPr>
-          <a:xfrm>
-            <a:off x="4307738" y="1965960"/>
-            <a:ext cx="3576218" cy="1188720"/>
-          </a:xfrm>
-          <a:prstGeom prst="roundRect">
-            <a:avLst>
-              <a:gd name="adj" fmla="val 4615"/>
-            </a:avLst>
-          </a:prstGeom>
-          <a:solidFill>
-            <a:srgbClr val="F7FAFC"/>
-          </a:solidFill>
-          <a:ln w="6350">
-            <a:solidFill>
-              <a:srgbClr val="CBD5E0"/>
-            </a:solidFill>
-            <a:prstDash val="solid"/>
-          </a:ln>
-        </p:spPr>
-      </p:sp>
-      <p:sp>
-        <p:nvSpPr>
-          <p:cNvPr id="13" name="Text 11"/>
-          <p:cNvSpPr/>
-          <p:nvPr/>
-        </p:nvSpPr>
-        <p:spPr>
-          <a:xfrm>
-            <a:off x="4472330" y="2093976"/>
-            <a:ext cx="3247034" cy="201168"/>
-          </a:xfrm>
-          <a:prstGeom prst="rect">
-            <a:avLst/>
-          </a:prstGeom>
-          <a:noFill/>
-          <a:ln/>
-        </p:spPr>
-        <p:txBody>
-          <a:bodyPr wrap="square" lIns="0" tIns="0" rIns="0" bIns="0" rtlCol="0" anchor="ctr"/>
-          <a:lstStyle/>
-          <a:p>
-            <a:pPr indent="0" marL="0">
-              <a:buNone/>
-            </a:pPr>
-            <a:r>
-              <a:rPr lang="en-US" sz="950" dirty="0">
-                <a:solidFill>
-                  <a:srgbClr val="718096"/>
-                </a:solidFill>
-                <a:latin typeface="Pretendard" pitchFamily="34" charset="0"/>
-                <a:ea typeface="Pretendard" pitchFamily="34" charset="-122"/>
-                <a:cs typeface="Pretendard" pitchFamily="34" charset="-120"/>
-              </a:rPr>
-              <a:t>운영비 (OPEX)</a:t>
-            </a:r>
-            <a:endParaRPr lang="en-US" sz="950" dirty="0"/>
-          </a:p>
-        </p:txBody>
-      </p:sp>
-      <p:sp>
-        <p:nvSpPr>
-          <p:cNvPr id="14" name="Text 12"/>
-          <p:cNvSpPr/>
-          <p:nvPr/>
-        </p:nvSpPr>
-        <p:spPr>
-          <a:xfrm>
-            <a:off x="4472330" y="2276856"/>
-            <a:ext cx="3247034" cy="402336"/>
-          </a:xfrm>
-          <a:prstGeom prst="rect">
-            <a:avLst/>
-          </a:prstGeom>
-          <a:noFill/>
-          <a:ln/>
-        </p:spPr>
-        <p:txBody>
-          <a:bodyPr wrap="square" lIns="0" tIns="0" rIns="0" bIns="0" rtlCol="0" anchor="ctr">
-            <a:normAutofit/>
-          </a:bodyPr>
-          <a:lstStyle/>
-          <a:p>
-            <a:pPr indent="0" marL="0">
-              <a:buNone/>
-            </a:pPr>
-            <a:r>
-              <a:rPr lang="en-US" sz="2200" b="1" dirty="0">
-                <a:solidFill>
-                  <a:srgbClr val="10161F"/>
-                </a:solidFill>
-                <a:latin typeface="Pretendard" pitchFamily="34" charset="0"/>
-                <a:ea typeface="Pretendard" pitchFamily="34" charset="-122"/>
-                <a:cs typeface="Pretendard" pitchFamily="34" charset="-120"/>
-              </a:rPr>
-              <a:t>인건비, 재료비, 유틸리티</a:t>
-            </a:r>
-            <a:endParaRPr lang="en-US" sz="2200" dirty="0"/>
-          </a:p>
-        </p:txBody>
-      </p:sp>
-      <p:sp>
-        <p:nvSpPr>
-          <p:cNvPr id="15" name="Text 13"/>
-          <p:cNvSpPr/>
-          <p:nvPr/>
-        </p:nvSpPr>
-        <p:spPr>
-          <a:xfrm>
-            <a:off x="4472330" y="2642616"/>
-            <a:ext cx="3247034" cy="164592"/>
-          </a:xfrm>
-          <a:prstGeom prst="rect">
-            <a:avLst/>
-          </a:prstGeom>
-          <a:noFill/>
-          <a:ln/>
-        </p:spPr>
-        <p:txBody>
-          <a:bodyPr wrap="square" lIns="0" tIns="0" rIns="0" bIns="0" rtlCol="0" anchor="ctr"/>
-          <a:lstStyle/>
-          <a:p>
-            <a:pPr indent="0" marL="0">
-              <a:buNone/>
-            </a:pPr>
-            <a:r>
-              <a:rPr lang="en-US" sz="880" dirty="0">
-                <a:solidFill>
-                  <a:srgbClr val="718096"/>
-                </a:solidFill>
-                <a:latin typeface="Pretendard" pitchFamily="34" charset="0"/>
-                <a:ea typeface="Pretendard" pitchFamily="34" charset="-122"/>
-                <a:cs typeface="Pretendard" pitchFamily="34" charset="-120"/>
-              </a:rPr>
-              <a:t>마진율 차감</a:t>
-            </a:r>
-            <a:endParaRPr lang="en-US" sz="880" dirty="0"/>
-          </a:p>
-        </p:txBody>
-      </p:sp>
-      <p:sp>
-        <p:nvSpPr>
-          <p:cNvPr id="16" name="Shape 14"/>
-          <p:cNvSpPr/>
-          <p:nvPr/>
-        </p:nvSpPr>
-        <p:spPr>
-          <a:xfrm>
-            <a:off x="8048549" y="1965960"/>
-            <a:ext cx="3576218" cy="1188720"/>
-          </a:xfrm>
-          <a:prstGeom prst="roundRect">
-            <a:avLst>
-              <a:gd name="adj" fmla="val 4615"/>
-            </a:avLst>
-          </a:prstGeom>
-          <a:solidFill>
-            <a:srgbClr val="F7FAFC"/>
-          </a:solidFill>
-          <a:ln w="6350">
-            <a:solidFill>
-              <a:srgbClr val="CBD5E0"/>
-            </a:solidFill>
-            <a:prstDash val="solid"/>
-          </a:ln>
-        </p:spPr>
-      </p:sp>
-      <p:sp>
-        <p:nvSpPr>
-          <p:cNvPr id="17" name="Text 15"/>
-          <p:cNvSpPr/>
-          <p:nvPr/>
-        </p:nvSpPr>
-        <p:spPr>
-          <a:xfrm>
-            <a:off x="8213141" y="2093976"/>
-            <a:ext cx="3247034" cy="201168"/>
-          </a:xfrm>
-          <a:prstGeom prst="rect">
-            <a:avLst/>
-          </a:prstGeom>
-          <a:noFill/>
-          <a:ln/>
-        </p:spPr>
-        <p:txBody>
-          <a:bodyPr wrap="square" lIns="0" tIns="0" rIns="0" bIns="0" rtlCol="0" anchor="ctr"/>
-          <a:lstStyle/>
-          <a:p>
-            <a:pPr indent="0" marL="0">
-              <a:buNone/>
-            </a:pPr>
-            <a:r>
-              <a:rPr lang="en-US" sz="950" dirty="0">
-                <a:solidFill>
-                  <a:srgbClr val="718096"/>
-                </a:solidFill>
-                <a:latin typeface="Pretendard" pitchFamily="34" charset="0"/>
-                <a:ea typeface="Pretendard" pitchFamily="34" charset="-122"/>
-                <a:cs typeface="Pretendard" pitchFamily="34" charset="-120"/>
-              </a:rPr>
-              <a:t>연간 GOP (영업이익)</a:t>
-            </a:r>
-            <a:endParaRPr lang="en-US" sz="950" dirty="0"/>
-          </a:p>
-        </p:txBody>
-      </p:sp>
-      <p:sp>
-        <p:nvSpPr>
-          <p:cNvPr id="18" name="Text 16"/>
-          <p:cNvSpPr/>
-          <p:nvPr/>
-        </p:nvSpPr>
-        <p:spPr>
-          <a:xfrm>
-            <a:off x="8213141" y="2276856"/>
-            <a:ext cx="3247034" cy="402336"/>
-          </a:xfrm>
-          <a:prstGeom prst="rect">
-            <a:avLst/>
-          </a:prstGeom>
-          <a:noFill/>
-          <a:ln/>
-        </p:spPr>
-        <p:txBody>
-          <a:bodyPr wrap="square" lIns="0" tIns="0" rIns="0" bIns="0" rtlCol="0" anchor="ctr">
-            <a:normAutofit/>
-          </a:bodyPr>
-          <a:lstStyle/>
-          <a:p>
-            <a:pPr indent="0" marL="0">
-              <a:buNone/>
-            </a:pPr>
-            <a:r>
-              <a:rPr lang="en-US" sz="2200" b="1" dirty="0">
-                <a:solidFill>
-                  <a:srgbClr val="10161F"/>
-                </a:solidFill>
-                <a:latin typeface="Pretendard" pitchFamily="34" charset="0"/>
-                <a:ea typeface="Pretendard" pitchFamily="34" charset="-122"/>
-                <a:cs typeface="Pretendard" pitchFamily="34" charset="-120"/>
-              </a:rPr>
-              <a:t>영업 매출 × GOP 마진율</a:t>
-            </a:r>
-            <a:endParaRPr lang="en-US" sz="2200" dirty="0"/>
-          </a:p>
-        </p:txBody>
-      </p:sp>
-      <p:sp>
-        <p:nvSpPr>
-          <p:cNvPr id="19" name="Text 17"/>
-          <p:cNvSpPr/>
-          <p:nvPr/>
-        </p:nvSpPr>
-        <p:spPr>
-          <a:xfrm>
-            <a:off x="8213141" y="2642616"/>
-            <a:ext cx="3247034" cy="164592"/>
-          </a:xfrm>
-          <a:prstGeom prst="rect">
-            <a:avLst/>
-          </a:prstGeom>
-          <a:noFill/>
-          <a:ln/>
-        </p:spPr>
-        <p:txBody>
-          <a:bodyPr wrap="square" lIns="0" tIns="0" rIns="0" bIns="0" rtlCol="0" anchor="ctr"/>
-          <a:lstStyle/>
-          <a:p>
-            <a:pPr indent="0" marL="0">
-              <a:buNone/>
-            </a:pPr>
-            <a:r>
-              <a:rPr lang="en-US" sz="880" dirty="0">
-                <a:solidFill>
-                  <a:srgbClr val="718096"/>
-                </a:solidFill>
-                <a:latin typeface="Pretendard" pitchFamily="34" charset="0"/>
-                <a:ea typeface="Pretendard" pitchFamily="34" charset="-122"/>
-                <a:cs typeface="Pretendard" pitchFamily="34" charset="-120"/>
-              </a:rPr>
-              <a:t>실질 운영 수익</a:t>
-            </a:r>
-            <a:endParaRPr lang="en-US" sz="880" dirty="0"/>
-          </a:p>
-        </p:txBody>
-      </p:sp>
-      <p:sp>
-        <p:nvSpPr>
-          <p:cNvPr id="20" name="Shape 18"/>
-          <p:cNvSpPr/>
-          <p:nvPr/>
-        </p:nvSpPr>
-        <p:spPr>
-          <a:xfrm>
-            <a:off x="566928" y="3319272"/>
-            <a:ext cx="3576218" cy="1051560"/>
-          </a:xfrm>
-          <a:prstGeom prst="roundRect">
-            <a:avLst>
-              <a:gd name="adj" fmla="val 5217"/>
-            </a:avLst>
-          </a:prstGeom>
-          <a:solidFill>
-            <a:srgbClr val="F7FAFC"/>
-          </a:solidFill>
-          <a:ln w="6350">
-            <a:solidFill>
-              <a:srgbClr val="CBD5E0"/>
-            </a:solidFill>
-            <a:prstDash val="solid"/>
-          </a:ln>
-        </p:spPr>
-      </p:sp>
-      <p:sp>
-        <p:nvSpPr>
-          <p:cNvPr id="21" name="Text 19"/>
-          <p:cNvSpPr/>
-          <p:nvPr/>
-        </p:nvSpPr>
-        <p:spPr>
-          <a:xfrm>
-            <a:off x="731520" y="3447288"/>
-            <a:ext cx="3247034" cy="201168"/>
-          </a:xfrm>
-          <a:prstGeom prst="rect">
-            <a:avLst/>
-          </a:prstGeom>
-          <a:noFill/>
-          <a:ln/>
-        </p:spPr>
-        <p:txBody>
-          <a:bodyPr wrap="square" lIns="0" tIns="0" rIns="0" bIns="0" rtlCol="0" anchor="ctr"/>
-          <a:lstStyle/>
-          <a:p>
-            <a:pPr indent="0" marL="0">
-              <a:buNone/>
-            </a:pPr>
-            <a:r>
-              <a:rPr lang="en-US" sz="950" dirty="0">
-                <a:solidFill>
-                  <a:srgbClr val="718096"/>
-                </a:solidFill>
-                <a:latin typeface="Pretendard" pitchFamily="34" charset="0"/>
-                <a:ea typeface="Pretendard" pitchFamily="34" charset="-122"/>
-                <a:cs typeface="Pretendard" pitchFamily="34" charset="-120"/>
-              </a:rPr>
-              <a:t>GOP Cap Rate</a:t>
-            </a:r>
-            <a:endParaRPr lang="en-US" sz="950" dirty="0"/>
-          </a:p>
-        </p:txBody>
-      </p:sp>
-      <p:sp>
-        <p:nvSpPr>
-          <p:cNvPr id="22" name="Text 20"/>
-          <p:cNvSpPr/>
-          <p:nvPr/>
-        </p:nvSpPr>
-        <p:spPr>
-          <a:xfrm>
-            <a:off x="731520" y="3630168"/>
-            <a:ext cx="3247034" cy="402336"/>
-          </a:xfrm>
-          <a:prstGeom prst="rect">
-            <a:avLst/>
-          </a:prstGeom>
-          <a:noFill/>
-          <a:ln/>
-        </p:spPr>
-        <p:txBody>
-          <a:bodyPr wrap="square" lIns="0" tIns="0" rIns="0" bIns="0" rtlCol="0" anchor="ctr">
-            <a:normAutofit/>
-          </a:bodyPr>
-          <a:lstStyle/>
-          <a:p>
-            <a:pPr indent="0" marL="0">
-              <a:buNone/>
-            </a:pPr>
-            <a:r>
-              <a:rPr lang="en-US" sz="1800" b="1" dirty="0">
-                <a:solidFill>
-                  <a:srgbClr val="10161F"/>
-                </a:solidFill>
-                <a:latin typeface="Pretendard" pitchFamily="34" charset="0"/>
-                <a:ea typeface="Pretendard" pitchFamily="34" charset="-122"/>
-                <a:cs typeface="Pretendard" pitchFamily="34" charset="-120"/>
-              </a:rPr>
-              <a:t>매매가 대비 GOP 비율</a:t>
-            </a:r>
-            <a:endParaRPr lang="en-US" sz="1800" dirty="0"/>
-          </a:p>
-        </p:txBody>
-      </p:sp>
-      <p:sp>
-        <p:nvSpPr>
-          <p:cNvPr id="23" name="Text 21"/>
-          <p:cNvSpPr/>
-          <p:nvPr/>
-        </p:nvSpPr>
-        <p:spPr>
-          <a:xfrm>
-            <a:off x="731520" y="3995928"/>
-            <a:ext cx="3247034" cy="164592"/>
-          </a:xfrm>
-          <a:prstGeom prst="rect">
-            <a:avLst/>
-          </a:prstGeom>
-          <a:noFill/>
-          <a:ln/>
-        </p:spPr>
-        <p:txBody>
-          <a:bodyPr wrap="square" lIns="0" tIns="0" rIns="0" bIns="0" rtlCol="0" anchor="ctr"/>
-          <a:lstStyle/>
-          <a:p>
-            <a:pPr indent="0" marL="0">
-              <a:buNone/>
-            </a:pPr>
-            <a:r>
-              <a:rPr lang="en-US" sz="880" dirty="0">
-                <a:solidFill>
-                  <a:srgbClr val="718096"/>
-                </a:solidFill>
-                <a:latin typeface="Pretendard" pitchFamily="34" charset="0"/>
-                <a:ea typeface="Pretendard" pitchFamily="34" charset="-122"/>
-                <a:cs typeface="Pretendard" pitchFamily="34" charset="-120"/>
-              </a:rPr>
-              <a:t>자산 가치 기준</a:t>
-            </a:r>
-            <a:endParaRPr lang="en-US" sz="880" dirty="0"/>
-          </a:p>
-        </p:txBody>
-      </p:sp>
-      <p:sp>
-        <p:nvSpPr>
-          <p:cNvPr id="24" name="Shape 22"/>
-          <p:cNvSpPr/>
-          <p:nvPr/>
-        </p:nvSpPr>
-        <p:spPr>
-          <a:xfrm>
-            <a:off x="566928" y="4626864"/>
+          <p:cNvPr id="7" name="Shape 5"/>
+          <p:cNvSpPr/>
+          <p:nvPr/>
+        </p:nvSpPr>
+        <p:spPr>
+          <a:xfrm>
+            <a:off x="566928" y="1645920"/>
             <a:ext cx="11057839" cy="1280160"/>
           </a:xfrm>
           <a:prstGeom prst="roundRect">
@@ -7901,13 +7948,13 @@
       </p:sp>
       <p:sp>
         <p:nvSpPr>
-          <p:cNvPr id="25" name="Shape 23"/>
-          <p:cNvSpPr/>
-          <p:nvPr/>
-        </p:nvSpPr>
-        <p:spPr>
-          <a:xfrm>
-            <a:off x="566928" y="4681728"/>
+          <p:cNvPr id="8" name="Shape 6"/>
+          <p:cNvSpPr/>
+          <p:nvPr/>
+        </p:nvSpPr>
+        <p:spPr>
+          <a:xfrm>
+            <a:off x="566928" y="1700784"/>
             <a:ext cx="36576" cy="1170432"/>
           </a:xfrm>
           <a:prstGeom prst="rect">
@@ -7921,13 +7968,13 @@
       </p:sp>
       <p:sp>
         <p:nvSpPr>
-          <p:cNvPr id="26" name="Text 24"/>
-          <p:cNvSpPr/>
-          <p:nvPr/>
-        </p:nvSpPr>
-        <p:spPr>
-          <a:xfrm>
-            <a:off x="749808" y="4736592"/>
+          <p:cNvPr id="9" name="Text 7"/>
+          <p:cNvSpPr/>
+          <p:nvPr/>
+        </p:nvSpPr>
+        <p:spPr>
+          <a:xfrm>
+            <a:off x="749808" y="1755648"/>
             <a:ext cx="10728655" cy="201168"/>
           </a:xfrm>
           <a:prstGeom prst="rect">
@@ -7960,13 +8007,13 @@
       </p:sp>
       <p:sp>
         <p:nvSpPr>
-          <p:cNvPr id="27" name="Text 25"/>
-          <p:cNvSpPr/>
-          <p:nvPr/>
-        </p:nvSpPr>
-        <p:spPr>
-          <a:xfrm>
-            <a:off x="749808" y="4956048"/>
+          <p:cNvPr id="10" name="Text 8"/>
+          <p:cNvSpPr/>
+          <p:nvPr/>
+        </p:nvSpPr>
+        <p:spPr>
+          <a:xfrm>
+            <a:off x="749808" y="1975104"/>
             <a:ext cx="10728655" cy="877824"/>
           </a:xfrm>
           <a:prstGeom prst="rect">
@@ -7994,7 +8041,7 @@
                 <a:ea typeface="Pretendard" pitchFamily="34" charset="-122"/>
                 <a:cs typeface="Pretendard" pitchFamily="34" charset="-120"/>
               </a:rPr>
-              <a:t>임대차 수익 구조가 아닌 영업 총매출에서 직접 운영비를 차감한 GOP 기반의 실질 수익성을 분석합니다. ### GOP 수익성 분석</a:t>
+              <a:t>{"ok":true,"mocked":true,"extractedFields":{"area_signal":"역삼","asset_type":"오피스빌딩","price_band":"300억","size_signal":"3000평(약 9917.4㎡)"},"extractedFacts":{"region":"역삼","exactAddressCandidate":"역삼동 742-1","assetType":"오피스빌딩","priceText":"300억","sizeText":"3000평(약 9917.4㎡)","currentUse":"오피스","currentUseSignal":"근린생활시설","leaseSignal":"임대중","vacancySignal":"공실없음","tenantNames":["쿠팡","네이버"],"unitRentTexts":["301호: 1500만"],"sellerMotivationText":"자산 효율화","brokerNotes":["초역세권 매물"]},"detectedSensitiveFields":["exact_address","tenant_name"],"ambiguousFields":[],"warnings":[],"areaSignal":"역삼","assetType":"오피스빌딩","priceBand":"300억","sizeSignal":"3000평(약 9917.4㎡)","dealType":"매각","buildingName":"역삼 센트럴타워","exactAddress":"역삼동 742-1","totalFloorArea":9917.3,"buildYear":2015,"currentUseSignal":"근린생활시설","vacancySignal":"공실 없음","fitSummary":"초역세권 근생 빌딩으로 시행/사옥 매입에 최적화","cautionSummary":"주요 임차인 만기 조율 필요","hiddenFields":["exact_address","seller_motivation"],"confidence":{"areaSignal":"confirmed","assetType":"confirmed","priceBand":"ai_hypothesis","fitSummary":"ai_hypothesis"},"missingData":["sizeSignal"],"boundaryNote":"본 자료는 실거래 통계 기반 참고치입니다.","buyerType":"법인 사옥형","budgetRange":{"min":50,"max":80,"display":"50억~80억"},"preferredRegions":["강남","성수"],"assetTypes":["꼬마빌딩","사옥용"],"purchasePurpose":"사옥용 매입","mustHave":["초역세권","주차"],"niceToHave":["테라스","루프탑"],"riskTolerance":"medium","financingNote":"자본금 50% 준비","missingQuestions":["구체적인 입주 시기가 언제인가요?","선호하는 수익률이 있나요?"],"privacyNotes":["연락처 비공개"],"fitReasons":["매수자 예산(50-80억)에 부합하는 매물입니다.","요청하신 성수/강남 권역에 해당합니다."],"cautionReasons":["요청한 용도와 달리 명도 협의가 다소 필요합니다."],"recommendedNextAction":"현장 답사 제안","kakaoMessage":"안녕하세요! 요청하신 조건에 부합하는 추천 매물이 있어 안내해 드립니다. 확인해보시고 피드백 부탁드립니다.","title":"강남 역삼역 초역세권 오피스 사옥용 빌딩 매각","shortSummary":"역삼역 도보 5분 거리의 준신축급 대형 오피스빌딩입니다.","dealPoints":["초역세권","사옥 최적"],"cautionPoints":["명도 조율 필요"],"hiddenInfoNotice":["보증금 및 지번은 인가 후 확인 가능"],"gateMessage":"G1 등급 등록이 필요합니다.","kakaoText":"강남 역삼역 오피스 빌딩 매각 안내입니다.","exactUnitCandidate":"101호","floor":"1층","areaSqmText":"150㎡","spaceType":"office","depositText":"5000만","monthlyRentText":"400만","maintenanceFeeText":"50만","availableFromText":"즉시입주","leaseTermMonthsText":"24","incentivesText":"렌트프리 2개월","restrictions":[],"landlordIdentity":"김성수","currentTenant":"스타트업","vacancyReason":"이전 확장","rentNegotiation":"협의 가능","region":"성수동","areaSqm":150,"deposit":5000,"monthlyRent":400,"maintenanceFee":50,"availableFrom":"즉시입주","leaseTermMonths":24,"incentives":{"rentFreeMonths":2,"interiorSupport":"일부 인테리어 지원","freeRentDetail":"렌트프리 2개월 지원"},"shortSummaryLease":"성수역 도보 5분 거리 1층 리테일 상가 매물입니다."}</a:t>
             </a:r>
             <a:endParaRPr lang="en-US" sz="930" dirty="0"/>
           </a:p>
@@ -8002,7 +8049,7 @@
       </p:sp>
       <p:sp>
         <p:nvSpPr>
-          <p:cNvPr id="28" name="Text 26"/>
+          <p:cNvPr id="11" name="Text 9"/>
           <p:cNvSpPr/>
           <p:nvPr/>
         </p:nvSpPr>
@@ -8041,7 +8088,7 @@
       </p:sp>
       <p:sp>
         <p:nvSpPr>
-          <p:cNvPr id="29" name="Text 27"/>
+          <p:cNvPr id="12" name="Text 10"/>
           <p:cNvSpPr/>
           <p:nvPr/>
         </p:nvSpPr>
@@ -8966,6 +9013,302 @@
 <file path=ppt/slides/slide8.xml><?xml version="1.0" encoding="utf-8"?>
 <p:sld xmlns:a="http://schemas.openxmlformats.org/drawingml/2006/main" xmlns:r="http://schemas.openxmlformats.org/officeDocument/2006/relationships" xmlns:p="http://schemas.openxmlformats.org/presentationml/2006/main">
   <p:cSld name="Slide 8">
+    <p:spTree>
+      <p:nvGrpSpPr>
+        <p:cNvPr id="1" name=""/>
+        <p:cNvGrpSpPr/>
+        <p:nvPr/>
+      </p:nvGrpSpPr>
+      <p:grpSpPr>
+        <a:xfrm>
+          <a:off x="0" y="0"/>
+          <a:ext cx="0" cy="0"/>
+          <a:chOff x="0" y="0"/>
+          <a:chExt cx="0" cy="0"/>
+        </a:xfrm>
+      </p:grpSpPr>
+      <p:sp>
+        <p:nvSpPr>
+          <p:cNvPr id="2" name="Shape 0"/>
+          <p:cNvSpPr/>
+          <p:nvPr/>
+        </p:nvSpPr>
+        <p:spPr>
+          <a:xfrm>
+            <a:off x="566928" y="457200"/>
+            <a:ext cx="384048" cy="384048"/>
+          </a:xfrm>
+          <a:prstGeom prst="ellipse">
+            <a:avLst/>
+          </a:prstGeom>
+          <a:solidFill>
+            <a:srgbClr val="B98A2E"/>
+          </a:solidFill>
+          <a:ln/>
+        </p:spPr>
+      </p:sp>
+      <p:sp>
+        <p:nvSpPr>
+          <p:cNvPr id="3" name="Text 1"/>
+          <p:cNvSpPr/>
+          <p:nvPr/>
+        </p:nvSpPr>
+        <p:spPr>
+          <a:xfrm>
+            <a:off x="566928" y="457200"/>
+            <a:ext cx="384048" cy="384048"/>
+          </a:xfrm>
+          <a:prstGeom prst="rect">
+            <a:avLst/>
+          </a:prstGeom>
+          <a:noFill/>
+          <a:ln/>
+        </p:spPr>
+        <p:txBody>
+          <a:bodyPr wrap="square" lIns="0" tIns="0" rIns="0" bIns="0" rtlCol="0" anchor="ctr"/>
+          <a:lstStyle/>
+          <a:p>
+            <a:pPr algn="ctr" indent="0" marL="0">
+              <a:buNone/>
+            </a:pPr>
+            <a:r>
+              <a:rPr lang="en-US" sz="1300" b="1" dirty="0">
+                <a:solidFill>
+                  <a:srgbClr val="FFFFFF"/>
+                </a:solidFill>
+                <a:latin typeface="Arial" pitchFamily="34" charset="0"/>
+                <a:ea typeface="Arial" pitchFamily="34" charset="-122"/>
+                <a:cs typeface="Arial" pitchFamily="34" charset="-120"/>
+              </a:rPr>
+              <a:t>08</a:t>
+            </a:r>
+            <a:endParaRPr lang="en-US" sz="1300" dirty="0"/>
+          </a:p>
+        </p:txBody>
+      </p:sp>
+      <p:sp>
+        <p:nvSpPr>
+          <p:cNvPr id="4" name="Text 2"/>
+          <p:cNvSpPr/>
+          <p:nvPr/>
+        </p:nvSpPr>
+        <p:spPr>
+          <a:xfrm>
+            <a:off x="1133856" y="457200"/>
+            <a:ext cx="10490911" cy="182880"/>
+          </a:xfrm>
+          <a:prstGeom prst="rect">
+            <a:avLst/>
+          </a:prstGeom>
+          <a:noFill/>
+          <a:ln/>
+        </p:spPr>
+        <p:txBody>
+          <a:bodyPr wrap="square" lIns="0" tIns="0" rIns="0" bIns="0" rtlCol="0" anchor="ctr"/>
+          <a:lstStyle/>
+          <a:p>
+            <a:pPr indent="0" marL="0">
+              <a:buNone/>
+            </a:pPr>
+            <a:r>
+              <a:rPr lang="en-US" sz="950" b="1" spc="200" kern="0" dirty="0">
+                <a:solidFill>
+                  <a:srgbClr val="B98A2E"/>
+                </a:solidFill>
+                <a:latin typeface="Arial" pitchFamily="34" charset="0"/>
+                <a:ea typeface="Arial" pitchFamily="34" charset="-122"/>
+                <a:cs typeface="Arial" pitchFamily="34" charset="-120"/>
+              </a:rPr>
+              <a:t>Checklist</a:t>
+            </a:r>
+            <a:endParaRPr lang="en-US" sz="950" dirty="0"/>
+          </a:p>
+        </p:txBody>
+      </p:sp>
+      <p:sp>
+        <p:nvSpPr>
+          <p:cNvPr id="5" name="Text 3"/>
+          <p:cNvSpPr/>
+          <p:nvPr/>
+        </p:nvSpPr>
+        <p:spPr>
+          <a:xfrm>
+            <a:off x="1133856" y="640080"/>
+            <a:ext cx="10490911" cy="365760"/>
+          </a:xfrm>
+          <a:prstGeom prst="rect">
+            <a:avLst/>
+          </a:prstGeom>
+          <a:noFill/>
+          <a:ln/>
+        </p:spPr>
+        <p:txBody>
+          <a:bodyPr wrap="square" lIns="0" tIns="0" rIns="0" bIns="0" rtlCol="0" anchor="ctr"/>
+          <a:lstStyle/>
+          <a:p>
+            <a:pPr indent="0" marL="0">
+              <a:buNone/>
+            </a:pPr>
+            <a:r>
+              <a:rPr lang="en-US" sz="2300" b="1" dirty="0">
+                <a:solidFill>
+                  <a:srgbClr val="10161F"/>
+                </a:solidFill>
+                <a:latin typeface="Pretendard" pitchFamily="34" charset="0"/>
+                <a:ea typeface="Pretendard" pitchFamily="34" charset="-122"/>
+                <a:cs typeface="Pretendard" pitchFamily="34" charset="-120"/>
+              </a:rPr>
+              <a:t>섹션 상세</a:t>
+            </a:r>
+            <a:endParaRPr lang="en-US" sz="2300" dirty="0"/>
+          </a:p>
+        </p:txBody>
+      </p:sp>
+      <p:sp>
+        <p:nvSpPr>
+          <p:cNvPr id="6" name="Text 4"/>
+          <p:cNvSpPr/>
+          <p:nvPr/>
+        </p:nvSpPr>
+        <p:spPr>
+          <a:xfrm>
+            <a:off x="566928" y="1517904"/>
+            <a:ext cx="6492240" cy="274320"/>
+          </a:xfrm>
+          <a:prstGeom prst="rect">
+            <a:avLst/>
+          </a:prstGeom>
+          <a:noFill/>
+          <a:ln/>
+        </p:spPr>
+        <p:txBody>
+          <a:bodyPr wrap="square" rtlCol="0" anchor="ctr"/>
+          <a:lstStyle/>
+          <a:p>
+            <a:pPr indent="0" marL="0">
+              <a:buNone/>
+            </a:pPr>
+            <a:endParaRPr lang="en-US" sz="1400" dirty="0"/>
+          </a:p>
+        </p:txBody>
+      </p:sp>
+      <p:sp>
+        <p:nvSpPr>
+          <p:cNvPr id="7" name="Text 5"/>
+          <p:cNvSpPr/>
+          <p:nvPr/>
+        </p:nvSpPr>
+        <p:spPr>
+          <a:xfrm>
+            <a:off x="566928" y="1874520"/>
+            <a:ext cx="6492240" cy="182880"/>
+          </a:xfrm>
+          <a:prstGeom prst="rect">
+            <a:avLst/>
+          </a:prstGeom>
+          <a:noFill/>
+          <a:ln/>
+        </p:spPr>
+        <p:txBody>
+          <a:bodyPr wrap="square" rtlCol="0" anchor="ctr"/>
+          <a:lstStyle/>
+          <a:p>
+            <a:pPr indent="0" marL="0">
+              <a:buNone/>
+            </a:pPr>
+            <a:endParaRPr lang="en-US" sz="900" dirty="0"/>
+          </a:p>
+        </p:txBody>
+      </p:sp>
+      <p:sp>
+        <p:nvSpPr>
+          <p:cNvPr id="8" name="Text 6"/>
+          <p:cNvSpPr/>
+          <p:nvPr/>
+        </p:nvSpPr>
+        <p:spPr>
+          <a:xfrm>
+            <a:off x="566928" y="6382512"/>
+            <a:ext cx="7315200" cy="219456"/>
+          </a:xfrm>
+          <a:prstGeom prst="rect">
+            <a:avLst/>
+          </a:prstGeom>
+          <a:noFill/>
+          <a:ln/>
+        </p:spPr>
+        <p:txBody>
+          <a:bodyPr wrap="square" lIns="0" tIns="0" rIns="0" bIns="0" rtlCol="0" anchor="ctr"/>
+          <a:lstStyle/>
+          <a:p>
+            <a:pPr indent="0" marL="0">
+              <a:buNone/>
+            </a:pPr>
+            <a:r>
+              <a:rPr lang="en-US" sz="800" dirty="0">
+                <a:solidFill>
+                  <a:srgbClr val="718096"/>
+                </a:solidFill>
+                <a:latin typeface="Pretendard" pitchFamily="34" charset="0"/>
+                <a:ea typeface="Pretendard" pitchFamily="34" charset="-122"/>
+                <a:cs typeface="Pretendard" pitchFamily="34" charset="-120"/>
+              </a:rPr>
+              <a:t>크리딜   |   </a:t>
+            </a:r>
+            <a:endParaRPr lang="en-US" sz="800" dirty="0"/>
+          </a:p>
+        </p:txBody>
+      </p:sp>
+      <p:sp>
+        <p:nvSpPr>
+          <p:cNvPr id="9" name="Text 7"/>
+          <p:cNvSpPr/>
+          <p:nvPr/>
+        </p:nvSpPr>
+        <p:spPr>
+          <a:xfrm>
+            <a:off x="10710367" y="6382512"/>
+            <a:ext cx="914400" cy="219456"/>
+          </a:xfrm>
+          <a:prstGeom prst="rect">
+            <a:avLst/>
+          </a:prstGeom>
+          <a:noFill/>
+          <a:ln/>
+        </p:spPr>
+        <p:txBody>
+          <a:bodyPr wrap="square" lIns="0" tIns="0" rIns="0" bIns="0" rtlCol="0" anchor="ctr"/>
+          <a:lstStyle/>
+          <a:p>
+            <a:pPr algn="r" indent="0" marL="0">
+              <a:buNone/>
+            </a:pPr>
+            <a:r>
+              <a:rPr lang="en-US" sz="900" b="1" dirty="0">
+                <a:solidFill>
+                  <a:srgbClr val="B98A2E"/>
+                </a:solidFill>
+                <a:latin typeface="Arial" pitchFamily="34" charset="0"/>
+                <a:ea typeface="Arial" pitchFamily="34" charset="-122"/>
+                <a:cs typeface="Arial" pitchFamily="34" charset="-120"/>
+              </a:rPr>
+              <a:t>8</a:t>
+            </a:r>
+            <a:endParaRPr lang="en-US" sz="900" dirty="0"/>
+          </a:p>
+        </p:txBody>
+      </p:sp>
+    </p:spTree>
+  </p:cSld>
+  <p:clrMapOvr>
+    <a:masterClrMapping/>
+  </p:clrMapOvr>
+</p:sld>
+</file>
+
+<file path=ppt/slides/slide9.xml><?xml version="1.0" encoding="utf-8"?>
+<p:sld xmlns:a="http://schemas.openxmlformats.org/drawingml/2006/main" xmlns:r="http://schemas.openxmlformats.org/officeDocument/2006/relationships" xmlns:p="http://schemas.openxmlformats.org/presentationml/2006/main">
+  <p:cSld name="Slide 9">
     <p:bg>
       <p:bgPr>
         <a:solidFill>
@@ -9040,7 +9383,7 @@
                 <a:ea typeface="Arial" pitchFamily="34" charset="-122"/>
                 <a:cs typeface="Arial" pitchFamily="34" charset="-120"/>
               </a:rPr>
-              <a:t>08</a:t>
+              <a:t>09</a:t>
             </a:r>
             <a:endParaRPr lang="en-US" sz="1300" dirty="0"/>
           </a:p>
@@ -9126,7 +9469,7 @@
       </p:sp>
       <p:graphicFrame>
         <p:nvGraphicFramePr>
-          <p:cNvPr id="9" name="Table 0"/>
+          <p:cNvPr id="10" name="Table 0"/>
           <p:cNvGraphicFramePr>
             <a:graphicFrameLocks noGrp="1"/>
           </p:cNvGraphicFramePr>
@@ -10424,984 +10767,6 @@
                 <a:ea typeface="Arial" pitchFamily="34" charset="-122"/>
                 <a:cs typeface="Arial" pitchFamily="34" charset="-120"/>
               </a:rPr>
-              <a:t>8</a:t>
-            </a:r>
-            <a:endParaRPr lang="en-US" sz="900" dirty="0"/>
-          </a:p>
-        </p:txBody>
-      </p:sp>
-    </p:spTree>
-  </p:cSld>
-  <p:clrMapOvr>
-    <a:masterClrMapping/>
-  </p:clrMapOvr>
-</p:sld>
-</file>
-
-<file path=ppt/slides/slide9.xml><?xml version="1.0" encoding="utf-8"?>
-<p:sld xmlns:a="http://schemas.openxmlformats.org/drawingml/2006/main" xmlns:r="http://schemas.openxmlformats.org/officeDocument/2006/relationships" xmlns:p="http://schemas.openxmlformats.org/presentationml/2006/main">
-  <p:cSld name="Slide 9">
-    <p:bg>
-      <p:bgPr>
-        <a:solidFill>
-          <a:srgbClr val="FFFFFF"/>
-        </a:solidFill>
-      </p:bgPr>
-    </p:bg>
-    <p:spTree>
-      <p:nvGrpSpPr>
-        <p:cNvPr id="1" name=""/>
-        <p:cNvGrpSpPr/>
-        <p:nvPr/>
-      </p:nvGrpSpPr>
-      <p:grpSpPr>
-        <a:xfrm>
-          <a:off x="0" y="0"/>
-          <a:ext cx="0" cy="0"/>
-          <a:chOff x="0" y="0"/>
-          <a:chExt cx="0" cy="0"/>
-        </a:xfrm>
-      </p:grpSpPr>
-      <p:sp>
-        <p:nvSpPr>
-          <p:cNvPr id="2" name="Shape 0"/>
-          <p:cNvSpPr/>
-          <p:nvPr/>
-        </p:nvSpPr>
-        <p:spPr>
-          <a:xfrm>
-            <a:off x="566928" y="457200"/>
-            <a:ext cx="384048" cy="384048"/>
-          </a:xfrm>
-          <a:prstGeom prst="ellipse">
-            <a:avLst/>
-          </a:prstGeom>
-          <a:solidFill>
-            <a:srgbClr val="B98A2E"/>
-          </a:solidFill>
-          <a:ln/>
-        </p:spPr>
-      </p:sp>
-      <p:sp>
-        <p:nvSpPr>
-          <p:cNvPr id="3" name="Text 1"/>
-          <p:cNvSpPr/>
-          <p:nvPr/>
-        </p:nvSpPr>
-        <p:spPr>
-          <a:xfrm>
-            <a:off x="566928" y="457200"/>
-            <a:ext cx="384048" cy="384048"/>
-          </a:xfrm>
-          <a:prstGeom prst="rect">
-            <a:avLst/>
-          </a:prstGeom>
-          <a:noFill/>
-          <a:ln/>
-        </p:spPr>
-        <p:txBody>
-          <a:bodyPr wrap="square" lIns="0" tIns="0" rIns="0" bIns="0" rtlCol="0" anchor="ctr"/>
-          <a:lstStyle/>
-          <a:p>
-            <a:pPr algn="ctr" indent="0" marL="0">
-              <a:buNone/>
-            </a:pPr>
-            <a:r>
-              <a:rPr lang="en-US" sz="1300" b="1" dirty="0">
-                <a:solidFill>
-                  <a:srgbClr val="FFFFFF"/>
-                </a:solidFill>
-                <a:latin typeface="Arial" pitchFamily="34" charset="0"/>
-                <a:ea typeface="Arial" pitchFamily="34" charset="-122"/>
-                <a:cs typeface="Arial" pitchFamily="34" charset="-120"/>
-              </a:rPr>
-              <a:t>09</a:t>
-            </a:r>
-            <a:endParaRPr lang="en-US" sz="1300" dirty="0"/>
-          </a:p>
-        </p:txBody>
-      </p:sp>
-      <p:sp>
-        <p:nvSpPr>
-          <p:cNvPr id="4" name="Text 2"/>
-          <p:cNvSpPr/>
-          <p:nvPr/>
-        </p:nvSpPr>
-        <p:spPr>
-          <a:xfrm>
-            <a:off x="1133856" y="457200"/>
-            <a:ext cx="10490911" cy="182880"/>
-          </a:xfrm>
-          <a:prstGeom prst="rect">
-            <a:avLst/>
-          </a:prstGeom>
-          <a:noFill/>
-          <a:ln/>
-        </p:spPr>
-        <p:txBody>
-          <a:bodyPr wrap="square" lIns="0" tIns="0" rIns="0" bIns="0" rtlCol="0" anchor="ctr"/>
-          <a:lstStyle/>
-          <a:p>
-            <a:pPr indent="0" marL="0">
-              <a:buNone/>
-            </a:pPr>
-            <a:r>
-              <a:rPr lang="en-US" sz="950" b="1" spc="200" kern="0" dirty="0">
-                <a:solidFill>
-                  <a:srgbClr val="B98A2E"/>
-                </a:solidFill>
-                <a:latin typeface="Arial" pitchFamily="34" charset="0"/>
-                <a:ea typeface="Arial" pitchFamily="34" charset="-122"/>
-                <a:cs typeface="Arial" pitchFamily="34" charset="-120"/>
-              </a:rPr>
-              <a:t>Process</a:t>
-            </a:r>
-            <a:endParaRPr lang="en-US" sz="950" dirty="0"/>
-          </a:p>
-        </p:txBody>
-      </p:sp>
-      <p:sp>
-        <p:nvSpPr>
-          <p:cNvPr id="5" name="Text 3"/>
-          <p:cNvSpPr/>
-          <p:nvPr/>
-        </p:nvSpPr>
-        <p:spPr>
-          <a:xfrm>
-            <a:off x="1133856" y="640080"/>
-            <a:ext cx="10490911" cy="365760"/>
-          </a:xfrm>
-          <a:prstGeom prst="rect">
-            <a:avLst/>
-          </a:prstGeom>
-          <a:noFill/>
-          <a:ln/>
-        </p:spPr>
-        <p:txBody>
-          <a:bodyPr wrap="square" lIns="0" tIns="0" rIns="0" bIns="0" rtlCol="0" anchor="ctr"/>
-          <a:lstStyle/>
-          <a:p>
-            <a:pPr indent="0" marL="0">
-              <a:buNone/>
-            </a:pPr>
-            <a:r>
-              <a:rPr lang="en-US" sz="2300" b="1" dirty="0">
-                <a:solidFill>
-                  <a:srgbClr val="10161F"/>
-                </a:solidFill>
-                <a:latin typeface="Pretendard" pitchFamily="34" charset="0"/>
-                <a:ea typeface="Pretendard" pitchFamily="34" charset="-122"/>
-                <a:cs typeface="Pretendard" pitchFamily="34" charset="-120"/>
-              </a:rPr>
-              <a:t>검토 후 다음 단계는 무엇인가</a:t>
-            </a:r>
-            <a:endParaRPr lang="en-US" sz="2300" dirty="0"/>
-          </a:p>
-        </p:txBody>
-      </p:sp>
-      <p:sp>
-        <p:nvSpPr>
-          <p:cNvPr id="6" name="Shape 4"/>
-          <p:cNvSpPr/>
-          <p:nvPr/>
-        </p:nvSpPr>
-        <p:spPr>
-          <a:xfrm>
-            <a:off x="566928" y="1572768"/>
-            <a:ext cx="2490140" cy="3200400"/>
-          </a:xfrm>
-          <a:prstGeom prst="roundRect">
-            <a:avLst>
-              <a:gd name="adj" fmla="val 2203"/>
-            </a:avLst>
-          </a:prstGeom>
-          <a:solidFill>
-            <a:srgbClr val="F7FAFC"/>
-          </a:solidFill>
-          <a:ln w="6350">
-            <a:solidFill>
-              <a:srgbClr val="CBD5E0"/>
-            </a:solidFill>
-            <a:prstDash val="solid"/>
-          </a:ln>
-        </p:spPr>
-      </p:sp>
-      <p:sp>
-        <p:nvSpPr>
-          <p:cNvPr id="7" name="Shape 5"/>
-          <p:cNvSpPr/>
-          <p:nvPr/>
-        </p:nvSpPr>
-        <p:spPr>
-          <a:xfrm>
-            <a:off x="786384" y="1792224"/>
-            <a:ext cx="438912" cy="438912"/>
-          </a:xfrm>
-          <a:prstGeom prst="ellipse">
-            <a:avLst/>
-          </a:prstGeom>
-          <a:solidFill>
-            <a:srgbClr val="B98A2E"/>
-          </a:solidFill>
-          <a:ln/>
-        </p:spPr>
-      </p:sp>
-      <p:sp>
-        <p:nvSpPr>
-          <p:cNvPr id="8" name="Text 6"/>
-          <p:cNvSpPr/>
-          <p:nvPr/>
-        </p:nvSpPr>
-        <p:spPr>
-          <a:xfrm>
-            <a:off x="786384" y="1792224"/>
-            <a:ext cx="438912" cy="438912"/>
-          </a:xfrm>
-          <a:prstGeom prst="rect">
-            <a:avLst/>
-          </a:prstGeom>
-          <a:noFill/>
-          <a:ln/>
-        </p:spPr>
-        <p:txBody>
-          <a:bodyPr wrap="square" lIns="0" tIns="0" rIns="0" bIns="0" rtlCol="0" anchor="ctr"/>
-          <a:lstStyle/>
-          <a:p>
-            <a:pPr algn="ctr" indent="0" marL="0">
-              <a:buNone/>
-            </a:pPr>
-            <a:r>
-              <a:rPr lang="en-US" sz="1400" b="1" dirty="0">
-                <a:solidFill>
-                  <a:srgbClr val="FFFFFF"/>
-                </a:solidFill>
-                <a:latin typeface="Arial" pitchFamily="34" charset="0"/>
-                <a:ea typeface="Arial" pitchFamily="34" charset="-122"/>
-                <a:cs typeface="Arial" pitchFamily="34" charset="-120"/>
-              </a:rPr>
-              <a:t>01</a:t>
-            </a:r>
-            <a:endParaRPr lang="en-US" sz="1400" dirty="0"/>
-          </a:p>
-        </p:txBody>
-      </p:sp>
-      <p:sp>
-        <p:nvSpPr>
-          <p:cNvPr id="9" name="Text 7"/>
-          <p:cNvSpPr/>
-          <p:nvPr/>
-        </p:nvSpPr>
-        <p:spPr>
-          <a:xfrm>
-            <a:off x="786384" y="2304288"/>
-            <a:ext cx="2051228" cy="365760"/>
-          </a:xfrm>
-          <a:prstGeom prst="rect">
-            <a:avLst/>
-          </a:prstGeom>
-          <a:noFill/>
-          <a:ln/>
-        </p:spPr>
-        <p:txBody>
-          <a:bodyPr wrap="square" rtlCol="0" anchor="ctr"/>
-          <a:lstStyle/>
-          <a:p>
-            <a:pPr indent="0" marL="0">
-              <a:buNone/>
-            </a:pPr>
-            <a:r>
-              <a:rPr lang="en-US" sz="1600" b="1" dirty="0">
-                <a:solidFill>
-                  <a:srgbClr val="10161F"/>
-                </a:solidFill>
-                <a:latin typeface="Pretendard" pitchFamily="34" charset="0"/>
-                <a:ea typeface="Pretendard" pitchFamily="34" charset="-122"/>
-                <a:cs typeface="Pretendard" pitchFamily="34" charset="-120"/>
-              </a:rPr>
-              <a:t>1단계</a:t>
-            </a:r>
-            <a:endParaRPr lang="en-US" sz="1600" dirty="0"/>
-          </a:p>
-        </p:txBody>
-      </p:sp>
-      <p:sp>
-        <p:nvSpPr>
-          <p:cNvPr id="10" name="Text 8"/>
-          <p:cNvSpPr/>
-          <p:nvPr/>
-        </p:nvSpPr>
-        <p:spPr>
-          <a:xfrm>
-            <a:off x="786384" y="2761488"/>
-            <a:ext cx="2051228" cy="1828800"/>
-          </a:xfrm>
-          <a:prstGeom prst="rect">
-            <a:avLst/>
-          </a:prstGeom>
-          <a:noFill/>
-          <a:ln/>
-        </p:spPr>
-        <p:txBody>
-          <a:bodyPr wrap="square" rtlCol="0" anchor="t"/>
-          <a:lstStyle/>
-          <a:p>
-            <a:pPr indent="0" marL="0">
-              <a:buNone/>
-            </a:pPr>
-            <a:r>
-              <a:rPr lang="en-US" sz="1100" dirty="0">
-                <a:solidFill>
-                  <a:srgbClr val="10161F"/>
-                </a:solidFill>
-                <a:latin typeface="Pretendard" pitchFamily="34" charset="0"/>
-                <a:ea typeface="Pretendard" pitchFamily="34" charset="-122"/>
-                <a:cs typeface="Pretendard" pitchFamily="34" charset="-120"/>
-              </a:rPr>
-              <a:t>초기 관심 표명 → 담당자 연락</a:t>
-            </a:r>
-            <a:endParaRPr lang="en-US" sz="1100" dirty="0"/>
-          </a:p>
-        </p:txBody>
-      </p:sp>
-      <p:sp>
-        <p:nvSpPr>
-          <p:cNvPr id="11" name="Shape 9"/>
-          <p:cNvSpPr/>
-          <p:nvPr/>
-        </p:nvSpPr>
-        <p:spPr>
-          <a:xfrm>
-            <a:off x="3148508" y="3035808"/>
-            <a:ext cx="182880" cy="274320"/>
-          </a:xfrm>
-          <a:prstGeom prst="rightArrow">
-            <a:avLst/>
-          </a:prstGeom>
-          <a:solidFill>
-            <a:srgbClr val="CBD5E0"/>
-          </a:solidFill>
-          <a:ln w="6350">
-            <a:solidFill>
-              <a:srgbClr val="718096"/>
-            </a:solidFill>
-            <a:prstDash val="solid"/>
-          </a:ln>
-        </p:spPr>
-      </p:sp>
-      <p:sp>
-        <p:nvSpPr>
-          <p:cNvPr id="12" name="Shape 10"/>
-          <p:cNvSpPr/>
-          <p:nvPr/>
-        </p:nvSpPr>
-        <p:spPr>
-          <a:xfrm>
-            <a:off x="3422828" y="1572768"/>
-            <a:ext cx="2490140" cy="3200400"/>
-          </a:xfrm>
-          <a:prstGeom prst="roundRect">
-            <a:avLst>
-              <a:gd name="adj" fmla="val 2203"/>
-            </a:avLst>
-          </a:prstGeom>
-          <a:solidFill>
-            <a:srgbClr val="F7FAFC"/>
-          </a:solidFill>
-          <a:ln w="6350">
-            <a:solidFill>
-              <a:srgbClr val="CBD5E0"/>
-            </a:solidFill>
-            <a:prstDash val="solid"/>
-          </a:ln>
-        </p:spPr>
-      </p:sp>
-      <p:sp>
-        <p:nvSpPr>
-          <p:cNvPr id="13" name="Shape 11"/>
-          <p:cNvSpPr/>
-          <p:nvPr/>
-        </p:nvSpPr>
-        <p:spPr>
-          <a:xfrm>
-            <a:off x="3642284" y="1792224"/>
-            <a:ext cx="438912" cy="438912"/>
-          </a:xfrm>
-          <a:prstGeom prst="ellipse">
-            <a:avLst/>
-          </a:prstGeom>
-          <a:solidFill>
-            <a:srgbClr val="B98A2E"/>
-          </a:solidFill>
-          <a:ln/>
-        </p:spPr>
-      </p:sp>
-      <p:sp>
-        <p:nvSpPr>
-          <p:cNvPr id="14" name="Text 12"/>
-          <p:cNvSpPr/>
-          <p:nvPr/>
-        </p:nvSpPr>
-        <p:spPr>
-          <a:xfrm>
-            <a:off x="3642284" y="1792224"/>
-            <a:ext cx="438912" cy="438912"/>
-          </a:xfrm>
-          <a:prstGeom prst="rect">
-            <a:avLst/>
-          </a:prstGeom>
-          <a:noFill/>
-          <a:ln/>
-        </p:spPr>
-        <p:txBody>
-          <a:bodyPr wrap="square" lIns="0" tIns="0" rIns="0" bIns="0" rtlCol="0" anchor="ctr"/>
-          <a:lstStyle/>
-          <a:p>
-            <a:pPr algn="ctr" indent="0" marL="0">
-              <a:buNone/>
-            </a:pPr>
-            <a:r>
-              <a:rPr lang="en-US" sz="1400" b="1" dirty="0">
-                <a:solidFill>
-                  <a:srgbClr val="FFFFFF"/>
-                </a:solidFill>
-                <a:latin typeface="Arial" pitchFamily="34" charset="0"/>
-                <a:ea typeface="Arial" pitchFamily="34" charset="-122"/>
-                <a:cs typeface="Arial" pitchFamily="34" charset="-120"/>
-              </a:rPr>
-              <a:t>02</a:t>
-            </a:r>
-            <a:endParaRPr lang="en-US" sz="1400" dirty="0"/>
-          </a:p>
-        </p:txBody>
-      </p:sp>
-      <p:sp>
-        <p:nvSpPr>
-          <p:cNvPr id="15" name="Text 13"/>
-          <p:cNvSpPr/>
-          <p:nvPr/>
-        </p:nvSpPr>
-        <p:spPr>
-          <a:xfrm>
-            <a:off x="3642284" y="2304288"/>
-            <a:ext cx="2051228" cy="365760"/>
-          </a:xfrm>
-          <a:prstGeom prst="rect">
-            <a:avLst/>
-          </a:prstGeom>
-          <a:noFill/>
-          <a:ln/>
-        </p:spPr>
-        <p:txBody>
-          <a:bodyPr wrap="square" rtlCol="0" anchor="ctr"/>
-          <a:lstStyle/>
-          <a:p>
-            <a:pPr indent="0" marL="0">
-              <a:buNone/>
-            </a:pPr>
-            <a:r>
-              <a:rPr lang="en-US" sz="1600" b="1" dirty="0">
-                <a:solidFill>
-                  <a:srgbClr val="10161F"/>
-                </a:solidFill>
-                <a:latin typeface="Pretendard" pitchFamily="34" charset="0"/>
-                <a:ea typeface="Pretendard" pitchFamily="34" charset="-122"/>
-                <a:cs typeface="Pretendard" pitchFamily="34" charset="-120"/>
-              </a:rPr>
-              <a:t>2단계</a:t>
-            </a:r>
-            <a:endParaRPr lang="en-US" sz="1600" dirty="0"/>
-          </a:p>
-        </p:txBody>
-      </p:sp>
-      <p:sp>
-        <p:nvSpPr>
-          <p:cNvPr id="16" name="Text 14"/>
-          <p:cNvSpPr/>
-          <p:nvPr/>
-        </p:nvSpPr>
-        <p:spPr>
-          <a:xfrm>
-            <a:off x="3642284" y="2761488"/>
-            <a:ext cx="2051228" cy="1828800"/>
-          </a:xfrm>
-          <a:prstGeom prst="rect">
-            <a:avLst/>
-          </a:prstGeom>
-          <a:noFill/>
-          <a:ln/>
-        </p:spPr>
-        <p:txBody>
-          <a:bodyPr wrap="square" rtlCol="0" anchor="t"/>
-          <a:lstStyle/>
-          <a:p>
-            <a:pPr indent="0" marL="0">
-              <a:buNone/>
-            </a:pPr>
-            <a:r>
-              <a:rPr lang="en-US" sz="1100" dirty="0">
-                <a:solidFill>
-                  <a:srgbClr val="10161F"/>
-                </a:solidFill>
-                <a:latin typeface="Pretendard" pitchFamily="34" charset="0"/>
-                <a:ea typeface="Pretendard" pitchFamily="34" charset="-122"/>
-                <a:cs typeface="Pretendard" pitchFamily="34" charset="-120"/>
-              </a:rPr>
-              <a:t>NDA 체결 → 임차인 정보 및 임대차계약서 제공</a:t>
-            </a:r>
-            <a:endParaRPr lang="en-US" sz="1100" dirty="0"/>
-          </a:p>
-        </p:txBody>
-      </p:sp>
-      <p:sp>
-        <p:nvSpPr>
-          <p:cNvPr id="17" name="Shape 15"/>
-          <p:cNvSpPr/>
-          <p:nvPr/>
-        </p:nvSpPr>
-        <p:spPr>
-          <a:xfrm>
-            <a:off x="6004408" y="3035808"/>
-            <a:ext cx="182880" cy="274320"/>
-          </a:xfrm>
-          <a:prstGeom prst="rightArrow">
-            <a:avLst/>
-          </a:prstGeom>
-          <a:solidFill>
-            <a:srgbClr val="CBD5E0"/>
-          </a:solidFill>
-          <a:ln w="6350">
-            <a:solidFill>
-              <a:srgbClr val="718096"/>
-            </a:solidFill>
-            <a:prstDash val="solid"/>
-          </a:ln>
-        </p:spPr>
-      </p:sp>
-      <p:sp>
-        <p:nvSpPr>
-          <p:cNvPr id="18" name="Shape 16"/>
-          <p:cNvSpPr/>
-          <p:nvPr/>
-        </p:nvSpPr>
-        <p:spPr>
-          <a:xfrm>
-            <a:off x="6278728" y="1572768"/>
-            <a:ext cx="2490140" cy="3200400"/>
-          </a:xfrm>
-          <a:prstGeom prst="roundRect">
-            <a:avLst>
-              <a:gd name="adj" fmla="val 2203"/>
-            </a:avLst>
-          </a:prstGeom>
-          <a:solidFill>
-            <a:srgbClr val="F7FAFC"/>
-          </a:solidFill>
-          <a:ln w="6350">
-            <a:solidFill>
-              <a:srgbClr val="CBD5E0"/>
-            </a:solidFill>
-            <a:prstDash val="solid"/>
-          </a:ln>
-        </p:spPr>
-      </p:sp>
-      <p:sp>
-        <p:nvSpPr>
-          <p:cNvPr id="19" name="Shape 17"/>
-          <p:cNvSpPr/>
-          <p:nvPr/>
-        </p:nvSpPr>
-        <p:spPr>
-          <a:xfrm>
-            <a:off x="6498184" y="1792224"/>
-            <a:ext cx="438912" cy="438912"/>
-          </a:xfrm>
-          <a:prstGeom prst="ellipse">
-            <a:avLst/>
-          </a:prstGeom>
-          <a:solidFill>
-            <a:srgbClr val="B98A2E"/>
-          </a:solidFill>
-          <a:ln/>
-        </p:spPr>
-      </p:sp>
-      <p:sp>
-        <p:nvSpPr>
-          <p:cNvPr id="20" name="Text 18"/>
-          <p:cNvSpPr/>
-          <p:nvPr/>
-        </p:nvSpPr>
-        <p:spPr>
-          <a:xfrm>
-            <a:off x="6498184" y="1792224"/>
-            <a:ext cx="438912" cy="438912"/>
-          </a:xfrm>
-          <a:prstGeom prst="rect">
-            <a:avLst/>
-          </a:prstGeom>
-          <a:noFill/>
-          <a:ln/>
-        </p:spPr>
-        <p:txBody>
-          <a:bodyPr wrap="square" lIns="0" tIns="0" rIns="0" bIns="0" rtlCol="0" anchor="ctr"/>
-          <a:lstStyle/>
-          <a:p>
-            <a:pPr algn="ctr" indent="0" marL="0">
-              <a:buNone/>
-            </a:pPr>
-            <a:r>
-              <a:rPr lang="en-US" sz="1400" b="1" dirty="0">
-                <a:solidFill>
-                  <a:srgbClr val="FFFFFF"/>
-                </a:solidFill>
-                <a:latin typeface="Arial" pitchFamily="34" charset="0"/>
-                <a:ea typeface="Arial" pitchFamily="34" charset="-122"/>
-                <a:cs typeface="Arial" pitchFamily="34" charset="-120"/>
-              </a:rPr>
-              <a:t>03</a:t>
-            </a:r>
-            <a:endParaRPr lang="en-US" sz="1400" dirty="0"/>
-          </a:p>
-        </p:txBody>
-      </p:sp>
-      <p:sp>
-        <p:nvSpPr>
-          <p:cNvPr id="21" name="Text 19"/>
-          <p:cNvSpPr/>
-          <p:nvPr/>
-        </p:nvSpPr>
-        <p:spPr>
-          <a:xfrm>
-            <a:off x="6498184" y="2304288"/>
-            <a:ext cx="2051228" cy="365760"/>
-          </a:xfrm>
-          <a:prstGeom prst="rect">
-            <a:avLst/>
-          </a:prstGeom>
-          <a:noFill/>
-          <a:ln/>
-        </p:spPr>
-        <p:txBody>
-          <a:bodyPr wrap="square" rtlCol="0" anchor="ctr"/>
-          <a:lstStyle/>
-          <a:p>
-            <a:pPr indent="0" marL="0">
-              <a:buNone/>
-            </a:pPr>
-            <a:r>
-              <a:rPr lang="en-US" sz="1600" b="1" dirty="0">
-                <a:solidFill>
-                  <a:srgbClr val="10161F"/>
-                </a:solidFill>
-                <a:latin typeface="Pretendard" pitchFamily="34" charset="0"/>
-                <a:ea typeface="Pretendard" pitchFamily="34" charset="-122"/>
-                <a:cs typeface="Pretendard" pitchFamily="34" charset="-120"/>
-              </a:rPr>
-              <a:t>3단계</a:t>
-            </a:r>
-            <a:endParaRPr lang="en-US" sz="1600" dirty="0"/>
-          </a:p>
-        </p:txBody>
-      </p:sp>
-      <p:sp>
-        <p:nvSpPr>
-          <p:cNvPr id="22" name="Text 20"/>
-          <p:cNvSpPr/>
-          <p:nvPr/>
-        </p:nvSpPr>
-        <p:spPr>
-          <a:xfrm>
-            <a:off x="6498184" y="2761488"/>
-            <a:ext cx="2051228" cy="1828800"/>
-          </a:xfrm>
-          <a:prstGeom prst="rect">
-            <a:avLst/>
-          </a:prstGeom>
-          <a:noFill/>
-          <a:ln/>
-        </p:spPr>
-        <p:txBody>
-          <a:bodyPr wrap="square" rtlCol="0" anchor="t"/>
-          <a:lstStyle/>
-          <a:p>
-            <a:pPr indent="0" marL="0">
-              <a:buNone/>
-            </a:pPr>
-            <a:r>
-              <a:rPr lang="en-US" sz="1100" dirty="0">
-                <a:solidFill>
-                  <a:srgbClr val="10161F"/>
-                </a:solidFill>
-                <a:latin typeface="Pretendard" pitchFamily="34" charset="0"/>
-                <a:ea typeface="Pretendard" pitchFamily="34" charset="-122"/>
-                <a:cs typeface="Pretendard" pitchFamily="34" charset="-120"/>
-              </a:rPr>
-              <a:t>현장 실사 일정 조율 → 건물 컨디션 및 설비 직접 확인</a:t>
-            </a:r>
-            <a:endParaRPr lang="en-US" sz="1100" dirty="0"/>
-          </a:p>
-        </p:txBody>
-      </p:sp>
-      <p:sp>
-        <p:nvSpPr>
-          <p:cNvPr id="23" name="Shape 21"/>
-          <p:cNvSpPr/>
-          <p:nvPr/>
-        </p:nvSpPr>
-        <p:spPr>
-          <a:xfrm>
-            <a:off x="8860307" y="3035808"/>
-            <a:ext cx="182880" cy="274320"/>
-          </a:xfrm>
-          <a:prstGeom prst="rightArrow">
-            <a:avLst/>
-          </a:prstGeom>
-          <a:solidFill>
-            <a:srgbClr val="CBD5E0"/>
-          </a:solidFill>
-          <a:ln w="6350">
-            <a:solidFill>
-              <a:srgbClr val="718096"/>
-            </a:solidFill>
-            <a:prstDash val="solid"/>
-          </a:ln>
-        </p:spPr>
-      </p:sp>
-      <p:sp>
-        <p:nvSpPr>
-          <p:cNvPr id="24" name="Shape 22"/>
-          <p:cNvSpPr/>
-          <p:nvPr/>
-        </p:nvSpPr>
-        <p:spPr>
-          <a:xfrm>
-            <a:off x="9134627" y="1572768"/>
-            <a:ext cx="2490140" cy="3200400"/>
-          </a:xfrm>
-          <a:prstGeom prst="roundRect">
-            <a:avLst>
-              <a:gd name="adj" fmla="val 2203"/>
-            </a:avLst>
-          </a:prstGeom>
-          <a:solidFill>
-            <a:srgbClr val="F7FAFC"/>
-          </a:solidFill>
-          <a:ln w="6350">
-            <a:solidFill>
-              <a:srgbClr val="CBD5E0"/>
-            </a:solidFill>
-            <a:prstDash val="solid"/>
-          </a:ln>
-        </p:spPr>
-      </p:sp>
-      <p:sp>
-        <p:nvSpPr>
-          <p:cNvPr id="25" name="Shape 23"/>
-          <p:cNvSpPr/>
-          <p:nvPr/>
-        </p:nvSpPr>
-        <p:spPr>
-          <a:xfrm>
-            <a:off x="9354083" y="1792224"/>
-            <a:ext cx="438912" cy="438912"/>
-          </a:xfrm>
-          <a:prstGeom prst="ellipse">
-            <a:avLst/>
-          </a:prstGeom>
-          <a:solidFill>
-            <a:srgbClr val="B98A2E"/>
-          </a:solidFill>
-          <a:ln/>
-        </p:spPr>
-      </p:sp>
-      <p:sp>
-        <p:nvSpPr>
-          <p:cNvPr id="26" name="Text 24"/>
-          <p:cNvSpPr/>
-          <p:nvPr/>
-        </p:nvSpPr>
-        <p:spPr>
-          <a:xfrm>
-            <a:off x="9354083" y="1792224"/>
-            <a:ext cx="438912" cy="438912"/>
-          </a:xfrm>
-          <a:prstGeom prst="rect">
-            <a:avLst/>
-          </a:prstGeom>
-          <a:noFill/>
-          <a:ln/>
-        </p:spPr>
-        <p:txBody>
-          <a:bodyPr wrap="square" lIns="0" tIns="0" rIns="0" bIns="0" rtlCol="0" anchor="ctr"/>
-          <a:lstStyle/>
-          <a:p>
-            <a:pPr algn="ctr" indent="0" marL="0">
-              <a:buNone/>
-            </a:pPr>
-            <a:r>
-              <a:rPr lang="en-US" sz="1400" b="1" dirty="0">
-                <a:solidFill>
-                  <a:srgbClr val="FFFFFF"/>
-                </a:solidFill>
-                <a:latin typeface="Arial" pitchFamily="34" charset="0"/>
-                <a:ea typeface="Arial" pitchFamily="34" charset="-122"/>
-                <a:cs typeface="Arial" pitchFamily="34" charset="-120"/>
-              </a:rPr>
-              <a:t>04</a:t>
-            </a:r>
-            <a:endParaRPr lang="en-US" sz="1400" dirty="0"/>
-          </a:p>
-        </p:txBody>
-      </p:sp>
-      <p:sp>
-        <p:nvSpPr>
-          <p:cNvPr id="27" name="Text 25"/>
-          <p:cNvSpPr/>
-          <p:nvPr/>
-        </p:nvSpPr>
-        <p:spPr>
-          <a:xfrm>
-            <a:off x="9354083" y="2304288"/>
-            <a:ext cx="2051228" cy="365760"/>
-          </a:xfrm>
-          <a:prstGeom prst="rect">
-            <a:avLst/>
-          </a:prstGeom>
-          <a:noFill/>
-          <a:ln/>
-        </p:spPr>
-        <p:txBody>
-          <a:bodyPr wrap="square" rtlCol="0" anchor="ctr"/>
-          <a:lstStyle/>
-          <a:p>
-            <a:pPr indent="0" marL="0">
-              <a:buNone/>
-            </a:pPr>
-            <a:r>
-              <a:rPr lang="en-US" sz="1600" b="1" dirty="0">
-                <a:solidFill>
-                  <a:srgbClr val="10161F"/>
-                </a:solidFill>
-                <a:latin typeface="Pretendard" pitchFamily="34" charset="0"/>
-                <a:ea typeface="Pretendard" pitchFamily="34" charset="-122"/>
-                <a:cs typeface="Pretendard" pitchFamily="34" charset="-120"/>
-              </a:rPr>
-              <a:t>4단계</a:t>
-            </a:r>
-            <a:endParaRPr lang="en-US" sz="1600" dirty="0"/>
-          </a:p>
-        </p:txBody>
-      </p:sp>
-      <p:sp>
-        <p:nvSpPr>
-          <p:cNvPr id="28" name="Text 26"/>
-          <p:cNvSpPr/>
-          <p:nvPr/>
-        </p:nvSpPr>
-        <p:spPr>
-          <a:xfrm>
-            <a:off x="9354083" y="2761488"/>
-            <a:ext cx="2051228" cy="1828800"/>
-          </a:xfrm>
-          <a:prstGeom prst="rect">
-            <a:avLst/>
-          </a:prstGeom>
-          <a:noFill/>
-          <a:ln/>
-        </p:spPr>
-        <p:txBody>
-          <a:bodyPr wrap="square" rtlCol="0" anchor="t"/>
-          <a:lstStyle/>
-          <a:p>
-            <a:pPr indent="0" marL="0">
-              <a:buNone/>
-            </a:pPr>
-            <a:r>
-              <a:rPr lang="en-US" sz="1100" dirty="0">
-                <a:solidFill>
-                  <a:srgbClr val="10161F"/>
-                </a:solidFill>
-                <a:latin typeface="Pretendard" pitchFamily="34" charset="0"/>
-                <a:ea typeface="Pretendard" pitchFamily="34" charset="-122"/>
-                <a:cs typeface="Pretendard" pitchFamily="34" charset="-120"/>
-              </a:rPr>
-              <a:t>LOI(투자의향서) 제출 → 가격 협의 개시</a:t>
-            </a:r>
-            <a:endParaRPr lang="en-US" sz="1100" dirty="0"/>
-          </a:p>
-        </p:txBody>
-      </p:sp>
-      <p:sp>
-        <p:nvSpPr>
-          <p:cNvPr id="29" name="Text 27"/>
-          <p:cNvSpPr/>
-          <p:nvPr/>
-        </p:nvSpPr>
-        <p:spPr>
-          <a:xfrm>
-            <a:off x="566928" y="6382512"/>
-            <a:ext cx="7315200" cy="219456"/>
-          </a:xfrm>
-          <a:prstGeom prst="rect">
-            <a:avLst/>
-          </a:prstGeom>
-          <a:noFill/>
-          <a:ln/>
-        </p:spPr>
-        <p:txBody>
-          <a:bodyPr wrap="square" lIns="0" tIns="0" rIns="0" bIns="0" rtlCol="0" anchor="ctr"/>
-          <a:lstStyle/>
-          <a:p>
-            <a:pPr indent="0" marL="0">
-              <a:buNone/>
-            </a:pPr>
-            <a:r>
-              <a:rPr lang="en-US" sz="800" dirty="0">
-                <a:solidFill>
-                  <a:srgbClr val="718096"/>
-                </a:solidFill>
-                <a:latin typeface="Pretendard" pitchFamily="34" charset="0"/>
-                <a:ea typeface="Pretendard" pitchFamily="34" charset="-122"/>
-                <a:cs typeface="Pretendard" pitchFamily="34" charset="-120"/>
-              </a:rPr>
-              <a:t>크리딜   |   </a:t>
-            </a:r>
-            <a:endParaRPr lang="en-US" sz="800" dirty="0"/>
-          </a:p>
-        </p:txBody>
-      </p:sp>
-      <p:sp>
-        <p:nvSpPr>
-          <p:cNvPr id="30" name="Text 28"/>
-          <p:cNvSpPr/>
-          <p:nvPr/>
-        </p:nvSpPr>
-        <p:spPr>
-          <a:xfrm>
-            <a:off x="10710367" y="6382512"/>
-            <a:ext cx="914400" cy="219456"/>
-          </a:xfrm>
-          <a:prstGeom prst="rect">
-            <a:avLst/>
-          </a:prstGeom>
-          <a:noFill/>
-          <a:ln/>
-        </p:spPr>
-        <p:txBody>
-          <a:bodyPr wrap="square" lIns="0" tIns="0" rIns="0" bIns="0" rtlCol="0" anchor="ctr"/>
-          <a:lstStyle/>
-          <a:p>
-            <a:pPr algn="r" indent="0" marL="0">
-              <a:buNone/>
-            </a:pPr>
-            <a:r>
-              <a:rPr lang="en-US" sz="900" b="1" dirty="0">
-                <a:solidFill>
-                  <a:srgbClr val="B98A2E"/>
-                </a:solidFill>
-                <a:latin typeface="Arial" pitchFamily="34" charset="0"/>
-                <a:ea typeface="Arial" pitchFamily="34" charset="-122"/>
-                <a:cs typeface="Arial" pitchFamily="34" charset="-120"/>
-              </a:rPr>
               <a:t>9</a:t>
             </a:r>
             <a:endParaRPr lang="en-US" sz="900" dirty="0"/>
